--- a/spec/additionalDocumentation/AutomationArchitecture/diagrams/260623 AutomationArchitecture.pptx
+++ b/spec/additionalDocumentation/AutomationArchitecture/diagrams/260623 AutomationArchitecture.pptx
@@ -3,10 +3,12 @@
 <p:presentation xmlns:a="http://schemas.openxmlformats.org/drawingml/2006/main" xmlns:r="http://schemas.openxmlformats.org/officeDocument/2006/relationships" xmlns:p="http://schemas.openxmlformats.org/presentationml/2006/main" saveSubsetFonts="1">
   <p:sldMasterIdLst>
     <p:sldMasterId id="2147483648" r:id="rId1"/>
+    <p:sldMasterId id="2147483660" r:id="rId2"/>
   </p:sldMasterIdLst>
   <p:sldIdLst>
-    <p:sldId id="269" r:id="rId2"/>
-    <p:sldId id="256" r:id="rId3"/>
+    <p:sldId id="269" r:id="rId3"/>
+    <p:sldId id="256" r:id="rId4"/>
+    <p:sldId id="274" r:id="rId5"/>
   </p:sldIdLst>
   <p:sldSz cx="12192000" cy="6858000"/>
   <p:notesSz cx="6858000" cy="9144000"/>
@@ -493,7 +495,7 @@
           <a:p>
             <a:fld id="{96DA8C75-A467-416A-B374-E97E5CF82461}" type="datetimeFigureOut">
               <a:rPr lang="de-DE" smtClean="0"/>
-              <a:t>02.07.2026</a:t>
+              <a:t>23.07.2026</a:t>
             </a:fld>
             <a:endParaRPr lang="de-DE"/>
           </a:p>
@@ -691,7 +693,7 @@
           <a:p>
             <a:fld id="{96DA8C75-A467-416A-B374-E97E5CF82461}" type="datetimeFigureOut">
               <a:rPr lang="de-DE" smtClean="0"/>
-              <a:t>02.07.2026</a:t>
+              <a:t>23.07.2026</a:t>
             </a:fld>
             <a:endParaRPr lang="de-DE"/>
           </a:p>
@@ -899,7 +901,7 @@
           <a:p>
             <a:fld id="{96DA8C75-A467-416A-B374-E97E5CF82461}" type="datetimeFigureOut">
               <a:rPr lang="de-DE" smtClean="0"/>
-              <a:t>02.07.2026</a:t>
+              <a:t>23.07.2026</a:t>
             </a:fld>
             <a:endParaRPr lang="de-DE"/>
           </a:p>
@@ -972,7 +974,227 @@
 </p:sldLayout>
 </file>
 
-<file path=ppt/slideLayouts/slideLayout2.xml><?xml version="1.0" encoding="utf-8"?>
+<file path=ppt/slideLayouts/slideLayout12.xml><?xml version="1.0" encoding="utf-8"?>
+<p:sldLayout xmlns:a="http://schemas.openxmlformats.org/drawingml/2006/main" xmlns:r="http://schemas.openxmlformats.org/officeDocument/2006/relationships" xmlns:p="http://schemas.openxmlformats.org/presentationml/2006/main" type="title" preserve="1">
+  <p:cSld name="Titelfolie">
+    <p:spTree>
+      <p:nvGrpSpPr>
+        <p:cNvPr id="1" name=""/>
+        <p:cNvGrpSpPr/>
+        <p:nvPr/>
+      </p:nvGrpSpPr>
+      <p:grpSpPr>
+        <a:xfrm>
+          <a:off x="0" y="0"/>
+          <a:ext cx="0" cy="0"/>
+          <a:chOff x="0" y="0"/>
+          <a:chExt cx="0" cy="0"/>
+        </a:xfrm>
+      </p:grpSpPr>
+      <p:sp>
+        <p:nvSpPr>
+          <p:cNvPr id="2" name="Titel 1">
+            <a:extLst>
+              <a:ext uri="{FF2B5EF4-FFF2-40B4-BE49-F238E27FC236}">
+                <a16:creationId xmlns:a16="http://schemas.microsoft.com/office/drawing/2014/main" id="{FB9722D8-A9AC-7837-7B1A-458718390724}"/>
+              </a:ext>
+            </a:extLst>
+          </p:cNvPr>
+          <p:cNvSpPr>
+            <a:spLocks noGrp="1"/>
+          </p:cNvSpPr>
+          <p:nvPr>
+            <p:ph type="ctrTitle"/>
+          </p:nvPr>
+        </p:nvSpPr>
+        <p:spPr>
+          <a:xfrm>
+            <a:off x="1524000" y="1122363"/>
+            <a:ext cx="9144000" cy="2387600"/>
+          </a:xfrm>
+        </p:spPr>
+        <p:txBody>
+          <a:bodyPr anchor="b"/>
+          <a:lstStyle>
+            <a:lvl1pPr algn="ctr">
+              <a:defRPr sz="6000"/>
+            </a:lvl1pPr>
+          </a:lstStyle>
+          <a:p>
+            <a:r>
+              <a:rPr lang="de-DE"/>
+              <a:t>Mastertitelformat bearbeiten</a:t>
+            </a:r>
+          </a:p>
+        </p:txBody>
+      </p:sp>
+      <p:sp>
+        <p:nvSpPr>
+          <p:cNvPr id="3" name="Untertitel 2">
+            <a:extLst>
+              <a:ext uri="{FF2B5EF4-FFF2-40B4-BE49-F238E27FC236}">
+                <a16:creationId xmlns:a16="http://schemas.microsoft.com/office/drawing/2014/main" id="{06D4C87F-CA6F-4A47-39C8-73F1C0590066}"/>
+              </a:ext>
+            </a:extLst>
+          </p:cNvPr>
+          <p:cNvSpPr>
+            <a:spLocks noGrp="1"/>
+          </p:cNvSpPr>
+          <p:nvPr>
+            <p:ph type="subTitle" idx="1"/>
+          </p:nvPr>
+        </p:nvSpPr>
+        <p:spPr>
+          <a:xfrm>
+            <a:off x="1524000" y="3602038"/>
+            <a:ext cx="9144000" cy="1655762"/>
+          </a:xfrm>
+        </p:spPr>
+        <p:txBody>
+          <a:bodyPr/>
+          <a:lstStyle>
+            <a:lvl1pPr marL="0" indent="0" algn="ctr">
+              <a:buNone/>
+              <a:defRPr sz="2400"/>
+            </a:lvl1pPr>
+            <a:lvl2pPr marL="457200" indent="0" algn="ctr">
+              <a:buNone/>
+              <a:defRPr sz="2000"/>
+            </a:lvl2pPr>
+            <a:lvl3pPr marL="914400" indent="0" algn="ctr">
+              <a:buNone/>
+              <a:defRPr sz="1800"/>
+            </a:lvl3pPr>
+            <a:lvl4pPr marL="1371600" indent="0" algn="ctr">
+              <a:buNone/>
+              <a:defRPr sz="1600"/>
+            </a:lvl4pPr>
+            <a:lvl5pPr marL="1828800" indent="0" algn="ctr">
+              <a:buNone/>
+              <a:defRPr sz="1600"/>
+            </a:lvl5pPr>
+            <a:lvl6pPr marL="2286000" indent="0" algn="ctr">
+              <a:buNone/>
+              <a:defRPr sz="1600"/>
+            </a:lvl6pPr>
+            <a:lvl7pPr marL="2743200" indent="0" algn="ctr">
+              <a:buNone/>
+              <a:defRPr sz="1600"/>
+            </a:lvl7pPr>
+            <a:lvl8pPr marL="3200400" indent="0" algn="ctr">
+              <a:buNone/>
+              <a:defRPr sz="1600"/>
+            </a:lvl8pPr>
+            <a:lvl9pPr marL="3657600" indent="0" algn="ctr">
+              <a:buNone/>
+              <a:defRPr sz="1600"/>
+            </a:lvl9pPr>
+          </a:lstStyle>
+          <a:p>
+            <a:r>
+              <a:rPr lang="de-DE"/>
+              <a:t>Master-Untertitelformat bearbeiten</a:t>
+            </a:r>
+          </a:p>
+        </p:txBody>
+      </p:sp>
+      <p:sp>
+        <p:nvSpPr>
+          <p:cNvPr id="4" name="Datumsplatzhalter 3">
+            <a:extLst>
+              <a:ext uri="{FF2B5EF4-FFF2-40B4-BE49-F238E27FC236}">
+                <a16:creationId xmlns:a16="http://schemas.microsoft.com/office/drawing/2014/main" id="{CC55D66E-4CCF-E604-571A-6EB25C808AB3}"/>
+              </a:ext>
+            </a:extLst>
+          </p:cNvPr>
+          <p:cNvSpPr>
+            <a:spLocks noGrp="1"/>
+          </p:cNvSpPr>
+          <p:nvPr>
+            <p:ph type="dt" sz="half" idx="10"/>
+          </p:nvPr>
+        </p:nvSpPr>
+        <p:spPr/>
+        <p:txBody>
+          <a:bodyPr/>
+          <a:lstStyle/>
+          <a:p>
+            <a:fld id="{F15EE0AF-3108-4CA3-86C7-0426E4F2C1B8}" type="datetimeFigureOut">
+              <a:rPr lang="de-DE" smtClean="0"/>
+              <a:t>23.07.2026</a:t>
+            </a:fld>
+            <a:endParaRPr lang="de-DE"/>
+          </a:p>
+        </p:txBody>
+      </p:sp>
+      <p:sp>
+        <p:nvSpPr>
+          <p:cNvPr id="5" name="Fußzeilenplatzhalter 4">
+            <a:extLst>
+              <a:ext uri="{FF2B5EF4-FFF2-40B4-BE49-F238E27FC236}">
+                <a16:creationId xmlns:a16="http://schemas.microsoft.com/office/drawing/2014/main" id="{CA994A7E-E626-4F3E-8DDD-26FE2CF3A02F}"/>
+              </a:ext>
+            </a:extLst>
+          </p:cNvPr>
+          <p:cNvSpPr>
+            <a:spLocks noGrp="1"/>
+          </p:cNvSpPr>
+          <p:nvPr>
+            <p:ph type="ftr" sz="quarter" idx="11"/>
+          </p:nvPr>
+        </p:nvSpPr>
+        <p:spPr/>
+        <p:txBody>
+          <a:bodyPr/>
+          <a:lstStyle/>
+          <a:p>
+            <a:endParaRPr lang="de-DE"/>
+          </a:p>
+        </p:txBody>
+      </p:sp>
+      <p:sp>
+        <p:nvSpPr>
+          <p:cNvPr id="6" name="Foliennummernplatzhalter 5">
+            <a:extLst>
+              <a:ext uri="{FF2B5EF4-FFF2-40B4-BE49-F238E27FC236}">
+                <a16:creationId xmlns:a16="http://schemas.microsoft.com/office/drawing/2014/main" id="{CD3D374B-7648-599B-E206-77D0755C1C24}"/>
+              </a:ext>
+            </a:extLst>
+          </p:cNvPr>
+          <p:cNvSpPr>
+            <a:spLocks noGrp="1"/>
+          </p:cNvSpPr>
+          <p:nvPr>
+            <p:ph type="sldNum" sz="quarter" idx="12"/>
+          </p:nvPr>
+        </p:nvSpPr>
+        <p:spPr/>
+        <p:txBody>
+          <a:bodyPr/>
+          <a:lstStyle/>
+          <a:p>
+            <a:fld id="{76E80021-631E-4299-85ED-5092D68E1074}" type="slidenum">
+              <a:rPr lang="de-DE" smtClean="0"/>
+              <a:t>‹Nr.›</a:t>
+            </a:fld>
+            <a:endParaRPr lang="de-DE"/>
+          </a:p>
+        </p:txBody>
+      </p:sp>
+    </p:spTree>
+    <p:extLst>
+      <p:ext uri="{BB962C8B-B14F-4D97-AF65-F5344CB8AC3E}">
+        <p14:creationId xmlns:p14="http://schemas.microsoft.com/office/powerpoint/2010/main" val="2534812681"/>
+      </p:ext>
+    </p:extLst>
+  </p:cSld>
+  <p:clrMapOvr>
+    <a:masterClrMapping/>
+  </p:clrMapOvr>
+</p:sldLayout>
+</file>
+
+<file path=ppt/slideLayouts/slideLayout13.xml><?xml version="1.0" encoding="utf-8"?>
 <p:sldLayout xmlns:a="http://schemas.openxmlformats.org/drawingml/2006/main" xmlns:r="http://schemas.openxmlformats.org/officeDocument/2006/relationships" xmlns:p="http://schemas.openxmlformats.org/presentationml/2006/main" type="obj" preserve="1">
   <p:cSld name="Titel und Inhalt">
     <p:spTree>
@@ -994,7 +1216,7 @@
           <p:cNvPr id="2" name="Titel 1">
             <a:extLst>
               <a:ext uri="{FF2B5EF4-FFF2-40B4-BE49-F238E27FC236}">
-                <a16:creationId xmlns:a16="http://schemas.microsoft.com/office/drawing/2014/main" id="{ACDD7E11-1DB9-25B0-27A6-A19A7A955D87}"/>
+                <a16:creationId xmlns:a16="http://schemas.microsoft.com/office/drawing/2014/main" id="{7C2BC44E-B492-CC45-FFAC-8B62376A68E3}"/>
               </a:ext>
             </a:extLst>
           </p:cNvPr>
@@ -1022,7 +1244,7 @@
           <p:cNvPr id="3" name="Inhaltsplatzhalter 2">
             <a:extLst>
               <a:ext uri="{FF2B5EF4-FFF2-40B4-BE49-F238E27FC236}">
-                <a16:creationId xmlns:a16="http://schemas.microsoft.com/office/drawing/2014/main" id="{C8D83747-5E05-C06A-9B75-682BA98D103D}"/>
+                <a16:creationId xmlns:a16="http://schemas.microsoft.com/office/drawing/2014/main" id="{B9E37F47-070C-6761-92C6-386B593FC0A3}"/>
               </a:ext>
             </a:extLst>
           </p:cNvPr>
@@ -1079,7 +1301,7 @@
           <p:cNvPr id="4" name="Datumsplatzhalter 3">
             <a:extLst>
               <a:ext uri="{FF2B5EF4-FFF2-40B4-BE49-F238E27FC236}">
-                <a16:creationId xmlns:a16="http://schemas.microsoft.com/office/drawing/2014/main" id="{8C9FE8B9-8589-84EA-D66F-0A19CADF65BE}"/>
+                <a16:creationId xmlns:a16="http://schemas.microsoft.com/office/drawing/2014/main" id="{DB6D0717-E24C-C0A9-FCD9-A3131590EE28}"/>
               </a:ext>
             </a:extLst>
           </p:cNvPr>
@@ -1095,9 +1317,9 @@
           <a:bodyPr/>
           <a:lstStyle/>
           <a:p>
-            <a:fld id="{96DA8C75-A467-416A-B374-E97E5CF82461}" type="datetimeFigureOut">
+            <a:fld id="{F15EE0AF-3108-4CA3-86C7-0426E4F2C1B8}" type="datetimeFigureOut">
               <a:rPr lang="de-DE" smtClean="0"/>
-              <a:t>02.07.2026</a:t>
+              <a:t>23.07.2026</a:t>
             </a:fld>
             <a:endParaRPr lang="de-DE"/>
           </a:p>
@@ -1108,7 +1330,7 @@
           <p:cNvPr id="5" name="Fußzeilenplatzhalter 4">
             <a:extLst>
               <a:ext uri="{FF2B5EF4-FFF2-40B4-BE49-F238E27FC236}">
-                <a16:creationId xmlns:a16="http://schemas.microsoft.com/office/drawing/2014/main" id="{D341B0CD-4C96-9332-31EB-09E94CC53BB2}"/>
+                <a16:creationId xmlns:a16="http://schemas.microsoft.com/office/drawing/2014/main" id="{EA43BA87-304F-03E2-9CBF-68B33FDBF14F}"/>
               </a:ext>
             </a:extLst>
           </p:cNvPr>
@@ -1133,7 +1355,7 @@
           <p:cNvPr id="6" name="Foliennummernplatzhalter 5">
             <a:extLst>
               <a:ext uri="{FF2B5EF4-FFF2-40B4-BE49-F238E27FC236}">
-                <a16:creationId xmlns:a16="http://schemas.microsoft.com/office/drawing/2014/main" id="{247BF47E-DFE6-4C5C-F094-EAFD1778A8F8}"/>
+                <a16:creationId xmlns:a16="http://schemas.microsoft.com/office/drawing/2014/main" id="{68BA15CF-E4AB-AA22-FB5D-AF7D54712864}"/>
               </a:ext>
             </a:extLst>
           </p:cNvPr>
@@ -1149,7 +1371,7 @@
           <a:bodyPr/>
           <a:lstStyle/>
           <a:p>
-            <a:fld id="{C74F4156-15F0-4830-8EB5-3206A1B7E9DA}" type="slidenum">
+            <a:fld id="{76E80021-631E-4299-85ED-5092D68E1074}" type="slidenum">
               <a:rPr lang="de-DE" smtClean="0"/>
               <a:t>‹Nr.›</a:t>
             </a:fld>
@@ -1160,7 +1382,7 @@
     </p:spTree>
     <p:extLst>
       <p:ext uri="{BB962C8B-B14F-4D97-AF65-F5344CB8AC3E}">
-        <p14:creationId xmlns:p14="http://schemas.microsoft.com/office/powerpoint/2010/main" val="2340864458"/>
+        <p14:creationId xmlns:p14="http://schemas.microsoft.com/office/powerpoint/2010/main" val="451317767"/>
       </p:ext>
     </p:extLst>
   </p:cSld>
@@ -1170,7 +1392,7 @@
 </p:sldLayout>
 </file>
 
-<file path=ppt/slideLayouts/slideLayout3.xml><?xml version="1.0" encoding="utf-8"?>
+<file path=ppt/slideLayouts/slideLayout14.xml><?xml version="1.0" encoding="utf-8"?>
 <p:sldLayout xmlns:a="http://schemas.openxmlformats.org/drawingml/2006/main" xmlns:r="http://schemas.openxmlformats.org/officeDocument/2006/relationships" xmlns:p="http://schemas.openxmlformats.org/presentationml/2006/main" type="secHead" preserve="1">
   <p:cSld name="Abschnitts-&#10;überschrift">
     <p:spTree>
@@ -1192,7 +1414,7 @@
           <p:cNvPr id="2" name="Titel 1">
             <a:extLst>
               <a:ext uri="{FF2B5EF4-FFF2-40B4-BE49-F238E27FC236}">
-                <a16:creationId xmlns:a16="http://schemas.microsoft.com/office/drawing/2014/main" id="{079FE03A-B15C-72F5-3778-8BC98A3CF62F}"/>
+                <a16:creationId xmlns:a16="http://schemas.microsoft.com/office/drawing/2014/main" id="{DE4A8B80-A7F1-BA96-A99A-D30149189156}"/>
               </a:ext>
             </a:extLst>
           </p:cNvPr>
@@ -1229,7 +1451,7 @@
           <p:cNvPr id="3" name="Textplatzhalter 2">
             <a:extLst>
               <a:ext uri="{FF2B5EF4-FFF2-40B4-BE49-F238E27FC236}">
-                <a16:creationId xmlns:a16="http://schemas.microsoft.com/office/drawing/2014/main" id="{F7CCDA95-157D-9A1F-523C-15AF0595359B}"/>
+                <a16:creationId xmlns:a16="http://schemas.microsoft.com/office/drawing/2014/main" id="{CB605DAA-A8EC-F3C3-E395-D77749777B8B}"/>
               </a:ext>
             </a:extLst>
           </p:cNvPr>
@@ -1354,7 +1576,7 @@
           <p:cNvPr id="4" name="Datumsplatzhalter 3">
             <a:extLst>
               <a:ext uri="{FF2B5EF4-FFF2-40B4-BE49-F238E27FC236}">
-                <a16:creationId xmlns:a16="http://schemas.microsoft.com/office/drawing/2014/main" id="{CE2B12C8-EAD3-FF26-5137-8C058C9E2C33}"/>
+                <a16:creationId xmlns:a16="http://schemas.microsoft.com/office/drawing/2014/main" id="{6F8AB83F-1EFE-BAB0-8934-513A3B6BBF24}"/>
               </a:ext>
             </a:extLst>
           </p:cNvPr>
@@ -1370,9 +1592,9 @@
           <a:bodyPr/>
           <a:lstStyle/>
           <a:p>
-            <a:fld id="{96DA8C75-A467-416A-B374-E97E5CF82461}" type="datetimeFigureOut">
+            <a:fld id="{F15EE0AF-3108-4CA3-86C7-0426E4F2C1B8}" type="datetimeFigureOut">
               <a:rPr lang="de-DE" smtClean="0"/>
-              <a:t>02.07.2026</a:t>
+              <a:t>23.07.2026</a:t>
             </a:fld>
             <a:endParaRPr lang="de-DE"/>
           </a:p>
@@ -1383,7 +1605,7 @@
           <p:cNvPr id="5" name="Fußzeilenplatzhalter 4">
             <a:extLst>
               <a:ext uri="{FF2B5EF4-FFF2-40B4-BE49-F238E27FC236}">
-                <a16:creationId xmlns:a16="http://schemas.microsoft.com/office/drawing/2014/main" id="{F8F7633C-56AF-7DAE-666B-DD8A412D60A0}"/>
+                <a16:creationId xmlns:a16="http://schemas.microsoft.com/office/drawing/2014/main" id="{401DB2C7-98F1-7BF4-20A5-F123B5FFD887}"/>
               </a:ext>
             </a:extLst>
           </p:cNvPr>
@@ -1408,7 +1630,7 @@
           <p:cNvPr id="6" name="Foliennummernplatzhalter 5">
             <a:extLst>
               <a:ext uri="{FF2B5EF4-FFF2-40B4-BE49-F238E27FC236}">
-                <a16:creationId xmlns:a16="http://schemas.microsoft.com/office/drawing/2014/main" id="{934C6F91-065F-4C4B-053E-5625B6810A81}"/>
+                <a16:creationId xmlns:a16="http://schemas.microsoft.com/office/drawing/2014/main" id="{60665AC6-A3EC-75A7-AAB8-0D0A0BB41174}"/>
               </a:ext>
             </a:extLst>
           </p:cNvPr>
@@ -1424,7 +1646,7 @@
           <a:bodyPr/>
           <a:lstStyle/>
           <a:p>
-            <a:fld id="{C74F4156-15F0-4830-8EB5-3206A1B7E9DA}" type="slidenum">
+            <a:fld id="{76E80021-631E-4299-85ED-5092D68E1074}" type="slidenum">
               <a:rPr lang="de-DE" smtClean="0"/>
               <a:t>‹Nr.›</a:t>
             </a:fld>
@@ -1435,7 +1657,7 @@
     </p:spTree>
     <p:extLst>
       <p:ext uri="{BB962C8B-B14F-4D97-AF65-F5344CB8AC3E}">
-        <p14:creationId xmlns:p14="http://schemas.microsoft.com/office/powerpoint/2010/main" val="917757961"/>
+        <p14:creationId xmlns:p14="http://schemas.microsoft.com/office/powerpoint/2010/main" val="2841269448"/>
       </p:ext>
     </p:extLst>
   </p:cSld>
@@ -1445,7 +1667,7 @@
 </p:sldLayout>
 </file>
 
-<file path=ppt/slideLayouts/slideLayout4.xml><?xml version="1.0" encoding="utf-8"?>
+<file path=ppt/slideLayouts/slideLayout15.xml><?xml version="1.0" encoding="utf-8"?>
 <p:sldLayout xmlns:a="http://schemas.openxmlformats.org/drawingml/2006/main" xmlns:r="http://schemas.openxmlformats.org/officeDocument/2006/relationships" xmlns:p="http://schemas.openxmlformats.org/presentationml/2006/main" type="twoObj" preserve="1">
   <p:cSld name="Zwei Inhalte">
     <p:spTree>
@@ -1467,7 +1689,7 @@
           <p:cNvPr id="2" name="Titel 1">
             <a:extLst>
               <a:ext uri="{FF2B5EF4-FFF2-40B4-BE49-F238E27FC236}">
-                <a16:creationId xmlns:a16="http://schemas.microsoft.com/office/drawing/2014/main" id="{7E0B1B66-4D9E-D3D3-584F-97609CB36C3D}"/>
+                <a16:creationId xmlns:a16="http://schemas.microsoft.com/office/drawing/2014/main" id="{28402214-1D47-9780-2D81-FC88A1285D29}"/>
               </a:ext>
             </a:extLst>
           </p:cNvPr>
@@ -1495,7 +1717,7 @@
           <p:cNvPr id="3" name="Inhaltsplatzhalter 2">
             <a:extLst>
               <a:ext uri="{FF2B5EF4-FFF2-40B4-BE49-F238E27FC236}">
-                <a16:creationId xmlns:a16="http://schemas.microsoft.com/office/drawing/2014/main" id="{35C0107D-BBE4-E384-7274-EA71B99C1081}"/>
+                <a16:creationId xmlns:a16="http://schemas.microsoft.com/office/drawing/2014/main" id="{3C4111E6-945E-66A4-532F-A81989DA9D17}"/>
               </a:ext>
             </a:extLst>
           </p:cNvPr>
@@ -1557,7 +1779,7 @@
           <p:cNvPr id="4" name="Inhaltsplatzhalter 3">
             <a:extLst>
               <a:ext uri="{FF2B5EF4-FFF2-40B4-BE49-F238E27FC236}">
-                <a16:creationId xmlns:a16="http://schemas.microsoft.com/office/drawing/2014/main" id="{774BC2EC-4D93-C03B-9170-477FD17C164C}"/>
+                <a16:creationId xmlns:a16="http://schemas.microsoft.com/office/drawing/2014/main" id="{ECD869B4-19AF-8D28-CF27-2EA02A3DF439}"/>
               </a:ext>
             </a:extLst>
           </p:cNvPr>
@@ -1619,7 +1841,7 @@
           <p:cNvPr id="5" name="Datumsplatzhalter 4">
             <a:extLst>
               <a:ext uri="{FF2B5EF4-FFF2-40B4-BE49-F238E27FC236}">
-                <a16:creationId xmlns:a16="http://schemas.microsoft.com/office/drawing/2014/main" id="{B38E210C-86C6-7600-CE6B-992E51294D85}"/>
+                <a16:creationId xmlns:a16="http://schemas.microsoft.com/office/drawing/2014/main" id="{9FB28340-5F1D-B43B-AB64-69A79A0971F1}"/>
               </a:ext>
             </a:extLst>
           </p:cNvPr>
@@ -1635,9 +1857,9 @@
           <a:bodyPr/>
           <a:lstStyle/>
           <a:p>
-            <a:fld id="{96DA8C75-A467-416A-B374-E97E5CF82461}" type="datetimeFigureOut">
+            <a:fld id="{F15EE0AF-3108-4CA3-86C7-0426E4F2C1B8}" type="datetimeFigureOut">
               <a:rPr lang="de-DE" smtClean="0"/>
-              <a:t>02.07.2026</a:t>
+              <a:t>23.07.2026</a:t>
             </a:fld>
             <a:endParaRPr lang="de-DE"/>
           </a:p>
@@ -1648,7 +1870,7 @@
           <p:cNvPr id="6" name="Fußzeilenplatzhalter 5">
             <a:extLst>
               <a:ext uri="{FF2B5EF4-FFF2-40B4-BE49-F238E27FC236}">
-                <a16:creationId xmlns:a16="http://schemas.microsoft.com/office/drawing/2014/main" id="{0B31B8D0-B8C6-07D4-2134-23B400471F5E}"/>
+                <a16:creationId xmlns:a16="http://schemas.microsoft.com/office/drawing/2014/main" id="{245B6EC7-F273-64BB-1432-0916E65CCF5A}"/>
               </a:ext>
             </a:extLst>
           </p:cNvPr>
@@ -1673,7 +1895,7 @@
           <p:cNvPr id="7" name="Foliennummernplatzhalter 6">
             <a:extLst>
               <a:ext uri="{FF2B5EF4-FFF2-40B4-BE49-F238E27FC236}">
-                <a16:creationId xmlns:a16="http://schemas.microsoft.com/office/drawing/2014/main" id="{E97C03B4-BC6F-97E9-16A4-978E28948293}"/>
+                <a16:creationId xmlns:a16="http://schemas.microsoft.com/office/drawing/2014/main" id="{9A8BC027-3741-5CE1-C2B1-C2C33042FC64}"/>
               </a:ext>
             </a:extLst>
           </p:cNvPr>
@@ -1689,7 +1911,7 @@
           <a:bodyPr/>
           <a:lstStyle/>
           <a:p>
-            <a:fld id="{C74F4156-15F0-4830-8EB5-3206A1B7E9DA}" type="slidenum">
+            <a:fld id="{76E80021-631E-4299-85ED-5092D68E1074}" type="slidenum">
               <a:rPr lang="de-DE" smtClean="0"/>
               <a:t>‹Nr.›</a:t>
             </a:fld>
@@ -1700,7 +1922,7 @@
     </p:spTree>
     <p:extLst>
       <p:ext uri="{BB962C8B-B14F-4D97-AF65-F5344CB8AC3E}">
-        <p14:creationId xmlns:p14="http://schemas.microsoft.com/office/powerpoint/2010/main" val="3483992217"/>
+        <p14:creationId xmlns:p14="http://schemas.microsoft.com/office/powerpoint/2010/main" val="900371884"/>
       </p:ext>
     </p:extLst>
   </p:cSld>
@@ -1710,7 +1932,7 @@
 </p:sldLayout>
 </file>
 
-<file path=ppt/slideLayouts/slideLayout5.xml><?xml version="1.0" encoding="utf-8"?>
+<file path=ppt/slideLayouts/slideLayout16.xml><?xml version="1.0" encoding="utf-8"?>
 <p:sldLayout xmlns:a="http://schemas.openxmlformats.org/drawingml/2006/main" xmlns:r="http://schemas.openxmlformats.org/officeDocument/2006/relationships" xmlns:p="http://schemas.openxmlformats.org/presentationml/2006/main" type="twoTxTwoObj" preserve="1">
   <p:cSld name="Vergleich">
     <p:spTree>
@@ -1732,7 +1954,7 @@
           <p:cNvPr id="2" name="Titel 1">
             <a:extLst>
               <a:ext uri="{FF2B5EF4-FFF2-40B4-BE49-F238E27FC236}">
-                <a16:creationId xmlns:a16="http://schemas.microsoft.com/office/drawing/2014/main" id="{D109D49E-9550-BECF-4EA1-DFEB0733607B}"/>
+                <a16:creationId xmlns:a16="http://schemas.microsoft.com/office/drawing/2014/main" id="{4882DCF9-1BC3-80F1-A0D8-27FA06CBCB5F}"/>
               </a:ext>
             </a:extLst>
           </p:cNvPr>
@@ -1765,7 +1987,7 @@
           <p:cNvPr id="3" name="Textplatzhalter 2">
             <a:extLst>
               <a:ext uri="{FF2B5EF4-FFF2-40B4-BE49-F238E27FC236}">
-                <a16:creationId xmlns:a16="http://schemas.microsoft.com/office/drawing/2014/main" id="{A4A28A71-2F8F-05C7-E7D9-C9EFDCA5BEDD}"/>
+                <a16:creationId xmlns:a16="http://schemas.microsoft.com/office/drawing/2014/main" id="{5919F9BA-FCEF-E853-8F18-8312918E5F8A}"/>
               </a:ext>
             </a:extLst>
           </p:cNvPr>
@@ -1836,7 +2058,7 @@
           <p:cNvPr id="4" name="Inhaltsplatzhalter 3">
             <a:extLst>
               <a:ext uri="{FF2B5EF4-FFF2-40B4-BE49-F238E27FC236}">
-                <a16:creationId xmlns:a16="http://schemas.microsoft.com/office/drawing/2014/main" id="{97246C7A-35E8-FE3E-8A61-4C57F0824B9A}"/>
+                <a16:creationId xmlns:a16="http://schemas.microsoft.com/office/drawing/2014/main" id="{AD82E1AD-8EDE-A4E0-05BA-478586928F87}"/>
               </a:ext>
             </a:extLst>
           </p:cNvPr>
@@ -1898,7 +2120,7 @@
           <p:cNvPr id="5" name="Textplatzhalter 4">
             <a:extLst>
               <a:ext uri="{FF2B5EF4-FFF2-40B4-BE49-F238E27FC236}">
-                <a16:creationId xmlns:a16="http://schemas.microsoft.com/office/drawing/2014/main" id="{47F58D0F-39C3-458D-7E72-851CBE0E2EAA}"/>
+                <a16:creationId xmlns:a16="http://schemas.microsoft.com/office/drawing/2014/main" id="{59E3A9E1-2654-5CB2-D744-2C5CEC484416}"/>
               </a:ext>
             </a:extLst>
           </p:cNvPr>
@@ -1969,7 +2191,7 @@
           <p:cNvPr id="6" name="Inhaltsplatzhalter 5">
             <a:extLst>
               <a:ext uri="{FF2B5EF4-FFF2-40B4-BE49-F238E27FC236}">
-                <a16:creationId xmlns:a16="http://schemas.microsoft.com/office/drawing/2014/main" id="{149A1CE7-B640-F6BA-272C-AA5C671D67FB}"/>
+                <a16:creationId xmlns:a16="http://schemas.microsoft.com/office/drawing/2014/main" id="{49127AA8-B3E6-7735-FF25-C29EAD2A93AD}"/>
               </a:ext>
             </a:extLst>
           </p:cNvPr>
@@ -2031,7 +2253,7 @@
           <p:cNvPr id="7" name="Datumsplatzhalter 6">
             <a:extLst>
               <a:ext uri="{FF2B5EF4-FFF2-40B4-BE49-F238E27FC236}">
-                <a16:creationId xmlns:a16="http://schemas.microsoft.com/office/drawing/2014/main" id="{6C4F4183-FCCB-5EFD-7054-56DA7C45A57A}"/>
+                <a16:creationId xmlns:a16="http://schemas.microsoft.com/office/drawing/2014/main" id="{53D4DF67-EA48-303D-74AE-78853C0774CD}"/>
               </a:ext>
             </a:extLst>
           </p:cNvPr>
@@ -2047,9 +2269,9 @@
           <a:bodyPr/>
           <a:lstStyle/>
           <a:p>
-            <a:fld id="{96DA8C75-A467-416A-B374-E97E5CF82461}" type="datetimeFigureOut">
+            <a:fld id="{F15EE0AF-3108-4CA3-86C7-0426E4F2C1B8}" type="datetimeFigureOut">
               <a:rPr lang="de-DE" smtClean="0"/>
-              <a:t>02.07.2026</a:t>
+              <a:t>23.07.2026</a:t>
             </a:fld>
             <a:endParaRPr lang="de-DE"/>
           </a:p>
@@ -2060,7 +2282,7 @@
           <p:cNvPr id="8" name="Fußzeilenplatzhalter 7">
             <a:extLst>
               <a:ext uri="{FF2B5EF4-FFF2-40B4-BE49-F238E27FC236}">
-                <a16:creationId xmlns:a16="http://schemas.microsoft.com/office/drawing/2014/main" id="{0992EC90-C786-9DF7-456D-89F694A27130}"/>
+                <a16:creationId xmlns:a16="http://schemas.microsoft.com/office/drawing/2014/main" id="{0109B45C-0292-7934-45C4-34ADB119A583}"/>
               </a:ext>
             </a:extLst>
           </p:cNvPr>
@@ -2085,7 +2307,7 @@
           <p:cNvPr id="9" name="Foliennummernplatzhalter 8">
             <a:extLst>
               <a:ext uri="{FF2B5EF4-FFF2-40B4-BE49-F238E27FC236}">
-                <a16:creationId xmlns:a16="http://schemas.microsoft.com/office/drawing/2014/main" id="{51498CF0-0A03-A01D-CA39-7F192438AAFD}"/>
+                <a16:creationId xmlns:a16="http://schemas.microsoft.com/office/drawing/2014/main" id="{7FC4F0CF-2FE3-6C13-3047-BA3C7FF9CF8A}"/>
               </a:ext>
             </a:extLst>
           </p:cNvPr>
@@ -2101,7 +2323,7 @@
           <a:bodyPr/>
           <a:lstStyle/>
           <a:p>
-            <a:fld id="{C74F4156-15F0-4830-8EB5-3206A1B7E9DA}" type="slidenum">
+            <a:fld id="{76E80021-631E-4299-85ED-5092D68E1074}" type="slidenum">
               <a:rPr lang="de-DE" smtClean="0"/>
               <a:t>‹Nr.›</a:t>
             </a:fld>
@@ -2112,7 +2334,7 @@
     </p:spTree>
     <p:extLst>
       <p:ext uri="{BB962C8B-B14F-4D97-AF65-F5344CB8AC3E}">
-        <p14:creationId xmlns:p14="http://schemas.microsoft.com/office/powerpoint/2010/main" val="4205519675"/>
+        <p14:creationId xmlns:p14="http://schemas.microsoft.com/office/powerpoint/2010/main" val="2920441613"/>
       </p:ext>
     </p:extLst>
   </p:cSld>
@@ -2122,7 +2344,7 @@
 </p:sldLayout>
 </file>
 
-<file path=ppt/slideLayouts/slideLayout6.xml><?xml version="1.0" encoding="utf-8"?>
+<file path=ppt/slideLayouts/slideLayout17.xml><?xml version="1.0" encoding="utf-8"?>
 <p:sldLayout xmlns:a="http://schemas.openxmlformats.org/drawingml/2006/main" xmlns:r="http://schemas.openxmlformats.org/officeDocument/2006/relationships" xmlns:p="http://schemas.openxmlformats.org/presentationml/2006/main" type="titleOnly" preserve="1">
   <p:cSld name="Nur Titel">
     <p:spTree>
@@ -2144,7 +2366,7 @@
           <p:cNvPr id="2" name="Titel 1">
             <a:extLst>
               <a:ext uri="{FF2B5EF4-FFF2-40B4-BE49-F238E27FC236}">
-                <a16:creationId xmlns:a16="http://schemas.microsoft.com/office/drawing/2014/main" id="{9624D286-2612-2676-958A-636DEAC54D39}"/>
+                <a16:creationId xmlns:a16="http://schemas.microsoft.com/office/drawing/2014/main" id="{59FEF923-29E6-3E8C-42D0-05769ED9698C}"/>
               </a:ext>
             </a:extLst>
           </p:cNvPr>
@@ -2172,7 +2394,7 @@
           <p:cNvPr id="3" name="Datumsplatzhalter 2">
             <a:extLst>
               <a:ext uri="{FF2B5EF4-FFF2-40B4-BE49-F238E27FC236}">
-                <a16:creationId xmlns:a16="http://schemas.microsoft.com/office/drawing/2014/main" id="{E3A16EE8-9C3D-10D1-2593-FDE8D09743C7}"/>
+                <a16:creationId xmlns:a16="http://schemas.microsoft.com/office/drawing/2014/main" id="{65E2A558-74BE-8A2E-A6DC-F6C8CB7E23A8}"/>
               </a:ext>
             </a:extLst>
           </p:cNvPr>
@@ -2188,9 +2410,9 @@
           <a:bodyPr/>
           <a:lstStyle/>
           <a:p>
-            <a:fld id="{96DA8C75-A467-416A-B374-E97E5CF82461}" type="datetimeFigureOut">
+            <a:fld id="{F15EE0AF-3108-4CA3-86C7-0426E4F2C1B8}" type="datetimeFigureOut">
               <a:rPr lang="de-DE" smtClean="0"/>
-              <a:t>02.07.2026</a:t>
+              <a:t>23.07.2026</a:t>
             </a:fld>
             <a:endParaRPr lang="de-DE"/>
           </a:p>
@@ -2201,7 +2423,7 @@
           <p:cNvPr id="4" name="Fußzeilenplatzhalter 3">
             <a:extLst>
               <a:ext uri="{FF2B5EF4-FFF2-40B4-BE49-F238E27FC236}">
-                <a16:creationId xmlns:a16="http://schemas.microsoft.com/office/drawing/2014/main" id="{79C41F5A-AC32-3306-ABB9-F7A1D33910A9}"/>
+                <a16:creationId xmlns:a16="http://schemas.microsoft.com/office/drawing/2014/main" id="{43EF8E9C-C443-F286-5AAC-948D9FC5EBE1}"/>
               </a:ext>
             </a:extLst>
           </p:cNvPr>
@@ -2226,7 +2448,7 @@
           <p:cNvPr id="5" name="Foliennummernplatzhalter 4">
             <a:extLst>
               <a:ext uri="{FF2B5EF4-FFF2-40B4-BE49-F238E27FC236}">
-                <a16:creationId xmlns:a16="http://schemas.microsoft.com/office/drawing/2014/main" id="{8F8F6230-BD04-5F20-F267-7DB921A02CFF}"/>
+                <a16:creationId xmlns:a16="http://schemas.microsoft.com/office/drawing/2014/main" id="{CFFF51B3-C084-310E-2AAF-82AF375158BE}"/>
               </a:ext>
             </a:extLst>
           </p:cNvPr>
@@ -2242,7 +2464,7 @@
           <a:bodyPr/>
           <a:lstStyle/>
           <a:p>
-            <a:fld id="{C74F4156-15F0-4830-8EB5-3206A1B7E9DA}" type="slidenum">
+            <a:fld id="{76E80021-631E-4299-85ED-5092D68E1074}" type="slidenum">
               <a:rPr lang="de-DE" smtClean="0"/>
               <a:t>‹Nr.›</a:t>
             </a:fld>
@@ -2253,7 +2475,7 @@
     </p:spTree>
     <p:extLst>
       <p:ext uri="{BB962C8B-B14F-4D97-AF65-F5344CB8AC3E}">
-        <p14:creationId xmlns:p14="http://schemas.microsoft.com/office/powerpoint/2010/main" val="3892674344"/>
+        <p14:creationId xmlns:p14="http://schemas.microsoft.com/office/powerpoint/2010/main" val="264040256"/>
       </p:ext>
     </p:extLst>
   </p:cSld>
@@ -2263,7 +2485,7 @@
 </p:sldLayout>
 </file>
 
-<file path=ppt/slideLayouts/slideLayout7.xml><?xml version="1.0" encoding="utf-8"?>
+<file path=ppt/slideLayouts/slideLayout18.xml><?xml version="1.0" encoding="utf-8"?>
 <p:sldLayout xmlns:a="http://schemas.openxmlformats.org/drawingml/2006/main" xmlns:r="http://schemas.openxmlformats.org/officeDocument/2006/relationships" xmlns:p="http://schemas.openxmlformats.org/presentationml/2006/main" type="blank" preserve="1">
   <p:cSld name="Leer">
     <p:spTree>
@@ -2285,7 +2507,7 @@
           <p:cNvPr id="2" name="Datumsplatzhalter 1">
             <a:extLst>
               <a:ext uri="{FF2B5EF4-FFF2-40B4-BE49-F238E27FC236}">
-                <a16:creationId xmlns:a16="http://schemas.microsoft.com/office/drawing/2014/main" id="{0BF366B7-81A3-7E2E-69BE-29B817176153}"/>
+                <a16:creationId xmlns:a16="http://schemas.microsoft.com/office/drawing/2014/main" id="{F824B113-6858-33E6-926E-F44B70F4A222}"/>
               </a:ext>
             </a:extLst>
           </p:cNvPr>
@@ -2301,9 +2523,9 @@
           <a:bodyPr/>
           <a:lstStyle/>
           <a:p>
-            <a:fld id="{96DA8C75-A467-416A-B374-E97E5CF82461}" type="datetimeFigureOut">
+            <a:fld id="{F15EE0AF-3108-4CA3-86C7-0426E4F2C1B8}" type="datetimeFigureOut">
               <a:rPr lang="de-DE" smtClean="0"/>
-              <a:t>02.07.2026</a:t>
+              <a:t>23.07.2026</a:t>
             </a:fld>
             <a:endParaRPr lang="de-DE"/>
           </a:p>
@@ -2314,7 +2536,7 @@
           <p:cNvPr id="3" name="Fußzeilenplatzhalter 2">
             <a:extLst>
               <a:ext uri="{FF2B5EF4-FFF2-40B4-BE49-F238E27FC236}">
-                <a16:creationId xmlns:a16="http://schemas.microsoft.com/office/drawing/2014/main" id="{7B8AB019-0F5C-8F14-85A5-247B261C8102}"/>
+                <a16:creationId xmlns:a16="http://schemas.microsoft.com/office/drawing/2014/main" id="{536AFC27-AE3E-7AA0-F121-6F33C1AC9D73}"/>
               </a:ext>
             </a:extLst>
           </p:cNvPr>
@@ -2339,7 +2561,7 @@
           <p:cNvPr id="4" name="Foliennummernplatzhalter 3">
             <a:extLst>
               <a:ext uri="{FF2B5EF4-FFF2-40B4-BE49-F238E27FC236}">
-                <a16:creationId xmlns:a16="http://schemas.microsoft.com/office/drawing/2014/main" id="{6DE83D03-3C0A-3D96-81B2-8EEF96277530}"/>
+                <a16:creationId xmlns:a16="http://schemas.microsoft.com/office/drawing/2014/main" id="{7080A4A9-8609-B9FB-EEC0-B304597BCA2D}"/>
               </a:ext>
             </a:extLst>
           </p:cNvPr>
@@ -2355,7 +2577,7 @@
           <a:bodyPr/>
           <a:lstStyle/>
           <a:p>
-            <a:fld id="{C74F4156-15F0-4830-8EB5-3206A1B7E9DA}" type="slidenum">
+            <a:fld id="{76E80021-631E-4299-85ED-5092D68E1074}" type="slidenum">
               <a:rPr lang="de-DE" smtClean="0"/>
               <a:t>‹Nr.›</a:t>
             </a:fld>
@@ -2366,7 +2588,7 @@
     </p:spTree>
     <p:extLst>
       <p:ext uri="{BB962C8B-B14F-4D97-AF65-F5344CB8AC3E}">
-        <p14:creationId xmlns:p14="http://schemas.microsoft.com/office/powerpoint/2010/main" val="567306326"/>
+        <p14:creationId xmlns:p14="http://schemas.microsoft.com/office/powerpoint/2010/main" val="1039527169"/>
       </p:ext>
     </p:extLst>
   </p:cSld>
@@ -2376,7 +2598,7 @@
 </p:sldLayout>
 </file>
 
-<file path=ppt/slideLayouts/slideLayout8.xml><?xml version="1.0" encoding="utf-8"?>
+<file path=ppt/slideLayouts/slideLayout19.xml><?xml version="1.0" encoding="utf-8"?>
 <p:sldLayout xmlns:a="http://schemas.openxmlformats.org/drawingml/2006/main" xmlns:r="http://schemas.openxmlformats.org/officeDocument/2006/relationships" xmlns:p="http://schemas.openxmlformats.org/presentationml/2006/main" type="objTx" preserve="1">
   <p:cSld name="Inhalt mit Überschrift">
     <p:spTree>
@@ -2398,7 +2620,7 @@
           <p:cNvPr id="2" name="Titel 1">
             <a:extLst>
               <a:ext uri="{FF2B5EF4-FFF2-40B4-BE49-F238E27FC236}">
-                <a16:creationId xmlns:a16="http://schemas.microsoft.com/office/drawing/2014/main" id="{8D0EA9D6-FB57-F007-E28D-B47A9360137E}"/>
+                <a16:creationId xmlns:a16="http://schemas.microsoft.com/office/drawing/2014/main" id="{598D7B39-C9CF-3324-174D-A22501454C4B}"/>
               </a:ext>
             </a:extLst>
           </p:cNvPr>
@@ -2435,7 +2657,7 @@
           <p:cNvPr id="3" name="Inhaltsplatzhalter 2">
             <a:extLst>
               <a:ext uri="{FF2B5EF4-FFF2-40B4-BE49-F238E27FC236}">
-                <a16:creationId xmlns:a16="http://schemas.microsoft.com/office/drawing/2014/main" id="{79183C11-16A5-02CD-38D4-331AA8673F0F}"/>
+                <a16:creationId xmlns:a16="http://schemas.microsoft.com/office/drawing/2014/main" id="{F30B6393-27BD-24F0-622D-2F5EEED1C20A}"/>
               </a:ext>
             </a:extLst>
           </p:cNvPr>
@@ -2525,7 +2747,7 @@
           <p:cNvPr id="4" name="Textplatzhalter 3">
             <a:extLst>
               <a:ext uri="{FF2B5EF4-FFF2-40B4-BE49-F238E27FC236}">
-                <a16:creationId xmlns:a16="http://schemas.microsoft.com/office/drawing/2014/main" id="{1D4D0615-0D51-F75D-1662-97F01AAD7C6B}"/>
+                <a16:creationId xmlns:a16="http://schemas.microsoft.com/office/drawing/2014/main" id="{E80AD643-29CB-40B9-24E3-0476323B279E}"/>
               </a:ext>
             </a:extLst>
           </p:cNvPr>
@@ -2596,7 +2818,7 @@
           <p:cNvPr id="5" name="Datumsplatzhalter 4">
             <a:extLst>
               <a:ext uri="{FF2B5EF4-FFF2-40B4-BE49-F238E27FC236}">
-                <a16:creationId xmlns:a16="http://schemas.microsoft.com/office/drawing/2014/main" id="{F0610F82-BCC4-54BE-7F67-EEFD777882DB}"/>
+                <a16:creationId xmlns:a16="http://schemas.microsoft.com/office/drawing/2014/main" id="{FB8F8FA6-D62E-779A-2C6F-934B4FD22553}"/>
               </a:ext>
             </a:extLst>
           </p:cNvPr>
@@ -2612,9 +2834,9 @@
           <a:bodyPr/>
           <a:lstStyle/>
           <a:p>
-            <a:fld id="{96DA8C75-A467-416A-B374-E97E5CF82461}" type="datetimeFigureOut">
+            <a:fld id="{F15EE0AF-3108-4CA3-86C7-0426E4F2C1B8}" type="datetimeFigureOut">
               <a:rPr lang="de-DE" smtClean="0"/>
-              <a:t>02.07.2026</a:t>
+              <a:t>23.07.2026</a:t>
             </a:fld>
             <a:endParaRPr lang="de-DE"/>
           </a:p>
@@ -2625,7 +2847,7 @@
           <p:cNvPr id="6" name="Fußzeilenplatzhalter 5">
             <a:extLst>
               <a:ext uri="{FF2B5EF4-FFF2-40B4-BE49-F238E27FC236}">
-                <a16:creationId xmlns:a16="http://schemas.microsoft.com/office/drawing/2014/main" id="{D761870B-0D02-23BE-C444-4FE7EB57E09E}"/>
+                <a16:creationId xmlns:a16="http://schemas.microsoft.com/office/drawing/2014/main" id="{57AEA5A7-A574-C88E-019D-4B72860A3AB4}"/>
               </a:ext>
             </a:extLst>
           </p:cNvPr>
@@ -2650,7 +2872,7 @@
           <p:cNvPr id="7" name="Foliennummernplatzhalter 6">
             <a:extLst>
               <a:ext uri="{FF2B5EF4-FFF2-40B4-BE49-F238E27FC236}">
-                <a16:creationId xmlns:a16="http://schemas.microsoft.com/office/drawing/2014/main" id="{47EFCDE7-BE72-08A8-D844-2F04ECAFF2B5}"/>
+                <a16:creationId xmlns:a16="http://schemas.microsoft.com/office/drawing/2014/main" id="{4F86354D-150D-0175-E1F8-DA0AB29B2AE3}"/>
               </a:ext>
             </a:extLst>
           </p:cNvPr>
@@ -2666,7 +2888,7 @@
           <a:bodyPr/>
           <a:lstStyle/>
           <a:p>
-            <a:fld id="{C74F4156-15F0-4830-8EB5-3206A1B7E9DA}" type="slidenum">
+            <a:fld id="{76E80021-631E-4299-85ED-5092D68E1074}" type="slidenum">
               <a:rPr lang="de-DE" smtClean="0"/>
               <a:t>‹Nr.›</a:t>
             </a:fld>
@@ -2677,7 +2899,7 @@
     </p:spTree>
     <p:extLst>
       <p:ext uri="{BB962C8B-B14F-4D97-AF65-F5344CB8AC3E}">
-        <p14:creationId xmlns:p14="http://schemas.microsoft.com/office/powerpoint/2010/main" val="4144702554"/>
+        <p14:creationId xmlns:p14="http://schemas.microsoft.com/office/powerpoint/2010/main" val="3296353043"/>
       </p:ext>
     </p:extLst>
   </p:cSld>
@@ -2687,7 +2909,205 @@
 </p:sldLayout>
 </file>
 
-<file path=ppt/slideLayouts/slideLayout9.xml><?xml version="1.0" encoding="utf-8"?>
+<file path=ppt/slideLayouts/slideLayout2.xml><?xml version="1.0" encoding="utf-8"?>
+<p:sldLayout xmlns:a="http://schemas.openxmlformats.org/drawingml/2006/main" xmlns:r="http://schemas.openxmlformats.org/officeDocument/2006/relationships" xmlns:p="http://schemas.openxmlformats.org/presentationml/2006/main" type="obj" preserve="1">
+  <p:cSld name="Titel und Inhalt">
+    <p:spTree>
+      <p:nvGrpSpPr>
+        <p:cNvPr id="1" name=""/>
+        <p:cNvGrpSpPr/>
+        <p:nvPr/>
+      </p:nvGrpSpPr>
+      <p:grpSpPr>
+        <a:xfrm>
+          <a:off x="0" y="0"/>
+          <a:ext cx="0" cy="0"/>
+          <a:chOff x="0" y="0"/>
+          <a:chExt cx="0" cy="0"/>
+        </a:xfrm>
+      </p:grpSpPr>
+      <p:sp>
+        <p:nvSpPr>
+          <p:cNvPr id="2" name="Titel 1">
+            <a:extLst>
+              <a:ext uri="{FF2B5EF4-FFF2-40B4-BE49-F238E27FC236}">
+                <a16:creationId xmlns:a16="http://schemas.microsoft.com/office/drawing/2014/main" id="{ACDD7E11-1DB9-25B0-27A6-A19A7A955D87}"/>
+              </a:ext>
+            </a:extLst>
+          </p:cNvPr>
+          <p:cNvSpPr>
+            <a:spLocks noGrp="1"/>
+          </p:cNvSpPr>
+          <p:nvPr>
+            <p:ph type="title"/>
+          </p:nvPr>
+        </p:nvSpPr>
+        <p:spPr/>
+        <p:txBody>
+          <a:bodyPr/>
+          <a:lstStyle/>
+          <a:p>
+            <a:r>
+              <a:rPr lang="de-DE"/>
+              <a:t>Mastertitelformat bearbeiten</a:t>
+            </a:r>
+          </a:p>
+        </p:txBody>
+      </p:sp>
+      <p:sp>
+        <p:nvSpPr>
+          <p:cNvPr id="3" name="Inhaltsplatzhalter 2">
+            <a:extLst>
+              <a:ext uri="{FF2B5EF4-FFF2-40B4-BE49-F238E27FC236}">
+                <a16:creationId xmlns:a16="http://schemas.microsoft.com/office/drawing/2014/main" id="{C8D83747-5E05-C06A-9B75-682BA98D103D}"/>
+              </a:ext>
+            </a:extLst>
+          </p:cNvPr>
+          <p:cNvSpPr>
+            <a:spLocks noGrp="1"/>
+          </p:cNvSpPr>
+          <p:nvPr>
+            <p:ph idx="1"/>
+          </p:nvPr>
+        </p:nvSpPr>
+        <p:spPr/>
+        <p:txBody>
+          <a:bodyPr/>
+          <a:lstStyle/>
+          <a:p>
+            <a:pPr lvl="0"/>
+            <a:r>
+              <a:rPr lang="de-DE"/>
+              <a:t>Mastertextformat bearbeiten</a:t>
+            </a:r>
+          </a:p>
+          <a:p>
+            <a:pPr lvl="1"/>
+            <a:r>
+              <a:rPr lang="de-DE"/>
+              <a:t>Zweite Ebene</a:t>
+            </a:r>
+          </a:p>
+          <a:p>
+            <a:pPr lvl="2"/>
+            <a:r>
+              <a:rPr lang="de-DE"/>
+              <a:t>Dritte Ebene</a:t>
+            </a:r>
+          </a:p>
+          <a:p>
+            <a:pPr lvl="3"/>
+            <a:r>
+              <a:rPr lang="de-DE"/>
+              <a:t>Vierte Ebene</a:t>
+            </a:r>
+          </a:p>
+          <a:p>
+            <a:pPr lvl="4"/>
+            <a:r>
+              <a:rPr lang="de-DE"/>
+              <a:t>Fünfte Ebene</a:t>
+            </a:r>
+          </a:p>
+        </p:txBody>
+      </p:sp>
+      <p:sp>
+        <p:nvSpPr>
+          <p:cNvPr id="4" name="Datumsplatzhalter 3">
+            <a:extLst>
+              <a:ext uri="{FF2B5EF4-FFF2-40B4-BE49-F238E27FC236}">
+                <a16:creationId xmlns:a16="http://schemas.microsoft.com/office/drawing/2014/main" id="{8C9FE8B9-8589-84EA-D66F-0A19CADF65BE}"/>
+              </a:ext>
+            </a:extLst>
+          </p:cNvPr>
+          <p:cNvSpPr>
+            <a:spLocks noGrp="1"/>
+          </p:cNvSpPr>
+          <p:nvPr>
+            <p:ph type="dt" sz="half" idx="10"/>
+          </p:nvPr>
+        </p:nvSpPr>
+        <p:spPr/>
+        <p:txBody>
+          <a:bodyPr/>
+          <a:lstStyle/>
+          <a:p>
+            <a:fld id="{96DA8C75-A467-416A-B374-E97E5CF82461}" type="datetimeFigureOut">
+              <a:rPr lang="de-DE" smtClean="0"/>
+              <a:t>23.07.2026</a:t>
+            </a:fld>
+            <a:endParaRPr lang="de-DE"/>
+          </a:p>
+        </p:txBody>
+      </p:sp>
+      <p:sp>
+        <p:nvSpPr>
+          <p:cNvPr id="5" name="Fußzeilenplatzhalter 4">
+            <a:extLst>
+              <a:ext uri="{FF2B5EF4-FFF2-40B4-BE49-F238E27FC236}">
+                <a16:creationId xmlns:a16="http://schemas.microsoft.com/office/drawing/2014/main" id="{D341B0CD-4C96-9332-31EB-09E94CC53BB2}"/>
+              </a:ext>
+            </a:extLst>
+          </p:cNvPr>
+          <p:cNvSpPr>
+            <a:spLocks noGrp="1"/>
+          </p:cNvSpPr>
+          <p:nvPr>
+            <p:ph type="ftr" sz="quarter" idx="11"/>
+          </p:nvPr>
+        </p:nvSpPr>
+        <p:spPr/>
+        <p:txBody>
+          <a:bodyPr/>
+          <a:lstStyle/>
+          <a:p>
+            <a:endParaRPr lang="de-DE"/>
+          </a:p>
+        </p:txBody>
+      </p:sp>
+      <p:sp>
+        <p:nvSpPr>
+          <p:cNvPr id="6" name="Foliennummernplatzhalter 5">
+            <a:extLst>
+              <a:ext uri="{FF2B5EF4-FFF2-40B4-BE49-F238E27FC236}">
+                <a16:creationId xmlns:a16="http://schemas.microsoft.com/office/drawing/2014/main" id="{247BF47E-DFE6-4C5C-F094-EAFD1778A8F8}"/>
+              </a:ext>
+            </a:extLst>
+          </p:cNvPr>
+          <p:cNvSpPr>
+            <a:spLocks noGrp="1"/>
+          </p:cNvSpPr>
+          <p:nvPr>
+            <p:ph type="sldNum" sz="quarter" idx="12"/>
+          </p:nvPr>
+        </p:nvSpPr>
+        <p:spPr/>
+        <p:txBody>
+          <a:bodyPr/>
+          <a:lstStyle/>
+          <a:p>
+            <a:fld id="{C74F4156-15F0-4830-8EB5-3206A1B7E9DA}" type="slidenum">
+              <a:rPr lang="de-DE" smtClean="0"/>
+              <a:t>‹Nr.›</a:t>
+            </a:fld>
+            <a:endParaRPr lang="de-DE"/>
+          </a:p>
+        </p:txBody>
+      </p:sp>
+    </p:spTree>
+    <p:extLst>
+      <p:ext uri="{BB962C8B-B14F-4D97-AF65-F5344CB8AC3E}">
+        <p14:creationId xmlns:p14="http://schemas.microsoft.com/office/powerpoint/2010/main" val="2340864458"/>
+      </p:ext>
+    </p:extLst>
+  </p:cSld>
+  <p:clrMapOvr>
+    <a:masterClrMapping/>
+  </p:clrMapOvr>
+</p:sldLayout>
+</file>
+
+<file path=ppt/slideLayouts/slideLayout20.xml><?xml version="1.0" encoding="utf-8"?>
 <p:sldLayout xmlns:a="http://schemas.openxmlformats.org/drawingml/2006/main" xmlns:r="http://schemas.openxmlformats.org/officeDocument/2006/relationships" xmlns:p="http://schemas.openxmlformats.org/presentationml/2006/main" type="picTx" preserve="1">
   <p:cSld name="Bild mit Überschrift">
     <p:spTree>
@@ -2709,7 +3129,7 @@
           <p:cNvPr id="2" name="Titel 1">
             <a:extLst>
               <a:ext uri="{FF2B5EF4-FFF2-40B4-BE49-F238E27FC236}">
-                <a16:creationId xmlns:a16="http://schemas.microsoft.com/office/drawing/2014/main" id="{26B12888-F729-3F22-A14A-2AA4B634639E}"/>
+                <a16:creationId xmlns:a16="http://schemas.microsoft.com/office/drawing/2014/main" id="{E18FB518-43CB-2509-EF47-AA9153F13541}"/>
               </a:ext>
             </a:extLst>
           </p:cNvPr>
@@ -2746,7 +3166,7 @@
           <p:cNvPr id="3" name="Bildplatzhalter 2">
             <a:extLst>
               <a:ext uri="{FF2B5EF4-FFF2-40B4-BE49-F238E27FC236}">
-                <a16:creationId xmlns:a16="http://schemas.microsoft.com/office/drawing/2014/main" id="{5F3D230B-C330-6666-D5F7-5D777AA54607}"/>
+                <a16:creationId xmlns:a16="http://schemas.microsoft.com/office/drawing/2014/main" id="{235A8644-F427-D000-B74C-EF3EE5BD3737}"/>
               </a:ext>
             </a:extLst>
           </p:cNvPr>
@@ -2813,7 +3233,7 @@
           <p:cNvPr id="4" name="Textplatzhalter 3">
             <a:extLst>
               <a:ext uri="{FF2B5EF4-FFF2-40B4-BE49-F238E27FC236}">
-                <a16:creationId xmlns:a16="http://schemas.microsoft.com/office/drawing/2014/main" id="{D1B1ECB7-8C01-EF59-4539-03A1F8737CBB}"/>
+                <a16:creationId xmlns:a16="http://schemas.microsoft.com/office/drawing/2014/main" id="{D5AB3B08-D662-93A0-720B-8CC4A70BAE1B}"/>
               </a:ext>
             </a:extLst>
           </p:cNvPr>
@@ -2884,7 +3304,7 @@
           <p:cNvPr id="5" name="Datumsplatzhalter 4">
             <a:extLst>
               <a:ext uri="{FF2B5EF4-FFF2-40B4-BE49-F238E27FC236}">
-                <a16:creationId xmlns:a16="http://schemas.microsoft.com/office/drawing/2014/main" id="{73199629-100B-751E-40C2-38433C6F833B}"/>
+                <a16:creationId xmlns:a16="http://schemas.microsoft.com/office/drawing/2014/main" id="{E931FAEB-4A3C-8679-B991-169DA08BEC76}"/>
               </a:ext>
             </a:extLst>
           </p:cNvPr>
@@ -2900,9 +3320,2220 @@
           <a:bodyPr/>
           <a:lstStyle/>
           <a:p>
+            <a:fld id="{F15EE0AF-3108-4CA3-86C7-0426E4F2C1B8}" type="datetimeFigureOut">
+              <a:rPr lang="de-DE" smtClean="0"/>
+              <a:t>23.07.2026</a:t>
+            </a:fld>
+            <a:endParaRPr lang="de-DE"/>
+          </a:p>
+        </p:txBody>
+      </p:sp>
+      <p:sp>
+        <p:nvSpPr>
+          <p:cNvPr id="6" name="Fußzeilenplatzhalter 5">
+            <a:extLst>
+              <a:ext uri="{FF2B5EF4-FFF2-40B4-BE49-F238E27FC236}">
+                <a16:creationId xmlns:a16="http://schemas.microsoft.com/office/drawing/2014/main" id="{BB81713D-1086-9004-4EAF-131945CBF3B5}"/>
+              </a:ext>
+            </a:extLst>
+          </p:cNvPr>
+          <p:cNvSpPr>
+            <a:spLocks noGrp="1"/>
+          </p:cNvSpPr>
+          <p:nvPr>
+            <p:ph type="ftr" sz="quarter" idx="11"/>
+          </p:nvPr>
+        </p:nvSpPr>
+        <p:spPr/>
+        <p:txBody>
+          <a:bodyPr/>
+          <a:lstStyle/>
+          <a:p>
+            <a:endParaRPr lang="de-DE"/>
+          </a:p>
+        </p:txBody>
+      </p:sp>
+      <p:sp>
+        <p:nvSpPr>
+          <p:cNvPr id="7" name="Foliennummernplatzhalter 6">
+            <a:extLst>
+              <a:ext uri="{FF2B5EF4-FFF2-40B4-BE49-F238E27FC236}">
+                <a16:creationId xmlns:a16="http://schemas.microsoft.com/office/drawing/2014/main" id="{EDA75CB1-EA91-6A3F-0719-3199CE9B3E80}"/>
+              </a:ext>
+            </a:extLst>
+          </p:cNvPr>
+          <p:cNvSpPr>
+            <a:spLocks noGrp="1"/>
+          </p:cNvSpPr>
+          <p:nvPr>
+            <p:ph type="sldNum" sz="quarter" idx="12"/>
+          </p:nvPr>
+        </p:nvSpPr>
+        <p:spPr/>
+        <p:txBody>
+          <a:bodyPr/>
+          <a:lstStyle/>
+          <a:p>
+            <a:fld id="{76E80021-631E-4299-85ED-5092D68E1074}" type="slidenum">
+              <a:rPr lang="de-DE" smtClean="0"/>
+              <a:t>‹Nr.›</a:t>
+            </a:fld>
+            <a:endParaRPr lang="de-DE"/>
+          </a:p>
+        </p:txBody>
+      </p:sp>
+    </p:spTree>
+    <p:extLst>
+      <p:ext uri="{BB962C8B-B14F-4D97-AF65-F5344CB8AC3E}">
+        <p14:creationId xmlns:p14="http://schemas.microsoft.com/office/powerpoint/2010/main" val="1160637272"/>
+      </p:ext>
+    </p:extLst>
+  </p:cSld>
+  <p:clrMapOvr>
+    <a:masterClrMapping/>
+  </p:clrMapOvr>
+</p:sldLayout>
+</file>
+
+<file path=ppt/slideLayouts/slideLayout21.xml><?xml version="1.0" encoding="utf-8"?>
+<p:sldLayout xmlns:a="http://schemas.openxmlformats.org/drawingml/2006/main" xmlns:r="http://schemas.openxmlformats.org/officeDocument/2006/relationships" xmlns:p="http://schemas.openxmlformats.org/presentationml/2006/main" type="vertTx" preserve="1">
+  <p:cSld name="Titel und vertikaler Text">
+    <p:spTree>
+      <p:nvGrpSpPr>
+        <p:cNvPr id="1" name=""/>
+        <p:cNvGrpSpPr/>
+        <p:nvPr/>
+      </p:nvGrpSpPr>
+      <p:grpSpPr>
+        <a:xfrm>
+          <a:off x="0" y="0"/>
+          <a:ext cx="0" cy="0"/>
+          <a:chOff x="0" y="0"/>
+          <a:chExt cx="0" cy="0"/>
+        </a:xfrm>
+      </p:grpSpPr>
+      <p:sp>
+        <p:nvSpPr>
+          <p:cNvPr id="2" name="Titel 1">
+            <a:extLst>
+              <a:ext uri="{FF2B5EF4-FFF2-40B4-BE49-F238E27FC236}">
+                <a16:creationId xmlns:a16="http://schemas.microsoft.com/office/drawing/2014/main" id="{00A659D3-0AC2-DC8C-B3A1-D1A8967ABB90}"/>
+              </a:ext>
+            </a:extLst>
+          </p:cNvPr>
+          <p:cNvSpPr>
+            <a:spLocks noGrp="1"/>
+          </p:cNvSpPr>
+          <p:nvPr>
+            <p:ph type="title"/>
+          </p:nvPr>
+        </p:nvSpPr>
+        <p:spPr/>
+        <p:txBody>
+          <a:bodyPr/>
+          <a:lstStyle/>
+          <a:p>
+            <a:r>
+              <a:rPr lang="de-DE"/>
+              <a:t>Mastertitelformat bearbeiten</a:t>
+            </a:r>
+          </a:p>
+        </p:txBody>
+      </p:sp>
+      <p:sp>
+        <p:nvSpPr>
+          <p:cNvPr id="3" name="Vertikaler Textplatzhalter 2">
+            <a:extLst>
+              <a:ext uri="{FF2B5EF4-FFF2-40B4-BE49-F238E27FC236}">
+                <a16:creationId xmlns:a16="http://schemas.microsoft.com/office/drawing/2014/main" id="{F0A681E6-EB9D-556F-C30C-D0783FC99022}"/>
+              </a:ext>
+            </a:extLst>
+          </p:cNvPr>
+          <p:cNvSpPr>
+            <a:spLocks noGrp="1"/>
+          </p:cNvSpPr>
+          <p:nvPr>
+            <p:ph type="body" orient="vert" idx="1"/>
+          </p:nvPr>
+        </p:nvSpPr>
+        <p:spPr/>
+        <p:txBody>
+          <a:bodyPr vert="eaVert"/>
+          <a:lstStyle/>
+          <a:p>
+            <a:pPr lvl="0"/>
+            <a:r>
+              <a:rPr lang="de-DE"/>
+              <a:t>Mastertextformat bearbeiten</a:t>
+            </a:r>
+          </a:p>
+          <a:p>
+            <a:pPr lvl="1"/>
+            <a:r>
+              <a:rPr lang="de-DE"/>
+              <a:t>Zweite Ebene</a:t>
+            </a:r>
+          </a:p>
+          <a:p>
+            <a:pPr lvl="2"/>
+            <a:r>
+              <a:rPr lang="de-DE"/>
+              <a:t>Dritte Ebene</a:t>
+            </a:r>
+          </a:p>
+          <a:p>
+            <a:pPr lvl="3"/>
+            <a:r>
+              <a:rPr lang="de-DE"/>
+              <a:t>Vierte Ebene</a:t>
+            </a:r>
+          </a:p>
+          <a:p>
+            <a:pPr lvl="4"/>
+            <a:r>
+              <a:rPr lang="de-DE"/>
+              <a:t>Fünfte Ebene</a:t>
+            </a:r>
+          </a:p>
+        </p:txBody>
+      </p:sp>
+      <p:sp>
+        <p:nvSpPr>
+          <p:cNvPr id="4" name="Datumsplatzhalter 3">
+            <a:extLst>
+              <a:ext uri="{FF2B5EF4-FFF2-40B4-BE49-F238E27FC236}">
+                <a16:creationId xmlns:a16="http://schemas.microsoft.com/office/drawing/2014/main" id="{AF2CC555-E9B6-DFE6-6D16-F85C302A144C}"/>
+              </a:ext>
+            </a:extLst>
+          </p:cNvPr>
+          <p:cNvSpPr>
+            <a:spLocks noGrp="1"/>
+          </p:cNvSpPr>
+          <p:nvPr>
+            <p:ph type="dt" sz="half" idx="10"/>
+          </p:nvPr>
+        </p:nvSpPr>
+        <p:spPr/>
+        <p:txBody>
+          <a:bodyPr/>
+          <a:lstStyle/>
+          <a:p>
+            <a:fld id="{F15EE0AF-3108-4CA3-86C7-0426E4F2C1B8}" type="datetimeFigureOut">
+              <a:rPr lang="de-DE" smtClean="0"/>
+              <a:t>23.07.2026</a:t>
+            </a:fld>
+            <a:endParaRPr lang="de-DE"/>
+          </a:p>
+        </p:txBody>
+      </p:sp>
+      <p:sp>
+        <p:nvSpPr>
+          <p:cNvPr id="5" name="Fußzeilenplatzhalter 4">
+            <a:extLst>
+              <a:ext uri="{FF2B5EF4-FFF2-40B4-BE49-F238E27FC236}">
+                <a16:creationId xmlns:a16="http://schemas.microsoft.com/office/drawing/2014/main" id="{1F599844-D115-822D-6CA3-4AF1C882723E}"/>
+              </a:ext>
+            </a:extLst>
+          </p:cNvPr>
+          <p:cNvSpPr>
+            <a:spLocks noGrp="1"/>
+          </p:cNvSpPr>
+          <p:nvPr>
+            <p:ph type="ftr" sz="quarter" idx="11"/>
+          </p:nvPr>
+        </p:nvSpPr>
+        <p:spPr/>
+        <p:txBody>
+          <a:bodyPr/>
+          <a:lstStyle/>
+          <a:p>
+            <a:endParaRPr lang="de-DE"/>
+          </a:p>
+        </p:txBody>
+      </p:sp>
+      <p:sp>
+        <p:nvSpPr>
+          <p:cNvPr id="6" name="Foliennummernplatzhalter 5">
+            <a:extLst>
+              <a:ext uri="{FF2B5EF4-FFF2-40B4-BE49-F238E27FC236}">
+                <a16:creationId xmlns:a16="http://schemas.microsoft.com/office/drawing/2014/main" id="{15C3E03D-5180-57BA-EEB9-6AE2EE27CF44}"/>
+              </a:ext>
+            </a:extLst>
+          </p:cNvPr>
+          <p:cNvSpPr>
+            <a:spLocks noGrp="1"/>
+          </p:cNvSpPr>
+          <p:nvPr>
+            <p:ph type="sldNum" sz="quarter" idx="12"/>
+          </p:nvPr>
+        </p:nvSpPr>
+        <p:spPr/>
+        <p:txBody>
+          <a:bodyPr/>
+          <a:lstStyle/>
+          <a:p>
+            <a:fld id="{76E80021-631E-4299-85ED-5092D68E1074}" type="slidenum">
+              <a:rPr lang="de-DE" smtClean="0"/>
+              <a:t>‹Nr.›</a:t>
+            </a:fld>
+            <a:endParaRPr lang="de-DE"/>
+          </a:p>
+        </p:txBody>
+      </p:sp>
+    </p:spTree>
+    <p:extLst>
+      <p:ext uri="{BB962C8B-B14F-4D97-AF65-F5344CB8AC3E}">
+        <p14:creationId xmlns:p14="http://schemas.microsoft.com/office/powerpoint/2010/main" val="3882296155"/>
+      </p:ext>
+    </p:extLst>
+  </p:cSld>
+  <p:clrMapOvr>
+    <a:masterClrMapping/>
+  </p:clrMapOvr>
+</p:sldLayout>
+</file>
+
+<file path=ppt/slideLayouts/slideLayout22.xml><?xml version="1.0" encoding="utf-8"?>
+<p:sldLayout xmlns:a="http://schemas.openxmlformats.org/drawingml/2006/main" xmlns:r="http://schemas.openxmlformats.org/officeDocument/2006/relationships" xmlns:p="http://schemas.openxmlformats.org/presentationml/2006/main" type="vertTitleAndTx" preserve="1">
+  <p:cSld name="Vertikaler Titel und Text">
+    <p:spTree>
+      <p:nvGrpSpPr>
+        <p:cNvPr id="1" name=""/>
+        <p:cNvGrpSpPr/>
+        <p:nvPr/>
+      </p:nvGrpSpPr>
+      <p:grpSpPr>
+        <a:xfrm>
+          <a:off x="0" y="0"/>
+          <a:ext cx="0" cy="0"/>
+          <a:chOff x="0" y="0"/>
+          <a:chExt cx="0" cy="0"/>
+        </a:xfrm>
+      </p:grpSpPr>
+      <p:sp>
+        <p:nvSpPr>
+          <p:cNvPr id="2" name="Vertikaler Titel 1">
+            <a:extLst>
+              <a:ext uri="{FF2B5EF4-FFF2-40B4-BE49-F238E27FC236}">
+                <a16:creationId xmlns:a16="http://schemas.microsoft.com/office/drawing/2014/main" id="{8FA5CE3C-0EB0-EF0B-DFB7-5E8869002357}"/>
+              </a:ext>
+            </a:extLst>
+          </p:cNvPr>
+          <p:cNvSpPr>
+            <a:spLocks noGrp="1"/>
+          </p:cNvSpPr>
+          <p:nvPr>
+            <p:ph type="title" orient="vert"/>
+          </p:nvPr>
+        </p:nvSpPr>
+        <p:spPr>
+          <a:xfrm>
+            <a:off x="8724900" y="365125"/>
+            <a:ext cx="2628900" cy="5811838"/>
+          </a:xfrm>
+        </p:spPr>
+        <p:txBody>
+          <a:bodyPr vert="eaVert"/>
+          <a:lstStyle/>
+          <a:p>
+            <a:r>
+              <a:rPr lang="de-DE"/>
+              <a:t>Mastertitelformat bearbeiten</a:t>
+            </a:r>
+          </a:p>
+        </p:txBody>
+      </p:sp>
+      <p:sp>
+        <p:nvSpPr>
+          <p:cNvPr id="3" name="Vertikaler Textplatzhalter 2">
+            <a:extLst>
+              <a:ext uri="{FF2B5EF4-FFF2-40B4-BE49-F238E27FC236}">
+                <a16:creationId xmlns:a16="http://schemas.microsoft.com/office/drawing/2014/main" id="{2864C3C7-3E0F-E236-8A6C-7705C9B11F1C}"/>
+              </a:ext>
+            </a:extLst>
+          </p:cNvPr>
+          <p:cNvSpPr>
+            <a:spLocks noGrp="1"/>
+          </p:cNvSpPr>
+          <p:nvPr>
+            <p:ph type="body" orient="vert" idx="1"/>
+          </p:nvPr>
+        </p:nvSpPr>
+        <p:spPr>
+          <a:xfrm>
+            <a:off x="838200" y="365125"/>
+            <a:ext cx="7734300" cy="5811838"/>
+          </a:xfrm>
+        </p:spPr>
+        <p:txBody>
+          <a:bodyPr vert="eaVert"/>
+          <a:lstStyle/>
+          <a:p>
+            <a:pPr lvl="0"/>
+            <a:r>
+              <a:rPr lang="de-DE"/>
+              <a:t>Mastertextformat bearbeiten</a:t>
+            </a:r>
+          </a:p>
+          <a:p>
+            <a:pPr lvl="1"/>
+            <a:r>
+              <a:rPr lang="de-DE"/>
+              <a:t>Zweite Ebene</a:t>
+            </a:r>
+          </a:p>
+          <a:p>
+            <a:pPr lvl="2"/>
+            <a:r>
+              <a:rPr lang="de-DE"/>
+              <a:t>Dritte Ebene</a:t>
+            </a:r>
+          </a:p>
+          <a:p>
+            <a:pPr lvl="3"/>
+            <a:r>
+              <a:rPr lang="de-DE"/>
+              <a:t>Vierte Ebene</a:t>
+            </a:r>
+          </a:p>
+          <a:p>
+            <a:pPr lvl="4"/>
+            <a:r>
+              <a:rPr lang="de-DE"/>
+              <a:t>Fünfte Ebene</a:t>
+            </a:r>
+          </a:p>
+        </p:txBody>
+      </p:sp>
+      <p:sp>
+        <p:nvSpPr>
+          <p:cNvPr id="4" name="Datumsplatzhalter 3">
+            <a:extLst>
+              <a:ext uri="{FF2B5EF4-FFF2-40B4-BE49-F238E27FC236}">
+                <a16:creationId xmlns:a16="http://schemas.microsoft.com/office/drawing/2014/main" id="{2BF597B7-D4D3-3A82-0844-DE77E94E6F51}"/>
+              </a:ext>
+            </a:extLst>
+          </p:cNvPr>
+          <p:cNvSpPr>
+            <a:spLocks noGrp="1"/>
+          </p:cNvSpPr>
+          <p:nvPr>
+            <p:ph type="dt" sz="half" idx="10"/>
+          </p:nvPr>
+        </p:nvSpPr>
+        <p:spPr/>
+        <p:txBody>
+          <a:bodyPr/>
+          <a:lstStyle/>
+          <a:p>
+            <a:fld id="{F15EE0AF-3108-4CA3-86C7-0426E4F2C1B8}" type="datetimeFigureOut">
+              <a:rPr lang="de-DE" smtClean="0"/>
+              <a:t>23.07.2026</a:t>
+            </a:fld>
+            <a:endParaRPr lang="de-DE"/>
+          </a:p>
+        </p:txBody>
+      </p:sp>
+      <p:sp>
+        <p:nvSpPr>
+          <p:cNvPr id="5" name="Fußzeilenplatzhalter 4">
+            <a:extLst>
+              <a:ext uri="{FF2B5EF4-FFF2-40B4-BE49-F238E27FC236}">
+                <a16:creationId xmlns:a16="http://schemas.microsoft.com/office/drawing/2014/main" id="{0D5EBC65-E1D7-7176-3139-B52458D66529}"/>
+              </a:ext>
+            </a:extLst>
+          </p:cNvPr>
+          <p:cNvSpPr>
+            <a:spLocks noGrp="1"/>
+          </p:cNvSpPr>
+          <p:nvPr>
+            <p:ph type="ftr" sz="quarter" idx="11"/>
+          </p:nvPr>
+        </p:nvSpPr>
+        <p:spPr/>
+        <p:txBody>
+          <a:bodyPr/>
+          <a:lstStyle/>
+          <a:p>
+            <a:endParaRPr lang="de-DE"/>
+          </a:p>
+        </p:txBody>
+      </p:sp>
+      <p:sp>
+        <p:nvSpPr>
+          <p:cNvPr id="6" name="Foliennummernplatzhalter 5">
+            <a:extLst>
+              <a:ext uri="{FF2B5EF4-FFF2-40B4-BE49-F238E27FC236}">
+                <a16:creationId xmlns:a16="http://schemas.microsoft.com/office/drawing/2014/main" id="{921507F2-C32F-D2DF-9E1D-A4B3728CFC48}"/>
+              </a:ext>
+            </a:extLst>
+          </p:cNvPr>
+          <p:cNvSpPr>
+            <a:spLocks noGrp="1"/>
+          </p:cNvSpPr>
+          <p:nvPr>
+            <p:ph type="sldNum" sz="quarter" idx="12"/>
+          </p:nvPr>
+        </p:nvSpPr>
+        <p:spPr/>
+        <p:txBody>
+          <a:bodyPr/>
+          <a:lstStyle/>
+          <a:p>
+            <a:fld id="{76E80021-631E-4299-85ED-5092D68E1074}" type="slidenum">
+              <a:rPr lang="de-DE" smtClean="0"/>
+              <a:t>‹Nr.›</a:t>
+            </a:fld>
+            <a:endParaRPr lang="de-DE"/>
+          </a:p>
+        </p:txBody>
+      </p:sp>
+    </p:spTree>
+    <p:extLst>
+      <p:ext uri="{BB962C8B-B14F-4D97-AF65-F5344CB8AC3E}">
+        <p14:creationId xmlns:p14="http://schemas.microsoft.com/office/powerpoint/2010/main" val="347695056"/>
+      </p:ext>
+    </p:extLst>
+  </p:cSld>
+  <p:clrMapOvr>
+    <a:masterClrMapping/>
+  </p:clrMapOvr>
+</p:sldLayout>
+</file>
+
+<file path=ppt/slideLayouts/slideLayout3.xml><?xml version="1.0" encoding="utf-8"?>
+<p:sldLayout xmlns:a="http://schemas.openxmlformats.org/drawingml/2006/main" xmlns:r="http://schemas.openxmlformats.org/officeDocument/2006/relationships" xmlns:p="http://schemas.openxmlformats.org/presentationml/2006/main" type="secHead" preserve="1">
+  <p:cSld name="Abschnitts-&#10;überschrift">
+    <p:spTree>
+      <p:nvGrpSpPr>
+        <p:cNvPr id="1" name=""/>
+        <p:cNvGrpSpPr/>
+        <p:nvPr/>
+      </p:nvGrpSpPr>
+      <p:grpSpPr>
+        <a:xfrm>
+          <a:off x="0" y="0"/>
+          <a:ext cx="0" cy="0"/>
+          <a:chOff x="0" y="0"/>
+          <a:chExt cx="0" cy="0"/>
+        </a:xfrm>
+      </p:grpSpPr>
+      <p:sp>
+        <p:nvSpPr>
+          <p:cNvPr id="2" name="Titel 1">
+            <a:extLst>
+              <a:ext uri="{FF2B5EF4-FFF2-40B4-BE49-F238E27FC236}">
+                <a16:creationId xmlns:a16="http://schemas.microsoft.com/office/drawing/2014/main" id="{079FE03A-B15C-72F5-3778-8BC98A3CF62F}"/>
+              </a:ext>
+            </a:extLst>
+          </p:cNvPr>
+          <p:cNvSpPr>
+            <a:spLocks noGrp="1"/>
+          </p:cNvSpPr>
+          <p:nvPr>
+            <p:ph type="title"/>
+          </p:nvPr>
+        </p:nvSpPr>
+        <p:spPr>
+          <a:xfrm>
+            <a:off x="831850" y="1709738"/>
+            <a:ext cx="10515600" cy="2852737"/>
+          </a:xfrm>
+        </p:spPr>
+        <p:txBody>
+          <a:bodyPr anchor="b"/>
+          <a:lstStyle>
+            <a:lvl1pPr>
+              <a:defRPr sz="6000"/>
+            </a:lvl1pPr>
+          </a:lstStyle>
+          <a:p>
+            <a:r>
+              <a:rPr lang="de-DE"/>
+              <a:t>Mastertitelformat bearbeiten</a:t>
+            </a:r>
+          </a:p>
+        </p:txBody>
+      </p:sp>
+      <p:sp>
+        <p:nvSpPr>
+          <p:cNvPr id="3" name="Textplatzhalter 2">
+            <a:extLst>
+              <a:ext uri="{FF2B5EF4-FFF2-40B4-BE49-F238E27FC236}">
+                <a16:creationId xmlns:a16="http://schemas.microsoft.com/office/drawing/2014/main" id="{F7CCDA95-157D-9A1F-523C-15AF0595359B}"/>
+              </a:ext>
+            </a:extLst>
+          </p:cNvPr>
+          <p:cNvSpPr>
+            <a:spLocks noGrp="1"/>
+          </p:cNvSpPr>
+          <p:nvPr>
+            <p:ph type="body" idx="1"/>
+          </p:nvPr>
+        </p:nvSpPr>
+        <p:spPr>
+          <a:xfrm>
+            <a:off x="831850" y="4589463"/>
+            <a:ext cx="10515600" cy="1500187"/>
+          </a:xfrm>
+        </p:spPr>
+        <p:txBody>
+          <a:bodyPr/>
+          <a:lstStyle>
+            <a:lvl1pPr marL="0" indent="0">
+              <a:buNone/>
+              <a:defRPr sz="2400">
+                <a:solidFill>
+                  <a:schemeClr val="tx1">
+                    <a:tint val="82000"/>
+                  </a:schemeClr>
+                </a:solidFill>
+              </a:defRPr>
+            </a:lvl1pPr>
+            <a:lvl2pPr marL="457200" indent="0">
+              <a:buNone/>
+              <a:defRPr sz="2000">
+                <a:solidFill>
+                  <a:schemeClr val="tx1">
+                    <a:tint val="82000"/>
+                  </a:schemeClr>
+                </a:solidFill>
+              </a:defRPr>
+            </a:lvl2pPr>
+            <a:lvl3pPr marL="914400" indent="0">
+              <a:buNone/>
+              <a:defRPr sz="1800">
+                <a:solidFill>
+                  <a:schemeClr val="tx1">
+                    <a:tint val="82000"/>
+                  </a:schemeClr>
+                </a:solidFill>
+              </a:defRPr>
+            </a:lvl3pPr>
+            <a:lvl4pPr marL="1371600" indent="0">
+              <a:buNone/>
+              <a:defRPr sz="1600">
+                <a:solidFill>
+                  <a:schemeClr val="tx1">
+                    <a:tint val="82000"/>
+                  </a:schemeClr>
+                </a:solidFill>
+              </a:defRPr>
+            </a:lvl4pPr>
+            <a:lvl5pPr marL="1828800" indent="0">
+              <a:buNone/>
+              <a:defRPr sz="1600">
+                <a:solidFill>
+                  <a:schemeClr val="tx1">
+                    <a:tint val="82000"/>
+                  </a:schemeClr>
+                </a:solidFill>
+              </a:defRPr>
+            </a:lvl5pPr>
+            <a:lvl6pPr marL="2286000" indent="0">
+              <a:buNone/>
+              <a:defRPr sz="1600">
+                <a:solidFill>
+                  <a:schemeClr val="tx1">
+                    <a:tint val="82000"/>
+                  </a:schemeClr>
+                </a:solidFill>
+              </a:defRPr>
+            </a:lvl6pPr>
+            <a:lvl7pPr marL="2743200" indent="0">
+              <a:buNone/>
+              <a:defRPr sz="1600">
+                <a:solidFill>
+                  <a:schemeClr val="tx1">
+                    <a:tint val="82000"/>
+                  </a:schemeClr>
+                </a:solidFill>
+              </a:defRPr>
+            </a:lvl7pPr>
+            <a:lvl8pPr marL="3200400" indent="0">
+              <a:buNone/>
+              <a:defRPr sz="1600">
+                <a:solidFill>
+                  <a:schemeClr val="tx1">
+                    <a:tint val="82000"/>
+                  </a:schemeClr>
+                </a:solidFill>
+              </a:defRPr>
+            </a:lvl8pPr>
+            <a:lvl9pPr marL="3657600" indent="0">
+              <a:buNone/>
+              <a:defRPr sz="1600">
+                <a:solidFill>
+                  <a:schemeClr val="tx1">
+                    <a:tint val="82000"/>
+                  </a:schemeClr>
+                </a:solidFill>
+              </a:defRPr>
+            </a:lvl9pPr>
+          </a:lstStyle>
+          <a:p>
+            <a:pPr lvl="0"/>
+            <a:r>
+              <a:rPr lang="de-DE"/>
+              <a:t>Mastertextformat bearbeiten</a:t>
+            </a:r>
+          </a:p>
+        </p:txBody>
+      </p:sp>
+      <p:sp>
+        <p:nvSpPr>
+          <p:cNvPr id="4" name="Datumsplatzhalter 3">
+            <a:extLst>
+              <a:ext uri="{FF2B5EF4-FFF2-40B4-BE49-F238E27FC236}">
+                <a16:creationId xmlns:a16="http://schemas.microsoft.com/office/drawing/2014/main" id="{CE2B12C8-EAD3-FF26-5137-8C058C9E2C33}"/>
+              </a:ext>
+            </a:extLst>
+          </p:cNvPr>
+          <p:cNvSpPr>
+            <a:spLocks noGrp="1"/>
+          </p:cNvSpPr>
+          <p:nvPr>
+            <p:ph type="dt" sz="half" idx="10"/>
+          </p:nvPr>
+        </p:nvSpPr>
+        <p:spPr/>
+        <p:txBody>
+          <a:bodyPr/>
+          <a:lstStyle/>
+          <a:p>
             <a:fld id="{96DA8C75-A467-416A-B374-E97E5CF82461}" type="datetimeFigureOut">
               <a:rPr lang="de-DE" smtClean="0"/>
-              <a:t>02.07.2026</a:t>
+              <a:t>23.07.2026</a:t>
+            </a:fld>
+            <a:endParaRPr lang="de-DE"/>
+          </a:p>
+        </p:txBody>
+      </p:sp>
+      <p:sp>
+        <p:nvSpPr>
+          <p:cNvPr id="5" name="Fußzeilenplatzhalter 4">
+            <a:extLst>
+              <a:ext uri="{FF2B5EF4-FFF2-40B4-BE49-F238E27FC236}">
+                <a16:creationId xmlns:a16="http://schemas.microsoft.com/office/drawing/2014/main" id="{F8F7633C-56AF-7DAE-666B-DD8A412D60A0}"/>
+              </a:ext>
+            </a:extLst>
+          </p:cNvPr>
+          <p:cNvSpPr>
+            <a:spLocks noGrp="1"/>
+          </p:cNvSpPr>
+          <p:nvPr>
+            <p:ph type="ftr" sz="quarter" idx="11"/>
+          </p:nvPr>
+        </p:nvSpPr>
+        <p:spPr/>
+        <p:txBody>
+          <a:bodyPr/>
+          <a:lstStyle/>
+          <a:p>
+            <a:endParaRPr lang="de-DE"/>
+          </a:p>
+        </p:txBody>
+      </p:sp>
+      <p:sp>
+        <p:nvSpPr>
+          <p:cNvPr id="6" name="Foliennummernplatzhalter 5">
+            <a:extLst>
+              <a:ext uri="{FF2B5EF4-FFF2-40B4-BE49-F238E27FC236}">
+                <a16:creationId xmlns:a16="http://schemas.microsoft.com/office/drawing/2014/main" id="{934C6F91-065F-4C4B-053E-5625B6810A81}"/>
+              </a:ext>
+            </a:extLst>
+          </p:cNvPr>
+          <p:cNvSpPr>
+            <a:spLocks noGrp="1"/>
+          </p:cNvSpPr>
+          <p:nvPr>
+            <p:ph type="sldNum" sz="quarter" idx="12"/>
+          </p:nvPr>
+        </p:nvSpPr>
+        <p:spPr/>
+        <p:txBody>
+          <a:bodyPr/>
+          <a:lstStyle/>
+          <a:p>
+            <a:fld id="{C74F4156-15F0-4830-8EB5-3206A1B7E9DA}" type="slidenum">
+              <a:rPr lang="de-DE" smtClean="0"/>
+              <a:t>‹Nr.›</a:t>
+            </a:fld>
+            <a:endParaRPr lang="de-DE"/>
+          </a:p>
+        </p:txBody>
+      </p:sp>
+    </p:spTree>
+    <p:extLst>
+      <p:ext uri="{BB962C8B-B14F-4D97-AF65-F5344CB8AC3E}">
+        <p14:creationId xmlns:p14="http://schemas.microsoft.com/office/powerpoint/2010/main" val="917757961"/>
+      </p:ext>
+    </p:extLst>
+  </p:cSld>
+  <p:clrMapOvr>
+    <a:masterClrMapping/>
+  </p:clrMapOvr>
+</p:sldLayout>
+</file>
+
+<file path=ppt/slideLayouts/slideLayout4.xml><?xml version="1.0" encoding="utf-8"?>
+<p:sldLayout xmlns:a="http://schemas.openxmlformats.org/drawingml/2006/main" xmlns:r="http://schemas.openxmlformats.org/officeDocument/2006/relationships" xmlns:p="http://schemas.openxmlformats.org/presentationml/2006/main" type="twoObj" preserve="1">
+  <p:cSld name="Zwei Inhalte">
+    <p:spTree>
+      <p:nvGrpSpPr>
+        <p:cNvPr id="1" name=""/>
+        <p:cNvGrpSpPr/>
+        <p:nvPr/>
+      </p:nvGrpSpPr>
+      <p:grpSpPr>
+        <a:xfrm>
+          <a:off x="0" y="0"/>
+          <a:ext cx="0" cy="0"/>
+          <a:chOff x="0" y="0"/>
+          <a:chExt cx="0" cy="0"/>
+        </a:xfrm>
+      </p:grpSpPr>
+      <p:sp>
+        <p:nvSpPr>
+          <p:cNvPr id="2" name="Titel 1">
+            <a:extLst>
+              <a:ext uri="{FF2B5EF4-FFF2-40B4-BE49-F238E27FC236}">
+                <a16:creationId xmlns:a16="http://schemas.microsoft.com/office/drawing/2014/main" id="{7E0B1B66-4D9E-D3D3-584F-97609CB36C3D}"/>
+              </a:ext>
+            </a:extLst>
+          </p:cNvPr>
+          <p:cNvSpPr>
+            <a:spLocks noGrp="1"/>
+          </p:cNvSpPr>
+          <p:nvPr>
+            <p:ph type="title"/>
+          </p:nvPr>
+        </p:nvSpPr>
+        <p:spPr/>
+        <p:txBody>
+          <a:bodyPr/>
+          <a:lstStyle/>
+          <a:p>
+            <a:r>
+              <a:rPr lang="de-DE"/>
+              <a:t>Mastertitelformat bearbeiten</a:t>
+            </a:r>
+          </a:p>
+        </p:txBody>
+      </p:sp>
+      <p:sp>
+        <p:nvSpPr>
+          <p:cNvPr id="3" name="Inhaltsplatzhalter 2">
+            <a:extLst>
+              <a:ext uri="{FF2B5EF4-FFF2-40B4-BE49-F238E27FC236}">
+                <a16:creationId xmlns:a16="http://schemas.microsoft.com/office/drawing/2014/main" id="{35C0107D-BBE4-E384-7274-EA71B99C1081}"/>
+              </a:ext>
+            </a:extLst>
+          </p:cNvPr>
+          <p:cNvSpPr>
+            <a:spLocks noGrp="1"/>
+          </p:cNvSpPr>
+          <p:nvPr>
+            <p:ph sz="half" idx="1"/>
+          </p:nvPr>
+        </p:nvSpPr>
+        <p:spPr>
+          <a:xfrm>
+            <a:off x="838200" y="1825625"/>
+            <a:ext cx="5181600" cy="4351338"/>
+          </a:xfrm>
+        </p:spPr>
+        <p:txBody>
+          <a:bodyPr/>
+          <a:lstStyle/>
+          <a:p>
+            <a:pPr lvl="0"/>
+            <a:r>
+              <a:rPr lang="de-DE"/>
+              <a:t>Mastertextformat bearbeiten</a:t>
+            </a:r>
+          </a:p>
+          <a:p>
+            <a:pPr lvl="1"/>
+            <a:r>
+              <a:rPr lang="de-DE"/>
+              <a:t>Zweite Ebene</a:t>
+            </a:r>
+          </a:p>
+          <a:p>
+            <a:pPr lvl="2"/>
+            <a:r>
+              <a:rPr lang="de-DE"/>
+              <a:t>Dritte Ebene</a:t>
+            </a:r>
+          </a:p>
+          <a:p>
+            <a:pPr lvl="3"/>
+            <a:r>
+              <a:rPr lang="de-DE"/>
+              <a:t>Vierte Ebene</a:t>
+            </a:r>
+          </a:p>
+          <a:p>
+            <a:pPr lvl="4"/>
+            <a:r>
+              <a:rPr lang="de-DE"/>
+              <a:t>Fünfte Ebene</a:t>
+            </a:r>
+          </a:p>
+        </p:txBody>
+      </p:sp>
+      <p:sp>
+        <p:nvSpPr>
+          <p:cNvPr id="4" name="Inhaltsplatzhalter 3">
+            <a:extLst>
+              <a:ext uri="{FF2B5EF4-FFF2-40B4-BE49-F238E27FC236}">
+                <a16:creationId xmlns:a16="http://schemas.microsoft.com/office/drawing/2014/main" id="{774BC2EC-4D93-C03B-9170-477FD17C164C}"/>
+              </a:ext>
+            </a:extLst>
+          </p:cNvPr>
+          <p:cNvSpPr>
+            <a:spLocks noGrp="1"/>
+          </p:cNvSpPr>
+          <p:nvPr>
+            <p:ph sz="half" idx="2"/>
+          </p:nvPr>
+        </p:nvSpPr>
+        <p:spPr>
+          <a:xfrm>
+            <a:off x="6172200" y="1825625"/>
+            <a:ext cx="5181600" cy="4351338"/>
+          </a:xfrm>
+        </p:spPr>
+        <p:txBody>
+          <a:bodyPr/>
+          <a:lstStyle/>
+          <a:p>
+            <a:pPr lvl="0"/>
+            <a:r>
+              <a:rPr lang="de-DE"/>
+              <a:t>Mastertextformat bearbeiten</a:t>
+            </a:r>
+          </a:p>
+          <a:p>
+            <a:pPr lvl="1"/>
+            <a:r>
+              <a:rPr lang="de-DE"/>
+              <a:t>Zweite Ebene</a:t>
+            </a:r>
+          </a:p>
+          <a:p>
+            <a:pPr lvl="2"/>
+            <a:r>
+              <a:rPr lang="de-DE"/>
+              <a:t>Dritte Ebene</a:t>
+            </a:r>
+          </a:p>
+          <a:p>
+            <a:pPr lvl="3"/>
+            <a:r>
+              <a:rPr lang="de-DE"/>
+              <a:t>Vierte Ebene</a:t>
+            </a:r>
+          </a:p>
+          <a:p>
+            <a:pPr lvl="4"/>
+            <a:r>
+              <a:rPr lang="de-DE"/>
+              <a:t>Fünfte Ebene</a:t>
+            </a:r>
+          </a:p>
+        </p:txBody>
+      </p:sp>
+      <p:sp>
+        <p:nvSpPr>
+          <p:cNvPr id="5" name="Datumsplatzhalter 4">
+            <a:extLst>
+              <a:ext uri="{FF2B5EF4-FFF2-40B4-BE49-F238E27FC236}">
+                <a16:creationId xmlns:a16="http://schemas.microsoft.com/office/drawing/2014/main" id="{B38E210C-86C6-7600-CE6B-992E51294D85}"/>
+              </a:ext>
+            </a:extLst>
+          </p:cNvPr>
+          <p:cNvSpPr>
+            <a:spLocks noGrp="1"/>
+          </p:cNvSpPr>
+          <p:nvPr>
+            <p:ph type="dt" sz="half" idx="10"/>
+          </p:nvPr>
+        </p:nvSpPr>
+        <p:spPr/>
+        <p:txBody>
+          <a:bodyPr/>
+          <a:lstStyle/>
+          <a:p>
+            <a:fld id="{96DA8C75-A467-416A-B374-E97E5CF82461}" type="datetimeFigureOut">
+              <a:rPr lang="de-DE" smtClean="0"/>
+              <a:t>23.07.2026</a:t>
+            </a:fld>
+            <a:endParaRPr lang="de-DE"/>
+          </a:p>
+        </p:txBody>
+      </p:sp>
+      <p:sp>
+        <p:nvSpPr>
+          <p:cNvPr id="6" name="Fußzeilenplatzhalter 5">
+            <a:extLst>
+              <a:ext uri="{FF2B5EF4-FFF2-40B4-BE49-F238E27FC236}">
+                <a16:creationId xmlns:a16="http://schemas.microsoft.com/office/drawing/2014/main" id="{0B31B8D0-B8C6-07D4-2134-23B400471F5E}"/>
+              </a:ext>
+            </a:extLst>
+          </p:cNvPr>
+          <p:cNvSpPr>
+            <a:spLocks noGrp="1"/>
+          </p:cNvSpPr>
+          <p:nvPr>
+            <p:ph type="ftr" sz="quarter" idx="11"/>
+          </p:nvPr>
+        </p:nvSpPr>
+        <p:spPr/>
+        <p:txBody>
+          <a:bodyPr/>
+          <a:lstStyle/>
+          <a:p>
+            <a:endParaRPr lang="de-DE"/>
+          </a:p>
+        </p:txBody>
+      </p:sp>
+      <p:sp>
+        <p:nvSpPr>
+          <p:cNvPr id="7" name="Foliennummernplatzhalter 6">
+            <a:extLst>
+              <a:ext uri="{FF2B5EF4-FFF2-40B4-BE49-F238E27FC236}">
+                <a16:creationId xmlns:a16="http://schemas.microsoft.com/office/drawing/2014/main" id="{E97C03B4-BC6F-97E9-16A4-978E28948293}"/>
+              </a:ext>
+            </a:extLst>
+          </p:cNvPr>
+          <p:cNvSpPr>
+            <a:spLocks noGrp="1"/>
+          </p:cNvSpPr>
+          <p:nvPr>
+            <p:ph type="sldNum" sz="quarter" idx="12"/>
+          </p:nvPr>
+        </p:nvSpPr>
+        <p:spPr/>
+        <p:txBody>
+          <a:bodyPr/>
+          <a:lstStyle/>
+          <a:p>
+            <a:fld id="{C74F4156-15F0-4830-8EB5-3206A1B7E9DA}" type="slidenum">
+              <a:rPr lang="de-DE" smtClean="0"/>
+              <a:t>‹Nr.›</a:t>
+            </a:fld>
+            <a:endParaRPr lang="de-DE"/>
+          </a:p>
+        </p:txBody>
+      </p:sp>
+    </p:spTree>
+    <p:extLst>
+      <p:ext uri="{BB962C8B-B14F-4D97-AF65-F5344CB8AC3E}">
+        <p14:creationId xmlns:p14="http://schemas.microsoft.com/office/powerpoint/2010/main" val="3483992217"/>
+      </p:ext>
+    </p:extLst>
+  </p:cSld>
+  <p:clrMapOvr>
+    <a:masterClrMapping/>
+  </p:clrMapOvr>
+</p:sldLayout>
+</file>
+
+<file path=ppt/slideLayouts/slideLayout5.xml><?xml version="1.0" encoding="utf-8"?>
+<p:sldLayout xmlns:a="http://schemas.openxmlformats.org/drawingml/2006/main" xmlns:r="http://schemas.openxmlformats.org/officeDocument/2006/relationships" xmlns:p="http://schemas.openxmlformats.org/presentationml/2006/main" type="twoTxTwoObj" preserve="1">
+  <p:cSld name="Vergleich">
+    <p:spTree>
+      <p:nvGrpSpPr>
+        <p:cNvPr id="1" name=""/>
+        <p:cNvGrpSpPr/>
+        <p:nvPr/>
+      </p:nvGrpSpPr>
+      <p:grpSpPr>
+        <a:xfrm>
+          <a:off x="0" y="0"/>
+          <a:ext cx="0" cy="0"/>
+          <a:chOff x="0" y="0"/>
+          <a:chExt cx="0" cy="0"/>
+        </a:xfrm>
+      </p:grpSpPr>
+      <p:sp>
+        <p:nvSpPr>
+          <p:cNvPr id="2" name="Titel 1">
+            <a:extLst>
+              <a:ext uri="{FF2B5EF4-FFF2-40B4-BE49-F238E27FC236}">
+                <a16:creationId xmlns:a16="http://schemas.microsoft.com/office/drawing/2014/main" id="{D109D49E-9550-BECF-4EA1-DFEB0733607B}"/>
+              </a:ext>
+            </a:extLst>
+          </p:cNvPr>
+          <p:cNvSpPr>
+            <a:spLocks noGrp="1"/>
+          </p:cNvSpPr>
+          <p:nvPr>
+            <p:ph type="title"/>
+          </p:nvPr>
+        </p:nvSpPr>
+        <p:spPr>
+          <a:xfrm>
+            <a:off x="839788" y="365125"/>
+            <a:ext cx="10515600" cy="1325563"/>
+          </a:xfrm>
+        </p:spPr>
+        <p:txBody>
+          <a:bodyPr/>
+          <a:lstStyle/>
+          <a:p>
+            <a:r>
+              <a:rPr lang="de-DE"/>
+              <a:t>Mastertitelformat bearbeiten</a:t>
+            </a:r>
+          </a:p>
+        </p:txBody>
+      </p:sp>
+      <p:sp>
+        <p:nvSpPr>
+          <p:cNvPr id="3" name="Textplatzhalter 2">
+            <a:extLst>
+              <a:ext uri="{FF2B5EF4-FFF2-40B4-BE49-F238E27FC236}">
+                <a16:creationId xmlns:a16="http://schemas.microsoft.com/office/drawing/2014/main" id="{A4A28A71-2F8F-05C7-E7D9-C9EFDCA5BEDD}"/>
+              </a:ext>
+            </a:extLst>
+          </p:cNvPr>
+          <p:cNvSpPr>
+            <a:spLocks noGrp="1"/>
+          </p:cNvSpPr>
+          <p:nvPr>
+            <p:ph type="body" idx="1"/>
+          </p:nvPr>
+        </p:nvSpPr>
+        <p:spPr>
+          <a:xfrm>
+            <a:off x="839788" y="1681163"/>
+            <a:ext cx="5157787" cy="823912"/>
+          </a:xfrm>
+        </p:spPr>
+        <p:txBody>
+          <a:bodyPr anchor="b"/>
+          <a:lstStyle>
+            <a:lvl1pPr marL="0" indent="0">
+              <a:buNone/>
+              <a:defRPr sz="2400" b="1"/>
+            </a:lvl1pPr>
+            <a:lvl2pPr marL="457200" indent="0">
+              <a:buNone/>
+              <a:defRPr sz="2000" b="1"/>
+            </a:lvl2pPr>
+            <a:lvl3pPr marL="914400" indent="0">
+              <a:buNone/>
+              <a:defRPr sz="1800" b="1"/>
+            </a:lvl3pPr>
+            <a:lvl4pPr marL="1371600" indent="0">
+              <a:buNone/>
+              <a:defRPr sz="1600" b="1"/>
+            </a:lvl4pPr>
+            <a:lvl5pPr marL="1828800" indent="0">
+              <a:buNone/>
+              <a:defRPr sz="1600" b="1"/>
+            </a:lvl5pPr>
+            <a:lvl6pPr marL="2286000" indent="0">
+              <a:buNone/>
+              <a:defRPr sz="1600" b="1"/>
+            </a:lvl6pPr>
+            <a:lvl7pPr marL="2743200" indent="0">
+              <a:buNone/>
+              <a:defRPr sz="1600" b="1"/>
+            </a:lvl7pPr>
+            <a:lvl8pPr marL="3200400" indent="0">
+              <a:buNone/>
+              <a:defRPr sz="1600" b="1"/>
+            </a:lvl8pPr>
+            <a:lvl9pPr marL="3657600" indent="0">
+              <a:buNone/>
+              <a:defRPr sz="1600" b="1"/>
+            </a:lvl9pPr>
+          </a:lstStyle>
+          <a:p>
+            <a:pPr lvl="0"/>
+            <a:r>
+              <a:rPr lang="de-DE"/>
+              <a:t>Mastertextformat bearbeiten</a:t>
+            </a:r>
+          </a:p>
+        </p:txBody>
+      </p:sp>
+      <p:sp>
+        <p:nvSpPr>
+          <p:cNvPr id="4" name="Inhaltsplatzhalter 3">
+            <a:extLst>
+              <a:ext uri="{FF2B5EF4-FFF2-40B4-BE49-F238E27FC236}">
+                <a16:creationId xmlns:a16="http://schemas.microsoft.com/office/drawing/2014/main" id="{97246C7A-35E8-FE3E-8A61-4C57F0824B9A}"/>
+              </a:ext>
+            </a:extLst>
+          </p:cNvPr>
+          <p:cNvSpPr>
+            <a:spLocks noGrp="1"/>
+          </p:cNvSpPr>
+          <p:nvPr>
+            <p:ph sz="half" idx="2"/>
+          </p:nvPr>
+        </p:nvSpPr>
+        <p:spPr>
+          <a:xfrm>
+            <a:off x="839788" y="2505075"/>
+            <a:ext cx="5157787" cy="3684588"/>
+          </a:xfrm>
+        </p:spPr>
+        <p:txBody>
+          <a:bodyPr/>
+          <a:lstStyle/>
+          <a:p>
+            <a:pPr lvl="0"/>
+            <a:r>
+              <a:rPr lang="de-DE"/>
+              <a:t>Mastertextformat bearbeiten</a:t>
+            </a:r>
+          </a:p>
+          <a:p>
+            <a:pPr lvl="1"/>
+            <a:r>
+              <a:rPr lang="de-DE"/>
+              <a:t>Zweite Ebene</a:t>
+            </a:r>
+          </a:p>
+          <a:p>
+            <a:pPr lvl="2"/>
+            <a:r>
+              <a:rPr lang="de-DE"/>
+              <a:t>Dritte Ebene</a:t>
+            </a:r>
+          </a:p>
+          <a:p>
+            <a:pPr lvl="3"/>
+            <a:r>
+              <a:rPr lang="de-DE"/>
+              <a:t>Vierte Ebene</a:t>
+            </a:r>
+          </a:p>
+          <a:p>
+            <a:pPr lvl="4"/>
+            <a:r>
+              <a:rPr lang="de-DE"/>
+              <a:t>Fünfte Ebene</a:t>
+            </a:r>
+          </a:p>
+        </p:txBody>
+      </p:sp>
+      <p:sp>
+        <p:nvSpPr>
+          <p:cNvPr id="5" name="Textplatzhalter 4">
+            <a:extLst>
+              <a:ext uri="{FF2B5EF4-FFF2-40B4-BE49-F238E27FC236}">
+                <a16:creationId xmlns:a16="http://schemas.microsoft.com/office/drawing/2014/main" id="{47F58D0F-39C3-458D-7E72-851CBE0E2EAA}"/>
+              </a:ext>
+            </a:extLst>
+          </p:cNvPr>
+          <p:cNvSpPr>
+            <a:spLocks noGrp="1"/>
+          </p:cNvSpPr>
+          <p:nvPr>
+            <p:ph type="body" sz="quarter" idx="3"/>
+          </p:nvPr>
+        </p:nvSpPr>
+        <p:spPr>
+          <a:xfrm>
+            <a:off x="6172200" y="1681163"/>
+            <a:ext cx="5183188" cy="823912"/>
+          </a:xfrm>
+        </p:spPr>
+        <p:txBody>
+          <a:bodyPr anchor="b"/>
+          <a:lstStyle>
+            <a:lvl1pPr marL="0" indent="0">
+              <a:buNone/>
+              <a:defRPr sz="2400" b="1"/>
+            </a:lvl1pPr>
+            <a:lvl2pPr marL="457200" indent="0">
+              <a:buNone/>
+              <a:defRPr sz="2000" b="1"/>
+            </a:lvl2pPr>
+            <a:lvl3pPr marL="914400" indent="0">
+              <a:buNone/>
+              <a:defRPr sz="1800" b="1"/>
+            </a:lvl3pPr>
+            <a:lvl4pPr marL="1371600" indent="0">
+              <a:buNone/>
+              <a:defRPr sz="1600" b="1"/>
+            </a:lvl4pPr>
+            <a:lvl5pPr marL="1828800" indent="0">
+              <a:buNone/>
+              <a:defRPr sz="1600" b="1"/>
+            </a:lvl5pPr>
+            <a:lvl6pPr marL="2286000" indent="0">
+              <a:buNone/>
+              <a:defRPr sz="1600" b="1"/>
+            </a:lvl6pPr>
+            <a:lvl7pPr marL="2743200" indent="0">
+              <a:buNone/>
+              <a:defRPr sz="1600" b="1"/>
+            </a:lvl7pPr>
+            <a:lvl8pPr marL="3200400" indent="0">
+              <a:buNone/>
+              <a:defRPr sz="1600" b="1"/>
+            </a:lvl8pPr>
+            <a:lvl9pPr marL="3657600" indent="0">
+              <a:buNone/>
+              <a:defRPr sz="1600" b="1"/>
+            </a:lvl9pPr>
+          </a:lstStyle>
+          <a:p>
+            <a:pPr lvl="0"/>
+            <a:r>
+              <a:rPr lang="de-DE"/>
+              <a:t>Mastertextformat bearbeiten</a:t>
+            </a:r>
+          </a:p>
+        </p:txBody>
+      </p:sp>
+      <p:sp>
+        <p:nvSpPr>
+          <p:cNvPr id="6" name="Inhaltsplatzhalter 5">
+            <a:extLst>
+              <a:ext uri="{FF2B5EF4-FFF2-40B4-BE49-F238E27FC236}">
+                <a16:creationId xmlns:a16="http://schemas.microsoft.com/office/drawing/2014/main" id="{149A1CE7-B640-F6BA-272C-AA5C671D67FB}"/>
+              </a:ext>
+            </a:extLst>
+          </p:cNvPr>
+          <p:cNvSpPr>
+            <a:spLocks noGrp="1"/>
+          </p:cNvSpPr>
+          <p:nvPr>
+            <p:ph sz="quarter" idx="4"/>
+          </p:nvPr>
+        </p:nvSpPr>
+        <p:spPr>
+          <a:xfrm>
+            <a:off x="6172200" y="2505075"/>
+            <a:ext cx="5183188" cy="3684588"/>
+          </a:xfrm>
+        </p:spPr>
+        <p:txBody>
+          <a:bodyPr/>
+          <a:lstStyle/>
+          <a:p>
+            <a:pPr lvl="0"/>
+            <a:r>
+              <a:rPr lang="de-DE"/>
+              <a:t>Mastertextformat bearbeiten</a:t>
+            </a:r>
+          </a:p>
+          <a:p>
+            <a:pPr lvl="1"/>
+            <a:r>
+              <a:rPr lang="de-DE"/>
+              <a:t>Zweite Ebene</a:t>
+            </a:r>
+          </a:p>
+          <a:p>
+            <a:pPr lvl="2"/>
+            <a:r>
+              <a:rPr lang="de-DE"/>
+              <a:t>Dritte Ebene</a:t>
+            </a:r>
+          </a:p>
+          <a:p>
+            <a:pPr lvl="3"/>
+            <a:r>
+              <a:rPr lang="de-DE"/>
+              <a:t>Vierte Ebene</a:t>
+            </a:r>
+          </a:p>
+          <a:p>
+            <a:pPr lvl="4"/>
+            <a:r>
+              <a:rPr lang="de-DE"/>
+              <a:t>Fünfte Ebene</a:t>
+            </a:r>
+          </a:p>
+        </p:txBody>
+      </p:sp>
+      <p:sp>
+        <p:nvSpPr>
+          <p:cNvPr id="7" name="Datumsplatzhalter 6">
+            <a:extLst>
+              <a:ext uri="{FF2B5EF4-FFF2-40B4-BE49-F238E27FC236}">
+                <a16:creationId xmlns:a16="http://schemas.microsoft.com/office/drawing/2014/main" id="{6C4F4183-FCCB-5EFD-7054-56DA7C45A57A}"/>
+              </a:ext>
+            </a:extLst>
+          </p:cNvPr>
+          <p:cNvSpPr>
+            <a:spLocks noGrp="1"/>
+          </p:cNvSpPr>
+          <p:nvPr>
+            <p:ph type="dt" sz="half" idx="10"/>
+          </p:nvPr>
+        </p:nvSpPr>
+        <p:spPr/>
+        <p:txBody>
+          <a:bodyPr/>
+          <a:lstStyle/>
+          <a:p>
+            <a:fld id="{96DA8C75-A467-416A-B374-E97E5CF82461}" type="datetimeFigureOut">
+              <a:rPr lang="de-DE" smtClean="0"/>
+              <a:t>23.07.2026</a:t>
+            </a:fld>
+            <a:endParaRPr lang="de-DE"/>
+          </a:p>
+        </p:txBody>
+      </p:sp>
+      <p:sp>
+        <p:nvSpPr>
+          <p:cNvPr id="8" name="Fußzeilenplatzhalter 7">
+            <a:extLst>
+              <a:ext uri="{FF2B5EF4-FFF2-40B4-BE49-F238E27FC236}">
+                <a16:creationId xmlns:a16="http://schemas.microsoft.com/office/drawing/2014/main" id="{0992EC90-C786-9DF7-456D-89F694A27130}"/>
+              </a:ext>
+            </a:extLst>
+          </p:cNvPr>
+          <p:cNvSpPr>
+            <a:spLocks noGrp="1"/>
+          </p:cNvSpPr>
+          <p:nvPr>
+            <p:ph type="ftr" sz="quarter" idx="11"/>
+          </p:nvPr>
+        </p:nvSpPr>
+        <p:spPr/>
+        <p:txBody>
+          <a:bodyPr/>
+          <a:lstStyle/>
+          <a:p>
+            <a:endParaRPr lang="de-DE"/>
+          </a:p>
+        </p:txBody>
+      </p:sp>
+      <p:sp>
+        <p:nvSpPr>
+          <p:cNvPr id="9" name="Foliennummernplatzhalter 8">
+            <a:extLst>
+              <a:ext uri="{FF2B5EF4-FFF2-40B4-BE49-F238E27FC236}">
+                <a16:creationId xmlns:a16="http://schemas.microsoft.com/office/drawing/2014/main" id="{51498CF0-0A03-A01D-CA39-7F192438AAFD}"/>
+              </a:ext>
+            </a:extLst>
+          </p:cNvPr>
+          <p:cNvSpPr>
+            <a:spLocks noGrp="1"/>
+          </p:cNvSpPr>
+          <p:nvPr>
+            <p:ph type="sldNum" sz="quarter" idx="12"/>
+          </p:nvPr>
+        </p:nvSpPr>
+        <p:spPr/>
+        <p:txBody>
+          <a:bodyPr/>
+          <a:lstStyle/>
+          <a:p>
+            <a:fld id="{C74F4156-15F0-4830-8EB5-3206A1B7E9DA}" type="slidenum">
+              <a:rPr lang="de-DE" smtClean="0"/>
+              <a:t>‹Nr.›</a:t>
+            </a:fld>
+            <a:endParaRPr lang="de-DE"/>
+          </a:p>
+        </p:txBody>
+      </p:sp>
+    </p:spTree>
+    <p:extLst>
+      <p:ext uri="{BB962C8B-B14F-4D97-AF65-F5344CB8AC3E}">
+        <p14:creationId xmlns:p14="http://schemas.microsoft.com/office/powerpoint/2010/main" val="4205519675"/>
+      </p:ext>
+    </p:extLst>
+  </p:cSld>
+  <p:clrMapOvr>
+    <a:masterClrMapping/>
+  </p:clrMapOvr>
+</p:sldLayout>
+</file>
+
+<file path=ppt/slideLayouts/slideLayout6.xml><?xml version="1.0" encoding="utf-8"?>
+<p:sldLayout xmlns:a="http://schemas.openxmlformats.org/drawingml/2006/main" xmlns:r="http://schemas.openxmlformats.org/officeDocument/2006/relationships" xmlns:p="http://schemas.openxmlformats.org/presentationml/2006/main" type="titleOnly" preserve="1">
+  <p:cSld name="Nur Titel">
+    <p:spTree>
+      <p:nvGrpSpPr>
+        <p:cNvPr id="1" name=""/>
+        <p:cNvGrpSpPr/>
+        <p:nvPr/>
+      </p:nvGrpSpPr>
+      <p:grpSpPr>
+        <a:xfrm>
+          <a:off x="0" y="0"/>
+          <a:ext cx="0" cy="0"/>
+          <a:chOff x="0" y="0"/>
+          <a:chExt cx="0" cy="0"/>
+        </a:xfrm>
+      </p:grpSpPr>
+      <p:sp>
+        <p:nvSpPr>
+          <p:cNvPr id="2" name="Titel 1">
+            <a:extLst>
+              <a:ext uri="{FF2B5EF4-FFF2-40B4-BE49-F238E27FC236}">
+                <a16:creationId xmlns:a16="http://schemas.microsoft.com/office/drawing/2014/main" id="{9624D286-2612-2676-958A-636DEAC54D39}"/>
+              </a:ext>
+            </a:extLst>
+          </p:cNvPr>
+          <p:cNvSpPr>
+            <a:spLocks noGrp="1"/>
+          </p:cNvSpPr>
+          <p:nvPr>
+            <p:ph type="title"/>
+          </p:nvPr>
+        </p:nvSpPr>
+        <p:spPr/>
+        <p:txBody>
+          <a:bodyPr/>
+          <a:lstStyle/>
+          <a:p>
+            <a:r>
+              <a:rPr lang="de-DE"/>
+              <a:t>Mastertitelformat bearbeiten</a:t>
+            </a:r>
+          </a:p>
+        </p:txBody>
+      </p:sp>
+      <p:sp>
+        <p:nvSpPr>
+          <p:cNvPr id="3" name="Datumsplatzhalter 2">
+            <a:extLst>
+              <a:ext uri="{FF2B5EF4-FFF2-40B4-BE49-F238E27FC236}">
+                <a16:creationId xmlns:a16="http://schemas.microsoft.com/office/drawing/2014/main" id="{E3A16EE8-9C3D-10D1-2593-FDE8D09743C7}"/>
+              </a:ext>
+            </a:extLst>
+          </p:cNvPr>
+          <p:cNvSpPr>
+            <a:spLocks noGrp="1"/>
+          </p:cNvSpPr>
+          <p:nvPr>
+            <p:ph type="dt" sz="half" idx="10"/>
+          </p:nvPr>
+        </p:nvSpPr>
+        <p:spPr/>
+        <p:txBody>
+          <a:bodyPr/>
+          <a:lstStyle/>
+          <a:p>
+            <a:fld id="{96DA8C75-A467-416A-B374-E97E5CF82461}" type="datetimeFigureOut">
+              <a:rPr lang="de-DE" smtClean="0"/>
+              <a:t>23.07.2026</a:t>
+            </a:fld>
+            <a:endParaRPr lang="de-DE"/>
+          </a:p>
+        </p:txBody>
+      </p:sp>
+      <p:sp>
+        <p:nvSpPr>
+          <p:cNvPr id="4" name="Fußzeilenplatzhalter 3">
+            <a:extLst>
+              <a:ext uri="{FF2B5EF4-FFF2-40B4-BE49-F238E27FC236}">
+                <a16:creationId xmlns:a16="http://schemas.microsoft.com/office/drawing/2014/main" id="{79C41F5A-AC32-3306-ABB9-F7A1D33910A9}"/>
+              </a:ext>
+            </a:extLst>
+          </p:cNvPr>
+          <p:cNvSpPr>
+            <a:spLocks noGrp="1"/>
+          </p:cNvSpPr>
+          <p:nvPr>
+            <p:ph type="ftr" sz="quarter" idx="11"/>
+          </p:nvPr>
+        </p:nvSpPr>
+        <p:spPr/>
+        <p:txBody>
+          <a:bodyPr/>
+          <a:lstStyle/>
+          <a:p>
+            <a:endParaRPr lang="de-DE"/>
+          </a:p>
+        </p:txBody>
+      </p:sp>
+      <p:sp>
+        <p:nvSpPr>
+          <p:cNvPr id="5" name="Foliennummernplatzhalter 4">
+            <a:extLst>
+              <a:ext uri="{FF2B5EF4-FFF2-40B4-BE49-F238E27FC236}">
+                <a16:creationId xmlns:a16="http://schemas.microsoft.com/office/drawing/2014/main" id="{8F8F6230-BD04-5F20-F267-7DB921A02CFF}"/>
+              </a:ext>
+            </a:extLst>
+          </p:cNvPr>
+          <p:cNvSpPr>
+            <a:spLocks noGrp="1"/>
+          </p:cNvSpPr>
+          <p:nvPr>
+            <p:ph type="sldNum" sz="quarter" idx="12"/>
+          </p:nvPr>
+        </p:nvSpPr>
+        <p:spPr/>
+        <p:txBody>
+          <a:bodyPr/>
+          <a:lstStyle/>
+          <a:p>
+            <a:fld id="{C74F4156-15F0-4830-8EB5-3206A1B7E9DA}" type="slidenum">
+              <a:rPr lang="de-DE" smtClean="0"/>
+              <a:t>‹Nr.›</a:t>
+            </a:fld>
+            <a:endParaRPr lang="de-DE"/>
+          </a:p>
+        </p:txBody>
+      </p:sp>
+    </p:spTree>
+    <p:extLst>
+      <p:ext uri="{BB962C8B-B14F-4D97-AF65-F5344CB8AC3E}">
+        <p14:creationId xmlns:p14="http://schemas.microsoft.com/office/powerpoint/2010/main" val="3892674344"/>
+      </p:ext>
+    </p:extLst>
+  </p:cSld>
+  <p:clrMapOvr>
+    <a:masterClrMapping/>
+  </p:clrMapOvr>
+</p:sldLayout>
+</file>
+
+<file path=ppt/slideLayouts/slideLayout7.xml><?xml version="1.0" encoding="utf-8"?>
+<p:sldLayout xmlns:a="http://schemas.openxmlformats.org/drawingml/2006/main" xmlns:r="http://schemas.openxmlformats.org/officeDocument/2006/relationships" xmlns:p="http://schemas.openxmlformats.org/presentationml/2006/main" type="blank" preserve="1">
+  <p:cSld name="Leer">
+    <p:spTree>
+      <p:nvGrpSpPr>
+        <p:cNvPr id="1" name=""/>
+        <p:cNvGrpSpPr/>
+        <p:nvPr/>
+      </p:nvGrpSpPr>
+      <p:grpSpPr>
+        <a:xfrm>
+          <a:off x="0" y="0"/>
+          <a:ext cx="0" cy="0"/>
+          <a:chOff x="0" y="0"/>
+          <a:chExt cx="0" cy="0"/>
+        </a:xfrm>
+      </p:grpSpPr>
+      <p:sp>
+        <p:nvSpPr>
+          <p:cNvPr id="2" name="Datumsplatzhalter 1">
+            <a:extLst>
+              <a:ext uri="{FF2B5EF4-FFF2-40B4-BE49-F238E27FC236}">
+                <a16:creationId xmlns:a16="http://schemas.microsoft.com/office/drawing/2014/main" id="{0BF366B7-81A3-7E2E-69BE-29B817176153}"/>
+              </a:ext>
+            </a:extLst>
+          </p:cNvPr>
+          <p:cNvSpPr>
+            <a:spLocks noGrp="1"/>
+          </p:cNvSpPr>
+          <p:nvPr>
+            <p:ph type="dt" sz="half" idx="10"/>
+          </p:nvPr>
+        </p:nvSpPr>
+        <p:spPr/>
+        <p:txBody>
+          <a:bodyPr/>
+          <a:lstStyle/>
+          <a:p>
+            <a:fld id="{96DA8C75-A467-416A-B374-E97E5CF82461}" type="datetimeFigureOut">
+              <a:rPr lang="de-DE" smtClean="0"/>
+              <a:t>23.07.2026</a:t>
+            </a:fld>
+            <a:endParaRPr lang="de-DE"/>
+          </a:p>
+        </p:txBody>
+      </p:sp>
+      <p:sp>
+        <p:nvSpPr>
+          <p:cNvPr id="3" name="Fußzeilenplatzhalter 2">
+            <a:extLst>
+              <a:ext uri="{FF2B5EF4-FFF2-40B4-BE49-F238E27FC236}">
+                <a16:creationId xmlns:a16="http://schemas.microsoft.com/office/drawing/2014/main" id="{7B8AB019-0F5C-8F14-85A5-247B261C8102}"/>
+              </a:ext>
+            </a:extLst>
+          </p:cNvPr>
+          <p:cNvSpPr>
+            <a:spLocks noGrp="1"/>
+          </p:cNvSpPr>
+          <p:nvPr>
+            <p:ph type="ftr" sz="quarter" idx="11"/>
+          </p:nvPr>
+        </p:nvSpPr>
+        <p:spPr/>
+        <p:txBody>
+          <a:bodyPr/>
+          <a:lstStyle/>
+          <a:p>
+            <a:endParaRPr lang="de-DE"/>
+          </a:p>
+        </p:txBody>
+      </p:sp>
+      <p:sp>
+        <p:nvSpPr>
+          <p:cNvPr id="4" name="Foliennummernplatzhalter 3">
+            <a:extLst>
+              <a:ext uri="{FF2B5EF4-FFF2-40B4-BE49-F238E27FC236}">
+                <a16:creationId xmlns:a16="http://schemas.microsoft.com/office/drawing/2014/main" id="{6DE83D03-3C0A-3D96-81B2-8EEF96277530}"/>
+              </a:ext>
+            </a:extLst>
+          </p:cNvPr>
+          <p:cNvSpPr>
+            <a:spLocks noGrp="1"/>
+          </p:cNvSpPr>
+          <p:nvPr>
+            <p:ph type="sldNum" sz="quarter" idx="12"/>
+          </p:nvPr>
+        </p:nvSpPr>
+        <p:spPr/>
+        <p:txBody>
+          <a:bodyPr/>
+          <a:lstStyle/>
+          <a:p>
+            <a:fld id="{C74F4156-15F0-4830-8EB5-3206A1B7E9DA}" type="slidenum">
+              <a:rPr lang="de-DE" smtClean="0"/>
+              <a:t>‹Nr.›</a:t>
+            </a:fld>
+            <a:endParaRPr lang="de-DE"/>
+          </a:p>
+        </p:txBody>
+      </p:sp>
+    </p:spTree>
+    <p:extLst>
+      <p:ext uri="{BB962C8B-B14F-4D97-AF65-F5344CB8AC3E}">
+        <p14:creationId xmlns:p14="http://schemas.microsoft.com/office/powerpoint/2010/main" val="567306326"/>
+      </p:ext>
+    </p:extLst>
+  </p:cSld>
+  <p:clrMapOvr>
+    <a:masterClrMapping/>
+  </p:clrMapOvr>
+</p:sldLayout>
+</file>
+
+<file path=ppt/slideLayouts/slideLayout8.xml><?xml version="1.0" encoding="utf-8"?>
+<p:sldLayout xmlns:a="http://schemas.openxmlformats.org/drawingml/2006/main" xmlns:r="http://schemas.openxmlformats.org/officeDocument/2006/relationships" xmlns:p="http://schemas.openxmlformats.org/presentationml/2006/main" type="objTx" preserve="1">
+  <p:cSld name="Inhalt mit Überschrift">
+    <p:spTree>
+      <p:nvGrpSpPr>
+        <p:cNvPr id="1" name=""/>
+        <p:cNvGrpSpPr/>
+        <p:nvPr/>
+      </p:nvGrpSpPr>
+      <p:grpSpPr>
+        <a:xfrm>
+          <a:off x="0" y="0"/>
+          <a:ext cx="0" cy="0"/>
+          <a:chOff x="0" y="0"/>
+          <a:chExt cx="0" cy="0"/>
+        </a:xfrm>
+      </p:grpSpPr>
+      <p:sp>
+        <p:nvSpPr>
+          <p:cNvPr id="2" name="Titel 1">
+            <a:extLst>
+              <a:ext uri="{FF2B5EF4-FFF2-40B4-BE49-F238E27FC236}">
+                <a16:creationId xmlns:a16="http://schemas.microsoft.com/office/drawing/2014/main" id="{8D0EA9D6-FB57-F007-E28D-B47A9360137E}"/>
+              </a:ext>
+            </a:extLst>
+          </p:cNvPr>
+          <p:cNvSpPr>
+            <a:spLocks noGrp="1"/>
+          </p:cNvSpPr>
+          <p:nvPr>
+            <p:ph type="title"/>
+          </p:nvPr>
+        </p:nvSpPr>
+        <p:spPr>
+          <a:xfrm>
+            <a:off x="839788" y="457200"/>
+            <a:ext cx="3932237" cy="1600200"/>
+          </a:xfrm>
+        </p:spPr>
+        <p:txBody>
+          <a:bodyPr anchor="b"/>
+          <a:lstStyle>
+            <a:lvl1pPr>
+              <a:defRPr sz="3200"/>
+            </a:lvl1pPr>
+          </a:lstStyle>
+          <a:p>
+            <a:r>
+              <a:rPr lang="de-DE"/>
+              <a:t>Mastertitelformat bearbeiten</a:t>
+            </a:r>
+          </a:p>
+        </p:txBody>
+      </p:sp>
+      <p:sp>
+        <p:nvSpPr>
+          <p:cNvPr id="3" name="Inhaltsplatzhalter 2">
+            <a:extLst>
+              <a:ext uri="{FF2B5EF4-FFF2-40B4-BE49-F238E27FC236}">
+                <a16:creationId xmlns:a16="http://schemas.microsoft.com/office/drawing/2014/main" id="{79183C11-16A5-02CD-38D4-331AA8673F0F}"/>
+              </a:ext>
+            </a:extLst>
+          </p:cNvPr>
+          <p:cNvSpPr>
+            <a:spLocks noGrp="1"/>
+          </p:cNvSpPr>
+          <p:nvPr>
+            <p:ph idx="1"/>
+          </p:nvPr>
+        </p:nvSpPr>
+        <p:spPr>
+          <a:xfrm>
+            <a:off x="5183188" y="987425"/>
+            <a:ext cx="6172200" cy="4873625"/>
+          </a:xfrm>
+        </p:spPr>
+        <p:txBody>
+          <a:bodyPr/>
+          <a:lstStyle>
+            <a:lvl1pPr>
+              <a:defRPr sz="3200"/>
+            </a:lvl1pPr>
+            <a:lvl2pPr>
+              <a:defRPr sz="2800"/>
+            </a:lvl2pPr>
+            <a:lvl3pPr>
+              <a:defRPr sz="2400"/>
+            </a:lvl3pPr>
+            <a:lvl4pPr>
+              <a:defRPr sz="2000"/>
+            </a:lvl4pPr>
+            <a:lvl5pPr>
+              <a:defRPr sz="2000"/>
+            </a:lvl5pPr>
+            <a:lvl6pPr>
+              <a:defRPr sz="2000"/>
+            </a:lvl6pPr>
+            <a:lvl7pPr>
+              <a:defRPr sz="2000"/>
+            </a:lvl7pPr>
+            <a:lvl8pPr>
+              <a:defRPr sz="2000"/>
+            </a:lvl8pPr>
+            <a:lvl9pPr>
+              <a:defRPr sz="2000"/>
+            </a:lvl9pPr>
+          </a:lstStyle>
+          <a:p>
+            <a:pPr lvl="0"/>
+            <a:r>
+              <a:rPr lang="de-DE"/>
+              <a:t>Mastertextformat bearbeiten</a:t>
+            </a:r>
+          </a:p>
+          <a:p>
+            <a:pPr lvl="1"/>
+            <a:r>
+              <a:rPr lang="de-DE"/>
+              <a:t>Zweite Ebene</a:t>
+            </a:r>
+          </a:p>
+          <a:p>
+            <a:pPr lvl="2"/>
+            <a:r>
+              <a:rPr lang="de-DE"/>
+              <a:t>Dritte Ebene</a:t>
+            </a:r>
+          </a:p>
+          <a:p>
+            <a:pPr lvl="3"/>
+            <a:r>
+              <a:rPr lang="de-DE"/>
+              <a:t>Vierte Ebene</a:t>
+            </a:r>
+          </a:p>
+          <a:p>
+            <a:pPr lvl="4"/>
+            <a:r>
+              <a:rPr lang="de-DE"/>
+              <a:t>Fünfte Ebene</a:t>
+            </a:r>
+          </a:p>
+        </p:txBody>
+      </p:sp>
+      <p:sp>
+        <p:nvSpPr>
+          <p:cNvPr id="4" name="Textplatzhalter 3">
+            <a:extLst>
+              <a:ext uri="{FF2B5EF4-FFF2-40B4-BE49-F238E27FC236}">
+                <a16:creationId xmlns:a16="http://schemas.microsoft.com/office/drawing/2014/main" id="{1D4D0615-0D51-F75D-1662-97F01AAD7C6B}"/>
+              </a:ext>
+            </a:extLst>
+          </p:cNvPr>
+          <p:cNvSpPr>
+            <a:spLocks noGrp="1"/>
+          </p:cNvSpPr>
+          <p:nvPr>
+            <p:ph type="body" sz="half" idx="2"/>
+          </p:nvPr>
+        </p:nvSpPr>
+        <p:spPr>
+          <a:xfrm>
+            <a:off x="839788" y="2057400"/>
+            <a:ext cx="3932237" cy="3811588"/>
+          </a:xfrm>
+        </p:spPr>
+        <p:txBody>
+          <a:bodyPr/>
+          <a:lstStyle>
+            <a:lvl1pPr marL="0" indent="0">
+              <a:buNone/>
+              <a:defRPr sz="1600"/>
+            </a:lvl1pPr>
+            <a:lvl2pPr marL="457200" indent="0">
+              <a:buNone/>
+              <a:defRPr sz="1400"/>
+            </a:lvl2pPr>
+            <a:lvl3pPr marL="914400" indent="0">
+              <a:buNone/>
+              <a:defRPr sz="1200"/>
+            </a:lvl3pPr>
+            <a:lvl4pPr marL="1371600" indent="0">
+              <a:buNone/>
+              <a:defRPr sz="1000"/>
+            </a:lvl4pPr>
+            <a:lvl5pPr marL="1828800" indent="0">
+              <a:buNone/>
+              <a:defRPr sz="1000"/>
+            </a:lvl5pPr>
+            <a:lvl6pPr marL="2286000" indent="0">
+              <a:buNone/>
+              <a:defRPr sz="1000"/>
+            </a:lvl6pPr>
+            <a:lvl7pPr marL="2743200" indent="0">
+              <a:buNone/>
+              <a:defRPr sz="1000"/>
+            </a:lvl7pPr>
+            <a:lvl8pPr marL="3200400" indent="0">
+              <a:buNone/>
+              <a:defRPr sz="1000"/>
+            </a:lvl8pPr>
+            <a:lvl9pPr marL="3657600" indent="0">
+              <a:buNone/>
+              <a:defRPr sz="1000"/>
+            </a:lvl9pPr>
+          </a:lstStyle>
+          <a:p>
+            <a:pPr lvl="0"/>
+            <a:r>
+              <a:rPr lang="de-DE"/>
+              <a:t>Mastertextformat bearbeiten</a:t>
+            </a:r>
+          </a:p>
+        </p:txBody>
+      </p:sp>
+      <p:sp>
+        <p:nvSpPr>
+          <p:cNvPr id="5" name="Datumsplatzhalter 4">
+            <a:extLst>
+              <a:ext uri="{FF2B5EF4-FFF2-40B4-BE49-F238E27FC236}">
+                <a16:creationId xmlns:a16="http://schemas.microsoft.com/office/drawing/2014/main" id="{F0610F82-BCC4-54BE-7F67-EEFD777882DB}"/>
+              </a:ext>
+            </a:extLst>
+          </p:cNvPr>
+          <p:cNvSpPr>
+            <a:spLocks noGrp="1"/>
+          </p:cNvSpPr>
+          <p:nvPr>
+            <p:ph type="dt" sz="half" idx="10"/>
+          </p:nvPr>
+        </p:nvSpPr>
+        <p:spPr/>
+        <p:txBody>
+          <a:bodyPr/>
+          <a:lstStyle/>
+          <a:p>
+            <a:fld id="{96DA8C75-A467-416A-B374-E97E5CF82461}" type="datetimeFigureOut">
+              <a:rPr lang="de-DE" smtClean="0"/>
+              <a:t>23.07.2026</a:t>
+            </a:fld>
+            <a:endParaRPr lang="de-DE"/>
+          </a:p>
+        </p:txBody>
+      </p:sp>
+      <p:sp>
+        <p:nvSpPr>
+          <p:cNvPr id="6" name="Fußzeilenplatzhalter 5">
+            <a:extLst>
+              <a:ext uri="{FF2B5EF4-FFF2-40B4-BE49-F238E27FC236}">
+                <a16:creationId xmlns:a16="http://schemas.microsoft.com/office/drawing/2014/main" id="{D761870B-0D02-23BE-C444-4FE7EB57E09E}"/>
+              </a:ext>
+            </a:extLst>
+          </p:cNvPr>
+          <p:cNvSpPr>
+            <a:spLocks noGrp="1"/>
+          </p:cNvSpPr>
+          <p:nvPr>
+            <p:ph type="ftr" sz="quarter" idx="11"/>
+          </p:nvPr>
+        </p:nvSpPr>
+        <p:spPr/>
+        <p:txBody>
+          <a:bodyPr/>
+          <a:lstStyle/>
+          <a:p>
+            <a:endParaRPr lang="de-DE"/>
+          </a:p>
+        </p:txBody>
+      </p:sp>
+      <p:sp>
+        <p:nvSpPr>
+          <p:cNvPr id="7" name="Foliennummernplatzhalter 6">
+            <a:extLst>
+              <a:ext uri="{FF2B5EF4-FFF2-40B4-BE49-F238E27FC236}">
+                <a16:creationId xmlns:a16="http://schemas.microsoft.com/office/drawing/2014/main" id="{47EFCDE7-BE72-08A8-D844-2F04ECAFF2B5}"/>
+              </a:ext>
+            </a:extLst>
+          </p:cNvPr>
+          <p:cNvSpPr>
+            <a:spLocks noGrp="1"/>
+          </p:cNvSpPr>
+          <p:nvPr>
+            <p:ph type="sldNum" sz="quarter" idx="12"/>
+          </p:nvPr>
+        </p:nvSpPr>
+        <p:spPr/>
+        <p:txBody>
+          <a:bodyPr/>
+          <a:lstStyle/>
+          <a:p>
+            <a:fld id="{C74F4156-15F0-4830-8EB5-3206A1B7E9DA}" type="slidenum">
+              <a:rPr lang="de-DE" smtClean="0"/>
+              <a:t>‹Nr.›</a:t>
+            </a:fld>
+            <a:endParaRPr lang="de-DE"/>
+          </a:p>
+        </p:txBody>
+      </p:sp>
+    </p:spTree>
+    <p:extLst>
+      <p:ext uri="{BB962C8B-B14F-4D97-AF65-F5344CB8AC3E}">
+        <p14:creationId xmlns:p14="http://schemas.microsoft.com/office/powerpoint/2010/main" val="4144702554"/>
+      </p:ext>
+    </p:extLst>
+  </p:cSld>
+  <p:clrMapOvr>
+    <a:masterClrMapping/>
+  </p:clrMapOvr>
+</p:sldLayout>
+</file>
+
+<file path=ppt/slideLayouts/slideLayout9.xml><?xml version="1.0" encoding="utf-8"?>
+<p:sldLayout xmlns:a="http://schemas.openxmlformats.org/drawingml/2006/main" xmlns:r="http://schemas.openxmlformats.org/officeDocument/2006/relationships" xmlns:p="http://schemas.openxmlformats.org/presentationml/2006/main" type="picTx" preserve="1">
+  <p:cSld name="Bild mit Überschrift">
+    <p:spTree>
+      <p:nvGrpSpPr>
+        <p:cNvPr id="1" name=""/>
+        <p:cNvGrpSpPr/>
+        <p:nvPr/>
+      </p:nvGrpSpPr>
+      <p:grpSpPr>
+        <a:xfrm>
+          <a:off x="0" y="0"/>
+          <a:ext cx="0" cy="0"/>
+          <a:chOff x="0" y="0"/>
+          <a:chExt cx="0" cy="0"/>
+        </a:xfrm>
+      </p:grpSpPr>
+      <p:sp>
+        <p:nvSpPr>
+          <p:cNvPr id="2" name="Titel 1">
+            <a:extLst>
+              <a:ext uri="{FF2B5EF4-FFF2-40B4-BE49-F238E27FC236}">
+                <a16:creationId xmlns:a16="http://schemas.microsoft.com/office/drawing/2014/main" id="{26B12888-F729-3F22-A14A-2AA4B634639E}"/>
+              </a:ext>
+            </a:extLst>
+          </p:cNvPr>
+          <p:cNvSpPr>
+            <a:spLocks noGrp="1"/>
+          </p:cNvSpPr>
+          <p:nvPr>
+            <p:ph type="title"/>
+          </p:nvPr>
+        </p:nvSpPr>
+        <p:spPr>
+          <a:xfrm>
+            <a:off x="839788" y="457200"/>
+            <a:ext cx="3932237" cy="1600200"/>
+          </a:xfrm>
+        </p:spPr>
+        <p:txBody>
+          <a:bodyPr anchor="b"/>
+          <a:lstStyle>
+            <a:lvl1pPr>
+              <a:defRPr sz="3200"/>
+            </a:lvl1pPr>
+          </a:lstStyle>
+          <a:p>
+            <a:r>
+              <a:rPr lang="de-DE"/>
+              <a:t>Mastertitelformat bearbeiten</a:t>
+            </a:r>
+          </a:p>
+        </p:txBody>
+      </p:sp>
+      <p:sp>
+        <p:nvSpPr>
+          <p:cNvPr id="3" name="Bildplatzhalter 2">
+            <a:extLst>
+              <a:ext uri="{FF2B5EF4-FFF2-40B4-BE49-F238E27FC236}">
+                <a16:creationId xmlns:a16="http://schemas.microsoft.com/office/drawing/2014/main" id="{5F3D230B-C330-6666-D5F7-5D777AA54607}"/>
+              </a:ext>
+            </a:extLst>
+          </p:cNvPr>
+          <p:cNvSpPr>
+            <a:spLocks noGrp="1"/>
+          </p:cNvSpPr>
+          <p:nvPr>
+            <p:ph type="pic" idx="1"/>
+          </p:nvPr>
+        </p:nvSpPr>
+        <p:spPr>
+          <a:xfrm>
+            <a:off x="5183188" y="987425"/>
+            <a:ext cx="6172200" cy="4873625"/>
+          </a:xfrm>
+        </p:spPr>
+        <p:txBody>
+          <a:bodyPr/>
+          <a:lstStyle>
+            <a:lvl1pPr marL="0" indent="0">
+              <a:buNone/>
+              <a:defRPr sz="3200"/>
+            </a:lvl1pPr>
+            <a:lvl2pPr marL="457200" indent="0">
+              <a:buNone/>
+              <a:defRPr sz="2800"/>
+            </a:lvl2pPr>
+            <a:lvl3pPr marL="914400" indent="0">
+              <a:buNone/>
+              <a:defRPr sz="2400"/>
+            </a:lvl3pPr>
+            <a:lvl4pPr marL="1371600" indent="0">
+              <a:buNone/>
+              <a:defRPr sz="2000"/>
+            </a:lvl4pPr>
+            <a:lvl5pPr marL="1828800" indent="0">
+              <a:buNone/>
+              <a:defRPr sz="2000"/>
+            </a:lvl5pPr>
+            <a:lvl6pPr marL="2286000" indent="0">
+              <a:buNone/>
+              <a:defRPr sz="2000"/>
+            </a:lvl6pPr>
+            <a:lvl7pPr marL="2743200" indent="0">
+              <a:buNone/>
+              <a:defRPr sz="2000"/>
+            </a:lvl7pPr>
+            <a:lvl8pPr marL="3200400" indent="0">
+              <a:buNone/>
+              <a:defRPr sz="2000"/>
+            </a:lvl8pPr>
+            <a:lvl9pPr marL="3657600" indent="0">
+              <a:buNone/>
+              <a:defRPr sz="2000"/>
+            </a:lvl9pPr>
+          </a:lstStyle>
+          <a:p>
+            <a:endParaRPr lang="de-DE"/>
+          </a:p>
+        </p:txBody>
+      </p:sp>
+      <p:sp>
+        <p:nvSpPr>
+          <p:cNvPr id="4" name="Textplatzhalter 3">
+            <a:extLst>
+              <a:ext uri="{FF2B5EF4-FFF2-40B4-BE49-F238E27FC236}">
+                <a16:creationId xmlns:a16="http://schemas.microsoft.com/office/drawing/2014/main" id="{D1B1ECB7-8C01-EF59-4539-03A1F8737CBB}"/>
+              </a:ext>
+            </a:extLst>
+          </p:cNvPr>
+          <p:cNvSpPr>
+            <a:spLocks noGrp="1"/>
+          </p:cNvSpPr>
+          <p:nvPr>
+            <p:ph type="body" sz="half" idx="2"/>
+          </p:nvPr>
+        </p:nvSpPr>
+        <p:spPr>
+          <a:xfrm>
+            <a:off x="839788" y="2057400"/>
+            <a:ext cx="3932237" cy="3811588"/>
+          </a:xfrm>
+        </p:spPr>
+        <p:txBody>
+          <a:bodyPr/>
+          <a:lstStyle>
+            <a:lvl1pPr marL="0" indent="0">
+              <a:buNone/>
+              <a:defRPr sz="1600"/>
+            </a:lvl1pPr>
+            <a:lvl2pPr marL="457200" indent="0">
+              <a:buNone/>
+              <a:defRPr sz="1400"/>
+            </a:lvl2pPr>
+            <a:lvl3pPr marL="914400" indent="0">
+              <a:buNone/>
+              <a:defRPr sz="1200"/>
+            </a:lvl3pPr>
+            <a:lvl4pPr marL="1371600" indent="0">
+              <a:buNone/>
+              <a:defRPr sz="1000"/>
+            </a:lvl4pPr>
+            <a:lvl5pPr marL="1828800" indent="0">
+              <a:buNone/>
+              <a:defRPr sz="1000"/>
+            </a:lvl5pPr>
+            <a:lvl6pPr marL="2286000" indent="0">
+              <a:buNone/>
+              <a:defRPr sz="1000"/>
+            </a:lvl6pPr>
+            <a:lvl7pPr marL="2743200" indent="0">
+              <a:buNone/>
+              <a:defRPr sz="1000"/>
+            </a:lvl7pPr>
+            <a:lvl8pPr marL="3200400" indent="0">
+              <a:buNone/>
+              <a:defRPr sz="1000"/>
+            </a:lvl8pPr>
+            <a:lvl9pPr marL="3657600" indent="0">
+              <a:buNone/>
+              <a:defRPr sz="1000"/>
+            </a:lvl9pPr>
+          </a:lstStyle>
+          <a:p>
+            <a:pPr lvl="0"/>
+            <a:r>
+              <a:rPr lang="de-DE"/>
+              <a:t>Mastertextformat bearbeiten</a:t>
+            </a:r>
+          </a:p>
+        </p:txBody>
+      </p:sp>
+      <p:sp>
+        <p:nvSpPr>
+          <p:cNvPr id="5" name="Datumsplatzhalter 4">
+            <a:extLst>
+              <a:ext uri="{FF2B5EF4-FFF2-40B4-BE49-F238E27FC236}">
+                <a16:creationId xmlns:a16="http://schemas.microsoft.com/office/drawing/2014/main" id="{73199629-100B-751E-40C2-38433C6F833B}"/>
+              </a:ext>
+            </a:extLst>
+          </p:cNvPr>
+          <p:cNvSpPr>
+            <a:spLocks noGrp="1"/>
+          </p:cNvSpPr>
+          <p:nvPr>
+            <p:ph type="dt" sz="half" idx="10"/>
+          </p:nvPr>
+        </p:nvSpPr>
+        <p:spPr/>
+        <p:txBody>
+          <a:bodyPr/>
+          <a:lstStyle/>
+          <a:p>
+            <a:fld id="{96DA8C75-A467-416A-B374-E97E5CF82461}" type="datetimeFigureOut">
+              <a:rPr lang="de-DE" smtClean="0"/>
+              <a:t>23.07.2026</a:t>
             </a:fld>
             <a:endParaRPr lang="de-DE"/>
           </a:p>
@@ -3146,7 +5777,7 @@
           <a:p>
             <a:fld id="{96DA8C75-A467-416A-B374-E97E5CF82461}" type="datetimeFigureOut">
               <a:rPr lang="de-DE" smtClean="0"/>
-              <a:t>02.07.2026</a:t>
+              <a:t>23.07.2026</a:t>
             </a:fld>
             <a:endParaRPr lang="de-DE"/>
           </a:p>
@@ -3546,6 +6177,623 @@
 </p:sldMaster>
 </file>
 
+<file path=ppt/slideMasters/slideMaster2.xml><?xml version="1.0" encoding="utf-8"?>
+<p:sldMaster xmlns:a="http://schemas.openxmlformats.org/drawingml/2006/main" xmlns:r="http://schemas.openxmlformats.org/officeDocument/2006/relationships" xmlns:p="http://schemas.openxmlformats.org/presentationml/2006/main">
+  <p:cSld>
+    <p:bg>
+      <p:bgRef idx="1001">
+        <a:schemeClr val="bg1"/>
+      </p:bgRef>
+    </p:bg>
+    <p:spTree>
+      <p:nvGrpSpPr>
+        <p:cNvPr id="1" name=""/>
+        <p:cNvGrpSpPr/>
+        <p:nvPr/>
+      </p:nvGrpSpPr>
+      <p:grpSpPr>
+        <a:xfrm>
+          <a:off x="0" y="0"/>
+          <a:ext cx="0" cy="0"/>
+          <a:chOff x="0" y="0"/>
+          <a:chExt cx="0" cy="0"/>
+        </a:xfrm>
+      </p:grpSpPr>
+      <p:sp>
+        <p:nvSpPr>
+          <p:cNvPr id="2" name="Titelplatzhalter 1">
+            <a:extLst>
+              <a:ext uri="{FF2B5EF4-FFF2-40B4-BE49-F238E27FC236}">
+                <a16:creationId xmlns:a16="http://schemas.microsoft.com/office/drawing/2014/main" id="{BF82F5EF-5F48-BE23-50CF-792249139D43}"/>
+              </a:ext>
+            </a:extLst>
+          </p:cNvPr>
+          <p:cNvSpPr>
+            <a:spLocks noGrp="1"/>
+          </p:cNvSpPr>
+          <p:nvPr>
+            <p:ph type="title"/>
+          </p:nvPr>
+        </p:nvSpPr>
+        <p:spPr>
+          <a:xfrm>
+            <a:off x="838200" y="365125"/>
+            <a:ext cx="10515600" cy="1325563"/>
+          </a:xfrm>
+          <a:prstGeom prst="rect">
+            <a:avLst/>
+          </a:prstGeom>
+        </p:spPr>
+        <p:txBody>
+          <a:bodyPr vert="horz" lIns="91440" tIns="45720" rIns="91440" bIns="45720" rtlCol="0" anchor="ctr">
+            <a:normAutofit/>
+          </a:bodyPr>
+          <a:lstStyle/>
+          <a:p>
+            <a:r>
+              <a:rPr lang="de-DE"/>
+              <a:t>Mastertitelformat bearbeiten</a:t>
+            </a:r>
+          </a:p>
+        </p:txBody>
+      </p:sp>
+      <p:sp>
+        <p:nvSpPr>
+          <p:cNvPr id="3" name="Textplatzhalter 2">
+            <a:extLst>
+              <a:ext uri="{FF2B5EF4-FFF2-40B4-BE49-F238E27FC236}">
+                <a16:creationId xmlns:a16="http://schemas.microsoft.com/office/drawing/2014/main" id="{DF6822DA-213B-37D4-24B1-1ABEEC2456F5}"/>
+              </a:ext>
+            </a:extLst>
+          </p:cNvPr>
+          <p:cNvSpPr>
+            <a:spLocks noGrp="1"/>
+          </p:cNvSpPr>
+          <p:nvPr>
+            <p:ph type="body" idx="1"/>
+          </p:nvPr>
+        </p:nvSpPr>
+        <p:spPr>
+          <a:xfrm>
+            <a:off x="838200" y="1825625"/>
+            <a:ext cx="10515600" cy="4351338"/>
+          </a:xfrm>
+          <a:prstGeom prst="rect">
+            <a:avLst/>
+          </a:prstGeom>
+        </p:spPr>
+        <p:txBody>
+          <a:bodyPr vert="horz" lIns="91440" tIns="45720" rIns="91440" bIns="45720" rtlCol="0">
+            <a:normAutofit/>
+          </a:bodyPr>
+          <a:lstStyle/>
+          <a:p>
+            <a:pPr lvl="0"/>
+            <a:r>
+              <a:rPr lang="de-DE"/>
+              <a:t>Mastertextformat bearbeiten</a:t>
+            </a:r>
+          </a:p>
+          <a:p>
+            <a:pPr lvl="1"/>
+            <a:r>
+              <a:rPr lang="de-DE"/>
+              <a:t>Zweite Ebene</a:t>
+            </a:r>
+          </a:p>
+          <a:p>
+            <a:pPr lvl="2"/>
+            <a:r>
+              <a:rPr lang="de-DE"/>
+              <a:t>Dritte Ebene</a:t>
+            </a:r>
+          </a:p>
+          <a:p>
+            <a:pPr lvl="3"/>
+            <a:r>
+              <a:rPr lang="de-DE"/>
+              <a:t>Vierte Ebene</a:t>
+            </a:r>
+          </a:p>
+          <a:p>
+            <a:pPr lvl="4"/>
+            <a:r>
+              <a:rPr lang="de-DE"/>
+              <a:t>Fünfte Ebene</a:t>
+            </a:r>
+          </a:p>
+        </p:txBody>
+      </p:sp>
+      <p:sp>
+        <p:nvSpPr>
+          <p:cNvPr id="4" name="Datumsplatzhalter 3">
+            <a:extLst>
+              <a:ext uri="{FF2B5EF4-FFF2-40B4-BE49-F238E27FC236}">
+                <a16:creationId xmlns:a16="http://schemas.microsoft.com/office/drawing/2014/main" id="{08B02FB5-707F-0DA3-4B1B-032F862B3E90}"/>
+              </a:ext>
+            </a:extLst>
+          </p:cNvPr>
+          <p:cNvSpPr>
+            <a:spLocks noGrp="1"/>
+          </p:cNvSpPr>
+          <p:nvPr>
+            <p:ph type="dt" sz="half" idx="2"/>
+          </p:nvPr>
+        </p:nvSpPr>
+        <p:spPr>
+          <a:xfrm>
+            <a:off x="838200" y="6356350"/>
+            <a:ext cx="2743200" cy="365125"/>
+          </a:xfrm>
+          <a:prstGeom prst="rect">
+            <a:avLst/>
+          </a:prstGeom>
+        </p:spPr>
+        <p:txBody>
+          <a:bodyPr vert="horz" lIns="91440" tIns="45720" rIns="91440" bIns="45720" rtlCol="0" anchor="ctr"/>
+          <a:lstStyle>
+            <a:lvl1pPr algn="l">
+              <a:defRPr sz="1200">
+                <a:solidFill>
+                  <a:schemeClr val="tx1">
+                    <a:tint val="82000"/>
+                  </a:schemeClr>
+                </a:solidFill>
+              </a:defRPr>
+            </a:lvl1pPr>
+          </a:lstStyle>
+          <a:p>
+            <a:fld id="{F15EE0AF-3108-4CA3-86C7-0426E4F2C1B8}" type="datetimeFigureOut">
+              <a:rPr lang="de-DE" smtClean="0"/>
+              <a:t>23.07.2026</a:t>
+            </a:fld>
+            <a:endParaRPr lang="de-DE"/>
+          </a:p>
+        </p:txBody>
+      </p:sp>
+      <p:sp>
+        <p:nvSpPr>
+          <p:cNvPr id="5" name="Fußzeilenplatzhalter 4">
+            <a:extLst>
+              <a:ext uri="{FF2B5EF4-FFF2-40B4-BE49-F238E27FC236}">
+                <a16:creationId xmlns:a16="http://schemas.microsoft.com/office/drawing/2014/main" id="{0E7F39F3-EE41-164C-B5EA-09E80A2F0E53}"/>
+              </a:ext>
+            </a:extLst>
+          </p:cNvPr>
+          <p:cNvSpPr>
+            <a:spLocks noGrp="1"/>
+          </p:cNvSpPr>
+          <p:nvPr>
+            <p:ph type="ftr" sz="quarter" idx="3"/>
+          </p:nvPr>
+        </p:nvSpPr>
+        <p:spPr>
+          <a:xfrm>
+            <a:off x="4038600" y="6356350"/>
+            <a:ext cx="4114800" cy="365125"/>
+          </a:xfrm>
+          <a:prstGeom prst="rect">
+            <a:avLst/>
+          </a:prstGeom>
+        </p:spPr>
+        <p:txBody>
+          <a:bodyPr vert="horz" lIns="91440" tIns="45720" rIns="91440" bIns="45720" rtlCol="0" anchor="ctr"/>
+          <a:lstStyle>
+            <a:lvl1pPr algn="ctr">
+              <a:defRPr sz="1200">
+                <a:solidFill>
+                  <a:schemeClr val="tx1">
+                    <a:tint val="82000"/>
+                  </a:schemeClr>
+                </a:solidFill>
+              </a:defRPr>
+            </a:lvl1pPr>
+          </a:lstStyle>
+          <a:p>
+            <a:endParaRPr lang="de-DE"/>
+          </a:p>
+        </p:txBody>
+      </p:sp>
+      <p:sp>
+        <p:nvSpPr>
+          <p:cNvPr id="6" name="Foliennummernplatzhalter 5">
+            <a:extLst>
+              <a:ext uri="{FF2B5EF4-FFF2-40B4-BE49-F238E27FC236}">
+                <a16:creationId xmlns:a16="http://schemas.microsoft.com/office/drawing/2014/main" id="{722C92C1-E53A-FD7D-A6C3-0FF0D77826CA}"/>
+              </a:ext>
+            </a:extLst>
+          </p:cNvPr>
+          <p:cNvSpPr>
+            <a:spLocks noGrp="1"/>
+          </p:cNvSpPr>
+          <p:nvPr>
+            <p:ph type="sldNum" sz="quarter" idx="4"/>
+          </p:nvPr>
+        </p:nvSpPr>
+        <p:spPr>
+          <a:xfrm>
+            <a:off x="8610600" y="6356350"/>
+            <a:ext cx="2743200" cy="365125"/>
+          </a:xfrm>
+          <a:prstGeom prst="rect">
+            <a:avLst/>
+          </a:prstGeom>
+        </p:spPr>
+        <p:txBody>
+          <a:bodyPr vert="horz" lIns="91440" tIns="45720" rIns="91440" bIns="45720" rtlCol="0" anchor="ctr"/>
+          <a:lstStyle>
+            <a:lvl1pPr algn="r">
+              <a:defRPr sz="1200">
+                <a:solidFill>
+                  <a:schemeClr val="tx1">
+                    <a:tint val="82000"/>
+                  </a:schemeClr>
+                </a:solidFill>
+              </a:defRPr>
+            </a:lvl1pPr>
+          </a:lstStyle>
+          <a:p>
+            <a:fld id="{76E80021-631E-4299-85ED-5092D68E1074}" type="slidenum">
+              <a:rPr lang="de-DE" smtClean="0"/>
+              <a:t>‹Nr.›</a:t>
+            </a:fld>
+            <a:endParaRPr lang="de-DE"/>
+          </a:p>
+        </p:txBody>
+      </p:sp>
+      <p:sp>
+        <p:nvSpPr>
+          <p:cNvPr id="8" name="Textfeld 7">
+            <a:extLst>
+              <a:ext uri="{FF2B5EF4-FFF2-40B4-BE49-F238E27FC236}">
+                <a16:creationId xmlns:a16="http://schemas.microsoft.com/office/drawing/2014/main" id="{056AE3E8-E9BF-6465-45F6-93E72F72878F}"/>
+              </a:ext>
+            </a:extLst>
+          </p:cNvPr>
+          <p:cNvSpPr txBox="1"/>
+          <p:nvPr userDrawn="1">
+            <p:extLst>
+              <p:ext uri="{1162E1C5-73C7-4A58-AE30-91384D911F3F}">
+                <p184:classification xmlns:p184="http://schemas.microsoft.com/office/powerpoint/2018/4/main" val="ftr"/>
+              </p:ext>
+            </p:extLst>
+          </p:nvPr>
+        </p:nvSpPr>
+        <p:spPr>
+          <a:xfrm>
+            <a:off x="63500" y="6611620"/>
+            <a:ext cx="3324225" cy="182880"/>
+          </a:xfrm>
+          <a:prstGeom prst="rect">
+            <a:avLst/>
+          </a:prstGeom>
+        </p:spPr>
+        <p:txBody>
+          <a:bodyPr horzOverflow="overflow" lIns="0" tIns="0" rIns="0" bIns="0">
+            <a:spAutoFit/>
+          </a:bodyPr>
+          <a:lstStyle/>
+          <a:p>
+            <a:pPr algn="l"/>
+            <a:r>
+              <a:rPr lang="de-DE" sz="600">
+                <a:solidFill>
+                  <a:srgbClr val="000000">
+                    <a:alpha val="50000"/>
+                  </a:srgbClr>
+                </a:solidFill>
+                <a:latin typeface="Aptos" panose="020B0004020202020204" pitchFamily="34" charset="0"/>
+              </a:rPr>
+              <a:t>*** Clasificado PÚBLICO por TELEFÓNICA. *** Classified PUBLIC by TELEFÓNICA.
+*** Classificado como PÚBLICO pela TELEFÓNICA. *** Von TELEFÓNICA als ÖFFENTLICH eingestuft.</a:t>
+            </a:r>
+          </a:p>
+        </p:txBody>
+      </p:sp>
+    </p:spTree>
+    <p:extLst>
+      <p:ext uri="{BB962C8B-B14F-4D97-AF65-F5344CB8AC3E}">
+        <p14:creationId xmlns:p14="http://schemas.microsoft.com/office/powerpoint/2010/main" val="4210860490"/>
+      </p:ext>
+    </p:extLst>
+  </p:cSld>
+  <p:clrMap bg1="lt1" tx1="dk1" bg2="lt2" tx2="dk2" accent1="accent1" accent2="accent2" accent3="accent3" accent4="accent4" accent5="accent5" accent6="accent6" hlink="hlink" folHlink="folHlink"/>
+  <p:sldLayoutIdLst>
+    <p:sldLayoutId id="2147483661" r:id="rId1"/>
+    <p:sldLayoutId id="2147483662" r:id="rId2"/>
+    <p:sldLayoutId id="2147483663" r:id="rId3"/>
+    <p:sldLayoutId id="2147483664" r:id="rId4"/>
+    <p:sldLayoutId id="2147483665" r:id="rId5"/>
+    <p:sldLayoutId id="2147483666" r:id="rId6"/>
+    <p:sldLayoutId id="2147483667" r:id="rId7"/>
+    <p:sldLayoutId id="2147483668" r:id="rId8"/>
+    <p:sldLayoutId id="2147483669" r:id="rId9"/>
+    <p:sldLayoutId id="2147483670" r:id="rId10"/>
+    <p:sldLayoutId id="2147483671" r:id="rId11"/>
+  </p:sldLayoutIdLst>
+  <p:txStyles>
+    <p:titleStyle>
+      <a:lvl1pPr algn="l" defTabSz="914400" rtl="0" eaLnBrk="1" latinLnBrk="0" hangingPunct="1">
+        <a:lnSpc>
+          <a:spcPct val="90000"/>
+        </a:lnSpc>
+        <a:spcBef>
+          <a:spcPct val="0"/>
+        </a:spcBef>
+        <a:buNone/>
+        <a:defRPr sz="4400" kern="1200">
+          <a:solidFill>
+            <a:schemeClr val="tx1"/>
+          </a:solidFill>
+          <a:latin typeface="+mj-lt"/>
+          <a:ea typeface="+mj-ea"/>
+          <a:cs typeface="+mj-cs"/>
+        </a:defRPr>
+      </a:lvl1pPr>
+    </p:titleStyle>
+    <p:bodyStyle>
+      <a:lvl1pPr marL="228600" indent="-228600" algn="l" defTabSz="914400" rtl="0" eaLnBrk="1" latinLnBrk="0" hangingPunct="1">
+        <a:lnSpc>
+          <a:spcPct val="90000"/>
+        </a:lnSpc>
+        <a:spcBef>
+          <a:spcPts val="1000"/>
+        </a:spcBef>
+        <a:buFont typeface="Arial" panose="020B0604020202020204" pitchFamily="34" charset="0"/>
+        <a:buChar char="•"/>
+        <a:defRPr sz="2800" kern="1200">
+          <a:solidFill>
+            <a:schemeClr val="tx1"/>
+          </a:solidFill>
+          <a:latin typeface="+mn-lt"/>
+          <a:ea typeface="+mn-ea"/>
+          <a:cs typeface="+mn-cs"/>
+        </a:defRPr>
+      </a:lvl1pPr>
+      <a:lvl2pPr marL="685800" indent="-228600" algn="l" defTabSz="914400" rtl="0" eaLnBrk="1" latinLnBrk="0" hangingPunct="1">
+        <a:lnSpc>
+          <a:spcPct val="90000"/>
+        </a:lnSpc>
+        <a:spcBef>
+          <a:spcPts val="500"/>
+        </a:spcBef>
+        <a:buFont typeface="Arial" panose="020B0604020202020204" pitchFamily="34" charset="0"/>
+        <a:buChar char="•"/>
+        <a:defRPr sz="2400" kern="1200">
+          <a:solidFill>
+            <a:schemeClr val="tx1"/>
+          </a:solidFill>
+          <a:latin typeface="+mn-lt"/>
+          <a:ea typeface="+mn-ea"/>
+          <a:cs typeface="+mn-cs"/>
+        </a:defRPr>
+      </a:lvl2pPr>
+      <a:lvl3pPr marL="1143000" indent="-228600" algn="l" defTabSz="914400" rtl="0" eaLnBrk="1" latinLnBrk="0" hangingPunct="1">
+        <a:lnSpc>
+          <a:spcPct val="90000"/>
+        </a:lnSpc>
+        <a:spcBef>
+          <a:spcPts val="500"/>
+        </a:spcBef>
+        <a:buFont typeface="Arial" panose="020B0604020202020204" pitchFamily="34" charset="0"/>
+        <a:buChar char="•"/>
+        <a:defRPr sz="2000" kern="1200">
+          <a:solidFill>
+            <a:schemeClr val="tx1"/>
+          </a:solidFill>
+          <a:latin typeface="+mn-lt"/>
+          <a:ea typeface="+mn-ea"/>
+          <a:cs typeface="+mn-cs"/>
+        </a:defRPr>
+      </a:lvl3pPr>
+      <a:lvl4pPr marL="1600200" indent="-228600" algn="l" defTabSz="914400" rtl="0" eaLnBrk="1" latinLnBrk="0" hangingPunct="1">
+        <a:lnSpc>
+          <a:spcPct val="90000"/>
+        </a:lnSpc>
+        <a:spcBef>
+          <a:spcPts val="500"/>
+        </a:spcBef>
+        <a:buFont typeface="Arial" panose="020B0604020202020204" pitchFamily="34" charset="0"/>
+        <a:buChar char="•"/>
+        <a:defRPr sz="1800" kern="1200">
+          <a:solidFill>
+            <a:schemeClr val="tx1"/>
+          </a:solidFill>
+          <a:latin typeface="+mn-lt"/>
+          <a:ea typeface="+mn-ea"/>
+          <a:cs typeface="+mn-cs"/>
+        </a:defRPr>
+      </a:lvl4pPr>
+      <a:lvl5pPr marL="2057400" indent="-228600" algn="l" defTabSz="914400" rtl="0" eaLnBrk="1" latinLnBrk="0" hangingPunct="1">
+        <a:lnSpc>
+          <a:spcPct val="90000"/>
+        </a:lnSpc>
+        <a:spcBef>
+          <a:spcPts val="500"/>
+        </a:spcBef>
+        <a:buFont typeface="Arial" panose="020B0604020202020204" pitchFamily="34" charset="0"/>
+        <a:buChar char="•"/>
+        <a:defRPr sz="1800" kern="1200">
+          <a:solidFill>
+            <a:schemeClr val="tx1"/>
+          </a:solidFill>
+          <a:latin typeface="+mn-lt"/>
+          <a:ea typeface="+mn-ea"/>
+          <a:cs typeface="+mn-cs"/>
+        </a:defRPr>
+      </a:lvl5pPr>
+      <a:lvl6pPr marL="2514600" indent="-228600" algn="l" defTabSz="914400" rtl="0" eaLnBrk="1" latinLnBrk="0" hangingPunct="1">
+        <a:lnSpc>
+          <a:spcPct val="90000"/>
+        </a:lnSpc>
+        <a:spcBef>
+          <a:spcPts val="500"/>
+        </a:spcBef>
+        <a:buFont typeface="Arial" panose="020B0604020202020204" pitchFamily="34" charset="0"/>
+        <a:buChar char="•"/>
+        <a:defRPr sz="1800" kern="1200">
+          <a:solidFill>
+            <a:schemeClr val="tx1"/>
+          </a:solidFill>
+          <a:latin typeface="+mn-lt"/>
+          <a:ea typeface="+mn-ea"/>
+          <a:cs typeface="+mn-cs"/>
+        </a:defRPr>
+      </a:lvl6pPr>
+      <a:lvl7pPr marL="2971800" indent="-228600" algn="l" defTabSz="914400" rtl="0" eaLnBrk="1" latinLnBrk="0" hangingPunct="1">
+        <a:lnSpc>
+          <a:spcPct val="90000"/>
+        </a:lnSpc>
+        <a:spcBef>
+          <a:spcPts val="500"/>
+        </a:spcBef>
+        <a:buFont typeface="Arial" panose="020B0604020202020204" pitchFamily="34" charset="0"/>
+        <a:buChar char="•"/>
+        <a:defRPr sz="1800" kern="1200">
+          <a:solidFill>
+            <a:schemeClr val="tx1"/>
+          </a:solidFill>
+          <a:latin typeface="+mn-lt"/>
+          <a:ea typeface="+mn-ea"/>
+          <a:cs typeface="+mn-cs"/>
+        </a:defRPr>
+      </a:lvl7pPr>
+      <a:lvl8pPr marL="3429000" indent="-228600" algn="l" defTabSz="914400" rtl="0" eaLnBrk="1" latinLnBrk="0" hangingPunct="1">
+        <a:lnSpc>
+          <a:spcPct val="90000"/>
+        </a:lnSpc>
+        <a:spcBef>
+          <a:spcPts val="500"/>
+        </a:spcBef>
+        <a:buFont typeface="Arial" panose="020B0604020202020204" pitchFamily="34" charset="0"/>
+        <a:buChar char="•"/>
+        <a:defRPr sz="1800" kern="1200">
+          <a:solidFill>
+            <a:schemeClr val="tx1"/>
+          </a:solidFill>
+          <a:latin typeface="+mn-lt"/>
+          <a:ea typeface="+mn-ea"/>
+          <a:cs typeface="+mn-cs"/>
+        </a:defRPr>
+      </a:lvl8pPr>
+      <a:lvl9pPr marL="3886200" indent="-228600" algn="l" defTabSz="914400" rtl="0" eaLnBrk="1" latinLnBrk="0" hangingPunct="1">
+        <a:lnSpc>
+          <a:spcPct val="90000"/>
+        </a:lnSpc>
+        <a:spcBef>
+          <a:spcPts val="500"/>
+        </a:spcBef>
+        <a:buFont typeface="Arial" panose="020B0604020202020204" pitchFamily="34" charset="0"/>
+        <a:buChar char="•"/>
+        <a:defRPr sz="1800" kern="1200">
+          <a:solidFill>
+            <a:schemeClr val="tx1"/>
+          </a:solidFill>
+          <a:latin typeface="+mn-lt"/>
+          <a:ea typeface="+mn-ea"/>
+          <a:cs typeface="+mn-cs"/>
+        </a:defRPr>
+      </a:lvl9pPr>
+    </p:bodyStyle>
+    <p:otherStyle>
+      <a:defPPr>
+        <a:defRPr lang="de-DE"/>
+      </a:defPPr>
+      <a:lvl1pPr marL="0" algn="l" defTabSz="914400" rtl="0" eaLnBrk="1" latinLnBrk="0" hangingPunct="1">
+        <a:defRPr sz="1800" kern="1200">
+          <a:solidFill>
+            <a:schemeClr val="tx1"/>
+          </a:solidFill>
+          <a:latin typeface="+mn-lt"/>
+          <a:ea typeface="+mn-ea"/>
+          <a:cs typeface="+mn-cs"/>
+        </a:defRPr>
+      </a:lvl1pPr>
+      <a:lvl2pPr marL="457200" algn="l" defTabSz="914400" rtl="0" eaLnBrk="1" latinLnBrk="0" hangingPunct="1">
+        <a:defRPr sz="1800" kern="1200">
+          <a:solidFill>
+            <a:schemeClr val="tx1"/>
+          </a:solidFill>
+          <a:latin typeface="+mn-lt"/>
+          <a:ea typeface="+mn-ea"/>
+          <a:cs typeface="+mn-cs"/>
+        </a:defRPr>
+      </a:lvl2pPr>
+      <a:lvl3pPr marL="914400" algn="l" defTabSz="914400" rtl="0" eaLnBrk="1" latinLnBrk="0" hangingPunct="1">
+        <a:defRPr sz="1800" kern="1200">
+          <a:solidFill>
+            <a:schemeClr val="tx1"/>
+          </a:solidFill>
+          <a:latin typeface="+mn-lt"/>
+          <a:ea typeface="+mn-ea"/>
+          <a:cs typeface="+mn-cs"/>
+        </a:defRPr>
+      </a:lvl3pPr>
+      <a:lvl4pPr marL="1371600" algn="l" defTabSz="914400" rtl="0" eaLnBrk="1" latinLnBrk="0" hangingPunct="1">
+        <a:defRPr sz="1800" kern="1200">
+          <a:solidFill>
+            <a:schemeClr val="tx1"/>
+          </a:solidFill>
+          <a:latin typeface="+mn-lt"/>
+          <a:ea typeface="+mn-ea"/>
+          <a:cs typeface="+mn-cs"/>
+        </a:defRPr>
+      </a:lvl4pPr>
+      <a:lvl5pPr marL="1828800" algn="l" defTabSz="914400" rtl="0" eaLnBrk="1" latinLnBrk="0" hangingPunct="1">
+        <a:defRPr sz="1800" kern="1200">
+          <a:solidFill>
+            <a:schemeClr val="tx1"/>
+          </a:solidFill>
+          <a:latin typeface="+mn-lt"/>
+          <a:ea typeface="+mn-ea"/>
+          <a:cs typeface="+mn-cs"/>
+        </a:defRPr>
+      </a:lvl5pPr>
+      <a:lvl6pPr marL="2286000" algn="l" defTabSz="914400" rtl="0" eaLnBrk="1" latinLnBrk="0" hangingPunct="1">
+        <a:defRPr sz="1800" kern="1200">
+          <a:solidFill>
+            <a:schemeClr val="tx1"/>
+          </a:solidFill>
+          <a:latin typeface="+mn-lt"/>
+          <a:ea typeface="+mn-ea"/>
+          <a:cs typeface="+mn-cs"/>
+        </a:defRPr>
+      </a:lvl6pPr>
+      <a:lvl7pPr marL="2743200" algn="l" defTabSz="914400" rtl="0" eaLnBrk="1" latinLnBrk="0" hangingPunct="1">
+        <a:defRPr sz="1800" kern="1200">
+          <a:solidFill>
+            <a:schemeClr val="tx1"/>
+          </a:solidFill>
+          <a:latin typeface="+mn-lt"/>
+          <a:ea typeface="+mn-ea"/>
+          <a:cs typeface="+mn-cs"/>
+        </a:defRPr>
+      </a:lvl7pPr>
+      <a:lvl8pPr marL="3200400" algn="l" defTabSz="914400" rtl="0" eaLnBrk="1" latinLnBrk="0" hangingPunct="1">
+        <a:defRPr sz="1800" kern="1200">
+          <a:solidFill>
+            <a:schemeClr val="tx1"/>
+          </a:solidFill>
+          <a:latin typeface="+mn-lt"/>
+          <a:ea typeface="+mn-ea"/>
+          <a:cs typeface="+mn-cs"/>
+        </a:defRPr>
+      </a:lvl8pPr>
+      <a:lvl9pPr marL="3657600" algn="l" defTabSz="914400" rtl="0" eaLnBrk="1" latinLnBrk="0" hangingPunct="1">
+        <a:defRPr sz="1800" kern="1200">
+          <a:solidFill>
+            <a:schemeClr val="tx1"/>
+          </a:solidFill>
+          <a:latin typeface="+mn-lt"/>
+          <a:ea typeface="+mn-ea"/>
+          <a:cs typeface="+mn-cs"/>
+        </a:defRPr>
+      </a:lvl9pPr>
+    </p:otherStyle>
+  </p:txStyles>
+</p:sldMaster>
+</file>
+
 <file path=ppt/slides/slide1.xml><?xml version="1.0" encoding="utf-8"?>
 <p:sld xmlns:a="http://schemas.openxmlformats.org/drawingml/2006/main" xmlns:r="http://schemas.openxmlformats.org/officeDocument/2006/relationships" xmlns:p="http://schemas.openxmlformats.org/presentationml/2006/main">
   <p:cSld>
@@ -7192,6 +10440,2380 @@
     <p:extLst>
       <p:ext uri="{BB962C8B-B14F-4D97-AF65-F5344CB8AC3E}">
         <p14:creationId xmlns:p14="http://schemas.microsoft.com/office/powerpoint/2010/main" val="840846288"/>
+      </p:ext>
+    </p:extLst>
+  </p:cSld>
+  <p:clrMapOvr>
+    <a:masterClrMapping/>
+  </p:clrMapOvr>
+</p:sld>
+</file>
+
+<file path=ppt/slides/slide3.xml><?xml version="1.0" encoding="utf-8"?>
+<p:sld xmlns:a="http://schemas.openxmlformats.org/drawingml/2006/main" xmlns:r="http://schemas.openxmlformats.org/officeDocument/2006/relationships" xmlns:p="http://schemas.openxmlformats.org/presentationml/2006/main">
+  <p:cSld>
+    <p:bg>
+      <p:bgPr>
+        <a:solidFill>
+          <a:schemeClr val="bg1"/>
+        </a:solidFill>
+        <a:effectLst/>
+      </p:bgPr>
+    </p:bg>
+    <p:spTree>
+      <p:nvGrpSpPr>
+        <p:cNvPr id="1" name="">
+          <a:extLst>
+            <a:ext uri="{FF2B5EF4-FFF2-40B4-BE49-F238E27FC236}">
+              <a16:creationId xmlns:a16="http://schemas.microsoft.com/office/drawing/2014/main" id="{B9F42C5D-ABB2-C257-9250-833E28F72ED4}"/>
+            </a:ext>
+          </a:extLst>
+        </p:cNvPr>
+        <p:cNvGrpSpPr/>
+        <p:nvPr/>
+      </p:nvGrpSpPr>
+      <p:grpSpPr>
+        <a:xfrm>
+          <a:off x="0" y="0"/>
+          <a:ext cx="0" cy="0"/>
+          <a:chOff x="0" y="0"/>
+          <a:chExt cx="0" cy="0"/>
+        </a:xfrm>
+      </p:grpSpPr>
+      <p:sp>
+        <p:nvSpPr>
+          <p:cNvPr id="10" name="Rectangle 9">
+            <a:extLst>
+              <a:ext uri="{FF2B5EF4-FFF2-40B4-BE49-F238E27FC236}">
+                <a16:creationId xmlns:a16="http://schemas.microsoft.com/office/drawing/2014/main" id="{C9E293C3-5FCA-FD32-64F3-6A1E647D3A62}"/>
+              </a:ext>
+              <a:ext uri="{C183D7F6-B498-43B3-948B-1728B52AA6E4}">
+                <adec:decorative xmlns:adec="http://schemas.microsoft.com/office/drawing/2017/decorative" val="1"/>
+              </a:ext>
+            </a:extLst>
+          </p:cNvPr>
+          <p:cNvSpPr>
+            <a:spLocks noGrp="1" noRot="1" noChangeAspect="1" noMove="1" noResize="1" noEditPoints="1" noAdjustHandles="1" noChangeArrowheads="1" noChangeShapeType="1" noTextEdit="1"/>
+          </p:cNvSpPr>
+          <p:nvPr>
+            <p:extLst>
+              <p:ext uri="{386F3935-93C4-4BCD-93E2-E3B085C9AB24}">
+                <p16:designElem xmlns:p16="http://schemas.microsoft.com/office/powerpoint/2015/main" val="1"/>
+              </p:ext>
+            </p:extLst>
+          </p:nvPr>
+        </p:nvSpPr>
+        <p:spPr>
+          <a:xfrm>
+            <a:off x="0" y="0"/>
+            <a:ext cx="12192000" cy="6858000"/>
+          </a:xfrm>
+          <a:prstGeom prst="rect">
+            <a:avLst/>
+          </a:prstGeom>
+          <a:gradFill flip="none" rotWithShape="1">
+            <a:gsLst>
+              <a:gs pos="0">
+                <a:schemeClr val="accent1"/>
+              </a:gs>
+              <a:gs pos="100000">
+                <a:schemeClr val="accent2"/>
+              </a:gs>
+            </a:gsLst>
+            <a:lin ang="2700000" scaled="1"/>
+            <a:tileRect/>
+          </a:gradFill>
+          <a:ln>
+            <a:noFill/>
+          </a:ln>
+        </p:spPr>
+        <p:style>
+          <a:lnRef idx="2">
+            <a:schemeClr val="accent1">
+              <a:shade val="50000"/>
+            </a:schemeClr>
+          </a:lnRef>
+          <a:fillRef idx="1">
+            <a:schemeClr val="accent1"/>
+          </a:fillRef>
+          <a:effectRef idx="0">
+            <a:schemeClr val="accent1"/>
+          </a:effectRef>
+          <a:fontRef idx="minor">
+            <a:schemeClr val="lt1"/>
+          </a:fontRef>
+        </p:style>
+        <p:txBody>
+          <a:bodyPr rtlCol="0" anchor="ctr"/>
+          <a:lstStyle/>
+          <a:p>
+            <a:pPr marL="0" marR="0" lvl="0" indent="0" algn="ctr" defTabSz="914400" rtl="0" eaLnBrk="1" fontAlgn="auto" latinLnBrk="0" hangingPunct="1">
+              <a:lnSpc>
+                <a:spcPct val="100000"/>
+              </a:lnSpc>
+              <a:spcBef>
+                <a:spcPts val="0"/>
+              </a:spcBef>
+              <a:spcAft>
+                <a:spcPts val="0"/>
+              </a:spcAft>
+              <a:buClrTx/>
+              <a:buSzTx/>
+              <a:buFontTx/>
+              <a:buNone/>
+              <a:tabLst/>
+              <a:defRPr/>
+            </a:pPr>
+            <a:endParaRPr kumimoji="0" lang="en-US" sz="1800" b="0" i="0" u="none" strike="noStrike" kern="1200" cap="none" spc="0" normalizeH="0" baseline="0" noProof="0">
+              <a:ln>
+                <a:noFill/>
+              </a:ln>
+              <a:solidFill>
+                <a:prstClr val="white"/>
+              </a:solidFill>
+              <a:effectLst/>
+              <a:uLnTx/>
+              <a:uFillTx/>
+              <a:latin typeface="Aptos" panose="02110004020202020204"/>
+              <a:ea typeface="+mn-ea"/>
+              <a:cs typeface="+mn-cs"/>
+            </a:endParaRPr>
+          </a:p>
+        </p:txBody>
+      </p:sp>
+      <p:sp>
+        <p:nvSpPr>
+          <p:cNvPr id="2" name="Rechteck 1">
+            <a:extLst>
+              <a:ext uri="{FF2B5EF4-FFF2-40B4-BE49-F238E27FC236}">
+                <a16:creationId xmlns:a16="http://schemas.microsoft.com/office/drawing/2014/main" id="{E604F400-0C80-74F1-D6FE-CCA17C22CCAE}"/>
+              </a:ext>
+            </a:extLst>
+          </p:cNvPr>
+          <p:cNvSpPr/>
+          <p:nvPr/>
+        </p:nvSpPr>
+        <p:spPr>
+          <a:xfrm>
+            <a:off x="805542" y="562575"/>
+            <a:ext cx="10779150" cy="5884846"/>
+          </a:xfrm>
+          <a:prstGeom prst="rect">
+            <a:avLst/>
+          </a:prstGeom>
+          <a:solidFill>
+            <a:schemeClr val="bg1"/>
+          </a:solidFill>
+        </p:spPr>
+        <p:style>
+          <a:lnRef idx="2">
+            <a:schemeClr val="accent1">
+              <a:shade val="15000"/>
+            </a:schemeClr>
+          </a:lnRef>
+          <a:fillRef idx="1">
+            <a:schemeClr val="accent1"/>
+          </a:fillRef>
+          <a:effectRef idx="0">
+            <a:schemeClr val="accent1"/>
+          </a:effectRef>
+          <a:fontRef idx="minor">
+            <a:schemeClr val="lt1"/>
+          </a:fontRef>
+        </p:style>
+        <p:txBody>
+          <a:bodyPr rtlCol="0" anchor="ctr"/>
+          <a:lstStyle/>
+          <a:p>
+            <a:pPr marL="0" marR="0" lvl="0" indent="0" algn="ctr" defTabSz="914400" rtl="0" eaLnBrk="1" fontAlgn="auto" latinLnBrk="0" hangingPunct="1">
+              <a:lnSpc>
+                <a:spcPct val="100000"/>
+              </a:lnSpc>
+              <a:spcBef>
+                <a:spcPts val="0"/>
+              </a:spcBef>
+              <a:spcAft>
+                <a:spcPts val="0"/>
+              </a:spcAft>
+              <a:buClrTx/>
+              <a:buSzTx/>
+              <a:buFontTx/>
+              <a:buNone/>
+              <a:tabLst/>
+              <a:defRPr/>
+            </a:pPr>
+            <a:endParaRPr kumimoji="0" lang="de-DE" sz="1800" b="0" i="0" u="none" strike="noStrike" kern="1200" cap="none" spc="0" normalizeH="0" baseline="0" noProof="0">
+              <a:ln>
+                <a:noFill/>
+              </a:ln>
+              <a:solidFill>
+                <a:prstClr val="white"/>
+              </a:solidFill>
+              <a:effectLst/>
+              <a:uLnTx/>
+              <a:uFillTx/>
+              <a:latin typeface="Aptos" panose="02110004020202020204"/>
+              <a:ea typeface="+mn-ea"/>
+              <a:cs typeface="+mn-cs"/>
+            </a:endParaRPr>
+          </a:p>
+        </p:txBody>
+      </p:sp>
+      <p:grpSp>
+        <p:nvGrpSpPr>
+          <p:cNvPr id="5" name="Gruppieren 4">
+            <a:extLst>
+              <a:ext uri="{FF2B5EF4-FFF2-40B4-BE49-F238E27FC236}">
+                <a16:creationId xmlns:a16="http://schemas.microsoft.com/office/drawing/2014/main" id="{C694F6EA-2A5B-52FE-12FE-6EAF7CAD78B4}"/>
+              </a:ext>
+            </a:extLst>
+          </p:cNvPr>
+          <p:cNvGrpSpPr/>
+          <p:nvPr/>
+        </p:nvGrpSpPr>
+        <p:grpSpPr>
+          <a:xfrm>
+            <a:off x="137739" y="676798"/>
+            <a:ext cx="11174925" cy="5688580"/>
+            <a:chOff x="24431" y="716821"/>
+            <a:chExt cx="11174925" cy="5688580"/>
+          </a:xfrm>
+        </p:grpSpPr>
+        <p:grpSp>
+          <p:nvGrpSpPr>
+            <p:cNvPr id="4" name="Gruppieren 3">
+              <a:extLst>
+                <a:ext uri="{FF2B5EF4-FFF2-40B4-BE49-F238E27FC236}">
+                  <a16:creationId xmlns:a16="http://schemas.microsoft.com/office/drawing/2014/main" id="{603C7A46-581C-1FF9-745B-53D0005345CF}"/>
+                </a:ext>
+              </a:extLst>
+            </p:cNvPr>
+            <p:cNvGrpSpPr/>
+            <p:nvPr/>
+          </p:nvGrpSpPr>
+          <p:grpSpPr>
+            <a:xfrm>
+              <a:off x="857880" y="716821"/>
+              <a:ext cx="10341476" cy="5688580"/>
+              <a:chOff x="857880" y="716821"/>
+              <a:chExt cx="10341476" cy="5688580"/>
+            </a:xfrm>
+          </p:grpSpPr>
+          <p:pic>
+            <p:nvPicPr>
+              <p:cNvPr id="3" name="Grafik 2">
+                <a:extLst>
+                  <a:ext uri="{FF2B5EF4-FFF2-40B4-BE49-F238E27FC236}">
+                    <a16:creationId xmlns:a16="http://schemas.microsoft.com/office/drawing/2014/main" id="{FDD897E9-0EF3-B589-C5E2-C398A97D179D}"/>
+                  </a:ext>
+                </a:extLst>
+              </p:cNvPr>
+              <p:cNvPicPr>
+                <a:picLocks noChangeAspect="1"/>
+              </p:cNvPicPr>
+              <p:nvPr/>
+            </p:nvPicPr>
+            <p:blipFill>
+              <a:blip r:embed="rId2"/>
+              <a:stretch>
+                <a:fillRect/>
+              </a:stretch>
+            </p:blipFill>
+            <p:spPr>
+              <a:xfrm>
+                <a:off x="1251890" y="1241448"/>
+                <a:ext cx="9247024" cy="4579177"/>
+              </a:xfrm>
+              <a:prstGeom prst="rect">
+                <a:avLst/>
+              </a:prstGeom>
+            </p:spPr>
+          </p:pic>
+          <p:sp>
+            <p:nvSpPr>
+              <p:cNvPr id="6" name="Textfeld 5">
+                <a:extLst>
+                  <a:ext uri="{FF2B5EF4-FFF2-40B4-BE49-F238E27FC236}">
+                    <a16:creationId xmlns:a16="http://schemas.microsoft.com/office/drawing/2014/main" id="{0B5EA730-4D2D-9497-613B-704C82512945}"/>
+                  </a:ext>
+                </a:extLst>
+              </p:cNvPr>
+              <p:cNvSpPr txBox="1"/>
+              <p:nvPr/>
+            </p:nvSpPr>
+            <p:spPr>
+              <a:xfrm>
+                <a:off x="857880" y="2203154"/>
+                <a:ext cx="1424012" cy="707886"/>
+              </a:xfrm>
+              <a:prstGeom prst="rect">
+                <a:avLst/>
+              </a:prstGeom>
+              <a:solidFill>
+                <a:schemeClr val="bg1">
+                  <a:lumMod val="95000"/>
+                </a:schemeClr>
+              </a:solidFill>
+            </p:spPr>
+            <p:txBody>
+              <a:bodyPr wrap="square" rtlCol="0">
+                <a:spAutoFit/>
+              </a:bodyPr>
+              <a:lstStyle/>
+              <a:p>
+                <a:pPr marL="0" marR="0" lvl="0" indent="0" algn="l" defTabSz="914400" rtl="0" eaLnBrk="1" fontAlgn="auto" latinLnBrk="0" hangingPunct="1">
+                  <a:lnSpc>
+                    <a:spcPct val="100000"/>
+                  </a:lnSpc>
+                  <a:spcBef>
+                    <a:spcPts val="0"/>
+                  </a:spcBef>
+                  <a:spcAft>
+                    <a:spcPts val="0"/>
+                  </a:spcAft>
+                  <a:buClrTx/>
+                  <a:buSzTx/>
+                  <a:buFontTx/>
+                  <a:buNone/>
+                  <a:tabLst/>
+                  <a:defRPr/>
+                </a:pPr>
+                <a:r>
+                  <a:rPr kumimoji="0" lang="de-DE" sz="800" b="0" i="0" u="none" strike="noStrike" kern="1200" cap="none" spc="0" normalizeH="0" baseline="0" noProof="0">
+                    <a:ln>
+                      <a:noFill/>
+                    </a:ln>
+                    <a:solidFill>
+                      <a:prstClr val="black"/>
+                    </a:solidFill>
+                    <a:effectLst/>
+                    <a:uLnTx/>
+                    <a:uFillTx/>
+                    <a:latin typeface="Aptos" panose="02110004020202020204"/>
+                    <a:ea typeface="+mn-ea"/>
+                    <a:cs typeface="+mn-cs"/>
+                  </a:rPr>
+                  <a:t>Generic interface to outside</a:t>
+                </a:r>
+              </a:p>
+              <a:p>
+                <a:pPr marL="171450" marR="0" lvl="0" indent="-171450" algn="l" defTabSz="914400" rtl="0" eaLnBrk="1" fontAlgn="auto" latinLnBrk="0" hangingPunct="1">
+                  <a:lnSpc>
+                    <a:spcPct val="100000"/>
+                  </a:lnSpc>
+                  <a:spcBef>
+                    <a:spcPts val="0"/>
+                  </a:spcBef>
+                  <a:spcAft>
+                    <a:spcPts val="0"/>
+                  </a:spcAft>
+                  <a:buClrTx/>
+                  <a:buSzTx/>
+                  <a:buFont typeface="Arial" panose="020B0604020202020204" pitchFamily="34" charset="0"/>
+                  <a:buChar char="•"/>
+                  <a:tabLst/>
+                  <a:defRPr/>
+                </a:pPr>
+                <a:r>
+                  <a:rPr kumimoji="0" lang="de-DE" sz="800" b="0" i="0" u="none" strike="noStrike" kern="1200" cap="none" spc="0" normalizeH="0" baseline="0" noProof="0">
+                    <a:ln>
+                      <a:noFill/>
+                    </a:ln>
+                    <a:solidFill>
+                      <a:prstClr val="black"/>
+                    </a:solidFill>
+                    <a:effectLst/>
+                    <a:uLnTx/>
+                    <a:uFillTx/>
+                    <a:latin typeface="Aptos" panose="02110004020202020204"/>
+                    <a:ea typeface="+mn-ea"/>
+                    <a:cs typeface="+mn-cs"/>
+                  </a:rPr>
+                  <a:t>as few info to ouside as possible</a:t>
+                </a:r>
+              </a:p>
+              <a:p>
+                <a:pPr marL="171450" marR="0" lvl="0" indent="-171450" algn="l" defTabSz="914400" rtl="0" eaLnBrk="1" fontAlgn="auto" latinLnBrk="0" hangingPunct="1">
+                  <a:lnSpc>
+                    <a:spcPct val="100000"/>
+                  </a:lnSpc>
+                  <a:spcBef>
+                    <a:spcPts val="0"/>
+                  </a:spcBef>
+                  <a:spcAft>
+                    <a:spcPts val="0"/>
+                  </a:spcAft>
+                  <a:buClrTx/>
+                  <a:buSzTx/>
+                  <a:buFont typeface="Arial" panose="020B0604020202020204" pitchFamily="34" charset="0"/>
+                  <a:buChar char="•"/>
+                  <a:tabLst/>
+                  <a:defRPr/>
+                </a:pPr>
+                <a:r>
+                  <a:rPr kumimoji="0" lang="de-DE" sz="800" b="0" i="0" u="none" strike="noStrike" kern="1200" cap="none" spc="0" normalizeH="0" baseline="0" noProof="0">
+                    <a:ln>
+                      <a:noFill/>
+                    </a:ln>
+                    <a:solidFill>
+                      <a:prstClr val="black"/>
+                    </a:solidFill>
+                    <a:effectLst/>
+                    <a:uLnTx/>
+                    <a:uFillTx/>
+                    <a:latin typeface="Aptos" panose="02110004020202020204"/>
+                    <a:ea typeface="+mn-ea"/>
+                    <a:cs typeface="+mn-cs"/>
+                  </a:rPr>
+                  <a:t>Info readable by other domains</a:t>
+                </a:r>
+              </a:p>
+            </p:txBody>
+          </p:sp>
+          <p:sp>
+            <p:nvSpPr>
+              <p:cNvPr id="8" name="Textfeld 7">
+                <a:extLst>
+                  <a:ext uri="{FF2B5EF4-FFF2-40B4-BE49-F238E27FC236}">
+                    <a16:creationId xmlns:a16="http://schemas.microsoft.com/office/drawing/2014/main" id="{203B6016-F752-7A46-CDB0-01BA0EE44134}"/>
+                  </a:ext>
+                </a:extLst>
+              </p:cNvPr>
+              <p:cNvSpPr txBox="1"/>
+              <p:nvPr/>
+            </p:nvSpPr>
+            <p:spPr>
+              <a:xfrm>
+                <a:off x="1411916" y="3452553"/>
+                <a:ext cx="1330660" cy="584775"/>
+              </a:xfrm>
+              <a:prstGeom prst="rect">
+                <a:avLst/>
+              </a:prstGeom>
+              <a:solidFill>
+                <a:schemeClr val="bg1">
+                  <a:lumMod val="95000"/>
+                </a:schemeClr>
+              </a:solidFill>
+            </p:spPr>
+            <p:txBody>
+              <a:bodyPr wrap="square" rtlCol="0">
+                <a:spAutoFit/>
+              </a:bodyPr>
+              <a:lstStyle/>
+              <a:p>
+                <a:pPr marL="0" marR="0" lvl="0" indent="0" algn="l" defTabSz="914400" rtl="0" eaLnBrk="1" fontAlgn="auto" latinLnBrk="0" hangingPunct="1">
+                  <a:lnSpc>
+                    <a:spcPct val="100000"/>
+                  </a:lnSpc>
+                  <a:spcBef>
+                    <a:spcPts val="0"/>
+                  </a:spcBef>
+                  <a:spcAft>
+                    <a:spcPts val="0"/>
+                  </a:spcAft>
+                  <a:buClrTx/>
+                  <a:buSzTx/>
+                  <a:buFontTx/>
+                  <a:buNone/>
+                  <a:tabLst/>
+                  <a:defRPr/>
+                </a:pPr>
+                <a:r>
+                  <a:rPr kumimoji="0" lang="de-DE" sz="800" b="0" i="0" u="none" strike="noStrike" kern="1200" cap="none" spc="0" normalizeH="0" baseline="0" noProof="0">
+                    <a:ln>
+                      <a:noFill/>
+                    </a:ln>
+                    <a:solidFill>
+                      <a:prstClr val="black"/>
+                    </a:solidFill>
+                    <a:effectLst/>
+                    <a:uLnTx/>
+                    <a:uFillTx/>
+                    <a:latin typeface="Aptos" panose="02110004020202020204"/>
+                    <a:ea typeface="+mn-ea"/>
+                    <a:cs typeface="+mn-cs"/>
+                  </a:rPr>
+                  <a:t>Approval:</a:t>
+                </a:r>
+              </a:p>
+              <a:p>
+                <a:pPr marL="0" marR="0" lvl="0" indent="0" algn="l" defTabSz="914400" rtl="0" eaLnBrk="1" fontAlgn="auto" latinLnBrk="0" hangingPunct="1">
+                  <a:lnSpc>
+                    <a:spcPct val="100000"/>
+                  </a:lnSpc>
+                  <a:spcBef>
+                    <a:spcPts val="0"/>
+                  </a:spcBef>
+                  <a:spcAft>
+                    <a:spcPts val="0"/>
+                  </a:spcAft>
+                  <a:buClrTx/>
+                  <a:buSzTx/>
+                  <a:buFontTx/>
+                  <a:buNone/>
+                  <a:tabLst/>
+                  <a:defRPr/>
+                </a:pPr>
+                <a:r>
+                  <a:rPr kumimoji="0" lang="de-DE" sz="800" b="0" i="0" u="none" strike="noStrike" kern="1200" cap="none" spc="0" normalizeH="0" baseline="0" noProof="0">
+                    <a:ln>
+                      <a:noFill/>
+                    </a:ln>
+                    <a:solidFill>
+                      <a:prstClr val="black"/>
+                    </a:solidFill>
+                    <a:effectLst/>
+                    <a:uLnTx/>
+                    <a:uFillTx/>
+                    <a:latin typeface="Aptos" panose="02110004020202020204"/>
+                    <a:ea typeface="+mn-ea"/>
+                    <a:cs typeface="+mn-cs"/>
+                  </a:rPr>
+                  <a:t>All domain rules met?</a:t>
+                </a:r>
+              </a:p>
+              <a:p>
+                <a:pPr marL="0" marR="0" lvl="0" indent="0" algn="l" defTabSz="914400" rtl="0" eaLnBrk="1" fontAlgn="auto" latinLnBrk="0" hangingPunct="1">
+                  <a:lnSpc>
+                    <a:spcPct val="100000"/>
+                  </a:lnSpc>
+                  <a:spcBef>
+                    <a:spcPts val="0"/>
+                  </a:spcBef>
+                  <a:spcAft>
+                    <a:spcPts val="0"/>
+                  </a:spcAft>
+                  <a:buClrTx/>
+                  <a:buSzTx/>
+                  <a:buFontTx/>
+                  <a:buNone/>
+                  <a:tabLst/>
+                  <a:defRPr/>
+                </a:pPr>
+                <a:r>
+                  <a:rPr kumimoji="0" lang="de-DE" sz="800" b="0" i="0" u="none" strike="noStrike" kern="1200" cap="none" spc="0" normalizeH="0" baseline="0" noProof="0">
+                    <a:ln>
+                      <a:noFill/>
+                    </a:ln>
+                    <a:solidFill>
+                      <a:prstClr val="black"/>
+                    </a:solidFill>
+                    <a:effectLst/>
+                    <a:uLnTx/>
+                    <a:uFillTx/>
+                    <a:latin typeface="Aptos" panose="02110004020202020204"/>
+                    <a:ea typeface="+mn-ea"/>
+                    <a:cs typeface="+mn-cs"/>
+                  </a:rPr>
+                  <a:t>Only then candidate can transition to target state</a:t>
+                </a:r>
+              </a:p>
+            </p:txBody>
+          </p:sp>
+          <p:sp>
+            <p:nvSpPr>
+              <p:cNvPr id="11" name="Textfeld 10">
+                <a:extLst>
+                  <a:ext uri="{FF2B5EF4-FFF2-40B4-BE49-F238E27FC236}">
+                    <a16:creationId xmlns:a16="http://schemas.microsoft.com/office/drawing/2014/main" id="{BA3F1538-D656-41EF-279B-1DF69A3B0EC8}"/>
+                  </a:ext>
+                </a:extLst>
+              </p:cNvPr>
+              <p:cNvSpPr txBox="1"/>
+              <p:nvPr/>
+            </p:nvSpPr>
+            <p:spPr>
+              <a:xfrm>
+                <a:off x="1014223" y="960555"/>
+                <a:ext cx="1267669" cy="507831"/>
+              </a:xfrm>
+              <a:prstGeom prst="rect">
+                <a:avLst/>
+              </a:prstGeom>
+              <a:solidFill>
+                <a:schemeClr val="tx2">
+                  <a:lumMod val="10000"/>
+                  <a:lumOff val="90000"/>
+                </a:schemeClr>
+              </a:solidFill>
+            </p:spPr>
+            <p:txBody>
+              <a:bodyPr wrap="square" rtlCol="0">
+                <a:spAutoFit/>
+              </a:bodyPr>
+              <a:lstStyle/>
+              <a:p>
+                <a:pPr marL="0" marR="0" lvl="0" indent="0" algn="l" defTabSz="914400" rtl="0" eaLnBrk="1" fontAlgn="auto" latinLnBrk="0" hangingPunct="1">
+                  <a:lnSpc>
+                    <a:spcPct val="100000"/>
+                  </a:lnSpc>
+                  <a:spcBef>
+                    <a:spcPts val="0"/>
+                  </a:spcBef>
+                  <a:spcAft>
+                    <a:spcPts val="0"/>
+                  </a:spcAft>
+                  <a:buClrTx/>
+                  <a:buSzTx/>
+                  <a:buFontTx/>
+                  <a:buNone/>
+                  <a:tabLst/>
+                  <a:defRPr/>
+                </a:pPr>
+                <a:r>
+                  <a:rPr kumimoji="0" lang="de-DE" sz="900" b="0" i="0" u="none" strike="noStrike" kern="1200" cap="none" spc="0" normalizeH="0" baseline="0" noProof="0">
+                    <a:ln>
+                      <a:noFill/>
+                    </a:ln>
+                    <a:solidFill>
+                      <a:srgbClr val="156082">
+                        <a:lumMod val="60000"/>
+                        <a:lumOff val="40000"/>
+                      </a:srgbClr>
+                    </a:solidFill>
+                    <a:effectLst/>
+                    <a:uLnTx/>
+                    <a:uFillTx/>
+                    <a:latin typeface="Aptos" panose="02110004020202020204"/>
+                    <a:ea typeface="+mn-ea"/>
+                    <a:cs typeface="+mn-cs"/>
+                  </a:rPr>
+                  <a:t>Request from outside (</a:t>
+                </a:r>
+                <a:r>
+                  <a:rPr kumimoji="0" lang="de-DE" sz="900" b="0" i="1" u="none" strike="noStrike" kern="1200" cap="none" spc="0" normalizeH="0" baseline="0" noProof="0">
+                    <a:ln>
+                      <a:noFill/>
+                    </a:ln>
+                    <a:solidFill>
+                      <a:srgbClr val="156082">
+                        <a:lumMod val="60000"/>
+                        <a:lumOff val="40000"/>
+                      </a:srgbClr>
+                    </a:solidFill>
+                    <a:effectLst/>
+                    <a:uLnTx/>
+                    <a:uFillTx/>
+                    <a:latin typeface="Aptos" panose="02110004020202020204"/>
+                    <a:ea typeface="+mn-ea"/>
+                    <a:cs typeface="+mn-cs"/>
+                  </a:rPr>
+                  <a:t>connect device x to deviceGroup y</a:t>
+                </a:r>
+                <a:r>
+                  <a:rPr kumimoji="0" lang="de-DE" sz="900" b="0" i="0" u="none" strike="noStrike" kern="1200" cap="none" spc="0" normalizeH="0" baseline="0" noProof="0">
+                    <a:ln>
+                      <a:noFill/>
+                    </a:ln>
+                    <a:solidFill>
+                      <a:srgbClr val="156082">
+                        <a:lumMod val="60000"/>
+                        <a:lumOff val="40000"/>
+                      </a:srgbClr>
+                    </a:solidFill>
+                    <a:effectLst/>
+                    <a:uLnTx/>
+                    <a:uFillTx/>
+                    <a:latin typeface="Aptos" panose="02110004020202020204"/>
+                    <a:ea typeface="+mn-ea"/>
+                    <a:cs typeface="+mn-cs"/>
+                  </a:rPr>
+                  <a:t>)</a:t>
+                </a:r>
+              </a:p>
+            </p:txBody>
+          </p:sp>
+          <p:sp>
+            <p:nvSpPr>
+              <p:cNvPr id="13" name="Textfeld 12">
+                <a:extLst>
+                  <a:ext uri="{FF2B5EF4-FFF2-40B4-BE49-F238E27FC236}">
+                    <a16:creationId xmlns:a16="http://schemas.microsoft.com/office/drawing/2014/main" id="{DCB8913B-A10E-8AA8-1DB4-4C71F72E6F51}"/>
+                  </a:ext>
+                </a:extLst>
+              </p:cNvPr>
+              <p:cNvSpPr txBox="1"/>
+              <p:nvPr/>
+            </p:nvSpPr>
+            <p:spPr>
+              <a:xfrm>
+                <a:off x="3251956" y="716821"/>
+                <a:ext cx="2148637" cy="507831"/>
+              </a:xfrm>
+              <a:prstGeom prst="rect">
+                <a:avLst/>
+              </a:prstGeom>
+              <a:solidFill>
+                <a:schemeClr val="tx2">
+                  <a:lumMod val="10000"/>
+                  <a:lumOff val="90000"/>
+                </a:schemeClr>
+              </a:solidFill>
+            </p:spPr>
+            <p:txBody>
+              <a:bodyPr wrap="square" rtlCol="0">
+                <a:spAutoFit/>
+              </a:bodyPr>
+              <a:lstStyle/>
+              <a:p>
+                <a:pPr marL="0" marR="0" lvl="0" indent="0" algn="l" defTabSz="914400" rtl="0" eaLnBrk="1" fontAlgn="auto" latinLnBrk="0" hangingPunct="1">
+                  <a:lnSpc>
+                    <a:spcPct val="100000"/>
+                  </a:lnSpc>
+                  <a:spcBef>
+                    <a:spcPts val="0"/>
+                  </a:spcBef>
+                  <a:spcAft>
+                    <a:spcPts val="0"/>
+                  </a:spcAft>
+                  <a:buClrTx/>
+                  <a:buSzTx/>
+                  <a:buFontTx/>
+                  <a:buNone/>
+                  <a:tabLst/>
+                  <a:defRPr/>
+                </a:pPr>
+                <a:r>
+                  <a:rPr kumimoji="0" lang="de-DE" sz="900" b="0" i="0" u="none" strike="noStrike" kern="1200" cap="none" spc="0" normalizeH="0" baseline="0" noProof="0">
+                    <a:ln>
+                      <a:noFill/>
+                    </a:ln>
+                    <a:solidFill>
+                      <a:srgbClr val="156082">
+                        <a:lumMod val="60000"/>
+                        <a:lumOff val="40000"/>
+                      </a:srgbClr>
+                    </a:solidFill>
+                    <a:effectLst/>
+                    <a:uLnTx/>
+                    <a:uFillTx/>
+                    <a:latin typeface="Aptos" panose="02110004020202020204"/>
+                    <a:ea typeface="+mn-ea"/>
+                    <a:cs typeface="+mn-cs"/>
+                  </a:rPr>
+                  <a:t>Request gets interpreted:</a:t>
+                </a:r>
+              </a:p>
+              <a:p>
+                <a:pPr marL="0" marR="0" lvl="0" indent="0" algn="l" defTabSz="914400" rtl="0" eaLnBrk="1" fontAlgn="auto" latinLnBrk="0" hangingPunct="1">
+                  <a:lnSpc>
+                    <a:spcPct val="100000"/>
+                  </a:lnSpc>
+                  <a:spcBef>
+                    <a:spcPts val="0"/>
+                  </a:spcBef>
+                  <a:spcAft>
+                    <a:spcPts val="0"/>
+                  </a:spcAft>
+                  <a:buClrTx/>
+                  <a:buSzTx/>
+                  <a:buFontTx/>
+                  <a:buNone/>
+                  <a:tabLst/>
+                  <a:defRPr/>
+                </a:pPr>
+                <a:r>
+                  <a:rPr kumimoji="0" lang="de-DE" sz="900" b="0" i="1" u="none" strike="noStrike" kern="1200" cap="none" spc="0" normalizeH="0" baseline="0" noProof="0">
+                    <a:ln>
+                      <a:noFill/>
+                    </a:ln>
+                    <a:solidFill>
+                      <a:srgbClr val="156082">
+                        <a:lumMod val="60000"/>
+                        <a:lumOff val="40000"/>
+                      </a:srgbClr>
+                    </a:solidFill>
+                    <a:effectLst/>
+                    <a:uLnTx/>
+                    <a:uFillTx/>
+                    <a:latin typeface="Aptos" panose="02110004020202020204"/>
+                    <a:ea typeface="+mn-ea"/>
+                    <a:cs typeface="+mn-cs"/>
+                  </a:rPr>
+                  <a:t>(deviceGroup y needs firmware z) </a:t>
+                </a:r>
+                <a:r>
+                  <a:rPr kumimoji="0" lang="de-DE" sz="900" b="0" i="0" u="none" strike="noStrike" kern="1200" cap="none" spc="0" normalizeH="0" baseline="0" noProof="0">
+                    <a:ln>
+                      <a:noFill/>
+                    </a:ln>
+                    <a:solidFill>
+                      <a:srgbClr val="156082">
+                        <a:lumMod val="60000"/>
+                        <a:lumOff val="40000"/>
+                      </a:srgbClr>
+                    </a:solidFill>
+                    <a:effectLst/>
+                    <a:uLnTx/>
+                    <a:uFillTx/>
+                    <a:latin typeface="Aptos" panose="02110004020202020204"/>
+                    <a:ea typeface="+mn-ea"/>
+                    <a:cs typeface="+mn-cs"/>
+                    <a:sym typeface="Symbol" panose="05050102010706020507" pitchFamily="18" charset="2"/>
+                  </a:rPr>
+                  <a:t></a:t>
+                </a:r>
+                <a:r>
+                  <a:rPr kumimoji="0" lang="de-DE" sz="900" b="0" i="0" u="none" strike="noStrike" kern="1200" cap="none" spc="0" normalizeH="0" baseline="0" noProof="0">
+                    <a:ln>
+                      <a:noFill/>
+                    </a:ln>
+                    <a:solidFill>
+                      <a:srgbClr val="156082">
+                        <a:lumMod val="60000"/>
+                        <a:lumOff val="40000"/>
+                      </a:srgbClr>
+                    </a:solidFill>
+                    <a:effectLst/>
+                    <a:uLnTx/>
+                    <a:uFillTx/>
+                    <a:latin typeface="Aptos" panose="02110004020202020204"/>
+                    <a:ea typeface="+mn-ea"/>
+                    <a:cs typeface="+mn-cs"/>
+                  </a:rPr>
+                  <a:t> association = </a:t>
+                </a:r>
+                <a:r>
+                  <a:rPr kumimoji="0" lang="de-DE" sz="900" b="0" i="1" u="none" strike="noStrike" kern="1200" cap="none" spc="0" normalizeH="0" baseline="0" noProof="0">
+                    <a:ln>
+                      <a:noFill/>
+                    </a:ln>
+                    <a:solidFill>
+                      <a:srgbClr val="156082">
+                        <a:lumMod val="60000"/>
+                        <a:lumOff val="40000"/>
+                      </a:srgbClr>
+                    </a:solidFill>
+                    <a:effectLst/>
+                    <a:uLnTx/>
+                    <a:uFillTx/>
+                    <a:latin typeface="Aptos" panose="02110004020202020204"/>
+                    <a:ea typeface="+mn-ea"/>
+                    <a:cs typeface="+mn-cs"/>
+                  </a:rPr>
+                  <a:t>device x needs firmware z</a:t>
+                </a:r>
+              </a:p>
+            </p:txBody>
+          </p:sp>
+          <p:sp>
+            <p:nvSpPr>
+              <p:cNvPr id="15" name="Textfeld 14">
+                <a:extLst>
+                  <a:ext uri="{FF2B5EF4-FFF2-40B4-BE49-F238E27FC236}">
+                    <a16:creationId xmlns:a16="http://schemas.microsoft.com/office/drawing/2014/main" id="{89B0EDCC-6F86-DF1F-AE3F-997E6F8FAEB8}"/>
+                  </a:ext>
+                </a:extLst>
+              </p:cNvPr>
+              <p:cNvSpPr txBox="1"/>
+              <p:nvPr/>
+            </p:nvSpPr>
+            <p:spPr>
+              <a:xfrm>
+                <a:off x="4322448" y="1260972"/>
+                <a:ext cx="2348081" cy="507831"/>
+              </a:xfrm>
+              <a:prstGeom prst="rect">
+                <a:avLst/>
+              </a:prstGeom>
+              <a:solidFill>
+                <a:schemeClr val="tx2">
+                  <a:lumMod val="10000"/>
+                  <a:lumOff val="90000"/>
+                </a:schemeClr>
+              </a:solidFill>
+            </p:spPr>
+            <p:txBody>
+              <a:bodyPr wrap="square" rtlCol="0">
+                <a:spAutoFit/>
+              </a:bodyPr>
+              <a:lstStyle/>
+              <a:p>
+                <a:pPr marL="0" marR="0" lvl="0" indent="0" algn="l" defTabSz="914400" rtl="0" eaLnBrk="1" fontAlgn="auto" latinLnBrk="0" hangingPunct="1">
+                  <a:lnSpc>
+                    <a:spcPct val="100000"/>
+                  </a:lnSpc>
+                  <a:spcBef>
+                    <a:spcPts val="0"/>
+                  </a:spcBef>
+                  <a:spcAft>
+                    <a:spcPts val="0"/>
+                  </a:spcAft>
+                  <a:buClrTx/>
+                  <a:buSzTx/>
+                  <a:buFontTx/>
+                  <a:buNone/>
+                  <a:tabLst/>
+                  <a:defRPr/>
+                </a:pPr>
+                <a:r>
+                  <a:rPr kumimoji="0" lang="de-DE" sz="900" b="0" i="0" u="none" strike="noStrike" kern="1200" cap="none" spc="0" normalizeH="0" baseline="0" noProof="0">
+                    <a:ln>
+                      <a:noFill/>
+                    </a:ln>
+                    <a:solidFill>
+                      <a:srgbClr val="156082">
+                        <a:lumMod val="60000"/>
+                        <a:lumOff val="40000"/>
+                      </a:srgbClr>
+                    </a:solidFill>
+                    <a:effectLst/>
+                    <a:uLnTx/>
+                    <a:uFillTx/>
+                    <a:latin typeface="Aptos" panose="02110004020202020204"/>
+                    <a:ea typeface="+mn-ea"/>
+                    <a:cs typeface="+mn-cs"/>
+                  </a:rPr>
+                  <a:t>Upon request from outside:</a:t>
+                </a:r>
+              </a:p>
+              <a:p>
+                <a:pPr marL="0" marR="0" lvl="0" indent="0" algn="l" defTabSz="914400" rtl="0" eaLnBrk="1" fontAlgn="auto" latinLnBrk="0" hangingPunct="1">
+                  <a:lnSpc>
+                    <a:spcPct val="100000"/>
+                  </a:lnSpc>
+                  <a:spcBef>
+                    <a:spcPts val="0"/>
+                  </a:spcBef>
+                  <a:spcAft>
+                    <a:spcPts val="0"/>
+                  </a:spcAft>
+                  <a:buClrTx/>
+                  <a:buSzTx/>
+                  <a:buFontTx/>
+                  <a:buNone/>
+                  <a:tabLst/>
+                  <a:defRPr/>
+                </a:pPr>
+                <a:r>
+                  <a:rPr kumimoji="0" lang="de-DE" sz="900" b="0" i="0" u="none" strike="noStrike" kern="1200" cap="none" spc="0" normalizeH="0" baseline="0" noProof="0">
+                    <a:ln>
+                      <a:noFill/>
+                    </a:ln>
+                    <a:solidFill>
+                      <a:srgbClr val="156082">
+                        <a:lumMod val="60000"/>
+                        <a:lumOff val="40000"/>
+                      </a:srgbClr>
+                    </a:solidFill>
+                    <a:effectLst/>
+                    <a:uLnTx/>
+                    <a:uFillTx/>
+                    <a:latin typeface="Aptos" panose="02110004020202020204"/>
+                    <a:ea typeface="+mn-ea"/>
+                    <a:cs typeface="+mn-cs"/>
+                  </a:rPr>
+                  <a:t>Load CandidateDS into CandidateDS,</a:t>
+                </a:r>
+              </a:p>
+              <a:p>
+                <a:pPr marL="0" marR="0" lvl="0" indent="0" algn="l" defTabSz="914400" rtl="0" eaLnBrk="1" fontAlgn="auto" latinLnBrk="0" hangingPunct="1">
+                  <a:lnSpc>
+                    <a:spcPct val="100000"/>
+                  </a:lnSpc>
+                  <a:spcBef>
+                    <a:spcPts val="0"/>
+                  </a:spcBef>
+                  <a:spcAft>
+                    <a:spcPts val="0"/>
+                  </a:spcAft>
+                  <a:buClrTx/>
+                  <a:buSzTx/>
+                  <a:buFontTx/>
+                  <a:buNone/>
+                  <a:tabLst/>
+                  <a:defRPr/>
+                </a:pPr>
+                <a:r>
+                  <a:rPr kumimoji="0" lang="de-DE" sz="900" b="0" i="0" u="none" strike="noStrike" kern="1200" cap="none" spc="0" normalizeH="0" baseline="0" noProof="0">
+                    <a:ln>
+                      <a:noFill/>
+                    </a:ln>
+                    <a:solidFill>
+                      <a:srgbClr val="156082">
+                        <a:lumMod val="60000"/>
+                        <a:lumOff val="40000"/>
+                      </a:srgbClr>
+                    </a:solidFill>
+                    <a:effectLst/>
+                    <a:uLnTx/>
+                    <a:uFillTx/>
+                    <a:latin typeface="Aptos" panose="02110004020202020204"/>
+                    <a:ea typeface="+mn-ea"/>
+                    <a:cs typeface="+mn-cs"/>
+                  </a:rPr>
+                  <a:t>Apply desired changes to CandidateDS</a:t>
+                </a:r>
+              </a:p>
+            </p:txBody>
+          </p:sp>
+          <p:sp>
+            <p:nvSpPr>
+              <p:cNvPr id="17" name="Textfeld 16">
+                <a:extLst>
+                  <a:ext uri="{FF2B5EF4-FFF2-40B4-BE49-F238E27FC236}">
+                    <a16:creationId xmlns:a16="http://schemas.microsoft.com/office/drawing/2014/main" id="{3900CBB4-20A2-78E1-7717-10D9E64A34A8}"/>
+                  </a:ext>
+                </a:extLst>
+              </p:cNvPr>
+              <p:cNvSpPr txBox="1"/>
+              <p:nvPr/>
+            </p:nvSpPr>
+            <p:spPr>
+              <a:xfrm>
+                <a:off x="1833645" y="4086383"/>
+                <a:ext cx="1764997" cy="646331"/>
+              </a:xfrm>
+              <a:prstGeom prst="rect">
+                <a:avLst/>
+              </a:prstGeom>
+              <a:solidFill>
+                <a:schemeClr val="tx2">
+                  <a:lumMod val="10000"/>
+                  <a:lumOff val="90000"/>
+                </a:schemeClr>
+              </a:solidFill>
+            </p:spPr>
+            <p:txBody>
+              <a:bodyPr wrap="square" rtlCol="0">
+                <a:spAutoFit/>
+              </a:bodyPr>
+              <a:lstStyle>
+                <a:defPPr>
+                  <a:defRPr lang="de-DE"/>
+                </a:defPPr>
+                <a:lvl1pPr>
+                  <a:defRPr sz="900">
+                    <a:solidFill>
+                      <a:schemeClr val="accent1">
+                        <a:lumMod val="60000"/>
+                        <a:lumOff val="40000"/>
+                      </a:schemeClr>
+                    </a:solidFill>
+                  </a:defRPr>
+                </a:lvl1pPr>
+              </a:lstStyle>
+              <a:p>
+                <a:pPr marL="0" marR="0" lvl="0" indent="0" algn="l" defTabSz="914400" rtl="0" eaLnBrk="1" fontAlgn="auto" latinLnBrk="0" hangingPunct="1">
+                  <a:lnSpc>
+                    <a:spcPct val="100000"/>
+                  </a:lnSpc>
+                  <a:spcBef>
+                    <a:spcPts val="0"/>
+                  </a:spcBef>
+                  <a:spcAft>
+                    <a:spcPts val="0"/>
+                  </a:spcAft>
+                  <a:buClrTx/>
+                  <a:buSzTx/>
+                  <a:buFontTx/>
+                  <a:buNone/>
+                  <a:tabLst/>
+                  <a:defRPr/>
+                </a:pPr>
+                <a:r>
+                  <a:rPr kumimoji="0" lang="de-DE" sz="900" b="0" i="0" u="none" strike="noStrike" kern="1200" cap="none" spc="0" normalizeH="0" baseline="0" noProof="0">
+                    <a:ln>
+                      <a:noFill/>
+                    </a:ln>
+                    <a:solidFill>
+                      <a:srgbClr val="156082">
+                        <a:lumMod val="60000"/>
+                        <a:lumOff val="40000"/>
+                      </a:srgbClr>
+                    </a:solidFill>
+                    <a:effectLst/>
+                    <a:uLnTx/>
+                    <a:uFillTx/>
+                    <a:latin typeface="Aptos" panose="02110004020202020204"/>
+                    <a:ea typeface="+mn-ea"/>
+                    <a:cs typeface="+mn-cs"/>
+                  </a:rPr>
+                  <a:t>Validation checks if changes to CandidateDS are valid, if yes RunningDS is overwritten by CandidateDS content</a:t>
+                </a:r>
+              </a:p>
+            </p:txBody>
+          </p:sp>
+          <p:sp>
+            <p:nvSpPr>
+              <p:cNvPr id="20" name="Bogen 19">
+                <a:extLst>
+                  <a:ext uri="{FF2B5EF4-FFF2-40B4-BE49-F238E27FC236}">
+                    <a16:creationId xmlns:a16="http://schemas.microsoft.com/office/drawing/2014/main" id="{E2A5C948-67A6-9856-2FA7-81445E9CC456}"/>
+                  </a:ext>
+                </a:extLst>
+              </p:cNvPr>
+              <p:cNvSpPr/>
+              <p:nvPr/>
+            </p:nvSpPr>
+            <p:spPr>
+              <a:xfrm flipH="1">
+                <a:off x="2939581" y="2363473"/>
+                <a:ext cx="2119738" cy="1752143"/>
+              </a:xfrm>
+              <a:prstGeom prst="arc">
+                <a:avLst>
+                  <a:gd name="adj1" fmla="val 16200000"/>
+                  <a:gd name="adj2" fmla="val 5384468"/>
+                </a:avLst>
+              </a:prstGeom>
+              <a:ln w="19050">
+                <a:solidFill>
+                  <a:schemeClr val="accent1">
+                    <a:lumMod val="40000"/>
+                    <a:lumOff val="60000"/>
+                  </a:schemeClr>
+                </a:solidFill>
+                <a:tailEnd type="triangle"/>
+              </a:ln>
+            </p:spPr>
+            <p:style>
+              <a:lnRef idx="2">
+                <a:schemeClr val="accent1"/>
+              </a:lnRef>
+              <a:fillRef idx="0">
+                <a:schemeClr val="accent1"/>
+              </a:fillRef>
+              <a:effectRef idx="1">
+                <a:schemeClr val="accent1"/>
+              </a:effectRef>
+              <a:fontRef idx="minor">
+                <a:schemeClr val="tx1"/>
+              </a:fontRef>
+            </p:style>
+            <p:txBody>
+              <a:bodyPr rtlCol="0" anchor="ctr"/>
+              <a:lstStyle/>
+              <a:p>
+                <a:pPr marL="0" marR="0" lvl="0" indent="0" algn="ctr" defTabSz="914400" rtl="0" eaLnBrk="1" fontAlgn="auto" latinLnBrk="0" hangingPunct="1">
+                  <a:lnSpc>
+                    <a:spcPct val="100000"/>
+                  </a:lnSpc>
+                  <a:spcBef>
+                    <a:spcPts val="0"/>
+                  </a:spcBef>
+                  <a:spcAft>
+                    <a:spcPts val="0"/>
+                  </a:spcAft>
+                  <a:buClrTx/>
+                  <a:buSzTx/>
+                  <a:buFontTx/>
+                  <a:buNone/>
+                  <a:tabLst/>
+                  <a:defRPr/>
+                </a:pPr>
+                <a:endParaRPr kumimoji="0" lang="de-DE" sz="1800" b="0" i="0" u="none" strike="noStrike" kern="1200" cap="none" spc="0" normalizeH="0" baseline="0" noProof="0">
+                  <a:ln>
+                    <a:noFill/>
+                  </a:ln>
+                  <a:solidFill>
+                    <a:prstClr val="black"/>
+                  </a:solidFill>
+                  <a:effectLst/>
+                  <a:uLnTx/>
+                  <a:uFillTx/>
+                  <a:latin typeface="Aptos" panose="02110004020202020204"/>
+                  <a:ea typeface="+mn-ea"/>
+                  <a:cs typeface="+mn-cs"/>
+                </a:endParaRPr>
+              </a:p>
+            </p:txBody>
+          </p:sp>
+          <p:sp>
+            <p:nvSpPr>
+              <p:cNvPr id="22" name="Textfeld 21">
+                <a:extLst>
+                  <a:ext uri="{FF2B5EF4-FFF2-40B4-BE49-F238E27FC236}">
+                    <a16:creationId xmlns:a16="http://schemas.microsoft.com/office/drawing/2014/main" id="{DC9742B5-61E2-1E62-096F-2C5BCE9A30F8}"/>
+                  </a:ext>
+                </a:extLst>
+              </p:cNvPr>
+              <p:cNvSpPr txBox="1"/>
+              <p:nvPr/>
+            </p:nvSpPr>
+            <p:spPr>
+              <a:xfrm>
+                <a:off x="3992652" y="4219914"/>
+                <a:ext cx="1061945" cy="307777"/>
+              </a:xfrm>
+              <a:prstGeom prst="rect">
+                <a:avLst/>
+              </a:prstGeom>
+              <a:solidFill>
+                <a:schemeClr val="accent2">
+                  <a:lumMod val="20000"/>
+                  <a:lumOff val="80000"/>
+                </a:schemeClr>
+              </a:solidFill>
+            </p:spPr>
+            <p:txBody>
+              <a:bodyPr wrap="square" rtlCol="0">
+                <a:spAutoFit/>
+              </a:bodyPr>
+              <a:lstStyle/>
+              <a:p>
+                <a:pPr marL="0" marR="0" lvl="0" indent="0" algn="l" defTabSz="914400" rtl="0" eaLnBrk="1" fontAlgn="auto" latinLnBrk="0" hangingPunct="1">
+                  <a:lnSpc>
+                    <a:spcPct val="100000"/>
+                  </a:lnSpc>
+                  <a:spcBef>
+                    <a:spcPts val="0"/>
+                  </a:spcBef>
+                  <a:spcAft>
+                    <a:spcPts val="0"/>
+                  </a:spcAft>
+                  <a:buClrTx/>
+                  <a:buSzTx/>
+                  <a:buFontTx/>
+                  <a:buNone/>
+                  <a:tabLst/>
+                  <a:defRPr/>
+                </a:pPr>
+                <a:r>
+                  <a:rPr kumimoji="0" lang="de-DE" sz="700" b="0" i="1" u="none" strike="noStrike" kern="1200" cap="none" spc="0" normalizeH="0" baseline="0" noProof="0">
+                    <a:ln>
+                      <a:noFill/>
+                    </a:ln>
+                    <a:solidFill>
+                      <a:srgbClr val="E97132">
+                        <a:lumMod val="75000"/>
+                      </a:srgbClr>
+                    </a:solidFill>
+                    <a:effectLst/>
+                    <a:uLnTx/>
+                    <a:uFillTx/>
+                    <a:latin typeface="Aptos" panose="02110004020202020204"/>
+                    <a:ea typeface="+mn-ea"/>
+                    <a:cs typeface="+mn-cs"/>
+                  </a:rPr>
+                  <a:t>Equipment: Actual</a:t>
+                </a:r>
+              </a:p>
+              <a:p>
+                <a:pPr marL="0" marR="0" lvl="0" indent="0" algn="l" defTabSz="914400" rtl="0" eaLnBrk="1" fontAlgn="auto" latinLnBrk="0" hangingPunct="1">
+                  <a:lnSpc>
+                    <a:spcPct val="100000"/>
+                  </a:lnSpc>
+                  <a:spcBef>
+                    <a:spcPts val="0"/>
+                  </a:spcBef>
+                  <a:spcAft>
+                    <a:spcPts val="0"/>
+                  </a:spcAft>
+                  <a:buClrTx/>
+                  <a:buSzTx/>
+                  <a:buFontTx/>
+                  <a:buNone/>
+                  <a:tabLst/>
+                  <a:defRPr/>
+                </a:pPr>
+                <a:r>
+                  <a:rPr kumimoji="0" lang="de-DE" sz="700" b="0" i="1" u="none" strike="noStrike" kern="1200" cap="none" spc="0" normalizeH="0" baseline="0" noProof="0">
+                    <a:ln>
+                      <a:noFill/>
+                    </a:ln>
+                    <a:solidFill>
+                      <a:srgbClr val="E97132">
+                        <a:lumMod val="75000"/>
+                      </a:srgbClr>
+                    </a:solidFill>
+                    <a:effectLst/>
+                    <a:uLnTx/>
+                    <a:uFillTx/>
+                    <a:latin typeface="Aptos" panose="02110004020202020204"/>
+                    <a:ea typeface="+mn-ea"/>
+                    <a:cs typeface="+mn-cs"/>
+                  </a:rPr>
+                  <a:t>FW: Target (validated)</a:t>
+                </a:r>
+              </a:p>
+            </p:txBody>
+          </p:sp>
+          <p:sp>
+            <p:nvSpPr>
+              <p:cNvPr id="24" name="Textfeld 23">
+                <a:extLst>
+                  <a:ext uri="{FF2B5EF4-FFF2-40B4-BE49-F238E27FC236}">
+                    <a16:creationId xmlns:a16="http://schemas.microsoft.com/office/drawing/2014/main" id="{F992976B-AE57-7C3F-9B78-B1E92CF2F754}"/>
+                  </a:ext>
+                </a:extLst>
+              </p:cNvPr>
+              <p:cNvSpPr txBox="1"/>
+              <p:nvPr/>
+            </p:nvSpPr>
+            <p:spPr>
+              <a:xfrm>
+                <a:off x="4268689" y="4001651"/>
+                <a:ext cx="872434" cy="215444"/>
+              </a:xfrm>
+              <a:prstGeom prst="rect">
+                <a:avLst/>
+              </a:prstGeom>
+              <a:noFill/>
+            </p:spPr>
+            <p:txBody>
+              <a:bodyPr wrap="square" rtlCol="0">
+                <a:spAutoFit/>
+              </a:bodyPr>
+              <a:lstStyle/>
+              <a:p>
+                <a:pPr marL="0" marR="0" lvl="0" indent="0" algn="l" defTabSz="914400" rtl="0" eaLnBrk="1" fontAlgn="auto" latinLnBrk="0" hangingPunct="1">
+                  <a:lnSpc>
+                    <a:spcPct val="100000"/>
+                  </a:lnSpc>
+                  <a:spcBef>
+                    <a:spcPts val="0"/>
+                  </a:spcBef>
+                  <a:spcAft>
+                    <a:spcPts val="0"/>
+                  </a:spcAft>
+                  <a:buClrTx/>
+                  <a:buSzTx/>
+                  <a:buFontTx/>
+                  <a:buNone/>
+                  <a:tabLst/>
+                  <a:defRPr/>
+                </a:pPr>
+                <a:r>
+                  <a:rPr kumimoji="0" lang="de-DE" sz="800" b="0" i="0" u="none" strike="noStrike" kern="1200" cap="none" spc="0" normalizeH="0" baseline="0" noProof="0">
+                    <a:ln>
+                      <a:noFill/>
+                    </a:ln>
+                    <a:solidFill>
+                      <a:srgbClr val="E97132">
+                        <a:lumMod val="75000"/>
+                      </a:srgbClr>
+                    </a:solidFill>
+                    <a:effectLst/>
+                    <a:uLnTx/>
+                    <a:uFillTx/>
+                    <a:latin typeface="Aptos" panose="02110004020202020204"/>
+                    <a:ea typeface="+mn-ea"/>
+                    <a:cs typeface="+mn-cs"/>
+                  </a:rPr>
+                  <a:t>Target state</a:t>
+                </a:r>
+              </a:p>
+            </p:txBody>
+          </p:sp>
+          <p:sp>
+            <p:nvSpPr>
+              <p:cNvPr id="26" name="Textfeld 25">
+                <a:extLst>
+                  <a:ext uri="{FF2B5EF4-FFF2-40B4-BE49-F238E27FC236}">
+                    <a16:creationId xmlns:a16="http://schemas.microsoft.com/office/drawing/2014/main" id="{59F5D333-A885-977A-949E-D90C7737D0ED}"/>
+                  </a:ext>
+                </a:extLst>
+              </p:cNvPr>
+              <p:cNvSpPr txBox="1"/>
+              <p:nvPr/>
+            </p:nvSpPr>
+            <p:spPr>
+              <a:xfrm>
+                <a:off x="7159465" y="3992163"/>
+                <a:ext cx="872434" cy="215444"/>
+              </a:xfrm>
+              <a:prstGeom prst="rect">
+                <a:avLst/>
+              </a:prstGeom>
+              <a:noFill/>
+            </p:spPr>
+            <p:txBody>
+              <a:bodyPr wrap="square" rtlCol="0">
+                <a:spAutoFit/>
+              </a:bodyPr>
+              <a:lstStyle/>
+              <a:p>
+                <a:pPr marL="0" marR="0" lvl="0" indent="0" algn="l" defTabSz="914400" rtl="0" eaLnBrk="1" fontAlgn="auto" latinLnBrk="0" hangingPunct="1">
+                  <a:lnSpc>
+                    <a:spcPct val="100000"/>
+                  </a:lnSpc>
+                  <a:spcBef>
+                    <a:spcPts val="0"/>
+                  </a:spcBef>
+                  <a:spcAft>
+                    <a:spcPts val="0"/>
+                  </a:spcAft>
+                  <a:buClrTx/>
+                  <a:buSzTx/>
+                  <a:buFontTx/>
+                  <a:buNone/>
+                  <a:tabLst/>
+                  <a:defRPr/>
+                </a:pPr>
+                <a:r>
+                  <a:rPr kumimoji="0" lang="de-DE" sz="800" b="0" i="0" u="none" strike="noStrike" kern="1200" cap="none" spc="0" normalizeH="0" baseline="0" noProof="0">
+                    <a:ln>
+                      <a:noFill/>
+                    </a:ln>
+                    <a:solidFill>
+                      <a:srgbClr val="E97132">
+                        <a:lumMod val="75000"/>
+                      </a:srgbClr>
+                    </a:solidFill>
+                    <a:effectLst/>
+                    <a:uLnTx/>
+                    <a:uFillTx/>
+                    <a:latin typeface="Aptos" panose="02110004020202020204"/>
+                    <a:ea typeface="+mn-ea"/>
+                    <a:cs typeface="+mn-cs"/>
+                  </a:rPr>
+                  <a:t>Actual state</a:t>
+                </a:r>
+              </a:p>
+            </p:txBody>
+          </p:sp>
+          <p:sp>
+            <p:nvSpPr>
+              <p:cNvPr id="28" name="Textfeld 27">
+                <a:extLst>
+                  <a:ext uri="{FF2B5EF4-FFF2-40B4-BE49-F238E27FC236}">
+                    <a16:creationId xmlns:a16="http://schemas.microsoft.com/office/drawing/2014/main" id="{EFFE51A6-6847-A544-5F65-DB57A4DA7B98}"/>
+                  </a:ext>
+                </a:extLst>
+              </p:cNvPr>
+              <p:cNvSpPr txBox="1"/>
+              <p:nvPr/>
+            </p:nvSpPr>
+            <p:spPr>
+              <a:xfrm>
+                <a:off x="5622454" y="5618481"/>
+                <a:ext cx="1537012" cy="461665"/>
+              </a:xfrm>
+              <a:prstGeom prst="rect">
+                <a:avLst/>
+              </a:prstGeom>
+              <a:solidFill>
+                <a:schemeClr val="bg1">
+                  <a:lumMod val="95000"/>
+                </a:schemeClr>
+              </a:solidFill>
+            </p:spPr>
+            <p:txBody>
+              <a:bodyPr wrap="square" rtlCol="0">
+                <a:spAutoFit/>
+              </a:bodyPr>
+              <a:lstStyle/>
+              <a:p>
+                <a:pPr marL="0" marR="0" lvl="0" indent="0" algn="l" defTabSz="914400" rtl="0" eaLnBrk="1" fontAlgn="auto" latinLnBrk="0" hangingPunct="1">
+                  <a:lnSpc>
+                    <a:spcPct val="100000"/>
+                  </a:lnSpc>
+                  <a:spcBef>
+                    <a:spcPts val="0"/>
+                  </a:spcBef>
+                  <a:spcAft>
+                    <a:spcPts val="0"/>
+                  </a:spcAft>
+                  <a:buClrTx/>
+                  <a:buSzTx/>
+                  <a:buFontTx/>
+                  <a:buNone/>
+                  <a:tabLst/>
+                  <a:defRPr/>
+                </a:pPr>
+                <a:r>
+                  <a:rPr kumimoji="0" lang="de-DE" sz="800" b="0" i="0" u="none" strike="noStrike" kern="1200" cap="none" spc="0" normalizeH="0" baseline="0" noProof="0">
+                    <a:ln>
+                      <a:noFill/>
+                    </a:ln>
+                    <a:solidFill>
+                      <a:prstClr val="black"/>
+                    </a:solidFill>
+                    <a:effectLst/>
+                    <a:uLnTx/>
+                    <a:uFillTx/>
+                    <a:latin typeface="Aptos" panose="02110004020202020204"/>
+                    <a:ea typeface="+mn-ea"/>
+                    <a:cs typeface="+mn-cs"/>
+                  </a:rPr>
+                  <a:t>ToDos = deviation between target and actual state</a:t>
+                </a:r>
+              </a:p>
+              <a:p>
+                <a:pPr marL="0" marR="0" lvl="0" indent="0" algn="l" defTabSz="914400" rtl="0" eaLnBrk="1" fontAlgn="auto" latinLnBrk="0" hangingPunct="1">
+                  <a:lnSpc>
+                    <a:spcPct val="100000"/>
+                  </a:lnSpc>
+                  <a:spcBef>
+                    <a:spcPts val="0"/>
+                  </a:spcBef>
+                  <a:spcAft>
+                    <a:spcPts val="0"/>
+                  </a:spcAft>
+                  <a:buClrTx/>
+                  <a:buSzTx/>
+                  <a:buFontTx/>
+                  <a:buNone/>
+                  <a:tabLst/>
+                  <a:defRPr/>
+                </a:pPr>
+                <a:r>
+                  <a:rPr kumimoji="0" lang="de-DE" sz="800" b="0" i="0" u="none" strike="noStrike" kern="1200" cap="none" spc="0" normalizeH="0" baseline="0" noProof="0">
+                    <a:ln>
+                      <a:noFill/>
+                    </a:ln>
+                    <a:solidFill>
+                      <a:prstClr val="black"/>
+                    </a:solidFill>
+                    <a:effectLst/>
+                    <a:uLnTx/>
+                    <a:uFillTx/>
+                    <a:latin typeface="Aptos" panose="02110004020202020204"/>
+                    <a:ea typeface="+mn-ea"/>
+                    <a:cs typeface="+mn-cs"/>
+                  </a:rPr>
+                  <a:t>(RunningDS – OperationalDS)</a:t>
+                </a:r>
+              </a:p>
+            </p:txBody>
+          </p:sp>
+          <p:sp>
+            <p:nvSpPr>
+              <p:cNvPr id="30" name="Textfeld 29">
+                <a:extLst>
+                  <a:ext uri="{FF2B5EF4-FFF2-40B4-BE49-F238E27FC236}">
+                    <a16:creationId xmlns:a16="http://schemas.microsoft.com/office/drawing/2014/main" id="{EA99CE17-2A08-24FA-59F4-0E966F44F29F}"/>
+                  </a:ext>
+                </a:extLst>
+              </p:cNvPr>
+              <p:cNvSpPr txBox="1"/>
+              <p:nvPr/>
+            </p:nvSpPr>
+            <p:spPr>
+              <a:xfrm>
+                <a:off x="1237259" y="5358960"/>
+                <a:ext cx="1537012" cy="707886"/>
+              </a:xfrm>
+              <a:prstGeom prst="rect">
+                <a:avLst/>
+              </a:prstGeom>
+              <a:solidFill>
+                <a:schemeClr val="bg1">
+                  <a:lumMod val="95000"/>
+                </a:schemeClr>
+              </a:solidFill>
+            </p:spPr>
+            <p:txBody>
+              <a:bodyPr wrap="square" rtlCol="0">
+                <a:spAutoFit/>
+              </a:bodyPr>
+              <a:lstStyle/>
+              <a:p>
+                <a:pPr marL="0" marR="0" lvl="0" indent="0" algn="l" defTabSz="914400" rtl="0" eaLnBrk="1" fontAlgn="auto" latinLnBrk="0" hangingPunct="1">
+                  <a:lnSpc>
+                    <a:spcPct val="100000"/>
+                  </a:lnSpc>
+                  <a:spcBef>
+                    <a:spcPts val="0"/>
+                  </a:spcBef>
+                  <a:spcAft>
+                    <a:spcPts val="0"/>
+                  </a:spcAft>
+                  <a:buClrTx/>
+                  <a:buSzTx/>
+                  <a:buFontTx/>
+                  <a:buNone/>
+                  <a:tabLst/>
+                  <a:defRPr/>
+                </a:pPr>
+                <a:r>
+                  <a:rPr kumimoji="0" lang="de-DE" sz="800" b="0" i="0" u="none" strike="noStrike" kern="1200" cap="none" spc="0" normalizeH="0" baseline="0" noProof="0">
+                    <a:ln>
+                      <a:noFill/>
+                    </a:ln>
+                    <a:solidFill>
+                      <a:prstClr val="black"/>
+                    </a:solidFill>
+                    <a:effectLst/>
+                    <a:uLnTx/>
+                    <a:uFillTx/>
+                    <a:latin typeface="Aptos" panose="02110004020202020204"/>
+                    <a:ea typeface="+mn-ea"/>
+                    <a:cs typeface="+mn-cs"/>
+                  </a:rPr>
+                  <a:t>All datastores have same data model, but with different meanings:</a:t>
+                </a:r>
+              </a:p>
+              <a:p>
+                <a:pPr marL="171450" marR="0" lvl="0" indent="-171450" algn="l" defTabSz="914400" rtl="0" eaLnBrk="1" fontAlgn="auto" latinLnBrk="0" hangingPunct="1">
+                  <a:lnSpc>
+                    <a:spcPct val="100000"/>
+                  </a:lnSpc>
+                  <a:spcBef>
+                    <a:spcPts val="0"/>
+                  </a:spcBef>
+                  <a:spcAft>
+                    <a:spcPts val="0"/>
+                  </a:spcAft>
+                  <a:buClrTx/>
+                  <a:buSzTx/>
+                  <a:buFontTx/>
+                  <a:buChar char="-"/>
+                  <a:tabLst/>
+                  <a:defRPr/>
+                </a:pPr>
+                <a:r>
+                  <a:rPr kumimoji="0" lang="de-DE" sz="800" b="0" i="0" u="none" strike="noStrike" kern="1200" cap="none" spc="0" normalizeH="0" baseline="0" noProof="0">
+                    <a:ln>
+                      <a:noFill/>
+                    </a:ln>
+                    <a:solidFill>
+                      <a:prstClr val="black"/>
+                    </a:solidFill>
+                    <a:effectLst/>
+                    <a:uLnTx/>
+                    <a:uFillTx/>
+                    <a:latin typeface="Aptos" panose="02110004020202020204"/>
+                    <a:ea typeface="+mn-ea"/>
+                    <a:cs typeface="+mn-cs"/>
+                  </a:rPr>
+                  <a:t>Equipment</a:t>
+                </a:r>
+              </a:p>
+              <a:p>
+                <a:pPr marL="171450" marR="0" lvl="0" indent="-171450" algn="l" defTabSz="914400" rtl="0" eaLnBrk="1" fontAlgn="auto" latinLnBrk="0" hangingPunct="1">
+                  <a:lnSpc>
+                    <a:spcPct val="100000"/>
+                  </a:lnSpc>
+                  <a:spcBef>
+                    <a:spcPts val="0"/>
+                  </a:spcBef>
+                  <a:spcAft>
+                    <a:spcPts val="0"/>
+                  </a:spcAft>
+                  <a:buClrTx/>
+                  <a:buSzTx/>
+                  <a:buFontTx/>
+                  <a:buChar char="-"/>
+                  <a:tabLst/>
+                  <a:defRPr/>
+                </a:pPr>
+                <a:r>
+                  <a:rPr kumimoji="0" lang="de-DE" sz="800" b="0" i="0" u="none" strike="noStrike" kern="1200" cap="none" spc="0" normalizeH="0" baseline="0" noProof="0">
+                    <a:ln>
+                      <a:noFill/>
+                    </a:ln>
+                    <a:solidFill>
+                      <a:prstClr val="black"/>
+                    </a:solidFill>
+                    <a:effectLst/>
+                    <a:uLnTx/>
+                    <a:uFillTx/>
+                    <a:latin typeface="Aptos" panose="02110004020202020204"/>
+                    <a:ea typeface="+mn-ea"/>
+                    <a:cs typeface="+mn-cs"/>
+                  </a:rPr>
+                  <a:t>Firmware</a:t>
+                </a:r>
+              </a:p>
+            </p:txBody>
+          </p:sp>
+          <p:sp>
+            <p:nvSpPr>
+              <p:cNvPr id="32" name="Textfeld 31">
+                <a:extLst>
+                  <a:ext uri="{FF2B5EF4-FFF2-40B4-BE49-F238E27FC236}">
+                    <a16:creationId xmlns:a16="http://schemas.microsoft.com/office/drawing/2014/main" id="{7A0BFA75-46D0-C999-92CC-EAC78156021C}"/>
+                  </a:ext>
+                </a:extLst>
+              </p:cNvPr>
+              <p:cNvSpPr txBox="1"/>
+              <p:nvPr/>
+            </p:nvSpPr>
+            <p:spPr>
+              <a:xfrm>
+                <a:off x="7218276" y="2363473"/>
+                <a:ext cx="1605887" cy="461665"/>
+              </a:xfrm>
+              <a:prstGeom prst="rect">
+                <a:avLst/>
+              </a:prstGeom>
+              <a:solidFill>
+                <a:schemeClr val="bg1">
+                  <a:lumMod val="95000"/>
+                </a:schemeClr>
+              </a:solidFill>
+            </p:spPr>
+            <p:txBody>
+              <a:bodyPr wrap="square" rtlCol="0">
+                <a:spAutoFit/>
+              </a:bodyPr>
+              <a:lstStyle/>
+              <a:p>
+                <a:pPr marL="0" marR="0" lvl="0" indent="0" algn="l" defTabSz="914400" rtl="0" eaLnBrk="1" fontAlgn="auto" latinLnBrk="0" hangingPunct="1">
+                  <a:lnSpc>
+                    <a:spcPct val="100000"/>
+                  </a:lnSpc>
+                  <a:spcBef>
+                    <a:spcPts val="0"/>
+                  </a:spcBef>
+                  <a:spcAft>
+                    <a:spcPts val="0"/>
+                  </a:spcAft>
+                  <a:buClrTx/>
+                  <a:buSzTx/>
+                  <a:buFontTx/>
+                  <a:buNone/>
+                  <a:tabLst/>
+                  <a:defRPr/>
+                </a:pPr>
+                <a:r>
+                  <a:rPr kumimoji="0" lang="de-DE" sz="800" b="0" i="0" u="none" strike="noStrike" kern="1200" cap="none" spc="0" normalizeH="0" baseline="0" noProof="0">
+                    <a:ln>
+                      <a:noFill/>
+                    </a:ln>
+                    <a:solidFill>
+                      <a:prstClr val="black"/>
+                    </a:solidFill>
+                    <a:effectLst/>
+                    <a:uLnTx/>
+                    <a:uFillTx/>
+                    <a:latin typeface="Aptos" panose="02110004020202020204"/>
+                    <a:ea typeface="+mn-ea"/>
+                    <a:cs typeface="+mn-cs"/>
+                  </a:rPr>
+                  <a:t>OperationalDS only contains data required for managing the domain (state on devices)</a:t>
+                </a:r>
+              </a:p>
+            </p:txBody>
+          </p:sp>
+          <p:sp>
+            <p:nvSpPr>
+              <p:cNvPr id="34" name="Textfeld 33">
+                <a:extLst>
+                  <a:ext uri="{FF2B5EF4-FFF2-40B4-BE49-F238E27FC236}">
+                    <a16:creationId xmlns:a16="http://schemas.microsoft.com/office/drawing/2014/main" id="{422B8B3E-B215-E77B-C872-39FAFA17819F}"/>
+                  </a:ext>
+                </a:extLst>
+              </p:cNvPr>
+              <p:cNvSpPr txBox="1"/>
+              <p:nvPr/>
+            </p:nvSpPr>
+            <p:spPr>
+              <a:xfrm>
+                <a:off x="7241269" y="4183479"/>
+                <a:ext cx="896299" cy="307777"/>
+              </a:xfrm>
+              <a:prstGeom prst="rect">
+                <a:avLst/>
+              </a:prstGeom>
+              <a:solidFill>
+                <a:schemeClr val="accent2">
+                  <a:lumMod val="20000"/>
+                  <a:lumOff val="80000"/>
+                </a:schemeClr>
+              </a:solidFill>
+            </p:spPr>
+            <p:txBody>
+              <a:bodyPr wrap="square" rtlCol="0">
+                <a:spAutoFit/>
+              </a:bodyPr>
+              <a:lstStyle/>
+              <a:p>
+                <a:pPr marL="0" marR="0" lvl="0" indent="0" algn="l" defTabSz="914400" rtl="0" eaLnBrk="1" fontAlgn="auto" latinLnBrk="0" hangingPunct="1">
+                  <a:lnSpc>
+                    <a:spcPct val="100000"/>
+                  </a:lnSpc>
+                  <a:spcBef>
+                    <a:spcPts val="0"/>
+                  </a:spcBef>
+                  <a:spcAft>
+                    <a:spcPts val="0"/>
+                  </a:spcAft>
+                  <a:buClrTx/>
+                  <a:buSzTx/>
+                  <a:buFontTx/>
+                  <a:buNone/>
+                  <a:tabLst/>
+                  <a:defRPr/>
+                </a:pPr>
+                <a:r>
+                  <a:rPr kumimoji="0" lang="de-DE" sz="700" b="0" i="1" u="none" strike="noStrike" kern="1200" cap="none" spc="0" normalizeH="0" baseline="0" noProof="0">
+                    <a:ln>
+                      <a:noFill/>
+                    </a:ln>
+                    <a:solidFill>
+                      <a:srgbClr val="E97132">
+                        <a:lumMod val="75000"/>
+                      </a:srgbClr>
+                    </a:solidFill>
+                    <a:effectLst/>
+                    <a:uLnTx/>
+                    <a:uFillTx/>
+                    <a:latin typeface="Aptos" panose="02110004020202020204"/>
+                    <a:ea typeface="+mn-ea"/>
+                    <a:cs typeface="+mn-cs"/>
+                  </a:rPr>
+                  <a:t>Equipment: Actual</a:t>
+                </a:r>
+              </a:p>
+              <a:p>
+                <a:pPr marL="0" marR="0" lvl="0" indent="0" algn="l" defTabSz="914400" rtl="0" eaLnBrk="1" fontAlgn="auto" latinLnBrk="0" hangingPunct="1">
+                  <a:lnSpc>
+                    <a:spcPct val="100000"/>
+                  </a:lnSpc>
+                  <a:spcBef>
+                    <a:spcPts val="0"/>
+                  </a:spcBef>
+                  <a:spcAft>
+                    <a:spcPts val="0"/>
+                  </a:spcAft>
+                  <a:buClrTx/>
+                  <a:buSzTx/>
+                  <a:buFontTx/>
+                  <a:buNone/>
+                  <a:tabLst/>
+                  <a:defRPr/>
+                </a:pPr>
+                <a:r>
+                  <a:rPr kumimoji="0" lang="de-DE" sz="700" b="0" i="1" u="none" strike="noStrike" kern="1200" cap="none" spc="0" normalizeH="0" baseline="0" noProof="0">
+                    <a:ln>
+                      <a:noFill/>
+                    </a:ln>
+                    <a:solidFill>
+                      <a:srgbClr val="E97132">
+                        <a:lumMod val="75000"/>
+                      </a:srgbClr>
+                    </a:solidFill>
+                    <a:effectLst/>
+                    <a:uLnTx/>
+                    <a:uFillTx/>
+                    <a:latin typeface="Aptos" panose="02110004020202020204"/>
+                    <a:ea typeface="+mn-ea"/>
+                    <a:cs typeface="+mn-cs"/>
+                  </a:rPr>
+                  <a:t>FW: Actual</a:t>
+                </a:r>
+              </a:p>
+            </p:txBody>
+          </p:sp>
+          <p:sp>
+            <p:nvSpPr>
+              <p:cNvPr id="36" name="Textfeld 35">
+                <a:extLst>
+                  <a:ext uri="{FF2B5EF4-FFF2-40B4-BE49-F238E27FC236}">
+                    <a16:creationId xmlns:a16="http://schemas.microsoft.com/office/drawing/2014/main" id="{5F306B7F-03FE-BFD9-7652-A4588DCBF8E8}"/>
+                  </a:ext>
+                </a:extLst>
+              </p:cNvPr>
+              <p:cNvSpPr txBox="1"/>
+              <p:nvPr/>
+            </p:nvSpPr>
+            <p:spPr>
+              <a:xfrm>
+                <a:off x="9491966" y="2363473"/>
+                <a:ext cx="1707390" cy="784830"/>
+              </a:xfrm>
+              <a:prstGeom prst="rect">
+                <a:avLst/>
+              </a:prstGeom>
+              <a:solidFill>
+                <a:schemeClr val="tx2">
+                  <a:lumMod val="10000"/>
+                  <a:lumOff val="90000"/>
+                </a:schemeClr>
+              </a:solidFill>
+            </p:spPr>
+            <p:txBody>
+              <a:bodyPr wrap="square" rtlCol="0">
+                <a:spAutoFit/>
+              </a:bodyPr>
+              <a:lstStyle/>
+              <a:p>
+                <a:pPr marL="0" marR="0" lvl="0" indent="0" algn="l" defTabSz="914400" rtl="0" eaLnBrk="1" fontAlgn="auto" latinLnBrk="0" hangingPunct="1">
+                  <a:lnSpc>
+                    <a:spcPct val="100000"/>
+                  </a:lnSpc>
+                  <a:spcBef>
+                    <a:spcPts val="0"/>
+                  </a:spcBef>
+                  <a:spcAft>
+                    <a:spcPts val="0"/>
+                  </a:spcAft>
+                  <a:buClrTx/>
+                  <a:buSzTx/>
+                  <a:buFontTx/>
+                  <a:buNone/>
+                  <a:tabLst/>
+                  <a:defRPr/>
+                </a:pPr>
+                <a:r>
+                  <a:rPr kumimoji="0" lang="de-DE" sz="900" b="0" i="0" u="none" strike="noStrike" kern="1200" cap="none" spc="0" normalizeH="0" baseline="0" noProof="0">
+                    <a:ln>
+                      <a:noFill/>
+                    </a:ln>
+                    <a:solidFill>
+                      <a:srgbClr val="156082">
+                        <a:lumMod val="60000"/>
+                        <a:lumOff val="40000"/>
+                      </a:srgbClr>
+                    </a:solidFill>
+                    <a:effectLst/>
+                    <a:uLnTx/>
+                    <a:uFillTx/>
+                    <a:latin typeface="Aptos" panose="02110004020202020204"/>
+                    <a:ea typeface="+mn-ea"/>
+                    <a:cs typeface="+mn-cs"/>
+                  </a:rPr>
+                  <a:t>Load current equipment + firmware state from devices</a:t>
+                </a:r>
+              </a:p>
+              <a:p>
+                <a:pPr marL="0" marR="0" lvl="0" indent="0" algn="l" defTabSz="914400" rtl="0" eaLnBrk="1" fontAlgn="auto" latinLnBrk="0" hangingPunct="1">
+                  <a:lnSpc>
+                    <a:spcPct val="100000"/>
+                  </a:lnSpc>
+                  <a:spcBef>
+                    <a:spcPts val="0"/>
+                  </a:spcBef>
+                  <a:spcAft>
+                    <a:spcPts val="0"/>
+                  </a:spcAft>
+                  <a:buClrTx/>
+                  <a:buSzTx/>
+                  <a:buFontTx/>
+                  <a:buNone/>
+                  <a:tabLst/>
+                  <a:defRPr/>
+                </a:pPr>
+                <a:r>
+                  <a:rPr kumimoji="0" lang="de-DE" sz="900" b="0" i="0" u="none" strike="noStrike" kern="1200" cap="none" spc="0" normalizeH="0" baseline="0" noProof="0">
+                    <a:ln>
+                      <a:noFill/>
+                    </a:ln>
+                    <a:solidFill>
+                      <a:srgbClr val="156082">
+                        <a:lumMod val="60000"/>
+                        <a:lumOff val="40000"/>
+                      </a:srgbClr>
+                    </a:solidFill>
+                    <a:effectLst/>
+                    <a:uLnTx/>
+                    <a:uFillTx/>
+                    <a:latin typeface="Aptos" panose="02110004020202020204"/>
+                    <a:ea typeface="+mn-ea"/>
+                    <a:cs typeface="+mn-cs"/>
+                  </a:rPr>
+                  <a:t>(Difficulty: interface is generic, but data is not homogenous </a:t>
+                </a:r>
+                <a:r>
+                  <a:rPr kumimoji="0" lang="de-DE" sz="900" b="0" i="0" u="none" strike="noStrike" kern="1200" cap="none" spc="0" normalizeH="0" baseline="0" noProof="0">
+                    <a:ln>
+                      <a:noFill/>
+                    </a:ln>
+                    <a:solidFill>
+                      <a:srgbClr val="156082">
+                        <a:lumMod val="60000"/>
+                        <a:lumOff val="40000"/>
+                      </a:srgbClr>
+                    </a:solidFill>
+                    <a:effectLst/>
+                    <a:uLnTx/>
+                    <a:uFillTx/>
+                    <a:latin typeface="Aptos" panose="02110004020202020204"/>
+                    <a:ea typeface="+mn-ea"/>
+                    <a:cs typeface="+mn-cs"/>
+                    <a:sym typeface="Symbol" panose="05050102010706020507" pitchFamily="18" charset="2"/>
+                  </a:rPr>
+                  <a:t></a:t>
+                </a:r>
+                <a:r>
+                  <a:rPr kumimoji="0" lang="de-DE" sz="900" b="0" i="0" u="none" strike="noStrike" kern="1200" cap="none" spc="0" normalizeH="0" baseline="0" noProof="0">
+                    <a:ln>
+                      <a:noFill/>
+                    </a:ln>
+                    <a:solidFill>
+                      <a:srgbClr val="156082">
+                        <a:lumMod val="60000"/>
+                        <a:lumOff val="40000"/>
+                      </a:srgbClr>
+                    </a:solidFill>
+                    <a:effectLst/>
+                    <a:uLnTx/>
+                    <a:uFillTx/>
+                    <a:latin typeface="Aptos" panose="02110004020202020204"/>
+                    <a:ea typeface="+mn-ea"/>
+                    <a:cs typeface="+mn-cs"/>
+                  </a:rPr>
+                  <a:t> interpretation of data required)</a:t>
+                </a:r>
+              </a:p>
+            </p:txBody>
+          </p:sp>
+          <p:sp>
+            <p:nvSpPr>
+              <p:cNvPr id="38" name="Textfeld 37">
+                <a:extLst>
+                  <a:ext uri="{FF2B5EF4-FFF2-40B4-BE49-F238E27FC236}">
+                    <a16:creationId xmlns:a16="http://schemas.microsoft.com/office/drawing/2014/main" id="{14283448-EA28-DABA-0675-02BE241E9FE3}"/>
+                  </a:ext>
+                </a:extLst>
+              </p:cNvPr>
+              <p:cNvSpPr txBox="1"/>
+              <p:nvPr/>
+            </p:nvSpPr>
+            <p:spPr>
+              <a:xfrm>
+                <a:off x="9287037" y="5482071"/>
+                <a:ext cx="1605887" cy="923330"/>
+              </a:xfrm>
+              <a:prstGeom prst="rect">
+                <a:avLst/>
+              </a:prstGeom>
+              <a:solidFill>
+                <a:schemeClr val="tx2">
+                  <a:lumMod val="10000"/>
+                  <a:lumOff val="90000"/>
+                </a:schemeClr>
+              </a:solidFill>
+            </p:spPr>
+            <p:txBody>
+              <a:bodyPr wrap="square" rtlCol="0">
+                <a:spAutoFit/>
+              </a:bodyPr>
+              <a:lstStyle>
+                <a:defPPr>
+                  <a:defRPr lang="de-DE"/>
+                </a:defPPr>
+                <a:lvl1pPr>
+                  <a:defRPr sz="900">
+                    <a:solidFill>
+                      <a:schemeClr val="accent1">
+                        <a:lumMod val="60000"/>
+                        <a:lumOff val="40000"/>
+                      </a:schemeClr>
+                    </a:solidFill>
+                  </a:defRPr>
+                </a:lvl1pPr>
+              </a:lstStyle>
+              <a:p>
+                <a:pPr marL="0" marR="0" lvl="0" indent="0" algn="l" defTabSz="914400" rtl="0" eaLnBrk="1" fontAlgn="auto" latinLnBrk="0" hangingPunct="1">
+                  <a:lnSpc>
+                    <a:spcPct val="100000"/>
+                  </a:lnSpc>
+                  <a:spcBef>
+                    <a:spcPts val="0"/>
+                  </a:spcBef>
+                  <a:spcAft>
+                    <a:spcPts val="0"/>
+                  </a:spcAft>
+                  <a:buClrTx/>
+                  <a:buSzTx/>
+                  <a:buFontTx/>
+                  <a:buNone/>
+                  <a:tabLst/>
+                  <a:defRPr/>
+                </a:pPr>
+                <a:r>
+                  <a:rPr kumimoji="0" lang="de-DE" sz="900" b="0" i="0" u="none" strike="noStrike" kern="1200" cap="none" spc="0" normalizeH="0" baseline="0" noProof="0">
+                    <a:ln>
+                      <a:noFill/>
+                    </a:ln>
+                    <a:solidFill>
+                      <a:srgbClr val="156082">
+                        <a:lumMod val="60000"/>
+                        <a:lumOff val="40000"/>
+                      </a:srgbClr>
+                    </a:solidFill>
+                    <a:effectLst/>
+                    <a:uLnTx/>
+                    <a:uFillTx/>
+                    <a:latin typeface="Aptos" panose="02110004020202020204"/>
+                    <a:ea typeface="+mn-ea"/>
+                    <a:cs typeface="+mn-cs"/>
+                  </a:rPr>
+                  <a:t>Implementation functions write changes into the network</a:t>
+                </a:r>
+              </a:p>
+              <a:p>
+                <a:pPr marL="0" marR="0" lvl="0" indent="0" algn="l" defTabSz="914400" rtl="0" eaLnBrk="1" fontAlgn="auto" latinLnBrk="0" hangingPunct="1">
+                  <a:lnSpc>
+                    <a:spcPct val="100000"/>
+                  </a:lnSpc>
+                  <a:spcBef>
+                    <a:spcPts val="0"/>
+                  </a:spcBef>
+                  <a:spcAft>
+                    <a:spcPts val="0"/>
+                  </a:spcAft>
+                  <a:buClrTx/>
+                  <a:buSzTx/>
+                  <a:buFontTx/>
+                  <a:buNone/>
+                  <a:tabLst/>
+                  <a:defRPr/>
+                </a:pPr>
+                <a:r>
+                  <a:rPr kumimoji="0" lang="de-DE" sz="900" b="0" i="0" u="none" strike="noStrike" kern="1200" cap="none" spc="0" normalizeH="0" baseline="0" noProof="0">
+                    <a:ln>
+                      <a:noFill/>
+                    </a:ln>
+                    <a:solidFill>
+                      <a:srgbClr val="156082">
+                        <a:lumMod val="60000"/>
+                        <a:lumOff val="40000"/>
+                      </a:srgbClr>
+                    </a:solidFill>
+                    <a:effectLst/>
+                    <a:uLnTx/>
+                    <a:uFillTx/>
+                    <a:latin typeface="Aptos" panose="02110004020202020204"/>
+                    <a:ea typeface="+mn-ea"/>
+                    <a:cs typeface="+mn-cs"/>
+                  </a:rPr>
+                  <a:t>(RPC1: download of FW to device, RPC2: device unpacks FW) </a:t>
+                </a:r>
+              </a:p>
+            </p:txBody>
+          </p:sp>
+        </p:grpSp>
+        <p:sp>
+          <p:nvSpPr>
+            <p:cNvPr id="18" name="Bogen 17">
+              <a:extLst>
+                <a:ext uri="{FF2B5EF4-FFF2-40B4-BE49-F238E27FC236}">
+                  <a16:creationId xmlns:a16="http://schemas.microsoft.com/office/drawing/2014/main" id="{AD31250E-8E6A-2970-B0DC-802571E12286}"/>
+                </a:ext>
+              </a:extLst>
+            </p:cNvPr>
+            <p:cNvSpPr/>
+            <p:nvPr/>
+          </p:nvSpPr>
+          <p:spPr>
+            <a:xfrm>
+              <a:off x="24431" y="1076866"/>
+              <a:ext cx="4433719" cy="1752143"/>
+            </a:xfrm>
+            <a:prstGeom prst="arc">
+              <a:avLst>
+                <a:gd name="adj1" fmla="val 16200000"/>
+                <a:gd name="adj2" fmla="val 205146"/>
+              </a:avLst>
+            </a:prstGeom>
+            <a:ln w="19050">
+              <a:solidFill>
+                <a:schemeClr val="accent1">
+                  <a:lumMod val="40000"/>
+                  <a:lumOff val="60000"/>
+                </a:schemeClr>
+              </a:solidFill>
+              <a:tailEnd type="triangle"/>
+            </a:ln>
+          </p:spPr>
+          <p:style>
+            <a:lnRef idx="2">
+              <a:schemeClr val="accent1"/>
+            </a:lnRef>
+            <a:fillRef idx="0">
+              <a:schemeClr val="accent1"/>
+            </a:fillRef>
+            <a:effectRef idx="1">
+              <a:schemeClr val="accent1"/>
+            </a:effectRef>
+            <a:fontRef idx="minor">
+              <a:schemeClr val="tx1"/>
+            </a:fontRef>
+          </p:style>
+          <p:txBody>
+            <a:bodyPr rtlCol="0" anchor="ctr"/>
+            <a:lstStyle/>
+            <a:p>
+              <a:pPr marL="0" marR="0" lvl="0" indent="0" algn="ctr" defTabSz="914400" rtl="0" eaLnBrk="1" fontAlgn="auto" latinLnBrk="0" hangingPunct="1">
+                <a:lnSpc>
+                  <a:spcPct val="100000"/>
+                </a:lnSpc>
+                <a:spcBef>
+                  <a:spcPts val="0"/>
+                </a:spcBef>
+                <a:spcAft>
+                  <a:spcPts val="0"/>
+                </a:spcAft>
+                <a:buClrTx/>
+                <a:buSzTx/>
+                <a:buFontTx/>
+                <a:buNone/>
+                <a:tabLst/>
+                <a:defRPr/>
+              </a:pPr>
+              <a:endParaRPr kumimoji="0" lang="de-DE" sz="1800" b="0" i="0" u="none" strike="noStrike" kern="1200" cap="none" spc="0" normalizeH="0" baseline="0" noProof="0">
+                <a:ln>
+                  <a:noFill/>
+                </a:ln>
+                <a:solidFill>
+                  <a:prstClr val="black"/>
+                </a:solidFill>
+                <a:effectLst/>
+                <a:uLnTx/>
+                <a:uFillTx/>
+                <a:latin typeface="Aptos" panose="02110004020202020204"/>
+                <a:ea typeface="+mn-ea"/>
+                <a:cs typeface="+mn-cs"/>
+              </a:endParaRPr>
+            </a:p>
+          </p:txBody>
+        </p:sp>
+      </p:grpSp>
+      <p:cxnSp>
+        <p:nvCxnSpPr>
+          <p:cNvPr id="9" name="Gerader Verbinder 8">
+            <a:extLst>
+              <a:ext uri="{FF2B5EF4-FFF2-40B4-BE49-F238E27FC236}">
+                <a16:creationId xmlns:a16="http://schemas.microsoft.com/office/drawing/2014/main" id="{58BBA6DD-F3DC-7921-E860-7DCB8DA4605A}"/>
+              </a:ext>
+            </a:extLst>
+          </p:cNvPr>
+          <p:cNvCxnSpPr/>
+          <p:nvPr/>
+        </p:nvCxnSpPr>
+        <p:spPr>
+          <a:xfrm flipH="1">
+            <a:off x="7519649" y="2758231"/>
+            <a:ext cx="48127" cy="882579"/>
+          </a:xfrm>
+          <a:prstGeom prst="line">
+            <a:avLst/>
+          </a:prstGeom>
+          <a:ln w="9525">
+            <a:solidFill>
+              <a:schemeClr val="tx1">
+                <a:lumMod val="50000"/>
+                <a:lumOff val="50000"/>
+              </a:schemeClr>
+            </a:solidFill>
+            <a:prstDash val="sysDot"/>
+          </a:ln>
+        </p:spPr>
+        <p:style>
+          <a:lnRef idx="2">
+            <a:schemeClr val="accent1"/>
+          </a:lnRef>
+          <a:fillRef idx="0">
+            <a:schemeClr val="accent1"/>
+          </a:fillRef>
+          <a:effectRef idx="1">
+            <a:schemeClr val="accent1"/>
+          </a:effectRef>
+          <a:fontRef idx="minor">
+            <a:schemeClr val="tx1"/>
+          </a:fontRef>
+        </p:style>
+      </p:cxnSp>
+      <p:sp>
+        <p:nvSpPr>
+          <p:cNvPr id="14" name="Textfeld 13">
+            <a:extLst>
+              <a:ext uri="{FF2B5EF4-FFF2-40B4-BE49-F238E27FC236}">
+                <a16:creationId xmlns:a16="http://schemas.microsoft.com/office/drawing/2014/main" id="{97C794AF-333E-4B67-F0C5-E210CC193FDD}"/>
+              </a:ext>
+            </a:extLst>
+          </p:cNvPr>
+          <p:cNvSpPr txBox="1"/>
+          <p:nvPr/>
+        </p:nvSpPr>
+        <p:spPr>
+          <a:xfrm>
+            <a:off x="4719755" y="1756152"/>
+            <a:ext cx="982825" cy="307777"/>
+          </a:xfrm>
+          <a:prstGeom prst="rect">
+            <a:avLst/>
+          </a:prstGeom>
+          <a:solidFill>
+            <a:schemeClr val="accent2">
+              <a:lumMod val="20000"/>
+              <a:lumOff val="80000"/>
+            </a:schemeClr>
+          </a:solidFill>
+        </p:spPr>
+        <p:txBody>
+          <a:bodyPr wrap="square" rtlCol="0">
+            <a:spAutoFit/>
+          </a:bodyPr>
+          <a:lstStyle/>
+          <a:p>
+            <a:pPr marL="0" marR="0" lvl="0" indent="0" algn="l" defTabSz="914400" rtl="0" eaLnBrk="1" fontAlgn="auto" latinLnBrk="0" hangingPunct="1">
+              <a:lnSpc>
+                <a:spcPct val="100000"/>
+              </a:lnSpc>
+              <a:spcBef>
+                <a:spcPts val="0"/>
+              </a:spcBef>
+              <a:spcAft>
+                <a:spcPts val="0"/>
+              </a:spcAft>
+              <a:buClrTx/>
+              <a:buSzTx/>
+              <a:buFontTx/>
+              <a:buNone/>
+              <a:tabLst/>
+              <a:defRPr/>
+            </a:pPr>
+            <a:r>
+              <a:rPr kumimoji="0" lang="de-DE" sz="700" b="0" i="1" u="none" strike="noStrike" kern="1200" cap="none" spc="0" normalizeH="0" baseline="0" noProof="0">
+                <a:ln>
+                  <a:noFill/>
+                </a:ln>
+                <a:solidFill>
+                  <a:srgbClr val="E97132">
+                    <a:lumMod val="75000"/>
+                  </a:srgbClr>
+                </a:solidFill>
+                <a:effectLst/>
+                <a:uLnTx/>
+                <a:uFillTx/>
+                <a:latin typeface="Aptos" panose="02110004020202020204"/>
+                <a:ea typeface="+mn-ea"/>
+                <a:cs typeface="+mn-cs"/>
+              </a:rPr>
+              <a:t>Equipment: Actual</a:t>
+            </a:r>
+          </a:p>
+          <a:p>
+            <a:pPr marL="0" marR="0" lvl="0" indent="0" algn="l" defTabSz="914400" rtl="0" eaLnBrk="1" fontAlgn="auto" latinLnBrk="0" hangingPunct="1">
+              <a:lnSpc>
+                <a:spcPct val="100000"/>
+              </a:lnSpc>
+              <a:spcBef>
+                <a:spcPts val="0"/>
+              </a:spcBef>
+              <a:spcAft>
+                <a:spcPts val="0"/>
+              </a:spcAft>
+              <a:buClrTx/>
+              <a:buSzTx/>
+              <a:buFontTx/>
+              <a:buNone/>
+              <a:tabLst/>
+              <a:defRPr/>
+            </a:pPr>
+            <a:r>
+              <a:rPr kumimoji="0" lang="de-DE" sz="700" b="0" i="1" u="none" strike="noStrike" kern="1200" cap="none" spc="0" normalizeH="0" baseline="0" noProof="0">
+                <a:ln>
+                  <a:noFill/>
+                </a:ln>
+                <a:solidFill>
+                  <a:srgbClr val="E97132">
+                    <a:lumMod val="75000"/>
+                  </a:srgbClr>
+                </a:solidFill>
+                <a:effectLst/>
+                <a:uLnTx/>
+                <a:uFillTx/>
+                <a:latin typeface="Aptos" panose="02110004020202020204"/>
+                <a:ea typeface="+mn-ea"/>
+                <a:cs typeface="+mn-cs"/>
+              </a:rPr>
+              <a:t>FW: Target (desired)</a:t>
+            </a:r>
+          </a:p>
+        </p:txBody>
+      </p:sp>
+    </p:spTree>
+    <p:extLst>
+      <p:ext uri="{BB962C8B-B14F-4D97-AF65-F5344CB8AC3E}">
+        <p14:creationId xmlns:p14="http://schemas.microsoft.com/office/powerpoint/2010/main" val="3561300164"/>
       </p:ext>
     </p:extLst>
   </p:cSld>
@@ -7516,6 +13138,321 @@
 </a:theme>
 </file>
 
+<file path=ppt/theme/theme2.xml><?xml version="1.0" encoding="utf-8"?>
+<a:theme xmlns:a="http://schemas.openxmlformats.org/drawingml/2006/main" name="1_Office">
+  <a:themeElements>
+    <a:clrScheme name="Office">
+      <a:dk1>
+        <a:sysClr val="windowText" lastClr="000000"/>
+      </a:dk1>
+      <a:lt1>
+        <a:sysClr val="window" lastClr="FFFFFF"/>
+      </a:lt1>
+      <a:dk2>
+        <a:srgbClr val="0E2841"/>
+      </a:dk2>
+      <a:lt2>
+        <a:srgbClr val="E8E8E8"/>
+      </a:lt2>
+      <a:accent1>
+        <a:srgbClr val="156082"/>
+      </a:accent1>
+      <a:accent2>
+        <a:srgbClr val="E97132"/>
+      </a:accent2>
+      <a:accent3>
+        <a:srgbClr val="196B24"/>
+      </a:accent3>
+      <a:accent4>
+        <a:srgbClr val="0F9ED5"/>
+      </a:accent4>
+      <a:accent5>
+        <a:srgbClr val="A02B93"/>
+      </a:accent5>
+      <a:accent6>
+        <a:srgbClr val="4EA72E"/>
+      </a:accent6>
+      <a:hlink>
+        <a:srgbClr val="467886"/>
+      </a:hlink>
+      <a:folHlink>
+        <a:srgbClr val="96607D"/>
+      </a:folHlink>
+    </a:clrScheme>
+    <a:fontScheme name="Office">
+      <a:majorFont>
+        <a:latin typeface="Aptos Display" panose="02110004020202020204"/>
+        <a:ea typeface=""/>
+        <a:cs typeface=""/>
+        <a:font script="Jpan" typeface="游ゴシック Light"/>
+        <a:font script="Hang" typeface="맑은 고딕"/>
+        <a:font script="Hans" typeface="等线 Light"/>
+        <a:font script="Hant" typeface="新細明體"/>
+        <a:font script="Arab" typeface="Times New Roman"/>
+        <a:font script="Hebr" typeface="Times New Roman"/>
+        <a:font script="Thai" typeface="Angsana New"/>
+        <a:font script="Ethi" typeface="Nyala"/>
+        <a:font script="Beng" typeface="Vrinda"/>
+        <a:font script="Gujr" typeface="Shruti"/>
+        <a:font script="Khmr" typeface="MoolBoran"/>
+        <a:font script="Knda" typeface="Tunga"/>
+        <a:font script="Guru" typeface="Raavi"/>
+        <a:font script="Cans" typeface="Euphemia"/>
+        <a:font script="Cher" typeface="Plantagenet Cherokee"/>
+        <a:font script="Yiii" typeface="Microsoft Yi Baiti"/>
+        <a:font script="Tibt" typeface="Microsoft Himalaya"/>
+        <a:font script="Thaa" typeface="MV Boli"/>
+        <a:font script="Deva" typeface="Mangal"/>
+        <a:font script="Telu" typeface="Gautami"/>
+        <a:font script="Taml" typeface="Latha"/>
+        <a:font script="Syrc" typeface="Estrangelo Edessa"/>
+        <a:font script="Orya" typeface="Kalinga"/>
+        <a:font script="Mlym" typeface="Kartika"/>
+        <a:font script="Laoo" typeface="DokChampa"/>
+        <a:font script="Sinh" typeface="Iskoola Pota"/>
+        <a:font script="Mong" typeface="Mongolian Baiti"/>
+        <a:font script="Viet" typeface="Times New Roman"/>
+        <a:font script="Uigh" typeface="Microsoft Uighur"/>
+        <a:font script="Geor" typeface="Sylfaen"/>
+        <a:font script="Armn" typeface="Arial"/>
+        <a:font script="Bugi" typeface="Leelawadee UI"/>
+        <a:font script="Bopo" typeface="Microsoft JhengHei"/>
+        <a:font script="Java" typeface="Javanese Text"/>
+        <a:font script="Lisu" typeface="Segoe UI"/>
+        <a:font script="Mymr" typeface="Myanmar Text"/>
+        <a:font script="Nkoo" typeface="Ebrima"/>
+        <a:font script="Olck" typeface="Nirmala UI"/>
+        <a:font script="Osma" typeface="Ebrima"/>
+        <a:font script="Phag" typeface="Phagspa"/>
+        <a:font script="Syrn" typeface="Estrangelo Edessa"/>
+        <a:font script="Syrj" typeface="Estrangelo Edessa"/>
+        <a:font script="Syre" typeface="Estrangelo Edessa"/>
+        <a:font script="Sora" typeface="Nirmala UI"/>
+        <a:font script="Tale" typeface="Microsoft Tai Le"/>
+        <a:font script="Talu" typeface="Microsoft New Tai Lue"/>
+        <a:font script="Tfng" typeface="Ebrima"/>
+      </a:majorFont>
+      <a:minorFont>
+        <a:latin typeface="Aptos" panose="02110004020202020204"/>
+        <a:ea typeface=""/>
+        <a:cs typeface=""/>
+        <a:font script="Jpan" typeface="游ゴシック"/>
+        <a:font script="Hang" typeface="맑은 고딕"/>
+        <a:font script="Hans" typeface="等线"/>
+        <a:font script="Hant" typeface="新細明體"/>
+        <a:font script="Arab" typeface="Arial"/>
+        <a:font script="Hebr" typeface="Arial"/>
+        <a:font script="Thai" typeface="Cordia New"/>
+        <a:font script="Ethi" typeface="Nyala"/>
+        <a:font script="Beng" typeface="Vrinda"/>
+        <a:font script="Gujr" typeface="Shruti"/>
+        <a:font script="Khmr" typeface="DaunPenh"/>
+        <a:font script="Knda" typeface="Tunga"/>
+        <a:font script="Guru" typeface="Raavi"/>
+        <a:font script="Cans" typeface="Euphemia"/>
+        <a:font script="Cher" typeface="Plantagenet Cherokee"/>
+        <a:font script="Yiii" typeface="Microsoft Yi Baiti"/>
+        <a:font script="Tibt" typeface="Microsoft Himalaya"/>
+        <a:font script="Thaa" typeface="MV Boli"/>
+        <a:font script="Deva" typeface="Mangal"/>
+        <a:font script="Telu" typeface="Gautami"/>
+        <a:font script="Taml" typeface="Latha"/>
+        <a:font script="Syrc" typeface="Estrangelo Edessa"/>
+        <a:font script="Orya" typeface="Kalinga"/>
+        <a:font script="Mlym" typeface="Kartika"/>
+        <a:font script="Laoo" typeface="DokChampa"/>
+        <a:font script="Sinh" typeface="Iskoola Pota"/>
+        <a:font script="Mong" typeface="Mongolian Baiti"/>
+        <a:font script="Viet" typeface="Arial"/>
+        <a:font script="Uigh" typeface="Microsoft Uighur"/>
+        <a:font script="Geor" typeface="Sylfaen"/>
+        <a:font script="Armn" typeface="Arial"/>
+        <a:font script="Bugi" typeface="Leelawadee UI"/>
+        <a:font script="Bopo" typeface="Microsoft JhengHei"/>
+        <a:font script="Java" typeface="Javanese Text"/>
+        <a:font script="Lisu" typeface="Segoe UI"/>
+        <a:font script="Mymr" typeface="Myanmar Text"/>
+        <a:font script="Nkoo" typeface="Ebrima"/>
+        <a:font script="Olck" typeface="Nirmala UI"/>
+        <a:font script="Osma" typeface="Ebrima"/>
+        <a:font script="Phag" typeface="Phagspa"/>
+        <a:font script="Syrn" typeface="Estrangelo Edessa"/>
+        <a:font script="Syrj" typeface="Estrangelo Edessa"/>
+        <a:font script="Syre" typeface="Estrangelo Edessa"/>
+        <a:font script="Sora" typeface="Nirmala UI"/>
+        <a:font script="Tale" typeface="Microsoft Tai Le"/>
+        <a:font script="Talu" typeface="Microsoft New Tai Lue"/>
+        <a:font script="Tfng" typeface="Ebrima"/>
+      </a:minorFont>
+    </a:fontScheme>
+    <a:fmtScheme name="Office">
+      <a:fillStyleLst>
+        <a:solidFill>
+          <a:schemeClr val="phClr"/>
+        </a:solidFill>
+        <a:gradFill rotWithShape="1">
+          <a:gsLst>
+            <a:gs pos="0">
+              <a:schemeClr val="phClr">
+                <a:lumMod val="110000"/>
+                <a:satMod val="105000"/>
+                <a:tint val="67000"/>
+              </a:schemeClr>
+            </a:gs>
+            <a:gs pos="50000">
+              <a:schemeClr val="phClr">
+                <a:lumMod val="105000"/>
+                <a:satMod val="103000"/>
+                <a:tint val="73000"/>
+              </a:schemeClr>
+            </a:gs>
+            <a:gs pos="100000">
+              <a:schemeClr val="phClr">
+                <a:lumMod val="105000"/>
+                <a:satMod val="109000"/>
+                <a:tint val="81000"/>
+              </a:schemeClr>
+            </a:gs>
+          </a:gsLst>
+          <a:lin ang="5400000" scaled="0"/>
+        </a:gradFill>
+        <a:gradFill rotWithShape="1">
+          <a:gsLst>
+            <a:gs pos="0">
+              <a:schemeClr val="phClr">
+                <a:satMod val="103000"/>
+                <a:lumMod val="102000"/>
+                <a:tint val="94000"/>
+              </a:schemeClr>
+            </a:gs>
+            <a:gs pos="50000">
+              <a:schemeClr val="phClr">
+                <a:satMod val="110000"/>
+                <a:lumMod val="100000"/>
+                <a:shade val="100000"/>
+              </a:schemeClr>
+            </a:gs>
+            <a:gs pos="100000">
+              <a:schemeClr val="phClr">
+                <a:lumMod val="99000"/>
+                <a:satMod val="120000"/>
+                <a:shade val="78000"/>
+              </a:schemeClr>
+            </a:gs>
+          </a:gsLst>
+          <a:lin ang="5400000" scaled="0"/>
+        </a:gradFill>
+      </a:fillStyleLst>
+      <a:lnStyleLst>
+        <a:ln w="12700" cap="flat" cmpd="sng" algn="ctr">
+          <a:solidFill>
+            <a:schemeClr val="phClr"/>
+          </a:solidFill>
+          <a:prstDash val="solid"/>
+          <a:miter lim="800000"/>
+        </a:ln>
+        <a:ln w="19050" cap="flat" cmpd="sng" algn="ctr">
+          <a:solidFill>
+            <a:schemeClr val="phClr"/>
+          </a:solidFill>
+          <a:prstDash val="solid"/>
+          <a:miter lim="800000"/>
+        </a:ln>
+        <a:ln w="25400" cap="flat" cmpd="sng" algn="ctr">
+          <a:solidFill>
+            <a:schemeClr val="phClr"/>
+          </a:solidFill>
+          <a:prstDash val="solid"/>
+          <a:miter lim="800000"/>
+        </a:ln>
+      </a:lnStyleLst>
+      <a:effectStyleLst>
+        <a:effectStyle>
+          <a:effectLst/>
+        </a:effectStyle>
+        <a:effectStyle>
+          <a:effectLst/>
+        </a:effectStyle>
+        <a:effectStyle>
+          <a:effectLst>
+            <a:outerShdw blurRad="57150" dist="19050" dir="5400000" algn="ctr" rotWithShape="0">
+              <a:srgbClr val="000000">
+                <a:alpha val="63000"/>
+              </a:srgbClr>
+            </a:outerShdw>
+          </a:effectLst>
+        </a:effectStyle>
+      </a:effectStyleLst>
+      <a:bgFillStyleLst>
+        <a:solidFill>
+          <a:schemeClr val="phClr"/>
+        </a:solidFill>
+        <a:solidFill>
+          <a:schemeClr val="phClr">
+            <a:tint val="95000"/>
+            <a:satMod val="170000"/>
+          </a:schemeClr>
+        </a:solidFill>
+        <a:gradFill rotWithShape="1">
+          <a:gsLst>
+            <a:gs pos="0">
+              <a:schemeClr val="phClr">
+                <a:tint val="93000"/>
+                <a:satMod val="150000"/>
+                <a:shade val="98000"/>
+                <a:lumMod val="102000"/>
+              </a:schemeClr>
+            </a:gs>
+            <a:gs pos="50000">
+              <a:schemeClr val="phClr">
+                <a:tint val="98000"/>
+                <a:satMod val="130000"/>
+                <a:shade val="90000"/>
+                <a:lumMod val="103000"/>
+              </a:schemeClr>
+            </a:gs>
+            <a:gs pos="100000">
+              <a:schemeClr val="phClr">
+                <a:shade val="63000"/>
+                <a:satMod val="120000"/>
+              </a:schemeClr>
+            </a:gs>
+          </a:gsLst>
+          <a:lin ang="5400000" scaled="0"/>
+        </a:gradFill>
+      </a:bgFillStyleLst>
+    </a:fmtScheme>
+  </a:themeElements>
+  <a:objectDefaults>
+    <a:lnDef>
+      <a:spPr/>
+      <a:bodyPr/>
+      <a:lstStyle/>
+      <a:style>
+        <a:lnRef idx="2">
+          <a:schemeClr val="accent1"/>
+        </a:lnRef>
+        <a:fillRef idx="0">
+          <a:schemeClr val="accent1"/>
+        </a:fillRef>
+        <a:effectRef idx="1">
+          <a:schemeClr val="accent1"/>
+        </a:effectRef>
+        <a:fontRef idx="minor">
+          <a:schemeClr val="tx1"/>
+        </a:fontRef>
+      </a:style>
+    </a:lnDef>
+  </a:objectDefaults>
+  <a:extraClrSchemeLst/>
+  <a:extLst>
+    <a:ext uri="{05A4C25C-085E-4340-85A3-A5531E510DB2}">
+      <thm15:themeFamily xmlns:thm15="http://schemas.microsoft.com/office/thememl/2012/main" name="Office Theme" id="{2E142A2C-CD16-42D6-873A-C26D2A0506FA}" vid="{1BDDFF52-6CD6-40A5-AB3C-68EB2F1E4D0A}"/>
+    </a:ext>
+  </a:extLst>
+</a:theme>
+</file>
+
 <file path=docMetadata/LabelInfo.xml><?xml version="1.0" encoding="utf-8"?>
 <clbl:labelList xmlns:clbl="http://schemas.microsoft.com/office/2020/mipLabelMetadata">
   <clbl:label id="{4ced55a7-e3ff-412d-8b16-16c16d29a51e}" enabled="1" method="Privileged" siteId="{9744600e-3e04-492e-baa1-25ec245c6f10}" removed="0"/>

--- a/spec/additionalDocumentation/AutomationArchitecture/diagrams/260623 AutomationArchitecture.pptx
+++ b/spec/additionalDocumentation/AutomationArchitecture/diagrams/260623 AutomationArchitecture.pptx
@@ -10659,12 +10659,167 @@
           </a:p>
         </p:txBody>
       </p:sp>
+      <p:cxnSp>
+        <p:nvCxnSpPr>
+          <p:cNvPr id="9" name="Gerader Verbinder 8">
+            <a:extLst>
+              <a:ext uri="{FF2B5EF4-FFF2-40B4-BE49-F238E27FC236}">
+                <a16:creationId xmlns:a16="http://schemas.microsoft.com/office/drawing/2014/main" id="{58BBA6DD-F3DC-7921-E860-7DCB8DA4605A}"/>
+              </a:ext>
+            </a:extLst>
+          </p:cNvPr>
+          <p:cNvCxnSpPr/>
+          <p:nvPr/>
+        </p:nvCxnSpPr>
+        <p:spPr>
+          <a:xfrm flipH="1">
+            <a:off x="7519649" y="2758231"/>
+            <a:ext cx="48127" cy="882579"/>
+          </a:xfrm>
+          <a:prstGeom prst="line">
+            <a:avLst/>
+          </a:prstGeom>
+          <a:ln w="9525">
+            <a:solidFill>
+              <a:schemeClr val="tx1">
+                <a:lumMod val="50000"/>
+                <a:lumOff val="50000"/>
+              </a:schemeClr>
+            </a:solidFill>
+            <a:prstDash val="sysDot"/>
+          </a:ln>
+        </p:spPr>
+        <p:style>
+          <a:lnRef idx="2">
+            <a:schemeClr val="accent1"/>
+          </a:lnRef>
+          <a:fillRef idx="0">
+            <a:schemeClr val="accent1"/>
+          </a:fillRef>
+          <a:effectRef idx="1">
+            <a:schemeClr val="accent1"/>
+          </a:effectRef>
+          <a:fontRef idx="minor">
+            <a:schemeClr val="tx1"/>
+          </a:fontRef>
+        </p:style>
+      </p:cxnSp>
+      <p:sp>
+        <p:nvSpPr>
+          <p:cNvPr id="14" name="Textfeld 13">
+            <a:extLst>
+              <a:ext uri="{FF2B5EF4-FFF2-40B4-BE49-F238E27FC236}">
+                <a16:creationId xmlns:a16="http://schemas.microsoft.com/office/drawing/2014/main" id="{97C794AF-333E-4B67-F0C5-E210CC193FDD}"/>
+              </a:ext>
+            </a:extLst>
+          </p:cNvPr>
+          <p:cNvSpPr txBox="1"/>
+          <p:nvPr/>
+        </p:nvSpPr>
+        <p:spPr>
+          <a:xfrm>
+            <a:off x="4719755" y="1756152"/>
+            <a:ext cx="982825" cy="307777"/>
+          </a:xfrm>
+          <a:prstGeom prst="rect">
+            <a:avLst/>
+          </a:prstGeom>
+          <a:solidFill>
+            <a:schemeClr val="accent2">
+              <a:lumMod val="20000"/>
+              <a:lumOff val="80000"/>
+            </a:schemeClr>
+          </a:solidFill>
+        </p:spPr>
+        <p:txBody>
+          <a:bodyPr wrap="square" rtlCol="0">
+            <a:spAutoFit/>
+          </a:bodyPr>
+          <a:lstStyle/>
+          <a:p>
+            <a:pPr marL="0" marR="0" lvl="0" indent="0" algn="l" defTabSz="914400" rtl="0" eaLnBrk="1" fontAlgn="auto" latinLnBrk="0" hangingPunct="1">
+              <a:lnSpc>
+                <a:spcPct val="100000"/>
+              </a:lnSpc>
+              <a:spcBef>
+                <a:spcPts val="0"/>
+              </a:spcBef>
+              <a:spcAft>
+                <a:spcPts val="0"/>
+              </a:spcAft>
+              <a:buClrTx/>
+              <a:buSzTx/>
+              <a:buFontTx/>
+              <a:buNone/>
+              <a:tabLst/>
+              <a:defRPr/>
+            </a:pPr>
+            <a:r>
+              <a:rPr kumimoji="0" lang="de-DE" sz="700" b="0" i="1" u="none" strike="noStrike" kern="1200" cap="none" spc="0" normalizeH="0" baseline="0" noProof="0">
+                <a:ln>
+                  <a:noFill/>
+                </a:ln>
+                <a:solidFill>
+                  <a:srgbClr val="E97132">
+                    <a:lumMod val="75000"/>
+                  </a:srgbClr>
+                </a:solidFill>
+                <a:effectLst/>
+                <a:uLnTx/>
+                <a:uFillTx/>
+                <a:latin typeface="Aptos" panose="02110004020202020204"/>
+                <a:ea typeface="+mn-ea"/>
+                <a:cs typeface="+mn-cs"/>
+              </a:rPr>
+              <a:t>Equipment: Actual</a:t>
+            </a:r>
+          </a:p>
+          <a:p>
+            <a:pPr marL="0" marR="0" lvl="0" indent="0" algn="l" defTabSz="914400" rtl="0" eaLnBrk="1" fontAlgn="auto" latinLnBrk="0" hangingPunct="1">
+              <a:lnSpc>
+                <a:spcPct val="100000"/>
+              </a:lnSpc>
+              <a:spcBef>
+                <a:spcPts val="0"/>
+              </a:spcBef>
+              <a:spcAft>
+                <a:spcPts val="0"/>
+              </a:spcAft>
+              <a:buClrTx/>
+              <a:buSzTx/>
+              <a:buFontTx/>
+              <a:buNone/>
+              <a:tabLst/>
+              <a:defRPr/>
+            </a:pPr>
+            <a:r>
+              <a:rPr kumimoji="0" lang="de-DE" sz="700" b="0" i="1" u="none" strike="noStrike" kern="1200" cap="none" spc="0" normalizeH="0" baseline="0" noProof="0">
+                <a:ln>
+                  <a:noFill/>
+                </a:ln>
+                <a:solidFill>
+                  <a:srgbClr val="E97132">
+                    <a:lumMod val="75000"/>
+                  </a:srgbClr>
+                </a:solidFill>
+                <a:effectLst/>
+                <a:uLnTx/>
+                <a:uFillTx/>
+                <a:latin typeface="Aptos" panose="02110004020202020204"/>
+                <a:ea typeface="+mn-ea"/>
+                <a:cs typeface="+mn-cs"/>
+              </a:rPr>
+              <a:t>FW: Target (desired)</a:t>
+            </a:r>
+          </a:p>
+        </p:txBody>
+      </p:sp>
       <p:grpSp>
         <p:nvGrpSpPr>
-          <p:cNvPr id="5" name="Gruppieren 4">
-            <a:extLst>
-              <a:ext uri="{FF2B5EF4-FFF2-40B4-BE49-F238E27FC236}">
-                <a16:creationId xmlns:a16="http://schemas.microsoft.com/office/drawing/2014/main" id="{C694F6EA-2A5B-52FE-12FE-6EAF7CAD78B4}"/>
+          <p:cNvPr id="21" name="Gruppieren 20">
+            <a:extLst>
+              <a:ext uri="{FF2B5EF4-FFF2-40B4-BE49-F238E27FC236}">
+                <a16:creationId xmlns:a16="http://schemas.microsoft.com/office/drawing/2014/main" id="{9E98993C-EB10-AD5E-5F0B-9B9EB28E06C2}"/>
               </a:ext>
             </a:extLst>
           </p:cNvPr>
@@ -10675,16 +10830,16 @@
           <a:xfrm>
             <a:off x="137739" y="676798"/>
             <a:ext cx="11174925" cy="5688580"/>
-            <a:chOff x="24431" y="716821"/>
+            <a:chOff x="137739" y="676798"/>
             <a:chExt cx="11174925" cy="5688580"/>
           </a:xfrm>
         </p:grpSpPr>
         <p:grpSp>
           <p:nvGrpSpPr>
-            <p:cNvPr id="4" name="Gruppieren 3">
+            <p:cNvPr id="5" name="Gruppieren 4">
               <a:extLst>
                 <a:ext uri="{FF2B5EF4-FFF2-40B4-BE49-F238E27FC236}">
-                  <a16:creationId xmlns:a16="http://schemas.microsoft.com/office/drawing/2014/main" id="{603C7A46-581C-1FF9-745B-53D0005345CF}"/>
+                  <a16:creationId xmlns:a16="http://schemas.microsoft.com/office/drawing/2014/main" id="{C694F6EA-2A5B-52FE-12FE-6EAF7CAD78B4}"/>
                 </a:ext>
               </a:extLst>
             </p:cNvPr>
@@ -10693,93 +10848,937 @@
           </p:nvGrpSpPr>
           <p:grpSpPr>
             <a:xfrm>
-              <a:off x="857880" y="716821"/>
-              <a:ext cx="10341476" cy="5688580"/>
-              <a:chOff x="857880" y="716821"/>
-              <a:chExt cx="10341476" cy="5688580"/>
+              <a:off x="137739" y="676798"/>
+              <a:ext cx="11174925" cy="5688580"/>
+              <a:chOff x="24431" y="716821"/>
+              <a:chExt cx="11174925" cy="5688580"/>
             </a:xfrm>
           </p:grpSpPr>
-          <p:pic>
-            <p:nvPicPr>
-              <p:cNvPr id="3" name="Grafik 2">
+          <p:grpSp>
+            <p:nvGrpSpPr>
+              <p:cNvPr id="4" name="Gruppieren 3">
                 <a:extLst>
                   <a:ext uri="{FF2B5EF4-FFF2-40B4-BE49-F238E27FC236}">
-                    <a16:creationId xmlns:a16="http://schemas.microsoft.com/office/drawing/2014/main" id="{FDD897E9-0EF3-B589-C5E2-C398A97D179D}"/>
+                    <a16:creationId xmlns:a16="http://schemas.microsoft.com/office/drawing/2014/main" id="{603C7A46-581C-1FF9-745B-53D0005345CF}"/>
                   </a:ext>
                 </a:extLst>
               </p:cNvPr>
-              <p:cNvPicPr>
-                <a:picLocks noChangeAspect="1"/>
-              </p:cNvPicPr>
+              <p:cNvGrpSpPr/>
               <p:nvPr/>
-            </p:nvPicPr>
-            <p:blipFill>
-              <a:blip r:embed="rId2"/>
-              <a:stretch>
-                <a:fillRect/>
-              </a:stretch>
-            </p:blipFill>
-            <p:spPr>
+            </p:nvGrpSpPr>
+            <p:grpSpPr>
               <a:xfrm>
-                <a:off x="1251890" y="1241448"/>
-                <a:ext cx="9247024" cy="4579177"/>
+                <a:off x="857880" y="716821"/>
+                <a:ext cx="10341476" cy="5688580"/>
+                <a:chOff x="857880" y="716821"/>
+                <a:chExt cx="10341476" cy="5688580"/>
               </a:xfrm>
-              <a:prstGeom prst="rect">
-                <a:avLst/>
-              </a:prstGeom>
-            </p:spPr>
-          </p:pic>
-          <p:sp>
-            <p:nvSpPr>
-              <p:cNvPr id="6" name="Textfeld 5">
-                <a:extLst>
-                  <a:ext uri="{FF2B5EF4-FFF2-40B4-BE49-F238E27FC236}">
-                    <a16:creationId xmlns:a16="http://schemas.microsoft.com/office/drawing/2014/main" id="{0B5EA730-4D2D-9497-613B-704C82512945}"/>
-                  </a:ext>
-                </a:extLst>
-              </p:cNvPr>
-              <p:cNvSpPr txBox="1"/>
-              <p:nvPr/>
-            </p:nvSpPr>
-            <p:spPr>
-              <a:xfrm>
-                <a:off x="857880" y="2203154"/>
-                <a:ext cx="1424012" cy="707886"/>
-              </a:xfrm>
-              <a:prstGeom prst="rect">
-                <a:avLst/>
-              </a:prstGeom>
-              <a:solidFill>
-                <a:schemeClr val="bg1">
-                  <a:lumMod val="95000"/>
-                </a:schemeClr>
-              </a:solidFill>
-            </p:spPr>
-            <p:txBody>
-              <a:bodyPr wrap="square" rtlCol="0">
-                <a:spAutoFit/>
-              </a:bodyPr>
-              <a:lstStyle/>
-              <a:p>
-                <a:pPr marL="0" marR="0" lvl="0" indent="0" algn="l" defTabSz="914400" rtl="0" eaLnBrk="1" fontAlgn="auto" latinLnBrk="0" hangingPunct="1">
-                  <a:lnSpc>
-                    <a:spcPct val="100000"/>
-                  </a:lnSpc>
-                  <a:spcBef>
-                    <a:spcPts val="0"/>
-                  </a:spcBef>
-                  <a:spcAft>
-                    <a:spcPts val="0"/>
-                  </a:spcAft>
-                  <a:buClrTx/>
-                  <a:buSzTx/>
-                  <a:buFontTx/>
-                  <a:buNone/>
-                  <a:tabLst/>
-                  <a:defRPr/>
-                </a:pPr>
-                <a:r>
-                  <a:rPr kumimoji="0" lang="de-DE" sz="800" b="0" i="0" u="none" strike="noStrike" kern="1200" cap="none" spc="0" normalizeH="0" baseline="0" noProof="0">
+            </p:grpSpPr>
+            <p:pic>
+              <p:nvPicPr>
+                <p:cNvPr id="3" name="Grafik 2">
+                  <a:extLst>
+                    <a:ext uri="{FF2B5EF4-FFF2-40B4-BE49-F238E27FC236}">
+                      <a16:creationId xmlns:a16="http://schemas.microsoft.com/office/drawing/2014/main" id="{FDD897E9-0EF3-B589-C5E2-C398A97D179D}"/>
+                    </a:ext>
+                  </a:extLst>
+                </p:cNvPr>
+                <p:cNvPicPr>
+                  <a:picLocks noChangeAspect="1"/>
+                </p:cNvPicPr>
+                <p:nvPr/>
+              </p:nvPicPr>
+              <p:blipFill>
+                <a:blip r:embed="rId2"/>
+                <a:stretch>
+                  <a:fillRect/>
+                </a:stretch>
+              </p:blipFill>
+              <p:spPr>
+                <a:xfrm>
+                  <a:off x="1251890" y="1241448"/>
+                  <a:ext cx="9247024" cy="4579177"/>
+                </a:xfrm>
+                <a:prstGeom prst="rect">
+                  <a:avLst/>
+                </a:prstGeom>
+              </p:spPr>
+            </p:pic>
+            <p:sp>
+              <p:nvSpPr>
+                <p:cNvPr id="6" name="Textfeld 5">
+                  <a:extLst>
+                    <a:ext uri="{FF2B5EF4-FFF2-40B4-BE49-F238E27FC236}">
+                      <a16:creationId xmlns:a16="http://schemas.microsoft.com/office/drawing/2014/main" id="{0B5EA730-4D2D-9497-613B-704C82512945}"/>
+                    </a:ext>
+                  </a:extLst>
+                </p:cNvPr>
+                <p:cNvSpPr txBox="1"/>
+                <p:nvPr/>
+              </p:nvSpPr>
+              <p:spPr>
+                <a:xfrm>
+                  <a:off x="857880" y="2203154"/>
+                  <a:ext cx="1424012" cy="707886"/>
+                </a:xfrm>
+                <a:prstGeom prst="rect">
+                  <a:avLst/>
+                </a:prstGeom>
+                <a:solidFill>
+                  <a:schemeClr val="bg1">
+                    <a:lumMod val="95000"/>
+                  </a:schemeClr>
+                </a:solidFill>
+              </p:spPr>
+              <p:txBody>
+                <a:bodyPr wrap="square" rtlCol="0">
+                  <a:spAutoFit/>
+                </a:bodyPr>
+                <a:lstStyle/>
+                <a:p>
+                  <a:pPr marL="0" marR="0" lvl="0" indent="0" algn="l" defTabSz="914400" rtl="0" eaLnBrk="1" fontAlgn="auto" latinLnBrk="0" hangingPunct="1">
+                    <a:lnSpc>
+                      <a:spcPct val="100000"/>
+                    </a:lnSpc>
+                    <a:spcBef>
+                      <a:spcPts val="0"/>
+                    </a:spcBef>
+                    <a:spcAft>
+                      <a:spcPts val="0"/>
+                    </a:spcAft>
+                    <a:buClrTx/>
+                    <a:buSzTx/>
+                    <a:buFontTx/>
+                    <a:buNone/>
+                    <a:tabLst/>
+                    <a:defRPr/>
+                  </a:pPr>
+                  <a:r>
+                    <a:rPr kumimoji="0" lang="de-DE" sz="800" b="0" i="0" u="none" strike="noStrike" kern="1200" cap="none" spc="0" normalizeH="0" baseline="0" noProof="0">
+                      <a:ln>
+                        <a:noFill/>
+                      </a:ln>
+                      <a:solidFill>
+                        <a:prstClr val="black"/>
+                      </a:solidFill>
+                      <a:effectLst/>
+                      <a:uLnTx/>
+                      <a:uFillTx/>
+                      <a:latin typeface="Aptos" panose="02110004020202020204"/>
+                      <a:ea typeface="+mn-ea"/>
+                      <a:cs typeface="+mn-cs"/>
+                    </a:rPr>
+                    <a:t>Generic interface to outside</a:t>
+                  </a:r>
+                </a:p>
+                <a:p>
+                  <a:pPr marL="171450" marR="0" lvl="0" indent="-171450" algn="l" defTabSz="914400" rtl="0" eaLnBrk="1" fontAlgn="auto" latinLnBrk="0" hangingPunct="1">
+                    <a:lnSpc>
+                      <a:spcPct val="100000"/>
+                    </a:lnSpc>
+                    <a:spcBef>
+                      <a:spcPts val="0"/>
+                    </a:spcBef>
+                    <a:spcAft>
+                      <a:spcPts val="0"/>
+                    </a:spcAft>
+                    <a:buClrTx/>
+                    <a:buSzTx/>
+                    <a:buFont typeface="Arial" panose="020B0604020202020204" pitchFamily="34" charset="0"/>
+                    <a:buChar char="•"/>
+                    <a:tabLst/>
+                    <a:defRPr/>
+                  </a:pPr>
+                  <a:r>
+                    <a:rPr kumimoji="0" lang="de-DE" sz="800" b="0" i="0" u="none" strike="noStrike" kern="1200" cap="none" spc="0" normalizeH="0" baseline="0" noProof="0">
+                      <a:ln>
+                        <a:noFill/>
+                      </a:ln>
+                      <a:solidFill>
+                        <a:prstClr val="black"/>
+                      </a:solidFill>
+                      <a:effectLst/>
+                      <a:uLnTx/>
+                      <a:uFillTx/>
+                      <a:latin typeface="Aptos" panose="02110004020202020204"/>
+                      <a:ea typeface="+mn-ea"/>
+                      <a:cs typeface="+mn-cs"/>
+                    </a:rPr>
+                    <a:t>as few info to ouside as possible</a:t>
+                  </a:r>
+                </a:p>
+                <a:p>
+                  <a:pPr marL="171450" marR="0" lvl="0" indent="-171450" algn="l" defTabSz="914400" rtl="0" eaLnBrk="1" fontAlgn="auto" latinLnBrk="0" hangingPunct="1">
+                    <a:lnSpc>
+                      <a:spcPct val="100000"/>
+                    </a:lnSpc>
+                    <a:spcBef>
+                      <a:spcPts val="0"/>
+                    </a:spcBef>
+                    <a:spcAft>
+                      <a:spcPts val="0"/>
+                    </a:spcAft>
+                    <a:buClrTx/>
+                    <a:buSzTx/>
+                    <a:buFont typeface="Arial" panose="020B0604020202020204" pitchFamily="34" charset="0"/>
+                    <a:buChar char="•"/>
+                    <a:tabLst/>
+                    <a:defRPr/>
+                  </a:pPr>
+                  <a:r>
+                    <a:rPr kumimoji="0" lang="de-DE" sz="800" b="0" i="0" u="none" strike="noStrike" kern="1200" cap="none" spc="0" normalizeH="0" baseline="0" noProof="0">
+                      <a:ln>
+                        <a:noFill/>
+                      </a:ln>
+                      <a:solidFill>
+                        <a:prstClr val="black"/>
+                      </a:solidFill>
+                      <a:effectLst/>
+                      <a:uLnTx/>
+                      <a:uFillTx/>
+                      <a:latin typeface="Aptos" panose="02110004020202020204"/>
+                      <a:ea typeface="+mn-ea"/>
+                      <a:cs typeface="+mn-cs"/>
+                    </a:rPr>
+                    <a:t>Info readable by other domains</a:t>
+                  </a:r>
+                </a:p>
+              </p:txBody>
+            </p:sp>
+            <p:sp>
+              <p:nvSpPr>
+                <p:cNvPr id="8" name="Textfeld 7">
+                  <a:extLst>
+                    <a:ext uri="{FF2B5EF4-FFF2-40B4-BE49-F238E27FC236}">
+                      <a16:creationId xmlns:a16="http://schemas.microsoft.com/office/drawing/2014/main" id="{203B6016-F752-7A46-CDB0-01BA0EE44134}"/>
+                    </a:ext>
+                  </a:extLst>
+                </p:cNvPr>
+                <p:cNvSpPr txBox="1"/>
+                <p:nvPr/>
+              </p:nvSpPr>
+              <p:spPr>
+                <a:xfrm>
+                  <a:off x="1411916" y="3452553"/>
+                  <a:ext cx="1330660" cy="584775"/>
+                </a:xfrm>
+                <a:prstGeom prst="rect">
+                  <a:avLst/>
+                </a:prstGeom>
+                <a:solidFill>
+                  <a:schemeClr val="bg1">
+                    <a:lumMod val="95000"/>
+                  </a:schemeClr>
+                </a:solidFill>
+              </p:spPr>
+              <p:txBody>
+                <a:bodyPr wrap="square" rtlCol="0">
+                  <a:spAutoFit/>
+                </a:bodyPr>
+                <a:lstStyle/>
+                <a:p>
+                  <a:pPr marL="0" marR="0" lvl="0" indent="0" algn="l" defTabSz="914400" rtl="0" eaLnBrk="1" fontAlgn="auto" latinLnBrk="0" hangingPunct="1">
+                    <a:lnSpc>
+                      <a:spcPct val="100000"/>
+                    </a:lnSpc>
+                    <a:spcBef>
+                      <a:spcPts val="0"/>
+                    </a:spcBef>
+                    <a:spcAft>
+                      <a:spcPts val="0"/>
+                    </a:spcAft>
+                    <a:buClrTx/>
+                    <a:buSzTx/>
+                    <a:buFontTx/>
+                    <a:buNone/>
+                    <a:tabLst/>
+                    <a:defRPr/>
+                  </a:pPr>
+                  <a:r>
+                    <a:rPr kumimoji="0" lang="de-DE" sz="800" b="0" i="0" u="none" strike="noStrike" kern="1200" cap="none" spc="0" normalizeH="0" baseline="0" noProof="0">
+                      <a:ln>
+                        <a:noFill/>
+                      </a:ln>
+                      <a:solidFill>
+                        <a:prstClr val="black"/>
+                      </a:solidFill>
+                      <a:effectLst/>
+                      <a:uLnTx/>
+                      <a:uFillTx/>
+                      <a:latin typeface="Aptos" panose="02110004020202020204"/>
+                      <a:ea typeface="+mn-ea"/>
+                      <a:cs typeface="+mn-cs"/>
+                    </a:rPr>
+                    <a:t>Approval:</a:t>
+                  </a:r>
+                </a:p>
+                <a:p>
+                  <a:pPr marL="0" marR="0" lvl="0" indent="0" algn="l" defTabSz="914400" rtl="0" eaLnBrk="1" fontAlgn="auto" latinLnBrk="0" hangingPunct="1">
+                    <a:lnSpc>
+                      <a:spcPct val="100000"/>
+                    </a:lnSpc>
+                    <a:spcBef>
+                      <a:spcPts val="0"/>
+                    </a:spcBef>
+                    <a:spcAft>
+                      <a:spcPts val="0"/>
+                    </a:spcAft>
+                    <a:buClrTx/>
+                    <a:buSzTx/>
+                    <a:buFontTx/>
+                    <a:buNone/>
+                    <a:tabLst/>
+                    <a:defRPr/>
+                  </a:pPr>
+                  <a:r>
+                    <a:rPr kumimoji="0" lang="de-DE" sz="800" b="0" i="0" u="none" strike="noStrike" kern="1200" cap="none" spc="0" normalizeH="0" baseline="0" noProof="0">
+                      <a:ln>
+                        <a:noFill/>
+                      </a:ln>
+                      <a:solidFill>
+                        <a:prstClr val="black"/>
+                      </a:solidFill>
+                      <a:effectLst/>
+                      <a:uLnTx/>
+                      <a:uFillTx/>
+                      <a:latin typeface="Aptos" panose="02110004020202020204"/>
+                      <a:ea typeface="+mn-ea"/>
+                      <a:cs typeface="+mn-cs"/>
+                    </a:rPr>
+                    <a:t>All domain rules met?</a:t>
+                  </a:r>
+                </a:p>
+                <a:p>
+                  <a:pPr marL="0" marR="0" lvl="0" indent="0" algn="l" defTabSz="914400" rtl="0" eaLnBrk="1" fontAlgn="auto" latinLnBrk="0" hangingPunct="1">
+                    <a:lnSpc>
+                      <a:spcPct val="100000"/>
+                    </a:lnSpc>
+                    <a:spcBef>
+                      <a:spcPts val="0"/>
+                    </a:spcBef>
+                    <a:spcAft>
+                      <a:spcPts val="0"/>
+                    </a:spcAft>
+                    <a:buClrTx/>
+                    <a:buSzTx/>
+                    <a:buFontTx/>
+                    <a:buNone/>
+                    <a:tabLst/>
+                    <a:defRPr/>
+                  </a:pPr>
+                  <a:r>
+                    <a:rPr kumimoji="0" lang="de-DE" sz="800" b="0" i="0" u="none" strike="noStrike" kern="1200" cap="none" spc="0" normalizeH="0" baseline="0" noProof="0">
+                      <a:ln>
+                        <a:noFill/>
+                      </a:ln>
+                      <a:solidFill>
+                        <a:prstClr val="black"/>
+                      </a:solidFill>
+                      <a:effectLst/>
+                      <a:uLnTx/>
+                      <a:uFillTx/>
+                      <a:latin typeface="Aptos" panose="02110004020202020204"/>
+                      <a:ea typeface="+mn-ea"/>
+                      <a:cs typeface="+mn-cs"/>
+                    </a:rPr>
+                    <a:t>Only then candidate can transition to target state</a:t>
+                  </a:r>
+                </a:p>
+              </p:txBody>
+            </p:sp>
+            <p:sp>
+              <p:nvSpPr>
+                <p:cNvPr id="11" name="Textfeld 10">
+                  <a:extLst>
+                    <a:ext uri="{FF2B5EF4-FFF2-40B4-BE49-F238E27FC236}">
+                      <a16:creationId xmlns:a16="http://schemas.microsoft.com/office/drawing/2014/main" id="{BA3F1538-D656-41EF-279B-1DF69A3B0EC8}"/>
+                    </a:ext>
+                  </a:extLst>
+                </p:cNvPr>
+                <p:cNvSpPr txBox="1"/>
+                <p:nvPr/>
+              </p:nvSpPr>
+              <p:spPr>
+                <a:xfrm>
+                  <a:off x="1014223" y="960555"/>
+                  <a:ext cx="1267669" cy="507831"/>
+                </a:xfrm>
+                <a:prstGeom prst="rect">
+                  <a:avLst/>
+                </a:prstGeom>
+                <a:solidFill>
+                  <a:schemeClr val="tx2">
+                    <a:lumMod val="10000"/>
+                    <a:lumOff val="90000"/>
+                  </a:schemeClr>
+                </a:solidFill>
+              </p:spPr>
+              <p:txBody>
+                <a:bodyPr wrap="square" rtlCol="0">
+                  <a:spAutoFit/>
+                </a:bodyPr>
+                <a:lstStyle/>
+                <a:p>
+                  <a:pPr marL="0" marR="0" lvl="0" indent="0" algn="l" defTabSz="914400" rtl="0" eaLnBrk="1" fontAlgn="auto" latinLnBrk="0" hangingPunct="1">
+                    <a:lnSpc>
+                      <a:spcPct val="100000"/>
+                    </a:lnSpc>
+                    <a:spcBef>
+                      <a:spcPts val="0"/>
+                    </a:spcBef>
+                    <a:spcAft>
+                      <a:spcPts val="0"/>
+                    </a:spcAft>
+                    <a:buClrTx/>
+                    <a:buSzTx/>
+                    <a:buFontTx/>
+                    <a:buNone/>
+                    <a:tabLst/>
+                    <a:defRPr/>
+                  </a:pPr>
+                  <a:r>
+                    <a:rPr kumimoji="0" lang="de-DE" sz="900" b="0" i="0" u="none" strike="noStrike" kern="1200" cap="none" spc="0" normalizeH="0" baseline="0" noProof="0">
+                      <a:ln>
+                        <a:noFill/>
+                      </a:ln>
+                      <a:solidFill>
+                        <a:srgbClr val="156082">
+                          <a:lumMod val="60000"/>
+                          <a:lumOff val="40000"/>
+                        </a:srgbClr>
+                      </a:solidFill>
+                      <a:effectLst/>
+                      <a:uLnTx/>
+                      <a:uFillTx/>
+                      <a:latin typeface="Aptos" panose="02110004020202020204"/>
+                      <a:ea typeface="+mn-ea"/>
+                      <a:cs typeface="+mn-cs"/>
+                    </a:rPr>
+                    <a:t>Request from outside (</a:t>
+                  </a:r>
+                  <a:r>
+                    <a:rPr kumimoji="0" lang="de-DE" sz="900" b="0" i="1" u="none" strike="noStrike" kern="1200" cap="none" spc="0" normalizeH="0" baseline="0" noProof="0">
+                      <a:ln>
+                        <a:noFill/>
+                      </a:ln>
+                      <a:solidFill>
+                        <a:srgbClr val="156082">
+                          <a:lumMod val="60000"/>
+                          <a:lumOff val="40000"/>
+                        </a:srgbClr>
+                      </a:solidFill>
+                      <a:effectLst/>
+                      <a:uLnTx/>
+                      <a:uFillTx/>
+                      <a:latin typeface="Aptos" panose="02110004020202020204"/>
+                      <a:ea typeface="+mn-ea"/>
+                      <a:cs typeface="+mn-cs"/>
+                    </a:rPr>
+                    <a:t>connect device x to deviceGroup y</a:t>
+                  </a:r>
+                  <a:r>
+                    <a:rPr kumimoji="0" lang="de-DE" sz="900" b="0" i="0" u="none" strike="noStrike" kern="1200" cap="none" spc="0" normalizeH="0" baseline="0" noProof="0">
+                      <a:ln>
+                        <a:noFill/>
+                      </a:ln>
+                      <a:solidFill>
+                        <a:srgbClr val="156082">
+                          <a:lumMod val="60000"/>
+                          <a:lumOff val="40000"/>
+                        </a:srgbClr>
+                      </a:solidFill>
+                      <a:effectLst/>
+                      <a:uLnTx/>
+                      <a:uFillTx/>
+                      <a:latin typeface="Aptos" panose="02110004020202020204"/>
+                      <a:ea typeface="+mn-ea"/>
+                      <a:cs typeface="+mn-cs"/>
+                    </a:rPr>
+                    <a:t>)</a:t>
+                  </a:r>
+                </a:p>
+              </p:txBody>
+            </p:sp>
+            <p:sp>
+              <p:nvSpPr>
+                <p:cNvPr id="13" name="Textfeld 12">
+                  <a:extLst>
+                    <a:ext uri="{FF2B5EF4-FFF2-40B4-BE49-F238E27FC236}">
+                      <a16:creationId xmlns:a16="http://schemas.microsoft.com/office/drawing/2014/main" id="{DCB8913B-A10E-8AA8-1DB4-4C71F72E6F51}"/>
+                    </a:ext>
+                  </a:extLst>
+                </p:cNvPr>
+                <p:cNvSpPr txBox="1"/>
+                <p:nvPr/>
+              </p:nvSpPr>
+              <p:spPr>
+                <a:xfrm>
+                  <a:off x="3251956" y="716821"/>
+                  <a:ext cx="2148637" cy="507831"/>
+                </a:xfrm>
+                <a:prstGeom prst="rect">
+                  <a:avLst/>
+                </a:prstGeom>
+                <a:solidFill>
+                  <a:schemeClr val="tx2">
+                    <a:lumMod val="10000"/>
+                    <a:lumOff val="90000"/>
+                  </a:schemeClr>
+                </a:solidFill>
+              </p:spPr>
+              <p:txBody>
+                <a:bodyPr wrap="square" rtlCol="0">
+                  <a:spAutoFit/>
+                </a:bodyPr>
+                <a:lstStyle/>
+                <a:p>
+                  <a:pPr marL="0" marR="0" lvl="0" indent="0" algn="l" defTabSz="914400" rtl="0" eaLnBrk="1" fontAlgn="auto" latinLnBrk="0" hangingPunct="1">
+                    <a:lnSpc>
+                      <a:spcPct val="100000"/>
+                    </a:lnSpc>
+                    <a:spcBef>
+                      <a:spcPts val="0"/>
+                    </a:spcBef>
+                    <a:spcAft>
+                      <a:spcPts val="0"/>
+                    </a:spcAft>
+                    <a:buClrTx/>
+                    <a:buSzTx/>
+                    <a:buFontTx/>
+                    <a:buNone/>
+                    <a:tabLst/>
+                    <a:defRPr/>
+                  </a:pPr>
+                  <a:r>
+                    <a:rPr kumimoji="0" lang="de-DE" sz="900" b="0" i="0" u="none" strike="noStrike" kern="1200" cap="none" spc="0" normalizeH="0" baseline="0" noProof="0">
+                      <a:ln>
+                        <a:noFill/>
+                      </a:ln>
+                      <a:solidFill>
+                        <a:srgbClr val="156082">
+                          <a:lumMod val="60000"/>
+                          <a:lumOff val="40000"/>
+                        </a:srgbClr>
+                      </a:solidFill>
+                      <a:effectLst/>
+                      <a:uLnTx/>
+                      <a:uFillTx/>
+                      <a:latin typeface="Aptos" panose="02110004020202020204"/>
+                      <a:ea typeface="+mn-ea"/>
+                      <a:cs typeface="+mn-cs"/>
+                    </a:rPr>
+                    <a:t>Request gets interpreted:</a:t>
+                  </a:r>
+                </a:p>
+                <a:p>
+                  <a:pPr marL="0" marR="0" lvl="0" indent="0" algn="l" defTabSz="914400" rtl="0" eaLnBrk="1" fontAlgn="auto" latinLnBrk="0" hangingPunct="1">
+                    <a:lnSpc>
+                      <a:spcPct val="100000"/>
+                    </a:lnSpc>
+                    <a:spcBef>
+                      <a:spcPts val="0"/>
+                    </a:spcBef>
+                    <a:spcAft>
+                      <a:spcPts val="0"/>
+                    </a:spcAft>
+                    <a:buClrTx/>
+                    <a:buSzTx/>
+                    <a:buFontTx/>
+                    <a:buNone/>
+                    <a:tabLst/>
+                    <a:defRPr/>
+                  </a:pPr>
+                  <a:r>
+                    <a:rPr kumimoji="0" lang="de-DE" sz="900" b="0" i="1" u="none" strike="noStrike" kern="1200" cap="none" spc="0" normalizeH="0" baseline="0" noProof="0">
+                      <a:ln>
+                        <a:noFill/>
+                      </a:ln>
+                      <a:solidFill>
+                        <a:srgbClr val="156082">
+                          <a:lumMod val="60000"/>
+                          <a:lumOff val="40000"/>
+                        </a:srgbClr>
+                      </a:solidFill>
+                      <a:effectLst/>
+                      <a:uLnTx/>
+                      <a:uFillTx/>
+                      <a:latin typeface="Aptos" panose="02110004020202020204"/>
+                      <a:ea typeface="+mn-ea"/>
+                      <a:cs typeface="+mn-cs"/>
+                    </a:rPr>
+                    <a:t>(deviceGroup y needs firmware z) </a:t>
+                  </a:r>
+                  <a:r>
+                    <a:rPr kumimoji="0" lang="de-DE" sz="900" b="0" i="0" u="none" strike="noStrike" kern="1200" cap="none" spc="0" normalizeH="0" baseline="0" noProof="0">
+                      <a:ln>
+                        <a:noFill/>
+                      </a:ln>
+                      <a:solidFill>
+                        <a:srgbClr val="156082">
+                          <a:lumMod val="60000"/>
+                          <a:lumOff val="40000"/>
+                        </a:srgbClr>
+                      </a:solidFill>
+                      <a:effectLst/>
+                      <a:uLnTx/>
+                      <a:uFillTx/>
+                      <a:latin typeface="Aptos" panose="02110004020202020204"/>
+                      <a:ea typeface="+mn-ea"/>
+                      <a:cs typeface="+mn-cs"/>
+                      <a:sym typeface="Symbol" panose="05050102010706020507" pitchFamily="18" charset="2"/>
+                    </a:rPr>
+                    <a:t></a:t>
+                  </a:r>
+                  <a:r>
+                    <a:rPr kumimoji="0" lang="de-DE" sz="900" b="0" i="0" u="none" strike="noStrike" kern="1200" cap="none" spc="0" normalizeH="0" baseline="0" noProof="0">
+                      <a:ln>
+                        <a:noFill/>
+                      </a:ln>
+                      <a:solidFill>
+                        <a:srgbClr val="156082">
+                          <a:lumMod val="60000"/>
+                          <a:lumOff val="40000"/>
+                        </a:srgbClr>
+                      </a:solidFill>
+                      <a:effectLst/>
+                      <a:uLnTx/>
+                      <a:uFillTx/>
+                      <a:latin typeface="Aptos" panose="02110004020202020204"/>
+                      <a:ea typeface="+mn-ea"/>
+                      <a:cs typeface="+mn-cs"/>
+                    </a:rPr>
+                    <a:t> association = </a:t>
+                  </a:r>
+                  <a:r>
+                    <a:rPr kumimoji="0" lang="de-DE" sz="900" b="0" i="1" u="none" strike="noStrike" kern="1200" cap="none" spc="0" normalizeH="0" baseline="0" noProof="0">
+                      <a:ln>
+                        <a:noFill/>
+                      </a:ln>
+                      <a:solidFill>
+                        <a:srgbClr val="156082">
+                          <a:lumMod val="60000"/>
+                          <a:lumOff val="40000"/>
+                        </a:srgbClr>
+                      </a:solidFill>
+                      <a:effectLst/>
+                      <a:uLnTx/>
+                      <a:uFillTx/>
+                      <a:latin typeface="Aptos" panose="02110004020202020204"/>
+                      <a:ea typeface="+mn-ea"/>
+                      <a:cs typeface="+mn-cs"/>
+                    </a:rPr>
+                    <a:t>device x needs firmware z</a:t>
+                  </a:r>
+                </a:p>
+              </p:txBody>
+            </p:sp>
+            <p:sp>
+              <p:nvSpPr>
+                <p:cNvPr id="15" name="Textfeld 14">
+                  <a:extLst>
+                    <a:ext uri="{FF2B5EF4-FFF2-40B4-BE49-F238E27FC236}">
+                      <a16:creationId xmlns:a16="http://schemas.microsoft.com/office/drawing/2014/main" id="{89B0EDCC-6F86-DF1F-AE3F-997E6F8FAEB8}"/>
+                    </a:ext>
+                  </a:extLst>
+                </p:cNvPr>
+                <p:cNvSpPr txBox="1"/>
+                <p:nvPr/>
+              </p:nvSpPr>
+              <p:spPr>
+                <a:xfrm>
+                  <a:off x="4322448" y="1260972"/>
+                  <a:ext cx="2348081" cy="507831"/>
+                </a:xfrm>
+                <a:prstGeom prst="rect">
+                  <a:avLst/>
+                </a:prstGeom>
+                <a:solidFill>
+                  <a:schemeClr val="tx2">
+                    <a:lumMod val="10000"/>
+                    <a:lumOff val="90000"/>
+                  </a:schemeClr>
+                </a:solidFill>
+              </p:spPr>
+              <p:txBody>
+                <a:bodyPr wrap="square" rtlCol="0">
+                  <a:spAutoFit/>
+                </a:bodyPr>
+                <a:lstStyle/>
+                <a:p>
+                  <a:pPr marL="0" marR="0" lvl="0" indent="0" algn="l" defTabSz="914400" rtl="0" eaLnBrk="1" fontAlgn="auto" latinLnBrk="0" hangingPunct="1">
+                    <a:lnSpc>
+                      <a:spcPct val="100000"/>
+                    </a:lnSpc>
+                    <a:spcBef>
+                      <a:spcPts val="0"/>
+                    </a:spcBef>
+                    <a:spcAft>
+                      <a:spcPts val="0"/>
+                    </a:spcAft>
+                    <a:buClrTx/>
+                    <a:buSzTx/>
+                    <a:buFontTx/>
+                    <a:buNone/>
+                    <a:tabLst/>
+                    <a:defRPr/>
+                  </a:pPr>
+                  <a:r>
+                    <a:rPr kumimoji="0" lang="de-DE" sz="900" b="0" i="0" u="none" strike="noStrike" kern="1200" cap="none" spc="0" normalizeH="0" baseline="0" noProof="0">
+                      <a:ln>
+                        <a:noFill/>
+                      </a:ln>
+                      <a:solidFill>
+                        <a:srgbClr val="156082">
+                          <a:lumMod val="60000"/>
+                          <a:lumOff val="40000"/>
+                        </a:srgbClr>
+                      </a:solidFill>
+                      <a:effectLst/>
+                      <a:uLnTx/>
+                      <a:uFillTx/>
+                      <a:latin typeface="Aptos" panose="02110004020202020204"/>
+                      <a:ea typeface="+mn-ea"/>
+                      <a:cs typeface="+mn-cs"/>
+                    </a:rPr>
+                    <a:t>Upon request from outside:</a:t>
+                  </a:r>
+                </a:p>
+                <a:p>
+                  <a:pPr marL="0" marR="0" lvl="0" indent="0" algn="l" defTabSz="914400" rtl="0" eaLnBrk="1" fontAlgn="auto" latinLnBrk="0" hangingPunct="1">
+                    <a:lnSpc>
+                      <a:spcPct val="100000"/>
+                    </a:lnSpc>
+                    <a:spcBef>
+                      <a:spcPts val="0"/>
+                    </a:spcBef>
+                    <a:spcAft>
+                      <a:spcPts val="0"/>
+                    </a:spcAft>
+                    <a:buClrTx/>
+                    <a:buSzTx/>
+                    <a:buFontTx/>
+                    <a:buNone/>
+                    <a:tabLst/>
+                    <a:defRPr/>
+                  </a:pPr>
+                  <a:r>
+                    <a:rPr kumimoji="0" lang="de-DE" sz="900" b="0" i="0" u="none" strike="noStrike" kern="1200" cap="none" spc="0" normalizeH="0" baseline="0" noProof="0">
+                      <a:ln>
+                        <a:noFill/>
+                      </a:ln>
+                      <a:solidFill>
+                        <a:srgbClr val="156082">
+                          <a:lumMod val="60000"/>
+                          <a:lumOff val="40000"/>
+                        </a:srgbClr>
+                      </a:solidFill>
+                      <a:effectLst/>
+                      <a:uLnTx/>
+                      <a:uFillTx/>
+                      <a:latin typeface="Aptos" panose="02110004020202020204"/>
+                      <a:ea typeface="+mn-ea"/>
+                      <a:cs typeface="+mn-cs"/>
+                    </a:rPr>
+                    <a:t>Load CandidateDS into CandidateDS,</a:t>
+                  </a:r>
+                </a:p>
+                <a:p>
+                  <a:pPr marL="0" marR="0" lvl="0" indent="0" algn="l" defTabSz="914400" rtl="0" eaLnBrk="1" fontAlgn="auto" latinLnBrk="0" hangingPunct="1">
+                    <a:lnSpc>
+                      <a:spcPct val="100000"/>
+                    </a:lnSpc>
+                    <a:spcBef>
+                      <a:spcPts val="0"/>
+                    </a:spcBef>
+                    <a:spcAft>
+                      <a:spcPts val="0"/>
+                    </a:spcAft>
+                    <a:buClrTx/>
+                    <a:buSzTx/>
+                    <a:buFontTx/>
+                    <a:buNone/>
+                    <a:tabLst/>
+                    <a:defRPr/>
+                  </a:pPr>
+                  <a:r>
+                    <a:rPr kumimoji="0" lang="de-DE" sz="900" b="0" i="0" u="none" strike="noStrike" kern="1200" cap="none" spc="0" normalizeH="0" baseline="0" noProof="0">
+                      <a:ln>
+                        <a:noFill/>
+                      </a:ln>
+                      <a:solidFill>
+                        <a:srgbClr val="156082">
+                          <a:lumMod val="60000"/>
+                          <a:lumOff val="40000"/>
+                        </a:srgbClr>
+                      </a:solidFill>
+                      <a:effectLst/>
+                      <a:uLnTx/>
+                      <a:uFillTx/>
+                      <a:latin typeface="Aptos" panose="02110004020202020204"/>
+                      <a:ea typeface="+mn-ea"/>
+                      <a:cs typeface="+mn-cs"/>
+                    </a:rPr>
+                    <a:t>Apply desired changes to CandidateDS</a:t>
+                  </a:r>
+                </a:p>
+              </p:txBody>
+            </p:sp>
+            <p:sp>
+              <p:nvSpPr>
+                <p:cNvPr id="17" name="Textfeld 16">
+                  <a:extLst>
+                    <a:ext uri="{FF2B5EF4-FFF2-40B4-BE49-F238E27FC236}">
+                      <a16:creationId xmlns:a16="http://schemas.microsoft.com/office/drawing/2014/main" id="{3900CBB4-20A2-78E1-7717-10D9E64A34A8}"/>
+                    </a:ext>
+                  </a:extLst>
+                </p:cNvPr>
+                <p:cNvSpPr txBox="1"/>
+                <p:nvPr/>
+              </p:nvSpPr>
+              <p:spPr>
+                <a:xfrm>
+                  <a:off x="1833645" y="4086383"/>
+                  <a:ext cx="1764997" cy="646331"/>
+                </a:xfrm>
+                <a:prstGeom prst="rect">
+                  <a:avLst/>
+                </a:prstGeom>
+                <a:solidFill>
+                  <a:schemeClr val="tx2">
+                    <a:lumMod val="10000"/>
+                    <a:lumOff val="90000"/>
+                  </a:schemeClr>
+                </a:solidFill>
+              </p:spPr>
+              <p:txBody>
+                <a:bodyPr wrap="square" rtlCol="0">
+                  <a:spAutoFit/>
+                </a:bodyPr>
+                <a:lstStyle>
+                  <a:defPPr>
+                    <a:defRPr lang="de-DE"/>
+                  </a:defPPr>
+                  <a:lvl1pPr>
+                    <a:defRPr sz="900">
+                      <a:solidFill>
+                        <a:schemeClr val="accent1">
+                          <a:lumMod val="60000"/>
+                          <a:lumOff val="40000"/>
+                        </a:schemeClr>
+                      </a:solidFill>
+                    </a:defRPr>
+                  </a:lvl1pPr>
+                </a:lstStyle>
+                <a:p>
+                  <a:pPr marL="0" marR="0" lvl="0" indent="0" algn="l" defTabSz="914400" rtl="0" eaLnBrk="1" fontAlgn="auto" latinLnBrk="0" hangingPunct="1">
+                    <a:lnSpc>
+                      <a:spcPct val="100000"/>
+                    </a:lnSpc>
+                    <a:spcBef>
+                      <a:spcPts val="0"/>
+                    </a:spcBef>
+                    <a:spcAft>
+                      <a:spcPts val="0"/>
+                    </a:spcAft>
+                    <a:buClrTx/>
+                    <a:buSzTx/>
+                    <a:buFontTx/>
+                    <a:buNone/>
+                    <a:tabLst/>
+                    <a:defRPr/>
+                  </a:pPr>
+                  <a:r>
+                    <a:rPr kumimoji="0" lang="de-DE" sz="900" b="0" i="0" u="none" strike="noStrike" kern="1200" cap="none" spc="0" normalizeH="0" baseline="0" noProof="0">
+                      <a:ln>
+                        <a:noFill/>
+                      </a:ln>
+                      <a:solidFill>
+                        <a:srgbClr val="156082">
+                          <a:lumMod val="60000"/>
+                          <a:lumOff val="40000"/>
+                        </a:srgbClr>
+                      </a:solidFill>
+                      <a:effectLst/>
+                      <a:uLnTx/>
+                      <a:uFillTx/>
+                      <a:latin typeface="Aptos" panose="02110004020202020204"/>
+                      <a:ea typeface="+mn-ea"/>
+                      <a:cs typeface="+mn-cs"/>
+                    </a:rPr>
+                    <a:t>Validation checks if changes to CandidateDS are valid, if yes RunningDS is overwritten by CandidateDS content</a:t>
+                  </a:r>
+                </a:p>
+              </p:txBody>
+            </p:sp>
+            <p:sp>
+              <p:nvSpPr>
+                <p:cNvPr id="20" name="Bogen 19">
+                  <a:extLst>
+                    <a:ext uri="{FF2B5EF4-FFF2-40B4-BE49-F238E27FC236}">
+                      <a16:creationId xmlns:a16="http://schemas.microsoft.com/office/drawing/2014/main" id="{E2A5C948-67A6-9856-2FA7-81445E9CC456}"/>
+                    </a:ext>
+                  </a:extLst>
+                </p:cNvPr>
+                <p:cNvSpPr/>
+                <p:nvPr/>
+              </p:nvSpPr>
+              <p:spPr>
+                <a:xfrm flipH="1">
+                  <a:off x="2939581" y="2363473"/>
+                  <a:ext cx="2119738" cy="1752143"/>
+                </a:xfrm>
+                <a:prstGeom prst="arc">
+                  <a:avLst>
+                    <a:gd name="adj1" fmla="val 16200000"/>
+                    <a:gd name="adj2" fmla="val 5384468"/>
+                  </a:avLst>
+                </a:prstGeom>
+                <a:ln w="19050">
+                  <a:solidFill>
+                    <a:schemeClr val="accent1">
+                      <a:lumMod val="40000"/>
+                      <a:lumOff val="60000"/>
+                    </a:schemeClr>
+                  </a:solidFill>
+                  <a:tailEnd type="triangle"/>
+                </a:ln>
+              </p:spPr>
+              <p:style>
+                <a:lnRef idx="2">
+                  <a:schemeClr val="accent1"/>
+                </a:lnRef>
+                <a:fillRef idx="0">
+                  <a:schemeClr val="accent1"/>
+                </a:fillRef>
+                <a:effectRef idx="1">
+                  <a:schemeClr val="accent1"/>
+                </a:effectRef>
+                <a:fontRef idx="minor">
+                  <a:schemeClr val="tx1"/>
+                </a:fontRef>
+              </p:style>
+              <p:txBody>
+                <a:bodyPr rtlCol="0" anchor="ctr"/>
+                <a:lstStyle/>
+                <a:p>
+                  <a:pPr marL="0" marR="0" lvl="0" indent="0" algn="ctr" defTabSz="914400" rtl="0" eaLnBrk="1" fontAlgn="auto" latinLnBrk="0" hangingPunct="1">
+                    <a:lnSpc>
+                      <a:spcPct val="100000"/>
+                    </a:lnSpc>
+                    <a:spcBef>
+                      <a:spcPts val="0"/>
+                    </a:spcBef>
+                    <a:spcAft>
+                      <a:spcPts val="0"/>
+                    </a:spcAft>
+                    <a:buClrTx/>
+                    <a:buSzTx/>
+                    <a:buFontTx/>
+                    <a:buNone/>
+                    <a:tabLst/>
+                    <a:defRPr/>
+                  </a:pPr>
+                  <a:endParaRPr kumimoji="0" lang="de-DE" sz="1800" b="0" i="0" u="none" strike="noStrike" kern="1200" cap="none" spc="0" normalizeH="0" baseline="0" noProof="0">
                     <a:ln>
                       <a:noFill/>
                     </a:ln>
@@ -10792,755 +11791,965 @@
                     <a:latin typeface="Aptos" panose="02110004020202020204"/>
                     <a:ea typeface="+mn-ea"/>
                     <a:cs typeface="+mn-cs"/>
-                  </a:rPr>
-                  <a:t>Generic interface to outside</a:t>
-                </a:r>
-              </a:p>
-              <a:p>
-                <a:pPr marL="171450" marR="0" lvl="0" indent="-171450" algn="l" defTabSz="914400" rtl="0" eaLnBrk="1" fontAlgn="auto" latinLnBrk="0" hangingPunct="1">
-                  <a:lnSpc>
-                    <a:spcPct val="100000"/>
-                  </a:lnSpc>
-                  <a:spcBef>
-                    <a:spcPts val="0"/>
-                  </a:spcBef>
-                  <a:spcAft>
-                    <a:spcPts val="0"/>
-                  </a:spcAft>
-                  <a:buClrTx/>
-                  <a:buSzTx/>
-                  <a:buFont typeface="Arial" panose="020B0604020202020204" pitchFamily="34" charset="0"/>
-                  <a:buChar char="•"/>
-                  <a:tabLst/>
-                  <a:defRPr/>
-                </a:pPr>
-                <a:r>
-                  <a:rPr kumimoji="0" lang="de-DE" sz="800" b="0" i="0" u="none" strike="noStrike" kern="1200" cap="none" spc="0" normalizeH="0" baseline="0" noProof="0">
-                    <a:ln>
-                      <a:noFill/>
-                    </a:ln>
-                    <a:solidFill>
-                      <a:prstClr val="black"/>
-                    </a:solidFill>
-                    <a:effectLst/>
-                    <a:uLnTx/>
-                    <a:uFillTx/>
-                    <a:latin typeface="Aptos" panose="02110004020202020204"/>
-                    <a:ea typeface="+mn-ea"/>
-                    <a:cs typeface="+mn-cs"/>
-                  </a:rPr>
-                  <a:t>as few info to ouside as possible</a:t>
-                </a:r>
-              </a:p>
-              <a:p>
-                <a:pPr marL="171450" marR="0" lvl="0" indent="-171450" algn="l" defTabSz="914400" rtl="0" eaLnBrk="1" fontAlgn="auto" latinLnBrk="0" hangingPunct="1">
-                  <a:lnSpc>
-                    <a:spcPct val="100000"/>
-                  </a:lnSpc>
-                  <a:spcBef>
-                    <a:spcPts val="0"/>
-                  </a:spcBef>
-                  <a:spcAft>
-                    <a:spcPts val="0"/>
-                  </a:spcAft>
-                  <a:buClrTx/>
-                  <a:buSzTx/>
-                  <a:buFont typeface="Arial" panose="020B0604020202020204" pitchFamily="34" charset="0"/>
-                  <a:buChar char="•"/>
-                  <a:tabLst/>
-                  <a:defRPr/>
-                </a:pPr>
-                <a:r>
-                  <a:rPr kumimoji="0" lang="de-DE" sz="800" b="0" i="0" u="none" strike="noStrike" kern="1200" cap="none" spc="0" normalizeH="0" baseline="0" noProof="0">
-                    <a:ln>
-                      <a:noFill/>
-                    </a:ln>
-                    <a:solidFill>
-                      <a:prstClr val="black"/>
-                    </a:solidFill>
-                    <a:effectLst/>
-                    <a:uLnTx/>
-                    <a:uFillTx/>
-                    <a:latin typeface="Aptos" panose="02110004020202020204"/>
-                    <a:ea typeface="+mn-ea"/>
-                    <a:cs typeface="+mn-cs"/>
-                  </a:rPr>
-                  <a:t>Info readable by other domains</a:t>
-                </a:r>
-              </a:p>
-            </p:txBody>
-          </p:sp>
+                  </a:endParaRPr>
+                </a:p>
+              </p:txBody>
+            </p:sp>
+            <p:sp>
+              <p:nvSpPr>
+                <p:cNvPr id="22" name="Textfeld 21">
+                  <a:extLst>
+                    <a:ext uri="{FF2B5EF4-FFF2-40B4-BE49-F238E27FC236}">
+                      <a16:creationId xmlns:a16="http://schemas.microsoft.com/office/drawing/2014/main" id="{DC9742B5-61E2-1E62-096F-2C5BCE9A30F8}"/>
+                    </a:ext>
+                  </a:extLst>
+                </p:cNvPr>
+                <p:cNvSpPr txBox="1"/>
+                <p:nvPr/>
+              </p:nvSpPr>
+              <p:spPr>
+                <a:xfrm>
+                  <a:off x="3992652" y="4219914"/>
+                  <a:ext cx="1061945" cy="307777"/>
+                </a:xfrm>
+                <a:prstGeom prst="rect">
+                  <a:avLst/>
+                </a:prstGeom>
+                <a:solidFill>
+                  <a:schemeClr val="accent2">
+                    <a:lumMod val="20000"/>
+                    <a:lumOff val="80000"/>
+                  </a:schemeClr>
+                </a:solidFill>
+              </p:spPr>
+              <p:txBody>
+                <a:bodyPr wrap="square" rtlCol="0">
+                  <a:spAutoFit/>
+                </a:bodyPr>
+                <a:lstStyle/>
+                <a:p>
+                  <a:pPr marL="0" marR="0" lvl="0" indent="0" algn="l" defTabSz="914400" rtl="0" eaLnBrk="1" fontAlgn="auto" latinLnBrk="0" hangingPunct="1">
+                    <a:lnSpc>
+                      <a:spcPct val="100000"/>
+                    </a:lnSpc>
+                    <a:spcBef>
+                      <a:spcPts val="0"/>
+                    </a:spcBef>
+                    <a:spcAft>
+                      <a:spcPts val="0"/>
+                    </a:spcAft>
+                    <a:buClrTx/>
+                    <a:buSzTx/>
+                    <a:buFontTx/>
+                    <a:buNone/>
+                    <a:tabLst/>
+                    <a:defRPr/>
+                  </a:pPr>
+                  <a:r>
+                    <a:rPr kumimoji="0" lang="de-DE" sz="700" b="0" i="1" u="none" strike="noStrike" kern="1200" cap="none" spc="0" normalizeH="0" baseline="0" noProof="0">
+                      <a:ln>
+                        <a:noFill/>
+                      </a:ln>
+                      <a:solidFill>
+                        <a:srgbClr val="E97132">
+                          <a:lumMod val="75000"/>
+                        </a:srgbClr>
+                      </a:solidFill>
+                      <a:effectLst/>
+                      <a:uLnTx/>
+                      <a:uFillTx/>
+                      <a:latin typeface="Aptos" panose="02110004020202020204"/>
+                      <a:ea typeface="+mn-ea"/>
+                      <a:cs typeface="+mn-cs"/>
+                    </a:rPr>
+                    <a:t>Equipment: Actual</a:t>
+                  </a:r>
+                </a:p>
+                <a:p>
+                  <a:pPr marL="0" marR="0" lvl="0" indent="0" algn="l" defTabSz="914400" rtl="0" eaLnBrk="1" fontAlgn="auto" latinLnBrk="0" hangingPunct="1">
+                    <a:lnSpc>
+                      <a:spcPct val="100000"/>
+                    </a:lnSpc>
+                    <a:spcBef>
+                      <a:spcPts val="0"/>
+                    </a:spcBef>
+                    <a:spcAft>
+                      <a:spcPts val="0"/>
+                    </a:spcAft>
+                    <a:buClrTx/>
+                    <a:buSzTx/>
+                    <a:buFontTx/>
+                    <a:buNone/>
+                    <a:tabLst/>
+                    <a:defRPr/>
+                  </a:pPr>
+                  <a:r>
+                    <a:rPr kumimoji="0" lang="de-DE" sz="700" b="0" i="1" u="none" strike="noStrike" kern="1200" cap="none" spc="0" normalizeH="0" baseline="0" noProof="0">
+                      <a:ln>
+                        <a:noFill/>
+                      </a:ln>
+                      <a:solidFill>
+                        <a:srgbClr val="E97132">
+                          <a:lumMod val="75000"/>
+                        </a:srgbClr>
+                      </a:solidFill>
+                      <a:effectLst/>
+                      <a:uLnTx/>
+                      <a:uFillTx/>
+                      <a:latin typeface="Aptos" panose="02110004020202020204"/>
+                      <a:ea typeface="+mn-ea"/>
+                      <a:cs typeface="+mn-cs"/>
+                    </a:rPr>
+                    <a:t>FW: Target (validated)</a:t>
+                  </a:r>
+                </a:p>
+              </p:txBody>
+            </p:sp>
+            <p:sp>
+              <p:nvSpPr>
+                <p:cNvPr id="24" name="Textfeld 23">
+                  <a:extLst>
+                    <a:ext uri="{FF2B5EF4-FFF2-40B4-BE49-F238E27FC236}">
+                      <a16:creationId xmlns:a16="http://schemas.microsoft.com/office/drawing/2014/main" id="{F992976B-AE57-7C3F-9B78-B1E92CF2F754}"/>
+                    </a:ext>
+                  </a:extLst>
+                </p:cNvPr>
+                <p:cNvSpPr txBox="1"/>
+                <p:nvPr/>
+              </p:nvSpPr>
+              <p:spPr>
+                <a:xfrm>
+                  <a:off x="4268689" y="4001651"/>
+                  <a:ext cx="872434" cy="215444"/>
+                </a:xfrm>
+                <a:prstGeom prst="rect">
+                  <a:avLst/>
+                </a:prstGeom>
+                <a:noFill/>
+              </p:spPr>
+              <p:txBody>
+                <a:bodyPr wrap="square" rtlCol="0">
+                  <a:spAutoFit/>
+                </a:bodyPr>
+                <a:lstStyle/>
+                <a:p>
+                  <a:pPr marL="0" marR="0" lvl="0" indent="0" algn="l" defTabSz="914400" rtl="0" eaLnBrk="1" fontAlgn="auto" latinLnBrk="0" hangingPunct="1">
+                    <a:lnSpc>
+                      <a:spcPct val="100000"/>
+                    </a:lnSpc>
+                    <a:spcBef>
+                      <a:spcPts val="0"/>
+                    </a:spcBef>
+                    <a:spcAft>
+                      <a:spcPts val="0"/>
+                    </a:spcAft>
+                    <a:buClrTx/>
+                    <a:buSzTx/>
+                    <a:buFontTx/>
+                    <a:buNone/>
+                    <a:tabLst/>
+                    <a:defRPr/>
+                  </a:pPr>
+                  <a:r>
+                    <a:rPr kumimoji="0" lang="de-DE" sz="800" b="0" i="0" u="none" strike="noStrike" kern="1200" cap="none" spc="0" normalizeH="0" baseline="0" noProof="0">
+                      <a:ln>
+                        <a:noFill/>
+                      </a:ln>
+                      <a:solidFill>
+                        <a:srgbClr val="E97132">
+                          <a:lumMod val="75000"/>
+                        </a:srgbClr>
+                      </a:solidFill>
+                      <a:effectLst/>
+                      <a:uLnTx/>
+                      <a:uFillTx/>
+                      <a:latin typeface="Aptos" panose="02110004020202020204"/>
+                      <a:ea typeface="+mn-ea"/>
+                      <a:cs typeface="+mn-cs"/>
+                    </a:rPr>
+                    <a:t>Target state</a:t>
+                  </a:r>
+                </a:p>
+              </p:txBody>
+            </p:sp>
+            <p:sp>
+              <p:nvSpPr>
+                <p:cNvPr id="26" name="Textfeld 25">
+                  <a:extLst>
+                    <a:ext uri="{FF2B5EF4-FFF2-40B4-BE49-F238E27FC236}">
+                      <a16:creationId xmlns:a16="http://schemas.microsoft.com/office/drawing/2014/main" id="{59F5D333-A885-977A-949E-D90C7737D0ED}"/>
+                    </a:ext>
+                  </a:extLst>
+                </p:cNvPr>
+                <p:cNvSpPr txBox="1"/>
+                <p:nvPr/>
+              </p:nvSpPr>
+              <p:spPr>
+                <a:xfrm>
+                  <a:off x="7159465" y="3992163"/>
+                  <a:ext cx="872434" cy="215444"/>
+                </a:xfrm>
+                <a:prstGeom prst="rect">
+                  <a:avLst/>
+                </a:prstGeom>
+                <a:noFill/>
+              </p:spPr>
+              <p:txBody>
+                <a:bodyPr wrap="square" rtlCol="0">
+                  <a:spAutoFit/>
+                </a:bodyPr>
+                <a:lstStyle/>
+                <a:p>
+                  <a:pPr marL="0" marR="0" lvl="0" indent="0" algn="l" defTabSz="914400" rtl="0" eaLnBrk="1" fontAlgn="auto" latinLnBrk="0" hangingPunct="1">
+                    <a:lnSpc>
+                      <a:spcPct val="100000"/>
+                    </a:lnSpc>
+                    <a:spcBef>
+                      <a:spcPts val="0"/>
+                    </a:spcBef>
+                    <a:spcAft>
+                      <a:spcPts val="0"/>
+                    </a:spcAft>
+                    <a:buClrTx/>
+                    <a:buSzTx/>
+                    <a:buFontTx/>
+                    <a:buNone/>
+                    <a:tabLst/>
+                    <a:defRPr/>
+                  </a:pPr>
+                  <a:r>
+                    <a:rPr kumimoji="0" lang="de-DE" sz="800" b="0" i="0" u="none" strike="noStrike" kern="1200" cap="none" spc="0" normalizeH="0" baseline="0" noProof="0">
+                      <a:ln>
+                        <a:noFill/>
+                      </a:ln>
+                      <a:solidFill>
+                        <a:srgbClr val="E97132">
+                          <a:lumMod val="75000"/>
+                        </a:srgbClr>
+                      </a:solidFill>
+                      <a:effectLst/>
+                      <a:uLnTx/>
+                      <a:uFillTx/>
+                      <a:latin typeface="Aptos" panose="02110004020202020204"/>
+                      <a:ea typeface="+mn-ea"/>
+                      <a:cs typeface="+mn-cs"/>
+                    </a:rPr>
+                    <a:t>Actual state</a:t>
+                  </a:r>
+                </a:p>
+              </p:txBody>
+            </p:sp>
+            <p:sp>
+              <p:nvSpPr>
+                <p:cNvPr id="28" name="Textfeld 27">
+                  <a:extLst>
+                    <a:ext uri="{FF2B5EF4-FFF2-40B4-BE49-F238E27FC236}">
+                      <a16:creationId xmlns:a16="http://schemas.microsoft.com/office/drawing/2014/main" id="{EFFE51A6-6847-A544-5F65-DB57A4DA7B98}"/>
+                    </a:ext>
+                  </a:extLst>
+                </p:cNvPr>
+                <p:cNvSpPr txBox="1"/>
+                <p:nvPr/>
+              </p:nvSpPr>
+              <p:spPr>
+                <a:xfrm>
+                  <a:off x="5622454" y="5618481"/>
+                  <a:ext cx="1537012" cy="461665"/>
+                </a:xfrm>
+                <a:prstGeom prst="rect">
+                  <a:avLst/>
+                </a:prstGeom>
+                <a:solidFill>
+                  <a:schemeClr val="bg1">
+                    <a:lumMod val="95000"/>
+                  </a:schemeClr>
+                </a:solidFill>
+              </p:spPr>
+              <p:txBody>
+                <a:bodyPr wrap="square" rtlCol="0">
+                  <a:spAutoFit/>
+                </a:bodyPr>
+                <a:lstStyle/>
+                <a:p>
+                  <a:pPr marL="0" marR="0" lvl="0" indent="0" algn="l" defTabSz="914400" rtl="0" eaLnBrk="1" fontAlgn="auto" latinLnBrk="0" hangingPunct="1">
+                    <a:lnSpc>
+                      <a:spcPct val="100000"/>
+                    </a:lnSpc>
+                    <a:spcBef>
+                      <a:spcPts val="0"/>
+                    </a:spcBef>
+                    <a:spcAft>
+                      <a:spcPts val="0"/>
+                    </a:spcAft>
+                    <a:buClrTx/>
+                    <a:buSzTx/>
+                    <a:buFontTx/>
+                    <a:buNone/>
+                    <a:tabLst/>
+                    <a:defRPr/>
+                  </a:pPr>
+                  <a:r>
+                    <a:rPr kumimoji="0" lang="de-DE" sz="800" b="0" i="0" u="none" strike="noStrike" kern="1200" cap="none" spc="0" normalizeH="0" baseline="0" noProof="0">
+                      <a:ln>
+                        <a:noFill/>
+                      </a:ln>
+                      <a:solidFill>
+                        <a:prstClr val="black"/>
+                      </a:solidFill>
+                      <a:effectLst/>
+                      <a:uLnTx/>
+                      <a:uFillTx/>
+                      <a:latin typeface="Aptos" panose="02110004020202020204"/>
+                      <a:ea typeface="+mn-ea"/>
+                      <a:cs typeface="+mn-cs"/>
+                    </a:rPr>
+                    <a:t>ToDos = deviation between target and actual state</a:t>
+                  </a:r>
+                </a:p>
+                <a:p>
+                  <a:pPr marL="0" marR="0" lvl="0" indent="0" algn="l" defTabSz="914400" rtl="0" eaLnBrk="1" fontAlgn="auto" latinLnBrk="0" hangingPunct="1">
+                    <a:lnSpc>
+                      <a:spcPct val="100000"/>
+                    </a:lnSpc>
+                    <a:spcBef>
+                      <a:spcPts val="0"/>
+                    </a:spcBef>
+                    <a:spcAft>
+                      <a:spcPts val="0"/>
+                    </a:spcAft>
+                    <a:buClrTx/>
+                    <a:buSzTx/>
+                    <a:buFontTx/>
+                    <a:buNone/>
+                    <a:tabLst/>
+                    <a:defRPr/>
+                  </a:pPr>
+                  <a:r>
+                    <a:rPr kumimoji="0" lang="de-DE" sz="800" b="0" i="0" u="none" strike="noStrike" kern="1200" cap="none" spc="0" normalizeH="0" baseline="0" noProof="0">
+                      <a:ln>
+                        <a:noFill/>
+                      </a:ln>
+                      <a:solidFill>
+                        <a:prstClr val="black"/>
+                      </a:solidFill>
+                      <a:effectLst/>
+                      <a:uLnTx/>
+                      <a:uFillTx/>
+                      <a:latin typeface="Aptos" panose="02110004020202020204"/>
+                      <a:ea typeface="+mn-ea"/>
+                      <a:cs typeface="+mn-cs"/>
+                    </a:rPr>
+                    <a:t>(RunningDS – OperationalDS)</a:t>
+                  </a:r>
+                </a:p>
+              </p:txBody>
+            </p:sp>
+            <p:sp>
+              <p:nvSpPr>
+                <p:cNvPr id="30" name="Textfeld 29">
+                  <a:extLst>
+                    <a:ext uri="{FF2B5EF4-FFF2-40B4-BE49-F238E27FC236}">
+                      <a16:creationId xmlns:a16="http://schemas.microsoft.com/office/drawing/2014/main" id="{EA99CE17-2A08-24FA-59F4-0E966F44F29F}"/>
+                    </a:ext>
+                  </a:extLst>
+                </p:cNvPr>
+                <p:cNvSpPr txBox="1"/>
+                <p:nvPr/>
+              </p:nvSpPr>
+              <p:spPr>
+                <a:xfrm>
+                  <a:off x="1237259" y="5358960"/>
+                  <a:ext cx="1537012" cy="707886"/>
+                </a:xfrm>
+                <a:prstGeom prst="rect">
+                  <a:avLst/>
+                </a:prstGeom>
+                <a:solidFill>
+                  <a:schemeClr val="bg1">
+                    <a:lumMod val="95000"/>
+                  </a:schemeClr>
+                </a:solidFill>
+              </p:spPr>
+              <p:txBody>
+                <a:bodyPr wrap="square" rtlCol="0">
+                  <a:spAutoFit/>
+                </a:bodyPr>
+                <a:lstStyle/>
+                <a:p>
+                  <a:pPr marL="0" marR="0" lvl="0" indent="0" algn="l" defTabSz="914400" rtl="0" eaLnBrk="1" fontAlgn="auto" latinLnBrk="0" hangingPunct="1">
+                    <a:lnSpc>
+                      <a:spcPct val="100000"/>
+                    </a:lnSpc>
+                    <a:spcBef>
+                      <a:spcPts val="0"/>
+                    </a:spcBef>
+                    <a:spcAft>
+                      <a:spcPts val="0"/>
+                    </a:spcAft>
+                    <a:buClrTx/>
+                    <a:buSzTx/>
+                    <a:buFontTx/>
+                    <a:buNone/>
+                    <a:tabLst/>
+                    <a:defRPr/>
+                  </a:pPr>
+                  <a:r>
+                    <a:rPr kumimoji="0" lang="de-DE" sz="800" b="0" i="0" u="none" strike="noStrike" kern="1200" cap="none" spc="0" normalizeH="0" baseline="0" noProof="0">
+                      <a:ln>
+                        <a:noFill/>
+                      </a:ln>
+                      <a:solidFill>
+                        <a:prstClr val="black"/>
+                      </a:solidFill>
+                      <a:effectLst/>
+                      <a:uLnTx/>
+                      <a:uFillTx/>
+                      <a:latin typeface="Aptos" panose="02110004020202020204"/>
+                      <a:ea typeface="+mn-ea"/>
+                      <a:cs typeface="+mn-cs"/>
+                    </a:rPr>
+                    <a:t>All datastores have same data model, but with different meanings:</a:t>
+                  </a:r>
+                </a:p>
+                <a:p>
+                  <a:pPr marL="171450" marR="0" lvl="0" indent="-171450" algn="l" defTabSz="914400" rtl="0" eaLnBrk="1" fontAlgn="auto" latinLnBrk="0" hangingPunct="1">
+                    <a:lnSpc>
+                      <a:spcPct val="100000"/>
+                    </a:lnSpc>
+                    <a:spcBef>
+                      <a:spcPts val="0"/>
+                    </a:spcBef>
+                    <a:spcAft>
+                      <a:spcPts val="0"/>
+                    </a:spcAft>
+                    <a:buClrTx/>
+                    <a:buSzTx/>
+                    <a:buFontTx/>
+                    <a:buChar char="-"/>
+                    <a:tabLst/>
+                    <a:defRPr/>
+                  </a:pPr>
+                  <a:r>
+                    <a:rPr kumimoji="0" lang="de-DE" sz="800" b="0" i="0" u="none" strike="noStrike" kern="1200" cap="none" spc="0" normalizeH="0" baseline="0" noProof="0">
+                      <a:ln>
+                        <a:noFill/>
+                      </a:ln>
+                      <a:solidFill>
+                        <a:prstClr val="black"/>
+                      </a:solidFill>
+                      <a:effectLst/>
+                      <a:uLnTx/>
+                      <a:uFillTx/>
+                      <a:latin typeface="Aptos" panose="02110004020202020204"/>
+                      <a:ea typeface="+mn-ea"/>
+                      <a:cs typeface="+mn-cs"/>
+                    </a:rPr>
+                    <a:t>Equipment</a:t>
+                  </a:r>
+                </a:p>
+                <a:p>
+                  <a:pPr marL="171450" marR="0" lvl="0" indent="-171450" algn="l" defTabSz="914400" rtl="0" eaLnBrk="1" fontAlgn="auto" latinLnBrk="0" hangingPunct="1">
+                    <a:lnSpc>
+                      <a:spcPct val="100000"/>
+                    </a:lnSpc>
+                    <a:spcBef>
+                      <a:spcPts val="0"/>
+                    </a:spcBef>
+                    <a:spcAft>
+                      <a:spcPts val="0"/>
+                    </a:spcAft>
+                    <a:buClrTx/>
+                    <a:buSzTx/>
+                    <a:buFontTx/>
+                    <a:buChar char="-"/>
+                    <a:tabLst/>
+                    <a:defRPr/>
+                  </a:pPr>
+                  <a:r>
+                    <a:rPr kumimoji="0" lang="de-DE" sz="800" b="0" i="0" u="none" strike="noStrike" kern="1200" cap="none" spc="0" normalizeH="0" baseline="0" noProof="0">
+                      <a:ln>
+                        <a:noFill/>
+                      </a:ln>
+                      <a:solidFill>
+                        <a:prstClr val="black"/>
+                      </a:solidFill>
+                      <a:effectLst/>
+                      <a:uLnTx/>
+                      <a:uFillTx/>
+                      <a:latin typeface="Aptos" panose="02110004020202020204"/>
+                      <a:ea typeface="+mn-ea"/>
+                      <a:cs typeface="+mn-cs"/>
+                    </a:rPr>
+                    <a:t>Firmware</a:t>
+                  </a:r>
+                </a:p>
+              </p:txBody>
+            </p:sp>
+            <p:sp>
+              <p:nvSpPr>
+                <p:cNvPr id="32" name="Textfeld 31">
+                  <a:extLst>
+                    <a:ext uri="{FF2B5EF4-FFF2-40B4-BE49-F238E27FC236}">
+                      <a16:creationId xmlns:a16="http://schemas.microsoft.com/office/drawing/2014/main" id="{7A0BFA75-46D0-C999-92CC-EAC78156021C}"/>
+                    </a:ext>
+                  </a:extLst>
+                </p:cNvPr>
+                <p:cNvSpPr txBox="1"/>
+                <p:nvPr/>
+              </p:nvSpPr>
+              <p:spPr>
+                <a:xfrm>
+                  <a:off x="7218276" y="2363473"/>
+                  <a:ext cx="1605887" cy="461665"/>
+                </a:xfrm>
+                <a:prstGeom prst="rect">
+                  <a:avLst/>
+                </a:prstGeom>
+                <a:solidFill>
+                  <a:schemeClr val="bg1">
+                    <a:lumMod val="95000"/>
+                  </a:schemeClr>
+                </a:solidFill>
+              </p:spPr>
+              <p:txBody>
+                <a:bodyPr wrap="square" rtlCol="0">
+                  <a:spAutoFit/>
+                </a:bodyPr>
+                <a:lstStyle/>
+                <a:p>
+                  <a:pPr marL="0" marR="0" lvl="0" indent="0" algn="l" defTabSz="914400" rtl="0" eaLnBrk="1" fontAlgn="auto" latinLnBrk="0" hangingPunct="1">
+                    <a:lnSpc>
+                      <a:spcPct val="100000"/>
+                    </a:lnSpc>
+                    <a:spcBef>
+                      <a:spcPts val="0"/>
+                    </a:spcBef>
+                    <a:spcAft>
+                      <a:spcPts val="0"/>
+                    </a:spcAft>
+                    <a:buClrTx/>
+                    <a:buSzTx/>
+                    <a:buFontTx/>
+                    <a:buNone/>
+                    <a:tabLst/>
+                    <a:defRPr/>
+                  </a:pPr>
+                  <a:r>
+                    <a:rPr kumimoji="0" lang="de-DE" sz="800" b="0" i="0" u="none" strike="noStrike" kern="1200" cap="none" spc="0" normalizeH="0" baseline="0" noProof="0">
+                      <a:ln>
+                        <a:noFill/>
+                      </a:ln>
+                      <a:solidFill>
+                        <a:prstClr val="black"/>
+                      </a:solidFill>
+                      <a:effectLst/>
+                      <a:uLnTx/>
+                      <a:uFillTx/>
+                      <a:latin typeface="Aptos" panose="02110004020202020204"/>
+                      <a:ea typeface="+mn-ea"/>
+                      <a:cs typeface="+mn-cs"/>
+                    </a:rPr>
+                    <a:t>OperationalDS only contains data required for managing the domain (state on devices)</a:t>
+                  </a:r>
+                </a:p>
+              </p:txBody>
+            </p:sp>
+            <p:sp>
+              <p:nvSpPr>
+                <p:cNvPr id="34" name="Textfeld 33">
+                  <a:extLst>
+                    <a:ext uri="{FF2B5EF4-FFF2-40B4-BE49-F238E27FC236}">
+                      <a16:creationId xmlns:a16="http://schemas.microsoft.com/office/drawing/2014/main" id="{422B8B3E-B215-E77B-C872-39FAFA17819F}"/>
+                    </a:ext>
+                  </a:extLst>
+                </p:cNvPr>
+                <p:cNvSpPr txBox="1"/>
+                <p:nvPr/>
+              </p:nvSpPr>
+              <p:spPr>
+                <a:xfrm>
+                  <a:off x="7241269" y="4183479"/>
+                  <a:ext cx="896299" cy="307777"/>
+                </a:xfrm>
+                <a:prstGeom prst="rect">
+                  <a:avLst/>
+                </a:prstGeom>
+                <a:solidFill>
+                  <a:schemeClr val="accent2">
+                    <a:lumMod val="20000"/>
+                    <a:lumOff val="80000"/>
+                  </a:schemeClr>
+                </a:solidFill>
+              </p:spPr>
+              <p:txBody>
+                <a:bodyPr wrap="square" rtlCol="0">
+                  <a:spAutoFit/>
+                </a:bodyPr>
+                <a:lstStyle/>
+                <a:p>
+                  <a:pPr marL="0" marR="0" lvl="0" indent="0" algn="l" defTabSz="914400" rtl="0" eaLnBrk="1" fontAlgn="auto" latinLnBrk="0" hangingPunct="1">
+                    <a:lnSpc>
+                      <a:spcPct val="100000"/>
+                    </a:lnSpc>
+                    <a:spcBef>
+                      <a:spcPts val="0"/>
+                    </a:spcBef>
+                    <a:spcAft>
+                      <a:spcPts val="0"/>
+                    </a:spcAft>
+                    <a:buClrTx/>
+                    <a:buSzTx/>
+                    <a:buFontTx/>
+                    <a:buNone/>
+                    <a:tabLst/>
+                    <a:defRPr/>
+                  </a:pPr>
+                  <a:r>
+                    <a:rPr kumimoji="0" lang="de-DE" sz="700" b="0" i="1" u="none" strike="noStrike" kern="1200" cap="none" spc="0" normalizeH="0" baseline="0" noProof="0">
+                      <a:ln>
+                        <a:noFill/>
+                      </a:ln>
+                      <a:solidFill>
+                        <a:srgbClr val="E97132">
+                          <a:lumMod val="75000"/>
+                        </a:srgbClr>
+                      </a:solidFill>
+                      <a:effectLst/>
+                      <a:uLnTx/>
+                      <a:uFillTx/>
+                      <a:latin typeface="Aptos" panose="02110004020202020204"/>
+                      <a:ea typeface="+mn-ea"/>
+                      <a:cs typeface="+mn-cs"/>
+                    </a:rPr>
+                    <a:t>Equipment: Actual</a:t>
+                  </a:r>
+                </a:p>
+                <a:p>
+                  <a:pPr marL="0" marR="0" lvl="0" indent="0" algn="l" defTabSz="914400" rtl="0" eaLnBrk="1" fontAlgn="auto" latinLnBrk="0" hangingPunct="1">
+                    <a:lnSpc>
+                      <a:spcPct val="100000"/>
+                    </a:lnSpc>
+                    <a:spcBef>
+                      <a:spcPts val="0"/>
+                    </a:spcBef>
+                    <a:spcAft>
+                      <a:spcPts val="0"/>
+                    </a:spcAft>
+                    <a:buClrTx/>
+                    <a:buSzTx/>
+                    <a:buFontTx/>
+                    <a:buNone/>
+                    <a:tabLst/>
+                    <a:defRPr/>
+                  </a:pPr>
+                  <a:r>
+                    <a:rPr kumimoji="0" lang="de-DE" sz="700" b="0" i="1" u="none" strike="noStrike" kern="1200" cap="none" spc="0" normalizeH="0" baseline="0" noProof="0">
+                      <a:ln>
+                        <a:noFill/>
+                      </a:ln>
+                      <a:solidFill>
+                        <a:srgbClr val="E97132">
+                          <a:lumMod val="75000"/>
+                        </a:srgbClr>
+                      </a:solidFill>
+                      <a:effectLst/>
+                      <a:uLnTx/>
+                      <a:uFillTx/>
+                      <a:latin typeface="Aptos" panose="02110004020202020204"/>
+                      <a:ea typeface="+mn-ea"/>
+                      <a:cs typeface="+mn-cs"/>
+                    </a:rPr>
+                    <a:t>FW: Actual</a:t>
+                  </a:r>
+                </a:p>
+              </p:txBody>
+            </p:sp>
+            <p:sp>
+              <p:nvSpPr>
+                <p:cNvPr id="36" name="Textfeld 35">
+                  <a:extLst>
+                    <a:ext uri="{FF2B5EF4-FFF2-40B4-BE49-F238E27FC236}">
+                      <a16:creationId xmlns:a16="http://schemas.microsoft.com/office/drawing/2014/main" id="{5F306B7F-03FE-BFD9-7652-A4588DCBF8E8}"/>
+                    </a:ext>
+                  </a:extLst>
+                </p:cNvPr>
+                <p:cNvSpPr txBox="1"/>
+                <p:nvPr/>
+              </p:nvSpPr>
+              <p:spPr>
+                <a:xfrm>
+                  <a:off x="9491966" y="2363473"/>
+                  <a:ext cx="1707390" cy="784830"/>
+                </a:xfrm>
+                <a:prstGeom prst="rect">
+                  <a:avLst/>
+                </a:prstGeom>
+                <a:solidFill>
+                  <a:schemeClr val="tx2">
+                    <a:lumMod val="10000"/>
+                    <a:lumOff val="90000"/>
+                  </a:schemeClr>
+                </a:solidFill>
+              </p:spPr>
+              <p:txBody>
+                <a:bodyPr wrap="square" rtlCol="0">
+                  <a:spAutoFit/>
+                </a:bodyPr>
+                <a:lstStyle/>
+                <a:p>
+                  <a:pPr marL="0" marR="0" lvl="0" indent="0" algn="l" defTabSz="914400" rtl="0" eaLnBrk="1" fontAlgn="auto" latinLnBrk="0" hangingPunct="1">
+                    <a:lnSpc>
+                      <a:spcPct val="100000"/>
+                    </a:lnSpc>
+                    <a:spcBef>
+                      <a:spcPts val="0"/>
+                    </a:spcBef>
+                    <a:spcAft>
+                      <a:spcPts val="0"/>
+                    </a:spcAft>
+                    <a:buClrTx/>
+                    <a:buSzTx/>
+                    <a:buFontTx/>
+                    <a:buNone/>
+                    <a:tabLst/>
+                    <a:defRPr/>
+                  </a:pPr>
+                  <a:r>
+                    <a:rPr kumimoji="0" lang="de-DE" sz="900" b="0" i="0" u="none" strike="noStrike" kern="1200" cap="none" spc="0" normalizeH="0" baseline="0" noProof="0">
+                      <a:ln>
+                        <a:noFill/>
+                      </a:ln>
+                      <a:solidFill>
+                        <a:srgbClr val="156082">
+                          <a:lumMod val="60000"/>
+                          <a:lumOff val="40000"/>
+                        </a:srgbClr>
+                      </a:solidFill>
+                      <a:effectLst/>
+                      <a:uLnTx/>
+                      <a:uFillTx/>
+                      <a:latin typeface="Aptos" panose="02110004020202020204"/>
+                      <a:ea typeface="+mn-ea"/>
+                      <a:cs typeface="+mn-cs"/>
+                    </a:rPr>
+                    <a:t>Load current equipment + firmware state from devices</a:t>
+                  </a:r>
+                </a:p>
+                <a:p>
+                  <a:pPr marL="0" marR="0" lvl="0" indent="0" algn="l" defTabSz="914400" rtl="0" eaLnBrk="1" fontAlgn="auto" latinLnBrk="0" hangingPunct="1">
+                    <a:lnSpc>
+                      <a:spcPct val="100000"/>
+                    </a:lnSpc>
+                    <a:spcBef>
+                      <a:spcPts val="0"/>
+                    </a:spcBef>
+                    <a:spcAft>
+                      <a:spcPts val="0"/>
+                    </a:spcAft>
+                    <a:buClrTx/>
+                    <a:buSzTx/>
+                    <a:buFontTx/>
+                    <a:buNone/>
+                    <a:tabLst/>
+                    <a:defRPr/>
+                  </a:pPr>
+                  <a:r>
+                    <a:rPr kumimoji="0" lang="de-DE" sz="900" b="0" i="0" u="none" strike="noStrike" kern="1200" cap="none" spc="0" normalizeH="0" baseline="0" noProof="0">
+                      <a:ln>
+                        <a:noFill/>
+                      </a:ln>
+                      <a:solidFill>
+                        <a:srgbClr val="156082">
+                          <a:lumMod val="60000"/>
+                          <a:lumOff val="40000"/>
+                        </a:srgbClr>
+                      </a:solidFill>
+                      <a:effectLst/>
+                      <a:uLnTx/>
+                      <a:uFillTx/>
+                      <a:latin typeface="Aptos" panose="02110004020202020204"/>
+                      <a:ea typeface="+mn-ea"/>
+                      <a:cs typeface="+mn-cs"/>
+                    </a:rPr>
+                    <a:t>(Difficulty: interface is generic, but data is not homogenous </a:t>
+                  </a:r>
+                  <a:r>
+                    <a:rPr kumimoji="0" lang="de-DE" sz="900" b="0" i="0" u="none" strike="noStrike" kern="1200" cap="none" spc="0" normalizeH="0" baseline="0" noProof="0">
+                      <a:ln>
+                        <a:noFill/>
+                      </a:ln>
+                      <a:solidFill>
+                        <a:srgbClr val="156082">
+                          <a:lumMod val="60000"/>
+                          <a:lumOff val="40000"/>
+                        </a:srgbClr>
+                      </a:solidFill>
+                      <a:effectLst/>
+                      <a:uLnTx/>
+                      <a:uFillTx/>
+                      <a:latin typeface="Aptos" panose="02110004020202020204"/>
+                      <a:ea typeface="+mn-ea"/>
+                      <a:cs typeface="+mn-cs"/>
+                      <a:sym typeface="Symbol" panose="05050102010706020507" pitchFamily="18" charset="2"/>
+                    </a:rPr>
+                    <a:t></a:t>
+                  </a:r>
+                  <a:r>
+                    <a:rPr kumimoji="0" lang="de-DE" sz="900" b="0" i="0" u="none" strike="noStrike" kern="1200" cap="none" spc="0" normalizeH="0" baseline="0" noProof="0">
+                      <a:ln>
+                        <a:noFill/>
+                      </a:ln>
+                      <a:solidFill>
+                        <a:srgbClr val="156082">
+                          <a:lumMod val="60000"/>
+                          <a:lumOff val="40000"/>
+                        </a:srgbClr>
+                      </a:solidFill>
+                      <a:effectLst/>
+                      <a:uLnTx/>
+                      <a:uFillTx/>
+                      <a:latin typeface="Aptos" panose="02110004020202020204"/>
+                      <a:ea typeface="+mn-ea"/>
+                      <a:cs typeface="+mn-cs"/>
+                    </a:rPr>
+                    <a:t> interpretation of data required)</a:t>
+                  </a:r>
+                </a:p>
+              </p:txBody>
+            </p:sp>
+            <p:sp>
+              <p:nvSpPr>
+                <p:cNvPr id="38" name="Textfeld 37">
+                  <a:extLst>
+                    <a:ext uri="{FF2B5EF4-FFF2-40B4-BE49-F238E27FC236}">
+                      <a16:creationId xmlns:a16="http://schemas.microsoft.com/office/drawing/2014/main" id="{14283448-EA28-DABA-0675-02BE241E9FE3}"/>
+                    </a:ext>
+                  </a:extLst>
+                </p:cNvPr>
+                <p:cNvSpPr txBox="1"/>
+                <p:nvPr/>
+              </p:nvSpPr>
+              <p:spPr>
+                <a:xfrm>
+                  <a:off x="9287037" y="5482071"/>
+                  <a:ext cx="1605887" cy="923330"/>
+                </a:xfrm>
+                <a:prstGeom prst="rect">
+                  <a:avLst/>
+                </a:prstGeom>
+                <a:solidFill>
+                  <a:schemeClr val="tx2">
+                    <a:lumMod val="10000"/>
+                    <a:lumOff val="90000"/>
+                  </a:schemeClr>
+                </a:solidFill>
+              </p:spPr>
+              <p:txBody>
+                <a:bodyPr wrap="square" rtlCol="0">
+                  <a:spAutoFit/>
+                </a:bodyPr>
+                <a:lstStyle>
+                  <a:defPPr>
+                    <a:defRPr lang="de-DE"/>
+                  </a:defPPr>
+                  <a:lvl1pPr>
+                    <a:defRPr sz="900">
+                      <a:solidFill>
+                        <a:schemeClr val="accent1">
+                          <a:lumMod val="60000"/>
+                          <a:lumOff val="40000"/>
+                        </a:schemeClr>
+                      </a:solidFill>
+                    </a:defRPr>
+                  </a:lvl1pPr>
+                </a:lstStyle>
+                <a:p>
+                  <a:pPr marL="0" marR="0" lvl="0" indent="0" algn="l" defTabSz="914400" rtl="0" eaLnBrk="1" fontAlgn="auto" latinLnBrk="0" hangingPunct="1">
+                    <a:lnSpc>
+                      <a:spcPct val="100000"/>
+                    </a:lnSpc>
+                    <a:spcBef>
+                      <a:spcPts val="0"/>
+                    </a:spcBef>
+                    <a:spcAft>
+                      <a:spcPts val="0"/>
+                    </a:spcAft>
+                    <a:buClrTx/>
+                    <a:buSzTx/>
+                    <a:buFontTx/>
+                    <a:buNone/>
+                    <a:tabLst/>
+                    <a:defRPr/>
+                  </a:pPr>
+                  <a:r>
+                    <a:rPr kumimoji="0" lang="de-DE" sz="900" b="0" i="0" u="none" strike="noStrike" kern="1200" cap="none" spc="0" normalizeH="0" baseline="0" noProof="0">
+                      <a:ln>
+                        <a:noFill/>
+                      </a:ln>
+                      <a:solidFill>
+                        <a:srgbClr val="156082">
+                          <a:lumMod val="60000"/>
+                          <a:lumOff val="40000"/>
+                        </a:srgbClr>
+                      </a:solidFill>
+                      <a:effectLst/>
+                      <a:uLnTx/>
+                      <a:uFillTx/>
+                      <a:latin typeface="Aptos" panose="02110004020202020204"/>
+                      <a:ea typeface="+mn-ea"/>
+                      <a:cs typeface="+mn-cs"/>
+                    </a:rPr>
+                    <a:t>Implementation functions write changes into the network</a:t>
+                  </a:r>
+                </a:p>
+                <a:p>
+                  <a:pPr marL="0" marR="0" lvl="0" indent="0" algn="l" defTabSz="914400" rtl="0" eaLnBrk="1" fontAlgn="auto" latinLnBrk="0" hangingPunct="1">
+                    <a:lnSpc>
+                      <a:spcPct val="100000"/>
+                    </a:lnSpc>
+                    <a:spcBef>
+                      <a:spcPts val="0"/>
+                    </a:spcBef>
+                    <a:spcAft>
+                      <a:spcPts val="0"/>
+                    </a:spcAft>
+                    <a:buClrTx/>
+                    <a:buSzTx/>
+                    <a:buFontTx/>
+                    <a:buNone/>
+                    <a:tabLst/>
+                    <a:defRPr/>
+                  </a:pPr>
+                  <a:r>
+                    <a:rPr kumimoji="0" lang="de-DE" sz="900" b="0" i="0" u="none" strike="noStrike" kern="1200" cap="none" spc="0" normalizeH="0" baseline="0" noProof="0">
+                      <a:ln>
+                        <a:noFill/>
+                      </a:ln>
+                      <a:solidFill>
+                        <a:srgbClr val="156082">
+                          <a:lumMod val="60000"/>
+                          <a:lumOff val="40000"/>
+                        </a:srgbClr>
+                      </a:solidFill>
+                      <a:effectLst/>
+                      <a:uLnTx/>
+                      <a:uFillTx/>
+                      <a:latin typeface="Aptos" panose="02110004020202020204"/>
+                      <a:ea typeface="+mn-ea"/>
+                      <a:cs typeface="+mn-cs"/>
+                    </a:rPr>
+                    <a:t>(RPC1: download of FW to device, RPC2: device unpacks FW) </a:t>
+                  </a:r>
+                </a:p>
+              </p:txBody>
+            </p:sp>
+          </p:grpSp>
           <p:sp>
             <p:nvSpPr>
-              <p:cNvPr id="8" name="Textfeld 7">
+              <p:cNvPr id="18" name="Bogen 17">
                 <a:extLst>
                   <a:ext uri="{FF2B5EF4-FFF2-40B4-BE49-F238E27FC236}">
-                    <a16:creationId xmlns:a16="http://schemas.microsoft.com/office/drawing/2014/main" id="{203B6016-F752-7A46-CDB0-01BA0EE44134}"/>
-                  </a:ext>
-                </a:extLst>
-              </p:cNvPr>
-              <p:cNvSpPr txBox="1"/>
-              <p:nvPr/>
-            </p:nvSpPr>
-            <p:spPr>
-              <a:xfrm>
-                <a:off x="1411916" y="3452553"/>
-                <a:ext cx="1330660" cy="584775"/>
-              </a:xfrm>
-              <a:prstGeom prst="rect">
-                <a:avLst/>
-              </a:prstGeom>
-              <a:solidFill>
-                <a:schemeClr val="bg1">
-                  <a:lumMod val="95000"/>
-                </a:schemeClr>
-              </a:solidFill>
-            </p:spPr>
-            <p:txBody>
-              <a:bodyPr wrap="square" rtlCol="0">
-                <a:spAutoFit/>
-              </a:bodyPr>
-              <a:lstStyle/>
-              <a:p>
-                <a:pPr marL="0" marR="0" lvl="0" indent="0" algn="l" defTabSz="914400" rtl="0" eaLnBrk="1" fontAlgn="auto" latinLnBrk="0" hangingPunct="1">
-                  <a:lnSpc>
-                    <a:spcPct val="100000"/>
-                  </a:lnSpc>
-                  <a:spcBef>
-                    <a:spcPts val="0"/>
-                  </a:spcBef>
-                  <a:spcAft>
-                    <a:spcPts val="0"/>
-                  </a:spcAft>
-                  <a:buClrTx/>
-                  <a:buSzTx/>
-                  <a:buFontTx/>
-                  <a:buNone/>
-                  <a:tabLst/>
-                  <a:defRPr/>
-                </a:pPr>
-                <a:r>
-                  <a:rPr kumimoji="0" lang="de-DE" sz="800" b="0" i="0" u="none" strike="noStrike" kern="1200" cap="none" spc="0" normalizeH="0" baseline="0" noProof="0">
-                    <a:ln>
-                      <a:noFill/>
-                    </a:ln>
-                    <a:solidFill>
-                      <a:prstClr val="black"/>
-                    </a:solidFill>
-                    <a:effectLst/>
-                    <a:uLnTx/>
-                    <a:uFillTx/>
-                    <a:latin typeface="Aptos" panose="02110004020202020204"/>
-                    <a:ea typeface="+mn-ea"/>
-                    <a:cs typeface="+mn-cs"/>
-                  </a:rPr>
-                  <a:t>Approval:</a:t>
-                </a:r>
-              </a:p>
-              <a:p>
-                <a:pPr marL="0" marR="0" lvl="0" indent="0" algn="l" defTabSz="914400" rtl="0" eaLnBrk="1" fontAlgn="auto" latinLnBrk="0" hangingPunct="1">
-                  <a:lnSpc>
-                    <a:spcPct val="100000"/>
-                  </a:lnSpc>
-                  <a:spcBef>
-                    <a:spcPts val="0"/>
-                  </a:spcBef>
-                  <a:spcAft>
-                    <a:spcPts val="0"/>
-                  </a:spcAft>
-                  <a:buClrTx/>
-                  <a:buSzTx/>
-                  <a:buFontTx/>
-                  <a:buNone/>
-                  <a:tabLst/>
-                  <a:defRPr/>
-                </a:pPr>
-                <a:r>
-                  <a:rPr kumimoji="0" lang="de-DE" sz="800" b="0" i="0" u="none" strike="noStrike" kern="1200" cap="none" spc="0" normalizeH="0" baseline="0" noProof="0">
-                    <a:ln>
-                      <a:noFill/>
-                    </a:ln>
-                    <a:solidFill>
-                      <a:prstClr val="black"/>
-                    </a:solidFill>
-                    <a:effectLst/>
-                    <a:uLnTx/>
-                    <a:uFillTx/>
-                    <a:latin typeface="Aptos" panose="02110004020202020204"/>
-                    <a:ea typeface="+mn-ea"/>
-                    <a:cs typeface="+mn-cs"/>
-                  </a:rPr>
-                  <a:t>All domain rules met?</a:t>
-                </a:r>
-              </a:p>
-              <a:p>
-                <a:pPr marL="0" marR="0" lvl="0" indent="0" algn="l" defTabSz="914400" rtl="0" eaLnBrk="1" fontAlgn="auto" latinLnBrk="0" hangingPunct="1">
-                  <a:lnSpc>
-                    <a:spcPct val="100000"/>
-                  </a:lnSpc>
-                  <a:spcBef>
-                    <a:spcPts val="0"/>
-                  </a:spcBef>
-                  <a:spcAft>
-                    <a:spcPts val="0"/>
-                  </a:spcAft>
-                  <a:buClrTx/>
-                  <a:buSzTx/>
-                  <a:buFontTx/>
-                  <a:buNone/>
-                  <a:tabLst/>
-                  <a:defRPr/>
-                </a:pPr>
-                <a:r>
-                  <a:rPr kumimoji="0" lang="de-DE" sz="800" b="0" i="0" u="none" strike="noStrike" kern="1200" cap="none" spc="0" normalizeH="0" baseline="0" noProof="0">
-                    <a:ln>
-                      <a:noFill/>
-                    </a:ln>
-                    <a:solidFill>
-                      <a:prstClr val="black"/>
-                    </a:solidFill>
-                    <a:effectLst/>
-                    <a:uLnTx/>
-                    <a:uFillTx/>
-                    <a:latin typeface="Aptos" panose="02110004020202020204"/>
-                    <a:ea typeface="+mn-ea"/>
-                    <a:cs typeface="+mn-cs"/>
-                  </a:rPr>
-                  <a:t>Only then candidate can transition to target state</a:t>
-                </a:r>
-              </a:p>
-            </p:txBody>
-          </p:sp>
-          <p:sp>
-            <p:nvSpPr>
-              <p:cNvPr id="11" name="Textfeld 10">
-                <a:extLst>
-                  <a:ext uri="{FF2B5EF4-FFF2-40B4-BE49-F238E27FC236}">
-                    <a16:creationId xmlns:a16="http://schemas.microsoft.com/office/drawing/2014/main" id="{BA3F1538-D656-41EF-279B-1DF69A3B0EC8}"/>
-                  </a:ext>
-                </a:extLst>
-              </p:cNvPr>
-              <p:cNvSpPr txBox="1"/>
-              <p:nvPr/>
-            </p:nvSpPr>
-            <p:spPr>
-              <a:xfrm>
-                <a:off x="1014223" y="960555"/>
-                <a:ext cx="1267669" cy="507831"/>
-              </a:xfrm>
-              <a:prstGeom prst="rect">
-                <a:avLst/>
-              </a:prstGeom>
-              <a:solidFill>
-                <a:schemeClr val="tx2">
-                  <a:lumMod val="10000"/>
-                  <a:lumOff val="90000"/>
-                </a:schemeClr>
-              </a:solidFill>
-            </p:spPr>
-            <p:txBody>
-              <a:bodyPr wrap="square" rtlCol="0">
-                <a:spAutoFit/>
-              </a:bodyPr>
-              <a:lstStyle/>
-              <a:p>
-                <a:pPr marL="0" marR="0" lvl="0" indent="0" algn="l" defTabSz="914400" rtl="0" eaLnBrk="1" fontAlgn="auto" latinLnBrk="0" hangingPunct="1">
-                  <a:lnSpc>
-                    <a:spcPct val="100000"/>
-                  </a:lnSpc>
-                  <a:spcBef>
-                    <a:spcPts val="0"/>
-                  </a:spcBef>
-                  <a:spcAft>
-                    <a:spcPts val="0"/>
-                  </a:spcAft>
-                  <a:buClrTx/>
-                  <a:buSzTx/>
-                  <a:buFontTx/>
-                  <a:buNone/>
-                  <a:tabLst/>
-                  <a:defRPr/>
-                </a:pPr>
-                <a:r>
-                  <a:rPr kumimoji="0" lang="de-DE" sz="900" b="0" i="0" u="none" strike="noStrike" kern="1200" cap="none" spc="0" normalizeH="0" baseline="0" noProof="0">
-                    <a:ln>
-                      <a:noFill/>
-                    </a:ln>
-                    <a:solidFill>
-                      <a:srgbClr val="156082">
-                        <a:lumMod val="60000"/>
-                        <a:lumOff val="40000"/>
-                      </a:srgbClr>
-                    </a:solidFill>
-                    <a:effectLst/>
-                    <a:uLnTx/>
-                    <a:uFillTx/>
-                    <a:latin typeface="Aptos" panose="02110004020202020204"/>
-                    <a:ea typeface="+mn-ea"/>
-                    <a:cs typeface="+mn-cs"/>
-                  </a:rPr>
-                  <a:t>Request from outside (</a:t>
-                </a:r>
-                <a:r>
-                  <a:rPr kumimoji="0" lang="de-DE" sz="900" b="0" i="1" u="none" strike="noStrike" kern="1200" cap="none" spc="0" normalizeH="0" baseline="0" noProof="0">
-                    <a:ln>
-                      <a:noFill/>
-                    </a:ln>
-                    <a:solidFill>
-                      <a:srgbClr val="156082">
-                        <a:lumMod val="60000"/>
-                        <a:lumOff val="40000"/>
-                      </a:srgbClr>
-                    </a:solidFill>
-                    <a:effectLst/>
-                    <a:uLnTx/>
-                    <a:uFillTx/>
-                    <a:latin typeface="Aptos" panose="02110004020202020204"/>
-                    <a:ea typeface="+mn-ea"/>
-                    <a:cs typeface="+mn-cs"/>
-                  </a:rPr>
-                  <a:t>connect device x to deviceGroup y</a:t>
-                </a:r>
-                <a:r>
-                  <a:rPr kumimoji="0" lang="de-DE" sz="900" b="0" i="0" u="none" strike="noStrike" kern="1200" cap="none" spc="0" normalizeH="0" baseline="0" noProof="0">
-                    <a:ln>
-                      <a:noFill/>
-                    </a:ln>
-                    <a:solidFill>
-                      <a:srgbClr val="156082">
-                        <a:lumMod val="60000"/>
-                        <a:lumOff val="40000"/>
-                      </a:srgbClr>
-                    </a:solidFill>
-                    <a:effectLst/>
-                    <a:uLnTx/>
-                    <a:uFillTx/>
-                    <a:latin typeface="Aptos" panose="02110004020202020204"/>
-                    <a:ea typeface="+mn-ea"/>
-                    <a:cs typeface="+mn-cs"/>
-                  </a:rPr>
-                  <a:t>)</a:t>
-                </a:r>
-              </a:p>
-            </p:txBody>
-          </p:sp>
-          <p:sp>
-            <p:nvSpPr>
-              <p:cNvPr id="13" name="Textfeld 12">
-                <a:extLst>
-                  <a:ext uri="{FF2B5EF4-FFF2-40B4-BE49-F238E27FC236}">
-                    <a16:creationId xmlns:a16="http://schemas.microsoft.com/office/drawing/2014/main" id="{DCB8913B-A10E-8AA8-1DB4-4C71F72E6F51}"/>
-                  </a:ext>
-                </a:extLst>
-              </p:cNvPr>
-              <p:cNvSpPr txBox="1"/>
-              <p:nvPr/>
-            </p:nvSpPr>
-            <p:spPr>
-              <a:xfrm>
-                <a:off x="3251956" y="716821"/>
-                <a:ext cx="2148637" cy="507831"/>
-              </a:xfrm>
-              <a:prstGeom prst="rect">
-                <a:avLst/>
-              </a:prstGeom>
-              <a:solidFill>
-                <a:schemeClr val="tx2">
-                  <a:lumMod val="10000"/>
-                  <a:lumOff val="90000"/>
-                </a:schemeClr>
-              </a:solidFill>
-            </p:spPr>
-            <p:txBody>
-              <a:bodyPr wrap="square" rtlCol="0">
-                <a:spAutoFit/>
-              </a:bodyPr>
-              <a:lstStyle/>
-              <a:p>
-                <a:pPr marL="0" marR="0" lvl="0" indent="0" algn="l" defTabSz="914400" rtl="0" eaLnBrk="1" fontAlgn="auto" latinLnBrk="0" hangingPunct="1">
-                  <a:lnSpc>
-                    <a:spcPct val="100000"/>
-                  </a:lnSpc>
-                  <a:spcBef>
-                    <a:spcPts val="0"/>
-                  </a:spcBef>
-                  <a:spcAft>
-                    <a:spcPts val="0"/>
-                  </a:spcAft>
-                  <a:buClrTx/>
-                  <a:buSzTx/>
-                  <a:buFontTx/>
-                  <a:buNone/>
-                  <a:tabLst/>
-                  <a:defRPr/>
-                </a:pPr>
-                <a:r>
-                  <a:rPr kumimoji="0" lang="de-DE" sz="900" b="0" i="0" u="none" strike="noStrike" kern="1200" cap="none" spc="0" normalizeH="0" baseline="0" noProof="0">
-                    <a:ln>
-                      <a:noFill/>
-                    </a:ln>
-                    <a:solidFill>
-                      <a:srgbClr val="156082">
-                        <a:lumMod val="60000"/>
-                        <a:lumOff val="40000"/>
-                      </a:srgbClr>
-                    </a:solidFill>
-                    <a:effectLst/>
-                    <a:uLnTx/>
-                    <a:uFillTx/>
-                    <a:latin typeface="Aptos" panose="02110004020202020204"/>
-                    <a:ea typeface="+mn-ea"/>
-                    <a:cs typeface="+mn-cs"/>
-                  </a:rPr>
-                  <a:t>Request gets interpreted:</a:t>
-                </a:r>
-              </a:p>
-              <a:p>
-                <a:pPr marL="0" marR="0" lvl="0" indent="0" algn="l" defTabSz="914400" rtl="0" eaLnBrk="1" fontAlgn="auto" latinLnBrk="0" hangingPunct="1">
-                  <a:lnSpc>
-                    <a:spcPct val="100000"/>
-                  </a:lnSpc>
-                  <a:spcBef>
-                    <a:spcPts val="0"/>
-                  </a:spcBef>
-                  <a:spcAft>
-                    <a:spcPts val="0"/>
-                  </a:spcAft>
-                  <a:buClrTx/>
-                  <a:buSzTx/>
-                  <a:buFontTx/>
-                  <a:buNone/>
-                  <a:tabLst/>
-                  <a:defRPr/>
-                </a:pPr>
-                <a:r>
-                  <a:rPr kumimoji="0" lang="de-DE" sz="900" b="0" i="1" u="none" strike="noStrike" kern="1200" cap="none" spc="0" normalizeH="0" baseline="0" noProof="0">
-                    <a:ln>
-                      <a:noFill/>
-                    </a:ln>
-                    <a:solidFill>
-                      <a:srgbClr val="156082">
-                        <a:lumMod val="60000"/>
-                        <a:lumOff val="40000"/>
-                      </a:srgbClr>
-                    </a:solidFill>
-                    <a:effectLst/>
-                    <a:uLnTx/>
-                    <a:uFillTx/>
-                    <a:latin typeface="Aptos" panose="02110004020202020204"/>
-                    <a:ea typeface="+mn-ea"/>
-                    <a:cs typeface="+mn-cs"/>
-                  </a:rPr>
-                  <a:t>(deviceGroup y needs firmware z) </a:t>
-                </a:r>
-                <a:r>
-                  <a:rPr kumimoji="0" lang="de-DE" sz="900" b="0" i="0" u="none" strike="noStrike" kern="1200" cap="none" spc="0" normalizeH="0" baseline="0" noProof="0">
-                    <a:ln>
-                      <a:noFill/>
-                    </a:ln>
-                    <a:solidFill>
-                      <a:srgbClr val="156082">
-                        <a:lumMod val="60000"/>
-                        <a:lumOff val="40000"/>
-                      </a:srgbClr>
-                    </a:solidFill>
-                    <a:effectLst/>
-                    <a:uLnTx/>
-                    <a:uFillTx/>
-                    <a:latin typeface="Aptos" panose="02110004020202020204"/>
-                    <a:ea typeface="+mn-ea"/>
-                    <a:cs typeface="+mn-cs"/>
-                    <a:sym typeface="Symbol" panose="05050102010706020507" pitchFamily="18" charset="2"/>
-                  </a:rPr>
-                  <a:t></a:t>
-                </a:r>
-                <a:r>
-                  <a:rPr kumimoji="0" lang="de-DE" sz="900" b="0" i="0" u="none" strike="noStrike" kern="1200" cap="none" spc="0" normalizeH="0" baseline="0" noProof="0">
-                    <a:ln>
-                      <a:noFill/>
-                    </a:ln>
-                    <a:solidFill>
-                      <a:srgbClr val="156082">
-                        <a:lumMod val="60000"/>
-                        <a:lumOff val="40000"/>
-                      </a:srgbClr>
-                    </a:solidFill>
-                    <a:effectLst/>
-                    <a:uLnTx/>
-                    <a:uFillTx/>
-                    <a:latin typeface="Aptos" panose="02110004020202020204"/>
-                    <a:ea typeface="+mn-ea"/>
-                    <a:cs typeface="+mn-cs"/>
-                  </a:rPr>
-                  <a:t> association = </a:t>
-                </a:r>
-                <a:r>
-                  <a:rPr kumimoji="0" lang="de-DE" sz="900" b="0" i="1" u="none" strike="noStrike" kern="1200" cap="none" spc="0" normalizeH="0" baseline="0" noProof="0">
-                    <a:ln>
-                      <a:noFill/>
-                    </a:ln>
-                    <a:solidFill>
-                      <a:srgbClr val="156082">
-                        <a:lumMod val="60000"/>
-                        <a:lumOff val="40000"/>
-                      </a:srgbClr>
-                    </a:solidFill>
-                    <a:effectLst/>
-                    <a:uLnTx/>
-                    <a:uFillTx/>
-                    <a:latin typeface="Aptos" panose="02110004020202020204"/>
-                    <a:ea typeface="+mn-ea"/>
-                    <a:cs typeface="+mn-cs"/>
-                  </a:rPr>
-                  <a:t>device x needs firmware z</a:t>
-                </a:r>
-              </a:p>
-            </p:txBody>
-          </p:sp>
-          <p:sp>
-            <p:nvSpPr>
-              <p:cNvPr id="15" name="Textfeld 14">
-                <a:extLst>
-                  <a:ext uri="{FF2B5EF4-FFF2-40B4-BE49-F238E27FC236}">
-                    <a16:creationId xmlns:a16="http://schemas.microsoft.com/office/drawing/2014/main" id="{89B0EDCC-6F86-DF1F-AE3F-997E6F8FAEB8}"/>
-                  </a:ext>
-                </a:extLst>
-              </p:cNvPr>
-              <p:cNvSpPr txBox="1"/>
-              <p:nvPr/>
-            </p:nvSpPr>
-            <p:spPr>
-              <a:xfrm>
-                <a:off x="4322448" y="1260972"/>
-                <a:ext cx="2348081" cy="507831"/>
-              </a:xfrm>
-              <a:prstGeom prst="rect">
-                <a:avLst/>
-              </a:prstGeom>
-              <a:solidFill>
-                <a:schemeClr val="tx2">
-                  <a:lumMod val="10000"/>
-                  <a:lumOff val="90000"/>
-                </a:schemeClr>
-              </a:solidFill>
-            </p:spPr>
-            <p:txBody>
-              <a:bodyPr wrap="square" rtlCol="0">
-                <a:spAutoFit/>
-              </a:bodyPr>
-              <a:lstStyle/>
-              <a:p>
-                <a:pPr marL="0" marR="0" lvl="0" indent="0" algn="l" defTabSz="914400" rtl="0" eaLnBrk="1" fontAlgn="auto" latinLnBrk="0" hangingPunct="1">
-                  <a:lnSpc>
-                    <a:spcPct val="100000"/>
-                  </a:lnSpc>
-                  <a:spcBef>
-                    <a:spcPts val="0"/>
-                  </a:spcBef>
-                  <a:spcAft>
-                    <a:spcPts val="0"/>
-                  </a:spcAft>
-                  <a:buClrTx/>
-                  <a:buSzTx/>
-                  <a:buFontTx/>
-                  <a:buNone/>
-                  <a:tabLst/>
-                  <a:defRPr/>
-                </a:pPr>
-                <a:r>
-                  <a:rPr kumimoji="0" lang="de-DE" sz="900" b="0" i="0" u="none" strike="noStrike" kern="1200" cap="none" spc="0" normalizeH="0" baseline="0" noProof="0">
-                    <a:ln>
-                      <a:noFill/>
-                    </a:ln>
-                    <a:solidFill>
-                      <a:srgbClr val="156082">
-                        <a:lumMod val="60000"/>
-                        <a:lumOff val="40000"/>
-                      </a:srgbClr>
-                    </a:solidFill>
-                    <a:effectLst/>
-                    <a:uLnTx/>
-                    <a:uFillTx/>
-                    <a:latin typeface="Aptos" panose="02110004020202020204"/>
-                    <a:ea typeface="+mn-ea"/>
-                    <a:cs typeface="+mn-cs"/>
-                  </a:rPr>
-                  <a:t>Upon request from outside:</a:t>
-                </a:r>
-              </a:p>
-              <a:p>
-                <a:pPr marL="0" marR="0" lvl="0" indent="0" algn="l" defTabSz="914400" rtl="0" eaLnBrk="1" fontAlgn="auto" latinLnBrk="0" hangingPunct="1">
-                  <a:lnSpc>
-                    <a:spcPct val="100000"/>
-                  </a:lnSpc>
-                  <a:spcBef>
-                    <a:spcPts val="0"/>
-                  </a:spcBef>
-                  <a:spcAft>
-                    <a:spcPts val="0"/>
-                  </a:spcAft>
-                  <a:buClrTx/>
-                  <a:buSzTx/>
-                  <a:buFontTx/>
-                  <a:buNone/>
-                  <a:tabLst/>
-                  <a:defRPr/>
-                </a:pPr>
-                <a:r>
-                  <a:rPr kumimoji="0" lang="de-DE" sz="900" b="0" i="0" u="none" strike="noStrike" kern="1200" cap="none" spc="0" normalizeH="0" baseline="0" noProof="0">
-                    <a:ln>
-                      <a:noFill/>
-                    </a:ln>
-                    <a:solidFill>
-                      <a:srgbClr val="156082">
-                        <a:lumMod val="60000"/>
-                        <a:lumOff val="40000"/>
-                      </a:srgbClr>
-                    </a:solidFill>
-                    <a:effectLst/>
-                    <a:uLnTx/>
-                    <a:uFillTx/>
-                    <a:latin typeface="Aptos" panose="02110004020202020204"/>
-                    <a:ea typeface="+mn-ea"/>
-                    <a:cs typeface="+mn-cs"/>
-                  </a:rPr>
-                  <a:t>Load CandidateDS into CandidateDS,</a:t>
-                </a:r>
-              </a:p>
-              <a:p>
-                <a:pPr marL="0" marR="0" lvl="0" indent="0" algn="l" defTabSz="914400" rtl="0" eaLnBrk="1" fontAlgn="auto" latinLnBrk="0" hangingPunct="1">
-                  <a:lnSpc>
-                    <a:spcPct val="100000"/>
-                  </a:lnSpc>
-                  <a:spcBef>
-                    <a:spcPts val="0"/>
-                  </a:spcBef>
-                  <a:spcAft>
-                    <a:spcPts val="0"/>
-                  </a:spcAft>
-                  <a:buClrTx/>
-                  <a:buSzTx/>
-                  <a:buFontTx/>
-                  <a:buNone/>
-                  <a:tabLst/>
-                  <a:defRPr/>
-                </a:pPr>
-                <a:r>
-                  <a:rPr kumimoji="0" lang="de-DE" sz="900" b="0" i="0" u="none" strike="noStrike" kern="1200" cap="none" spc="0" normalizeH="0" baseline="0" noProof="0">
-                    <a:ln>
-                      <a:noFill/>
-                    </a:ln>
-                    <a:solidFill>
-                      <a:srgbClr val="156082">
-                        <a:lumMod val="60000"/>
-                        <a:lumOff val="40000"/>
-                      </a:srgbClr>
-                    </a:solidFill>
-                    <a:effectLst/>
-                    <a:uLnTx/>
-                    <a:uFillTx/>
-                    <a:latin typeface="Aptos" panose="02110004020202020204"/>
-                    <a:ea typeface="+mn-ea"/>
-                    <a:cs typeface="+mn-cs"/>
-                  </a:rPr>
-                  <a:t>Apply desired changes to CandidateDS</a:t>
-                </a:r>
-              </a:p>
-            </p:txBody>
-          </p:sp>
-          <p:sp>
-            <p:nvSpPr>
-              <p:cNvPr id="17" name="Textfeld 16">
-                <a:extLst>
-                  <a:ext uri="{FF2B5EF4-FFF2-40B4-BE49-F238E27FC236}">
-                    <a16:creationId xmlns:a16="http://schemas.microsoft.com/office/drawing/2014/main" id="{3900CBB4-20A2-78E1-7717-10D9E64A34A8}"/>
-                  </a:ext>
-                </a:extLst>
-              </p:cNvPr>
-              <p:cNvSpPr txBox="1"/>
-              <p:nvPr/>
-            </p:nvSpPr>
-            <p:spPr>
-              <a:xfrm>
-                <a:off x="1833645" y="4086383"/>
-                <a:ext cx="1764997" cy="646331"/>
-              </a:xfrm>
-              <a:prstGeom prst="rect">
-                <a:avLst/>
-              </a:prstGeom>
-              <a:solidFill>
-                <a:schemeClr val="tx2">
-                  <a:lumMod val="10000"/>
-                  <a:lumOff val="90000"/>
-                </a:schemeClr>
-              </a:solidFill>
-            </p:spPr>
-            <p:txBody>
-              <a:bodyPr wrap="square" rtlCol="0">
-                <a:spAutoFit/>
-              </a:bodyPr>
-              <a:lstStyle>
-                <a:defPPr>
-                  <a:defRPr lang="de-DE"/>
-                </a:defPPr>
-                <a:lvl1pPr>
-                  <a:defRPr sz="900">
-                    <a:solidFill>
-                      <a:schemeClr val="accent1">
-                        <a:lumMod val="60000"/>
-                        <a:lumOff val="40000"/>
-                      </a:schemeClr>
-                    </a:solidFill>
-                  </a:defRPr>
-                </a:lvl1pPr>
-              </a:lstStyle>
-              <a:p>
-                <a:pPr marL="0" marR="0" lvl="0" indent="0" algn="l" defTabSz="914400" rtl="0" eaLnBrk="1" fontAlgn="auto" latinLnBrk="0" hangingPunct="1">
-                  <a:lnSpc>
-                    <a:spcPct val="100000"/>
-                  </a:lnSpc>
-                  <a:spcBef>
-                    <a:spcPts val="0"/>
-                  </a:spcBef>
-                  <a:spcAft>
-                    <a:spcPts val="0"/>
-                  </a:spcAft>
-                  <a:buClrTx/>
-                  <a:buSzTx/>
-                  <a:buFontTx/>
-                  <a:buNone/>
-                  <a:tabLst/>
-                  <a:defRPr/>
-                </a:pPr>
-                <a:r>
-                  <a:rPr kumimoji="0" lang="de-DE" sz="900" b="0" i="0" u="none" strike="noStrike" kern="1200" cap="none" spc="0" normalizeH="0" baseline="0" noProof="0">
-                    <a:ln>
-                      <a:noFill/>
-                    </a:ln>
-                    <a:solidFill>
-                      <a:srgbClr val="156082">
-                        <a:lumMod val="60000"/>
-                        <a:lumOff val="40000"/>
-                      </a:srgbClr>
-                    </a:solidFill>
-                    <a:effectLst/>
-                    <a:uLnTx/>
-                    <a:uFillTx/>
-                    <a:latin typeface="Aptos" panose="02110004020202020204"/>
-                    <a:ea typeface="+mn-ea"/>
-                    <a:cs typeface="+mn-cs"/>
-                  </a:rPr>
-                  <a:t>Validation checks if changes to CandidateDS are valid, if yes RunningDS is overwritten by CandidateDS content</a:t>
-                </a:r>
-              </a:p>
-            </p:txBody>
-          </p:sp>
-          <p:sp>
-            <p:nvSpPr>
-              <p:cNvPr id="20" name="Bogen 19">
-                <a:extLst>
-                  <a:ext uri="{FF2B5EF4-FFF2-40B4-BE49-F238E27FC236}">
-                    <a16:creationId xmlns:a16="http://schemas.microsoft.com/office/drawing/2014/main" id="{E2A5C948-67A6-9856-2FA7-81445E9CC456}"/>
+                    <a16:creationId xmlns:a16="http://schemas.microsoft.com/office/drawing/2014/main" id="{AD31250E-8E6A-2970-B0DC-802571E12286}"/>
                   </a:ext>
                 </a:extLst>
               </p:cNvPr>
@@ -11548,14 +12757,14 @@
               <p:nvPr/>
             </p:nvSpPr>
             <p:spPr>
-              <a:xfrm flipH="1">
-                <a:off x="2939581" y="2363473"/>
-                <a:ext cx="2119738" cy="1752143"/>
+              <a:xfrm>
+                <a:off x="24431" y="1076866"/>
+                <a:ext cx="4433719" cy="1752143"/>
               </a:xfrm>
               <a:prstGeom prst="arc">
                 <a:avLst>
                   <a:gd name="adj1" fmla="val 16200000"/>
-                  <a:gd name="adj2" fmla="val 5384468"/>
+                  <a:gd name="adj2" fmla="val 205146"/>
                 </a:avLst>
               </a:prstGeom>
               <a:ln w="19050">
@@ -11620,1196 +12829,38 @@
               </a:p>
             </p:txBody>
           </p:sp>
-          <p:sp>
-            <p:nvSpPr>
-              <p:cNvPr id="22" name="Textfeld 21">
-                <a:extLst>
-                  <a:ext uri="{FF2B5EF4-FFF2-40B4-BE49-F238E27FC236}">
-                    <a16:creationId xmlns:a16="http://schemas.microsoft.com/office/drawing/2014/main" id="{DC9742B5-61E2-1E62-096F-2C5BCE9A30F8}"/>
-                  </a:ext>
-                </a:extLst>
-              </p:cNvPr>
-              <p:cNvSpPr txBox="1"/>
-              <p:nvPr/>
-            </p:nvSpPr>
-            <p:spPr>
-              <a:xfrm>
-                <a:off x="3992652" y="4219914"/>
-                <a:ext cx="1061945" cy="307777"/>
-              </a:xfrm>
-              <a:prstGeom prst="rect">
-                <a:avLst/>
-              </a:prstGeom>
-              <a:solidFill>
-                <a:schemeClr val="accent2">
-                  <a:lumMod val="20000"/>
-                  <a:lumOff val="80000"/>
-                </a:schemeClr>
-              </a:solidFill>
-            </p:spPr>
-            <p:txBody>
-              <a:bodyPr wrap="square" rtlCol="0">
-                <a:spAutoFit/>
-              </a:bodyPr>
-              <a:lstStyle/>
-              <a:p>
-                <a:pPr marL="0" marR="0" lvl="0" indent="0" algn="l" defTabSz="914400" rtl="0" eaLnBrk="1" fontAlgn="auto" latinLnBrk="0" hangingPunct="1">
-                  <a:lnSpc>
-                    <a:spcPct val="100000"/>
-                  </a:lnSpc>
-                  <a:spcBef>
-                    <a:spcPts val="0"/>
-                  </a:spcBef>
-                  <a:spcAft>
-                    <a:spcPts val="0"/>
-                  </a:spcAft>
-                  <a:buClrTx/>
-                  <a:buSzTx/>
-                  <a:buFontTx/>
-                  <a:buNone/>
-                  <a:tabLst/>
-                  <a:defRPr/>
-                </a:pPr>
-                <a:r>
-                  <a:rPr kumimoji="0" lang="de-DE" sz="700" b="0" i="1" u="none" strike="noStrike" kern="1200" cap="none" spc="0" normalizeH="0" baseline="0" noProof="0">
-                    <a:ln>
-                      <a:noFill/>
-                    </a:ln>
-                    <a:solidFill>
-                      <a:srgbClr val="E97132">
-                        <a:lumMod val="75000"/>
-                      </a:srgbClr>
-                    </a:solidFill>
-                    <a:effectLst/>
-                    <a:uLnTx/>
-                    <a:uFillTx/>
-                    <a:latin typeface="Aptos" panose="02110004020202020204"/>
-                    <a:ea typeface="+mn-ea"/>
-                    <a:cs typeface="+mn-cs"/>
-                  </a:rPr>
-                  <a:t>Equipment: Actual</a:t>
-                </a:r>
-              </a:p>
-              <a:p>
-                <a:pPr marL="0" marR="0" lvl="0" indent="0" algn="l" defTabSz="914400" rtl="0" eaLnBrk="1" fontAlgn="auto" latinLnBrk="0" hangingPunct="1">
-                  <a:lnSpc>
-                    <a:spcPct val="100000"/>
-                  </a:lnSpc>
-                  <a:spcBef>
-                    <a:spcPts val="0"/>
-                  </a:spcBef>
-                  <a:spcAft>
-                    <a:spcPts val="0"/>
-                  </a:spcAft>
-                  <a:buClrTx/>
-                  <a:buSzTx/>
-                  <a:buFontTx/>
-                  <a:buNone/>
-                  <a:tabLst/>
-                  <a:defRPr/>
-                </a:pPr>
-                <a:r>
-                  <a:rPr kumimoji="0" lang="de-DE" sz="700" b="0" i="1" u="none" strike="noStrike" kern="1200" cap="none" spc="0" normalizeH="0" baseline="0" noProof="0">
-                    <a:ln>
-                      <a:noFill/>
-                    </a:ln>
-                    <a:solidFill>
-                      <a:srgbClr val="E97132">
-                        <a:lumMod val="75000"/>
-                      </a:srgbClr>
-                    </a:solidFill>
-                    <a:effectLst/>
-                    <a:uLnTx/>
-                    <a:uFillTx/>
-                    <a:latin typeface="Aptos" panose="02110004020202020204"/>
-                    <a:ea typeface="+mn-ea"/>
-                    <a:cs typeface="+mn-cs"/>
-                  </a:rPr>
-                  <a:t>FW: Target (validated)</a:t>
-                </a:r>
-              </a:p>
-            </p:txBody>
-          </p:sp>
-          <p:sp>
-            <p:nvSpPr>
-              <p:cNvPr id="24" name="Textfeld 23">
-                <a:extLst>
-                  <a:ext uri="{FF2B5EF4-FFF2-40B4-BE49-F238E27FC236}">
-                    <a16:creationId xmlns:a16="http://schemas.microsoft.com/office/drawing/2014/main" id="{F992976B-AE57-7C3F-9B78-B1E92CF2F754}"/>
-                  </a:ext>
-                </a:extLst>
-              </p:cNvPr>
-              <p:cNvSpPr txBox="1"/>
-              <p:nvPr/>
-            </p:nvSpPr>
-            <p:spPr>
-              <a:xfrm>
-                <a:off x="4268689" y="4001651"/>
-                <a:ext cx="872434" cy="215444"/>
-              </a:xfrm>
-              <a:prstGeom prst="rect">
-                <a:avLst/>
-              </a:prstGeom>
-              <a:noFill/>
-            </p:spPr>
-            <p:txBody>
-              <a:bodyPr wrap="square" rtlCol="0">
-                <a:spAutoFit/>
-              </a:bodyPr>
-              <a:lstStyle/>
-              <a:p>
-                <a:pPr marL="0" marR="0" lvl="0" indent="0" algn="l" defTabSz="914400" rtl="0" eaLnBrk="1" fontAlgn="auto" latinLnBrk="0" hangingPunct="1">
-                  <a:lnSpc>
-                    <a:spcPct val="100000"/>
-                  </a:lnSpc>
-                  <a:spcBef>
-                    <a:spcPts val="0"/>
-                  </a:spcBef>
-                  <a:spcAft>
-                    <a:spcPts val="0"/>
-                  </a:spcAft>
-                  <a:buClrTx/>
-                  <a:buSzTx/>
-                  <a:buFontTx/>
-                  <a:buNone/>
-                  <a:tabLst/>
-                  <a:defRPr/>
-                </a:pPr>
-                <a:r>
-                  <a:rPr kumimoji="0" lang="de-DE" sz="800" b="0" i="0" u="none" strike="noStrike" kern="1200" cap="none" spc="0" normalizeH="0" baseline="0" noProof="0">
-                    <a:ln>
-                      <a:noFill/>
-                    </a:ln>
-                    <a:solidFill>
-                      <a:srgbClr val="E97132">
-                        <a:lumMod val="75000"/>
-                      </a:srgbClr>
-                    </a:solidFill>
-                    <a:effectLst/>
-                    <a:uLnTx/>
-                    <a:uFillTx/>
-                    <a:latin typeface="Aptos" panose="02110004020202020204"/>
-                    <a:ea typeface="+mn-ea"/>
-                    <a:cs typeface="+mn-cs"/>
-                  </a:rPr>
-                  <a:t>Target state</a:t>
-                </a:r>
-              </a:p>
-            </p:txBody>
-          </p:sp>
-          <p:sp>
-            <p:nvSpPr>
-              <p:cNvPr id="26" name="Textfeld 25">
-                <a:extLst>
-                  <a:ext uri="{FF2B5EF4-FFF2-40B4-BE49-F238E27FC236}">
-                    <a16:creationId xmlns:a16="http://schemas.microsoft.com/office/drawing/2014/main" id="{59F5D333-A885-977A-949E-D90C7737D0ED}"/>
-                  </a:ext>
-                </a:extLst>
-              </p:cNvPr>
-              <p:cNvSpPr txBox="1"/>
-              <p:nvPr/>
-            </p:nvSpPr>
-            <p:spPr>
-              <a:xfrm>
-                <a:off x="7159465" y="3992163"/>
-                <a:ext cx="872434" cy="215444"/>
-              </a:xfrm>
-              <a:prstGeom prst="rect">
-                <a:avLst/>
-              </a:prstGeom>
-              <a:noFill/>
-            </p:spPr>
-            <p:txBody>
-              <a:bodyPr wrap="square" rtlCol="0">
-                <a:spAutoFit/>
-              </a:bodyPr>
-              <a:lstStyle/>
-              <a:p>
-                <a:pPr marL="0" marR="0" lvl="0" indent="0" algn="l" defTabSz="914400" rtl="0" eaLnBrk="1" fontAlgn="auto" latinLnBrk="0" hangingPunct="1">
-                  <a:lnSpc>
-                    <a:spcPct val="100000"/>
-                  </a:lnSpc>
-                  <a:spcBef>
-                    <a:spcPts val="0"/>
-                  </a:spcBef>
-                  <a:spcAft>
-                    <a:spcPts val="0"/>
-                  </a:spcAft>
-                  <a:buClrTx/>
-                  <a:buSzTx/>
-                  <a:buFontTx/>
-                  <a:buNone/>
-                  <a:tabLst/>
-                  <a:defRPr/>
-                </a:pPr>
-                <a:r>
-                  <a:rPr kumimoji="0" lang="de-DE" sz="800" b="0" i="0" u="none" strike="noStrike" kern="1200" cap="none" spc="0" normalizeH="0" baseline="0" noProof="0">
-                    <a:ln>
-                      <a:noFill/>
-                    </a:ln>
-                    <a:solidFill>
-                      <a:srgbClr val="E97132">
-                        <a:lumMod val="75000"/>
-                      </a:srgbClr>
-                    </a:solidFill>
-                    <a:effectLst/>
-                    <a:uLnTx/>
-                    <a:uFillTx/>
-                    <a:latin typeface="Aptos" panose="02110004020202020204"/>
-                    <a:ea typeface="+mn-ea"/>
-                    <a:cs typeface="+mn-cs"/>
-                  </a:rPr>
-                  <a:t>Actual state</a:t>
-                </a:r>
-              </a:p>
-            </p:txBody>
-          </p:sp>
-          <p:sp>
-            <p:nvSpPr>
-              <p:cNvPr id="28" name="Textfeld 27">
-                <a:extLst>
-                  <a:ext uri="{FF2B5EF4-FFF2-40B4-BE49-F238E27FC236}">
-                    <a16:creationId xmlns:a16="http://schemas.microsoft.com/office/drawing/2014/main" id="{EFFE51A6-6847-A544-5F65-DB57A4DA7B98}"/>
-                  </a:ext>
-                </a:extLst>
-              </p:cNvPr>
-              <p:cNvSpPr txBox="1"/>
-              <p:nvPr/>
-            </p:nvSpPr>
-            <p:spPr>
-              <a:xfrm>
-                <a:off x="5622454" y="5618481"/>
-                <a:ext cx="1537012" cy="461665"/>
-              </a:xfrm>
-              <a:prstGeom prst="rect">
-                <a:avLst/>
-              </a:prstGeom>
-              <a:solidFill>
-                <a:schemeClr val="bg1">
-                  <a:lumMod val="95000"/>
-                </a:schemeClr>
-              </a:solidFill>
-            </p:spPr>
-            <p:txBody>
-              <a:bodyPr wrap="square" rtlCol="0">
-                <a:spAutoFit/>
-              </a:bodyPr>
-              <a:lstStyle/>
-              <a:p>
-                <a:pPr marL="0" marR="0" lvl="0" indent="0" algn="l" defTabSz="914400" rtl="0" eaLnBrk="1" fontAlgn="auto" latinLnBrk="0" hangingPunct="1">
-                  <a:lnSpc>
-                    <a:spcPct val="100000"/>
-                  </a:lnSpc>
-                  <a:spcBef>
-                    <a:spcPts val="0"/>
-                  </a:spcBef>
-                  <a:spcAft>
-                    <a:spcPts val="0"/>
-                  </a:spcAft>
-                  <a:buClrTx/>
-                  <a:buSzTx/>
-                  <a:buFontTx/>
-                  <a:buNone/>
-                  <a:tabLst/>
-                  <a:defRPr/>
-                </a:pPr>
-                <a:r>
-                  <a:rPr kumimoji="0" lang="de-DE" sz="800" b="0" i="0" u="none" strike="noStrike" kern="1200" cap="none" spc="0" normalizeH="0" baseline="0" noProof="0">
-                    <a:ln>
-                      <a:noFill/>
-                    </a:ln>
-                    <a:solidFill>
-                      <a:prstClr val="black"/>
-                    </a:solidFill>
-                    <a:effectLst/>
-                    <a:uLnTx/>
-                    <a:uFillTx/>
-                    <a:latin typeface="Aptos" panose="02110004020202020204"/>
-                    <a:ea typeface="+mn-ea"/>
-                    <a:cs typeface="+mn-cs"/>
-                  </a:rPr>
-                  <a:t>ToDos = deviation between target and actual state</a:t>
-                </a:r>
-              </a:p>
-              <a:p>
-                <a:pPr marL="0" marR="0" lvl="0" indent="0" algn="l" defTabSz="914400" rtl="0" eaLnBrk="1" fontAlgn="auto" latinLnBrk="0" hangingPunct="1">
-                  <a:lnSpc>
-                    <a:spcPct val="100000"/>
-                  </a:lnSpc>
-                  <a:spcBef>
-                    <a:spcPts val="0"/>
-                  </a:spcBef>
-                  <a:spcAft>
-                    <a:spcPts val="0"/>
-                  </a:spcAft>
-                  <a:buClrTx/>
-                  <a:buSzTx/>
-                  <a:buFontTx/>
-                  <a:buNone/>
-                  <a:tabLst/>
-                  <a:defRPr/>
-                </a:pPr>
-                <a:r>
-                  <a:rPr kumimoji="0" lang="de-DE" sz="800" b="0" i="0" u="none" strike="noStrike" kern="1200" cap="none" spc="0" normalizeH="0" baseline="0" noProof="0">
-                    <a:ln>
-                      <a:noFill/>
-                    </a:ln>
-                    <a:solidFill>
-                      <a:prstClr val="black"/>
-                    </a:solidFill>
-                    <a:effectLst/>
-                    <a:uLnTx/>
-                    <a:uFillTx/>
-                    <a:latin typeface="Aptos" panose="02110004020202020204"/>
-                    <a:ea typeface="+mn-ea"/>
-                    <a:cs typeface="+mn-cs"/>
-                  </a:rPr>
-                  <a:t>(RunningDS – OperationalDS)</a:t>
-                </a:r>
-              </a:p>
-            </p:txBody>
-          </p:sp>
-          <p:sp>
-            <p:nvSpPr>
-              <p:cNvPr id="30" name="Textfeld 29">
-                <a:extLst>
-                  <a:ext uri="{FF2B5EF4-FFF2-40B4-BE49-F238E27FC236}">
-                    <a16:creationId xmlns:a16="http://schemas.microsoft.com/office/drawing/2014/main" id="{EA99CE17-2A08-24FA-59F4-0E966F44F29F}"/>
-                  </a:ext>
-                </a:extLst>
-              </p:cNvPr>
-              <p:cNvSpPr txBox="1"/>
-              <p:nvPr/>
-            </p:nvSpPr>
-            <p:spPr>
-              <a:xfrm>
-                <a:off x="1237259" y="5358960"/>
-                <a:ext cx="1537012" cy="707886"/>
-              </a:xfrm>
-              <a:prstGeom prst="rect">
-                <a:avLst/>
-              </a:prstGeom>
-              <a:solidFill>
-                <a:schemeClr val="bg1">
-                  <a:lumMod val="95000"/>
-                </a:schemeClr>
-              </a:solidFill>
-            </p:spPr>
-            <p:txBody>
-              <a:bodyPr wrap="square" rtlCol="0">
-                <a:spAutoFit/>
-              </a:bodyPr>
-              <a:lstStyle/>
-              <a:p>
-                <a:pPr marL="0" marR="0" lvl="0" indent="0" algn="l" defTabSz="914400" rtl="0" eaLnBrk="1" fontAlgn="auto" latinLnBrk="0" hangingPunct="1">
-                  <a:lnSpc>
-                    <a:spcPct val="100000"/>
-                  </a:lnSpc>
-                  <a:spcBef>
-                    <a:spcPts val="0"/>
-                  </a:spcBef>
-                  <a:spcAft>
-                    <a:spcPts val="0"/>
-                  </a:spcAft>
-                  <a:buClrTx/>
-                  <a:buSzTx/>
-                  <a:buFontTx/>
-                  <a:buNone/>
-                  <a:tabLst/>
-                  <a:defRPr/>
-                </a:pPr>
-                <a:r>
-                  <a:rPr kumimoji="0" lang="de-DE" sz="800" b="0" i="0" u="none" strike="noStrike" kern="1200" cap="none" spc="0" normalizeH="0" baseline="0" noProof="0">
-                    <a:ln>
-                      <a:noFill/>
-                    </a:ln>
-                    <a:solidFill>
-                      <a:prstClr val="black"/>
-                    </a:solidFill>
-                    <a:effectLst/>
-                    <a:uLnTx/>
-                    <a:uFillTx/>
-                    <a:latin typeface="Aptos" panose="02110004020202020204"/>
-                    <a:ea typeface="+mn-ea"/>
-                    <a:cs typeface="+mn-cs"/>
-                  </a:rPr>
-                  <a:t>All datastores have same data model, but with different meanings:</a:t>
-                </a:r>
-              </a:p>
-              <a:p>
-                <a:pPr marL="171450" marR="0" lvl="0" indent="-171450" algn="l" defTabSz="914400" rtl="0" eaLnBrk="1" fontAlgn="auto" latinLnBrk="0" hangingPunct="1">
-                  <a:lnSpc>
-                    <a:spcPct val="100000"/>
-                  </a:lnSpc>
-                  <a:spcBef>
-                    <a:spcPts val="0"/>
-                  </a:spcBef>
-                  <a:spcAft>
-                    <a:spcPts val="0"/>
-                  </a:spcAft>
-                  <a:buClrTx/>
-                  <a:buSzTx/>
-                  <a:buFontTx/>
-                  <a:buChar char="-"/>
-                  <a:tabLst/>
-                  <a:defRPr/>
-                </a:pPr>
-                <a:r>
-                  <a:rPr kumimoji="0" lang="de-DE" sz="800" b="0" i="0" u="none" strike="noStrike" kern="1200" cap="none" spc="0" normalizeH="0" baseline="0" noProof="0">
-                    <a:ln>
-                      <a:noFill/>
-                    </a:ln>
-                    <a:solidFill>
-                      <a:prstClr val="black"/>
-                    </a:solidFill>
-                    <a:effectLst/>
-                    <a:uLnTx/>
-                    <a:uFillTx/>
-                    <a:latin typeface="Aptos" panose="02110004020202020204"/>
-                    <a:ea typeface="+mn-ea"/>
-                    <a:cs typeface="+mn-cs"/>
-                  </a:rPr>
-                  <a:t>Equipment</a:t>
-                </a:r>
-              </a:p>
-              <a:p>
-                <a:pPr marL="171450" marR="0" lvl="0" indent="-171450" algn="l" defTabSz="914400" rtl="0" eaLnBrk="1" fontAlgn="auto" latinLnBrk="0" hangingPunct="1">
-                  <a:lnSpc>
-                    <a:spcPct val="100000"/>
-                  </a:lnSpc>
-                  <a:spcBef>
-                    <a:spcPts val="0"/>
-                  </a:spcBef>
-                  <a:spcAft>
-                    <a:spcPts val="0"/>
-                  </a:spcAft>
-                  <a:buClrTx/>
-                  <a:buSzTx/>
-                  <a:buFontTx/>
-                  <a:buChar char="-"/>
-                  <a:tabLst/>
-                  <a:defRPr/>
-                </a:pPr>
-                <a:r>
-                  <a:rPr kumimoji="0" lang="de-DE" sz="800" b="0" i="0" u="none" strike="noStrike" kern="1200" cap="none" spc="0" normalizeH="0" baseline="0" noProof="0">
-                    <a:ln>
-                      <a:noFill/>
-                    </a:ln>
-                    <a:solidFill>
-                      <a:prstClr val="black"/>
-                    </a:solidFill>
-                    <a:effectLst/>
-                    <a:uLnTx/>
-                    <a:uFillTx/>
-                    <a:latin typeface="Aptos" panose="02110004020202020204"/>
-                    <a:ea typeface="+mn-ea"/>
-                    <a:cs typeface="+mn-cs"/>
-                  </a:rPr>
-                  <a:t>Firmware</a:t>
-                </a:r>
-              </a:p>
-            </p:txBody>
-          </p:sp>
-          <p:sp>
-            <p:nvSpPr>
-              <p:cNvPr id="32" name="Textfeld 31">
-                <a:extLst>
-                  <a:ext uri="{FF2B5EF4-FFF2-40B4-BE49-F238E27FC236}">
-                    <a16:creationId xmlns:a16="http://schemas.microsoft.com/office/drawing/2014/main" id="{7A0BFA75-46D0-C999-92CC-EAC78156021C}"/>
-                  </a:ext>
-                </a:extLst>
-              </p:cNvPr>
-              <p:cNvSpPr txBox="1"/>
-              <p:nvPr/>
-            </p:nvSpPr>
-            <p:spPr>
-              <a:xfrm>
-                <a:off x="7218276" y="2363473"/>
-                <a:ext cx="1605887" cy="461665"/>
-              </a:xfrm>
-              <a:prstGeom prst="rect">
-                <a:avLst/>
-              </a:prstGeom>
-              <a:solidFill>
-                <a:schemeClr val="bg1">
-                  <a:lumMod val="95000"/>
-                </a:schemeClr>
-              </a:solidFill>
-            </p:spPr>
-            <p:txBody>
-              <a:bodyPr wrap="square" rtlCol="0">
-                <a:spAutoFit/>
-              </a:bodyPr>
-              <a:lstStyle/>
-              <a:p>
-                <a:pPr marL="0" marR="0" lvl="0" indent="0" algn="l" defTabSz="914400" rtl="0" eaLnBrk="1" fontAlgn="auto" latinLnBrk="0" hangingPunct="1">
-                  <a:lnSpc>
-                    <a:spcPct val="100000"/>
-                  </a:lnSpc>
-                  <a:spcBef>
-                    <a:spcPts val="0"/>
-                  </a:spcBef>
-                  <a:spcAft>
-                    <a:spcPts val="0"/>
-                  </a:spcAft>
-                  <a:buClrTx/>
-                  <a:buSzTx/>
-                  <a:buFontTx/>
-                  <a:buNone/>
-                  <a:tabLst/>
-                  <a:defRPr/>
-                </a:pPr>
-                <a:r>
-                  <a:rPr kumimoji="0" lang="de-DE" sz="800" b="0" i="0" u="none" strike="noStrike" kern="1200" cap="none" spc="0" normalizeH="0" baseline="0" noProof="0">
-                    <a:ln>
-                      <a:noFill/>
-                    </a:ln>
-                    <a:solidFill>
-                      <a:prstClr val="black"/>
-                    </a:solidFill>
-                    <a:effectLst/>
-                    <a:uLnTx/>
-                    <a:uFillTx/>
-                    <a:latin typeface="Aptos" panose="02110004020202020204"/>
-                    <a:ea typeface="+mn-ea"/>
-                    <a:cs typeface="+mn-cs"/>
-                  </a:rPr>
-                  <a:t>OperationalDS only contains data required for managing the domain (state on devices)</a:t>
-                </a:r>
-              </a:p>
-            </p:txBody>
-          </p:sp>
-          <p:sp>
-            <p:nvSpPr>
-              <p:cNvPr id="34" name="Textfeld 33">
-                <a:extLst>
-                  <a:ext uri="{FF2B5EF4-FFF2-40B4-BE49-F238E27FC236}">
-                    <a16:creationId xmlns:a16="http://schemas.microsoft.com/office/drawing/2014/main" id="{422B8B3E-B215-E77B-C872-39FAFA17819F}"/>
-                  </a:ext>
-                </a:extLst>
-              </p:cNvPr>
-              <p:cNvSpPr txBox="1"/>
-              <p:nvPr/>
-            </p:nvSpPr>
-            <p:spPr>
-              <a:xfrm>
-                <a:off x="7241269" y="4183479"/>
-                <a:ext cx="896299" cy="307777"/>
-              </a:xfrm>
-              <a:prstGeom prst="rect">
-                <a:avLst/>
-              </a:prstGeom>
-              <a:solidFill>
-                <a:schemeClr val="accent2">
-                  <a:lumMod val="20000"/>
-                  <a:lumOff val="80000"/>
-                </a:schemeClr>
-              </a:solidFill>
-            </p:spPr>
-            <p:txBody>
-              <a:bodyPr wrap="square" rtlCol="0">
-                <a:spAutoFit/>
-              </a:bodyPr>
-              <a:lstStyle/>
-              <a:p>
-                <a:pPr marL="0" marR="0" lvl="0" indent="0" algn="l" defTabSz="914400" rtl="0" eaLnBrk="1" fontAlgn="auto" latinLnBrk="0" hangingPunct="1">
-                  <a:lnSpc>
-                    <a:spcPct val="100000"/>
-                  </a:lnSpc>
-                  <a:spcBef>
-                    <a:spcPts val="0"/>
-                  </a:spcBef>
-                  <a:spcAft>
-                    <a:spcPts val="0"/>
-                  </a:spcAft>
-                  <a:buClrTx/>
-                  <a:buSzTx/>
-                  <a:buFontTx/>
-                  <a:buNone/>
-                  <a:tabLst/>
-                  <a:defRPr/>
-                </a:pPr>
-                <a:r>
-                  <a:rPr kumimoji="0" lang="de-DE" sz="700" b="0" i="1" u="none" strike="noStrike" kern="1200" cap="none" spc="0" normalizeH="0" baseline="0" noProof="0">
-                    <a:ln>
-                      <a:noFill/>
-                    </a:ln>
-                    <a:solidFill>
-                      <a:srgbClr val="E97132">
-                        <a:lumMod val="75000"/>
-                      </a:srgbClr>
-                    </a:solidFill>
-                    <a:effectLst/>
-                    <a:uLnTx/>
-                    <a:uFillTx/>
-                    <a:latin typeface="Aptos" panose="02110004020202020204"/>
-                    <a:ea typeface="+mn-ea"/>
-                    <a:cs typeface="+mn-cs"/>
-                  </a:rPr>
-                  <a:t>Equipment: Actual</a:t>
-                </a:r>
-              </a:p>
-              <a:p>
-                <a:pPr marL="0" marR="0" lvl="0" indent="0" algn="l" defTabSz="914400" rtl="0" eaLnBrk="1" fontAlgn="auto" latinLnBrk="0" hangingPunct="1">
-                  <a:lnSpc>
-                    <a:spcPct val="100000"/>
-                  </a:lnSpc>
-                  <a:spcBef>
-                    <a:spcPts val="0"/>
-                  </a:spcBef>
-                  <a:spcAft>
-                    <a:spcPts val="0"/>
-                  </a:spcAft>
-                  <a:buClrTx/>
-                  <a:buSzTx/>
-                  <a:buFontTx/>
-                  <a:buNone/>
-                  <a:tabLst/>
-                  <a:defRPr/>
-                </a:pPr>
-                <a:r>
-                  <a:rPr kumimoji="0" lang="de-DE" sz="700" b="0" i="1" u="none" strike="noStrike" kern="1200" cap="none" spc="0" normalizeH="0" baseline="0" noProof="0">
-                    <a:ln>
-                      <a:noFill/>
-                    </a:ln>
-                    <a:solidFill>
-                      <a:srgbClr val="E97132">
-                        <a:lumMod val="75000"/>
-                      </a:srgbClr>
-                    </a:solidFill>
-                    <a:effectLst/>
-                    <a:uLnTx/>
-                    <a:uFillTx/>
-                    <a:latin typeface="Aptos" panose="02110004020202020204"/>
-                    <a:ea typeface="+mn-ea"/>
-                    <a:cs typeface="+mn-cs"/>
-                  </a:rPr>
-                  <a:t>FW: Actual</a:t>
-                </a:r>
-              </a:p>
-            </p:txBody>
-          </p:sp>
-          <p:sp>
-            <p:nvSpPr>
-              <p:cNvPr id="36" name="Textfeld 35">
-                <a:extLst>
-                  <a:ext uri="{FF2B5EF4-FFF2-40B4-BE49-F238E27FC236}">
-                    <a16:creationId xmlns:a16="http://schemas.microsoft.com/office/drawing/2014/main" id="{5F306B7F-03FE-BFD9-7652-A4588DCBF8E8}"/>
-                  </a:ext>
-                </a:extLst>
-              </p:cNvPr>
-              <p:cNvSpPr txBox="1"/>
-              <p:nvPr/>
-            </p:nvSpPr>
-            <p:spPr>
-              <a:xfrm>
-                <a:off x="9491966" y="2363473"/>
-                <a:ext cx="1707390" cy="784830"/>
-              </a:xfrm>
-              <a:prstGeom prst="rect">
-                <a:avLst/>
-              </a:prstGeom>
-              <a:solidFill>
-                <a:schemeClr val="tx2">
-                  <a:lumMod val="10000"/>
-                  <a:lumOff val="90000"/>
-                </a:schemeClr>
-              </a:solidFill>
-            </p:spPr>
-            <p:txBody>
-              <a:bodyPr wrap="square" rtlCol="0">
-                <a:spAutoFit/>
-              </a:bodyPr>
-              <a:lstStyle/>
-              <a:p>
-                <a:pPr marL="0" marR="0" lvl="0" indent="0" algn="l" defTabSz="914400" rtl="0" eaLnBrk="1" fontAlgn="auto" latinLnBrk="0" hangingPunct="1">
-                  <a:lnSpc>
-                    <a:spcPct val="100000"/>
-                  </a:lnSpc>
-                  <a:spcBef>
-                    <a:spcPts val="0"/>
-                  </a:spcBef>
-                  <a:spcAft>
-                    <a:spcPts val="0"/>
-                  </a:spcAft>
-                  <a:buClrTx/>
-                  <a:buSzTx/>
-                  <a:buFontTx/>
-                  <a:buNone/>
-                  <a:tabLst/>
-                  <a:defRPr/>
-                </a:pPr>
-                <a:r>
-                  <a:rPr kumimoji="0" lang="de-DE" sz="900" b="0" i="0" u="none" strike="noStrike" kern="1200" cap="none" spc="0" normalizeH="0" baseline="0" noProof="0">
-                    <a:ln>
-                      <a:noFill/>
-                    </a:ln>
-                    <a:solidFill>
-                      <a:srgbClr val="156082">
-                        <a:lumMod val="60000"/>
-                        <a:lumOff val="40000"/>
-                      </a:srgbClr>
-                    </a:solidFill>
-                    <a:effectLst/>
-                    <a:uLnTx/>
-                    <a:uFillTx/>
-                    <a:latin typeface="Aptos" panose="02110004020202020204"/>
-                    <a:ea typeface="+mn-ea"/>
-                    <a:cs typeface="+mn-cs"/>
-                  </a:rPr>
-                  <a:t>Load current equipment + firmware state from devices</a:t>
-                </a:r>
-              </a:p>
-              <a:p>
-                <a:pPr marL="0" marR="0" lvl="0" indent="0" algn="l" defTabSz="914400" rtl="0" eaLnBrk="1" fontAlgn="auto" latinLnBrk="0" hangingPunct="1">
-                  <a:lnSpc>
-                    <a:spcPct val="100000"/>
-                  </a:lnSpc>
-                  <a:spcBef>
-                    <a:spcPts val="0"/>
-                  </a:spcBef>
-                  <a:spcAft>
-                    <a:spcPts val="0"/>
-                  </a:spcAft>
-                  <a:buClrTx/>
-                  <a:buSzTx/>
-                  <a:buFontTx/>
-                  <a:buNone/>
-                  <a:tabLst/>
-                  <a:defRPr/>
-                </a:pPr>
-                <a:r>
-                  <a:rPr kumimoji="0" lang="de-DE" sz="900" b="0" i="0" u="none" strike="noStrike" kern="1200" cap="none" spc="0" normalizeH="0" baseline="0" noProof="0">
-                    <a:ln>
-                      <a:noFill/>
-                    </a:ln>
-                    <a:solidFill>
-                      <a:srgbClr val="156082">
-                        <a:lumMod val="60000"/>
-                        <a:lumOff val="40000"/>
-                      </a:srgbClr>
-                    </a:solidFill>
-                    <a:effectLst/>
-                    <a:uLnTx/>
-                    <a:uFillTx/>
-                    <a:latin typeface="Aptos" panose="02110004020202020204"/>
-                    <a:ea typeface="+mn-ea"/>
-                    <a:cs typeface="+mn-cs"/>
-                  </a:rPr>
-                  <a:t>(Difficulty: interface is generic, but data is not homogenous </a:t>
-                </a:r>
-                <a:r>
-                  <a:rPr kumimoji="0" lang="de-DE" sz="900" b="0" i="0" u="none" strike="noStrike" kern="1200" cap="none" spc="0" normalizeH="0" baseline="0" noProof="0">
-                    <a:ln>
-                      <a:noFill/>
-                    </a:ln>
-                    <a:solidFill>
-                      <a:srgbClr val="156082">
-                        <a:lumMod val="60000"/>
-                        <a:lumOff val="40000"/>
-                      </a:srgbClr>
-                    </a:solidFill>
-                    <a:effectLst/>
-                    <a:uLnTx/>
-                    <a:uFillTx/>
-                    <a:latin typeface="Aptos" panose="02110004020202020204"/>
-                    <a:ea typeface="+mn-ea"/>
-                    <a:cs typeface="+mn-cs"/>
-                    <a:sym typeface="Symbol" panose="05050102010706020507" pitchFamily="18" charset="2"/>
-                  </a:rPr>
-                  <a:t></a:t>
-                </a:r>
-                <a:r>
-                  <a:rPr kumimoji="0" lang="de-DE" sz="900" b="0" i="0" u="none" strike="noStrike" kern="1200" cap="none" spc="0" normalizeH="0" baseline="0" noProof="0">
-                    <a:ln>
-                      <a:noFill/>
-                    </a:ln>
-                    <a:solidFill>
-                      <a:srgbClr val="156082">
-                        <a:lumMod val="60000"/>
-                        <a:lumOff val="40000"/>
-                      </a:srgbClr>
-                    </a:solidFill>
-                    <a:effectLst/>
-                    <a:uLnTx/>
-                    <a:uFillTx/>
-                    <a:latin typeface="Aptos" panose="02110004020202020204"/>
-                    <a:ea typeface="+mn-ea"/>
-                    <a:cs typeface="+mn-cs"/>
-                  </a:rPr>
-                  <a:t> interpretation of data required)</a:t>
-                </a:r>
-              </a:p>
-            </p:txBody>
-          </p:sp>
-          <p:sp>
-            <p:nvSpPr>
-              <p:cNvPr id="38" name="Textfeld 37">
-                <a:extLst>
-                  <a:ext uri="{FF2B5EF4-FFF2-40B4-BE49-F238E27FC236}">
-                    <a16:creationId xmlns:a16="http://schemas.microsoft.com/office/drawing/2014/main" id="{14283448-EA28-DABA-0675-02BE241E9FE3}"/>
-                  </a:ext>
-                </a:extLst>
-              </p:cNvPr>
-              <p:cNvSpPr txBox="1"/>
-              <p:nvPr/>
-            </p:nvSpPr>
-            <p:spPr>
-              <a:xfrm>
-                <a:off x="9287037" y="5482071"/>
-                <a:ext cx="1605887" cy="923330"/>
-              </a:xfrm>
-              <a:prstGeom prst="rect">
-                <a:avLst/>
-              </a:prstGeom>
-              <a:solidFill>
-                <a:schemeClr val="tx2">
-                  <a:lumMod val="10000"/>
-                  <a:lumOff val="90000"/>
-                </a:schemeClr>
-              </a:solidFill>
-            </p:spPr>
-            <p:txBody>
-              <a:bodyPr wrap="square" rtlCol="0">
-                <a:spAutoFit/>
-              </a:bodyPr>
-              <a:lstStyle>
-                <a:defPPr>
-                  <a:defRPr lang="de-DE"/>
-                </a:defPPr>
-                <a:lvl1pPr>
-                  <a:defRPr sz="900">
-                    <a:solidFill>
-                      <a:schemeClr val="accent1">
-                        <a:lumMod val="60000"/>
-                        <a:lumOff val="40000"/>
-                      </a:schemeClr>
-                    </a:solidFill>
-                  </a:defRPr>
-                </a:lvl1pPr>
-              </a:lstStyle>
-              <a:p>
-                <a:pPr marL="0" marR="0" lvl="0" indent="0" algn="l" defTabSz="914400" rtl="0" eaLnBrk="1" fontAlgn="auto" latinLnBrk="0" hangingPunct="1">
-                  <a:lnSpc>
-                    <a:spcPct val="100000"/>
-                  </a:lnSpc>
-                  <a:spcBef>
-                    <a:spcPts val="0"/>
-                  </a:spcBef>
-                  <a:spcAft>
-                    <a:spcPts val="0"/>
-                  </a:spcAft>
-                  <a:buClrTx/>
-                  <a:buSzTx/>
-                  <a:buFontTx/>
-                  <a:buNone/>
-                  <a:tabLst/>
-                  <a:defRPr/>
-                </a:pPr>
-                <a:r>
-                  <a:rPr kumimoji="0" lang="de-DE" sz="900" b="0" i="0" u="none" strike="noStrike" kern="1200" cap="none" spc="0" normalizeH="0" baseline="0" noProof="0">
-                    <a:ln>
-                      <a:noFill/>
-                    </a:ln>
-                    <a:solidFill>
-                      <a:srgbClr val="156082">
-                        <a:lumMod val="60000"/>
-                        <a:lumOff val="40000"/>
-                      </a:srgbClr>
-                    </a:solidFill>
-                    <a:effectLst/>
-                    <a:uLnTx/>
-                    <a:uFillTx/>
-                    <a:latin typeface="Aptos" panose="02110004020202020204"/>
-                    <a:ea typeface="+mn-ea"/>
-                    <a:cs typeface="+mn-cs"/>
-                  </a:rPr>
-                  <a:t>Implementation functions write changes into the network</a:t>
-                </a:r>
-              </a:p>
-              <a:p>
-                <a:pPr marL="0" marR="0" lvl="0" indent="0" algn="l" defTabSz="914400" rtl="0" eaLnBrk="1" fontAlgn="auto" latinLnBrk="0" hangingPunct="1">
-                  <a:lnSpc>
-                    <a:spcPct val="100000"/>
-                  </a:lnSpc>
-                  <a:spcBef>
-                    <a:spcPts val="0"/>
-                  </a:spcBef>
-                  <a:spcAft>
-                    <a:spcPts val="0"/>
-                  </a:spcAft>
-                  <a:buClrTx/>
-                  <a:buSzTx/>
-                  <a:buFontTx/>
-                  <a:buNone/>
-                  <a:tabLst/>
-                  <a:defRPr/>
-                </a:pPr>
-                <a:r>
-                  <a:rPr kumimoji="0" lang="de-DE" sz="900" b="0" i="0" u="none" strike="noStrike" kern="1200" cap="none" spc="0" normalizeH="0" baseline="0" noProof="0">
-                    <a:ln>
-                      <a:noFill/>
-                    </a:ln>
-                    <a:solidFill>
-                      <a:srgbClr val="156082">
-                        <a:lumMod val="60000"/>
-                        <a:lumOff val="40000"/>
-                      </a:srgbClr>
-                    </a:solidFill>
-                    <a:effectLst/>
-                    <a:uLnTx/>
-                    <a:uFillTx/>
-                    <a:latin typeface="Aptos" panose="02110004020202020204"/>
-                    <a:ea typeface="+mn-ea"/>
-                    <a:cs typeface="+mn-cs"/>
-                  </a:rPr>
-                  <a:t>(RPC1: download of FW to device, RPC2: device unpacks FW) </a:t>
-                </a:r>
-              </a:p>
-            </p:txBody>
-          </p:sp>
         </p:grpSp>
-        <p:sp>
-          <p:nvSpPr>
-            <p:cNvPr id="18" name="Bogen 17">
+        <p:pic>
+          <p:nvPicPr>
+            <p:cNvPr id="19" name="Grafik 18">
               <a:extLst>
                 <a:ext uri="{FF2B5EF4-FFF2-40B4-BE49-F238E27FC236}">
-                  <a16:creationId xmlns:a16="http://schemas.microsoft.com/office/drawing/2014/main" id="{AD31250E-8E6A-2970-B0DC-802571E12286}"/>
+                  <a16:creationId xmlns:a16="http://schemas.microsoft.com/office/drawing/2014/main" id="{3F6746CA-3B27-7C69-A6CF-744785BBB7D4}"/>
                 </a:ext>
               </a:extLst>
             </p:cNvPr>
-            <p:cNvSpPr/>
+            <p:cNvPicPr>
+              <a:picLocks noChangeAspect="1"/>
+            </p:cNvPicPr>
             <p:nvPr/>
-          </p:nvSpPr>
+          </p:nvPicPr>
+          <p:blipFill>
+            <a:blip r:embed="rId3"/>
+            <a:stretch>
+              <a:fillRect/>
+            </a:stretch>
+          </p:blipFill>
           <p:spPr>
             <a:xfrm>
-              <a:off x="24431" y="1076866"/>
-              <a:ext cx="4433719" cy="1752143"/>
+              <a:off x="6009642" y="2130588"/>
+              <a:ext cx="537841" cy="385724"/>
             </a:xfrm>
-            <a:prstGeom prst="arc">
-              <a:avLst>
-                <a:gd name="adj1" fmla="val 16200000"/>
-                <a:gd name="adj2" fmla="val 205146"/>
-              </a:avLst>
+            <a:prstGeom prst="rect">
+              <a:avLst/>
             </a:prstGeom>
-            <a:ln w="19050">
-              <a:solidFill>
-                <a:schemeClr val="accent1">
-                  <a:lumMod val="40000"/>
-                  <a:lumOff val="60000"/>
-                </a:schemeClr>
-              </a:solidFill>
-              <a:tailEnd type="triangle"/>
-            </a:ln>
           </p:spPr>
-          <p:style>
-            <a:lnRef idx="2">
-              <a:schemeClr val="accent1"/>
-            </a:lnRef>
-            <a:fillRef idx="0">
-              <a:schemeClr val="accent1"/>
-            </a:fillRef>
-            <a:effectRef idx="1">
-              <a:schemeClr val="accent1"/>
-            </a:effectRef>
-            <a:fontRef idx="minor">
-              <a:schemeClr val="tx1"/>
-            </a:fontRef>
-          </p:style>
-          <p:txBody>
-            <a:bodyPr rtlCol="0" anchor="ctr"/>
-            <a:lstStyle/>
-            <a:p>
-              <a:pPr marL="0" marR="0" lvl="0" indent="0" algn="ctr" defTabSz="914400" rtl="0" eaLnBrk="1" fontAlgn="auto" latinLnBrk="0" hangingPunct="1">
-                <a:lnSpc>
-                  <a:spcPct val="100000"/>
-                </a:lnSpc>
-                <a:spcBef>
-                  <a:spcPts val="0"/>
-                </a:spcBef>
-                <a:spcAft>
-                  <a:spcPts val="0"/>
-                </a:spcAft>
-                <a:buClrTx/>
-                <a:buSzTx/>
-                <a:buFontTx/>
-                <a:buNone/>
-                <a:tabLst/>
-                <a:defRPr/>
-              </a:pPr>
-              <a:endParaRPr kumimoji="0" lang="de-DE" sz="1800" b="0" i="0" u="none" strike="noStrike" kern="1200" cap="none" spc="0" normalizeH="0" baseline="0" noProof="0">
-                <a:ln>
-                  <a:noFill/>
-                </a:ln>
-                <a:solidFill>
-                  <a:prstClr val="black"/>
-                </a:solidFill>
-                <a:effectLst/>
-                <a:uLnTx/>
-                <a:uFillTx/>
-                <a:latin typeface="Aptos" panose="02110004020202020204"/>
-                <a:ea typeface="+mn-ea"/>
-                <a:cs typeface="+mn-cs"/>
-              </a:endParaRPr>
-            </a:p>
-          </p:txBody>
-        </p:sp>
+        </p:pic>
       </p:grpSp>
-      <p:cxnSp>
-        <p:nvCxnSpPr>
-          <p:cNvPr id="9" name="Gerader Verbinder 8">
-            <a:extLst>
-              <a:ext uri="{FF2B5EF4-FFF2-40B4-BE49-F238E27FC236}">
-                <a16:creationId xmlns:a16="http://schemas.microsoft.com/office/drawing/2014/main" id="{58BBA6DD-F3DC-7921-E860-7DCB8DA4605A}"/>
-              </a:ext>
-            </a:extLst>
-          </p:cNvPr>
-          <p:cNvCxnSpPr/>
-          <p:nvPr/>
-        </p:nvCxnSpPr>
-        <p:spPr>
-          <a:xfrm flipH="1">
-            <a:off x="7519649" y="2758231"/>
-            <a:ext cx="48127" cy="882579"/>
-          </a:xfrm>
-          <a:prstGeom prst="line">
-            <a:avLst/>
-          </a:prstGeom>
-          <a:ln w="9525">
-            <a:solidFill>
-              <a:schemeClr val="tx1">
-                <a:lumMod val="50000"/>
-                <a:lumOff val="50000"/>
-              </a:schemeClr>
-            </a:solidFill>
-            <a:prstDash val="sysDot"/>
-          </a:ln>
-        </p:spPr>
-        <p:style>
-          <a:lnRef idx="2">
-            <a:schemeClr val="accent1"/>
-          </a:lnRef>
-          <a:fillRef idx="0">
-            <a:schemeClr val="accent1"/>
-          </a:fillRef>
-          <a:effectRef idx="1">
-            <a:schemeClr val="accent1"/>
-          </a:effectRef>
-          <a:fontRef idx="minor">
-            <a:schemeClr val="tx1"/>
-          </a:fontRef>
-        </p:style>
-      </p:cxnSp>
-      <p:sp>
-        <p:nvSpPr>
-          <p:cNvPr id="14" name="Textfeld 13">
-            <a:extLst>
-              <a:ext uri="{FF2B5EF4-FFF2-40B4-BE49-F238E27FC236}">
-                <a16:creationId xmlns:a16="http://schemas.microsoft.com/office/drawing/2014/main" id="{97C794AF-333E-4B67-F0C5-E210CC193FDD}"/>
-              </a:ext>
-            </a:extLst>
-          </p:cNvPr>
-          <p:cNvSpPr txBox="1"/>
-          <p:nvPr/>
-        </p:nvSpPr>
-        <p:spPr>
-          <a:xfrm>
-            <a:off x="4719755" y="1756152"/>
-            <a:ext cx="982825" cy="307777"/>
-          </a:xfrm>
-          <a:prstGeom prst="rect">
-            <a:avLst/>
-          </a:prstGeom>
-          <a:solidFill>
-            <a:schemeClr val="accent2">
-              <a:lumMod val="20000"/>
-              <a:lumOff val="80000"/>
-            </a:schemeClr>
-          </a:solidFill>
-        </p:spPr>
-        <p:txBody>
-          <a:bodyPr wrap="square" rtlCol="0">
-            <a:spAutoFit/>
-          </a:bodyPr>
-          <a:lstStyle/>
-          <a:p>
-            <a:pPr marL="0" marR="0" lvl="0" indent="0" algn="l" defTabSz="914400" rtl="0" eaLnBrk="1" fontAlgn="auto" latinLnBrk="0" hangingPunct="1">
-              <a:lnSpc>
-                <a:spcPct val="100000"/>
-              </a:lnSpc>
-              <a:spcBef>
-                <a:spcPts val="0"/>
-              </a:spcBef>
-              <a:spcAft>
-                <a:spcPts val="0"/>
-              </a:spcAft>
-              <a:buClrTx/>
-              <a:buSzTx/>
-              <a:buFontTx/>
-              <a:buNone/>
-              <a:tabLst/>
-              <a:defRPr/>
-            </a:pPr>
-            <a:r>
-              <a:rPr kumimoji="0" lang="de-DE" sz="700" b="0" i="1" u="none" strike="noStrike" kern="1200" cap="none" spc="0" normalizeH="0" baseline="0" noProof="0">
-                <a:ln>
-                  <a:noFill/>
-                </a:ln>
-                <a:solidFill>
-                  <a:srgbClr val="E97132">
-                    <a:lumMod val="75000"/>
-                  </a:srgbClr>
-                </a:solidFill>
-                <a:effectLst/>
-                <a:uLnTx/>
-                <a:uFillTx/>
-                <a:latin typeface="Aptos" panose="02110004020202020204"/>
-                <a:ea typeface="+mn-ea"/>
-                <a:cs typeface="+mn-cs"/>
-              </a:rPr>
-              <a:t>Equipment: Actual</a:t>
-            </a:r>
-          </a:p>
-          <a:p>
-            <a:pPr marL="0" marR="0" lvl="0" indent="0" algn="l" defTabSz="914400" rtl="0" eaLnBrk="1" fontAlgn="auto" latinLnBrk="0" hangingPunct="1">
-              <a:lnSpc>
-                <a:spcPct val="100000"/>
-              </a:lnSpc>
-              <a:spcBef>
-                <a:spcPts val="0"/>
-              </a:spcBef>
-              <a:spcAft>
-                <a:spcPts val="0"/>
-              </a:spcAft>
-              <a:buClrTx/>
-              <a:buSzTx/>
-              <a:buFontTx/>
-              <a:buNone/>
-              <a:tabLst/>
-              <a:defRPr/>
-            </a:pPr>
-            <a:r>
-              <a:rPr kumimoji="0" lang="de-DE" sz="700" b="0" i="1" u="none" strike="noStrike" kern="1200" cap="none" spc="0" normalizeH="0" baseline="0" noProof="0">
-                <a:ln>
-                  <a:noFill/>
-                </a:ln>
-                <a:solidFill>
-                  <a:srgbClr val="E97132">
-                    <a:lumMod val="75000"/>
-                  </a:srgbClr>
-                </a:solidFill>
-                <a:effectLst/>
-                <a:uLnTx/>
-                <a:uFillTx/>
-                <a:latin typeface="Aptos" panose="02110004020202020204"/>
-                <a:ea typeface="+mn-ea"/>
-                <a:cs typeface="+mn-cs"/>
-              </a:rPr>
-              <a:t>FW: Target (desired)</a:t>
-            </a:r>
-          </a:p>
-        </p:txBody>
-      </p:sp>
     </p:spTree>
     <p:extLst>
       <p:ext uri="{BB962C8B-B14F-4D97-AF65-F5344CB8AC3E}">
